--- a/deliverables/WhatDaDev_Презентация_Знакомство.pptx
+++ b/deliverables/WhatDaDev_Презентация_Знакомство.pptx
@@ -10,9 +10,11 @@
     <p:sldId id="258" r:id="rId4"/>
     <p:sldId id="259" r:id="rId5"/>
     <p:sldId id="260" r:id="rId6"/>
+    <p:sldId id="261" r:id="rId7"/>
+    <p:sldId id="262" r:id="rId8"/>
   </p:sldIdLst>
   <p:notesMasterIdLst>
-    <p:notesMasterId r:id="rId7"/>
+    <p:notesMasterId r:id="rId9"/>
   </p:notesMasterIdLst>
   <p:sldSz cx="9144000" cy="5143500"/>
   <p:notesSz cx="5143500" cy="9144000"/>
@@ -506,7 +508,7 @@
           <a:p>
             <a:r>
               <a:rPr lang="en-US" dirty="0"/>
-              <a:t>Открывашка знакомства. Кто мы: внедряем ELMA365 под ключ + свои продукты для документооборота. Главный козырь — сами живём в ELMA365. Рынки: РФ и Казахстан.</a:t>
+              <a:t>Открываем болью клиента, не собой. Before/After: как сейчас (хаос) → с Coordo (порядок).</a:t>
             </a:r>
             <a:endParaRPr lang="en-US" dirty="0"/>
           </a:p>
@@ -594,7 +596,7 @@
           <a:p>
             <a:r>
               <a:rPr lang="en-US" dirty="0"/>
-              <a:t>ELMA365 — российская low-code BPM-платформа. Один инструмент закрывает процессы, CRM, ЭДО/КЭДО, ServiceDesk, закупки, проекты, портал. Ключевое: настройка маршрутов без кода.</a:t>
+              <a:t>Козырь доверия: dogfooding. Сертифицированная команда, продукт+услуги, РФ и КЗ.</a:t>
             </a:r>
             <a:endParaRPr lang="en-US" dirty="0"/>
           </a:p>
@@ -682,7 +684,7 @@
           <a:p>
             <a:r>
               <a:rPr lang="en-US" dirty="0"/>
-              <a:t>Coordo — наш коробочный продукт на ELMA365. Три готовых контура. Маршруты настраиваются без кода. Мобильное приложение в комплекте. Модель — один раз, без подписки и доплат за пользователей.</a:t>
+              <a:t>Крупная цифра 4000+ с выводом на визуале. Стат-строка. Импортозамещение.</a:t>
             </a:r>
             <a:endParaRPr lang="en-US" dirty="0"/>
           </a:p>
@@ -770,7 +772,7 @@
           <a:p>
             <a:r>
               <a:rPr lang="en-US" dirty="0"/>
-              <a:t>Предварительный слайд. Показываем типы проектов без выдуманных цифр (правило: метрики не выдумываем). Реальные названия, логотипы и цифры добавим по согласованию с клиентами.</a:t>
+              <a:t>Time before/after Месяцы→Недели. Процесс из 3 шагов. Без подписки.</a:t>
             </a:r>
             <a:endParaRPr lang="en-US" dirty="0"/>
           </a:p>
@@ -858,7 +860,7 @@
           <a:p>
             <a:r>
               <a:rPr lang="en-US" dirty="0"/>
-              <a:t>Экосистема: ЭДО — вход, дальше на той же платформе закрываем весь контур. Закрываем призывом: покажем на ваших документах за один разбор процесса. Контакты для связи.</a:t>
+              <a:t>Формат доказательства. Реальные названия и цифры — по согласованию (Фаза 0).</a:t>
             </a:r>
             <a:endParaRPr lang="en-US" dirty="0"/>
           </a:p>
@@ -882,6 +884,182 @@
             <a:fld id="{F7021451-1387-4CA6-816F-3879F97B5CBC}" type="slidenum">
               <a:rPr lang="en-US"/>
               <a:t>5</a:t>
+            </a:fld>
+            <a:endParaRPr lang="en-US"/>
+          </a:p>
+        </p:txBody>
+      </p:sp>
+    </p:spTree>
+    <p:extLst>
+      <p:ext uri="{BB962C8B-B14F-4D97-AF65-F5344CB8AC3E}">
+        <p14:creationId xmlns:p14="http://schemas.microsoft.com/office/powerpoint/2010/main" val="1024086991"/>
+      </p:ext>
+    </p:extLst>
+  </p:cSld>
+  <p:clrMapOvr>
+    <a:masterClrMapping/>
+  </p:clrMapOvr>
+</p:notes>
+</file>
+
+<file path=ppt/notesSlides/notesSlide6.xml><?xml version="1.0" encoding="utf-8"?>
+<p:notes xmlns:a="http://schemas.openxmlformats.org/drawingml/2006/main" xmlns:r="http://schemas.openxmlformats.org/officeDocument/2006/relationships" xmlns:p="http://schemas.openxmlformats.org/presentationml/2006/main">
+  <p:cSld>
+    <p:spTree>
+      <p:nvGrpSpPr>
+        <p:cNvPr id="1" name=""/>
+        <p:cNvGrpSpPr/>
+        <p:nvPr/>
+      </p:nvGrpSpPr>
+      <p:grpSpPr>
+        <a:xfrm>
+          <a:off x="0" y="0"/>
+          <a:ext cx="0" cy="0"/>
+          <a:chOff x="0" y="0"/>
+          <a:chExt cx="0" cy="0"/>
+        </a:xfrm>
+      </p:grpSpPr>
+      <p:sp>
+        <p:nvSpPr>
+          <p:cNvPr id="2" name="Slide Image Placeholder 1"/>
+          <p:cNvSpPr>
+            <a:spLocks noGrp="1" noRot="1" noChangeAspect="1"/>
+          </p:cNvSpPr>
+          <p:nvPr>
+            <p:ph type="sldImg"/>
+          </p:nvPr>
+        </p:nvSpPr>
+        <p:spPr/>
+      </p:sp>
+      <p:sp>
+        <p:nvSpPr>
+          <p:cNvPr id="3" name="Notes Placeholder 2"/>
+          <p:cNvSpPr>
+            <a:spLocks noGrp="1"/>
+          </p:cNvSpPr>
+          <p:nvPr>
+            <p:ph type="body" idx="1"/>
+          </p:nvPr>
+        </p:nvSpPr>
+        <p:spPr/>
+        <p:txBody>
+          <a:bodyPr/>
+          <a:lstStyle/>
+          <a:p>
+            <a:r>
+              <a:rPr lang="en-US" dirty="0"/>
+              <a:t>ЭДО — вход, дальше вся платформа. Импортозамещение выделено тёплым callout.</a:t>
+            </a:r>
+            <a:endParaRPr lang="en-US" dirty="0"/>
+          </a:p>
+        </p:txBody>
+      </p:sp>
+      <p:sp>
+        <p:nvSpPr>
+          <p:cNvPr id="4" name="Slide Number Placeholder 3"/>
+          <p:cNvSpPr>
+            <a:spLocks noGrp="1"/>
+          </p:cNvSpPr>
+          <p:nvPr>
+            <p:ph type="sldNum" sz="quarter" idx="10"/>
+          </p:nvPr>
+        </p:nvSpPr>
+        <p:spPr/>
+        <p:txBody>
+          <a:bodyPr/>
+          <a:lstStyle/>
+          <a:p>
+            <a:fld id="{F7021451-1387-4CA6-816F-3879F97B5CBC}" type="slidenum">
+              <a:rPr lang="en-US"/>
+              <a:t>6</a:t>
+            </a:fld>
+            <a:endParaRPr lang="en-US"/>
+          </a:p>
+        </p:txBody>
+      </p:sp>
+    </p:spTree>
+    <p:extLst>
+      <p:ext uri="{BB962C8B-B14F-4D97-AF65-F5344CB8AC3E}">
+        <p14:creationId xmlns:p14="http://schemas.microsoft.com/office/powerpoint/2010/main" val="1024086991"/>
+      </p:ext>
+    </p:extLst>
+  </p:cSld>
+  <p:clrMapOvr>
+    <a:masterClrMapping/>
+  </p:clrMapOvr>
+</p:notes>
+</file>
+
+<file path=ppt/notesSlides/notesSlide7.xml><?xml version="1.0" encoding="utf-8"?>
+<p:notes xmlns:a="http://schemas.openxmlformats.org/drawingml/2006/main" xmlns:r="http://schemas.openxmlformats.org/officeDocument/2006/relationships" xmlns:p="http://schemas.openxmlformats.org/presentationml/2006/main">
+  <p:cSld>
+    <p:spTree>
+      <p:nvGrpSpPr>
+        <p:cNvPr id="1" name=""/>
+        <p:cNvGrpSpPr/>
+        <p:nvPr/>
+      </p:nvGrpSpPr>
+      <p:grpSpPr>
+        <a:xfrm>
+          <a:off x="0" y="0"/>
+          <a:ext cx="0" cy="0"/>
+          <a:chOff x="0" y="0"/>
+          <a:chExt cx="0" cy="0"/>
+        </a:xfrm>
+      </p:grpSpPr>
+      <p:sp>
+        <p:nvSpPr>
+          <p:cNvPr id="2" name="Slide Image Placeholder 1"/>
+          <p:cNvSpPr>
+            <a:spLocks noGrp="1" noRot="1" noChangeAspect="1"/>
+          </p:cNvSpPr>
+          <p:nvPr>
+            <p:ph type="sldImg"/>
+          </p:nvPr>
+        </p:nvSpPr>
+        <p:spPr/>
+      </p:sp>
+      <p:sp>
+        <p:nvSpPr>
+          <p:cNvPr id="3" name="Notes Placeholder 2"/>
+          <p:cNvSpPr>
+            <a:spLocks noGrp="1"/>
+          </p:cNvSpPr>
+          <p:nvPr>
+            <p:ph type="body" idx="1"/>
+          </p:nvPr>
+        </p:nvSpPr>
+        <p:spPr/>
+        <p:txBody>
+          <a:bodyPr/>
+          <a:lstStyle/>
+          <a:p>
+            <a:r>
+              <a:rPr lang="en-US" dirty="0"/>
+              <a:t>Закрытие: конкретный низкобарьерный оффер (бесплатный разбор за 30 минут) + контакты.</a:t>
+            </a:r>
+            <a:endParaRPr lang="en-US" dirty="0"/>
+          </a:p>
+        </p:txBody>
+      </p:sp>
+      <p:sp>
+        <p:nvSpPr>
+          <p:cNvPr id="4" name="Slide Number Placeholder 3"/>
+          <p:cNvSpPr>
+            <a:spLocks noGrp="1"/>
+          </p:cNvSpPr>
+          <p:nvPr>
+            <p:ph type="sldNum" sz="quarter" idx="10"/>
+          </p:nvPr>
+        </p:nvSpPr>
+        <p:spPr/>
+        <p:txBody>
+          <a:bodyPr/>
+          <a:lstStyle/>
+          <a:p>
+            <a:fld id="{F7021451-1387-4CA6-816F-3879F97B5CBC}" type="slidenum">
+              <a:rPr lang="en-US"/>
+              <a:t>7</a:t>
             </a:fld>
             <a:endParaRPr lang="en-US"/>
           </a:p>
@@ -1213,7 +1391,7 @@
     <p:bg>
       <p:bgPr>
         <a:solidFill>
-          <a:srgbClr val="134C7A"/>
+          <a:srgbClr val="F3F5F6"/>
         </a:solidFill>
       </p:bgPr>
     </p:bg>
@@ -1248,11 +1426,11 @@
             </a:avLst>
           </a:prstGeom>
           <a:solidFill>
-            <a:srgbClr val="134C7A"/>
+            <a:srgbClr val="F3F5F6"/>
           </a:solidFill>
           <a:ln w="15875">
             <a:solidFill>
-              <a:srgbClr val="86B8E0"/>
+              <a:srgbClr val="1D5C9A"/>
             </a:solidFill>
             <a:prstDash val="solid"/>
           </a:ln>
@@ -1285,11 +1463,11 @@
             <a:r>
               <a:rPr lang="en-US" sz="1100" b="1" dirty="0">
                 <a:solidFill>
-                  <a:srgbClr val="86B8E0"/>
-                </a:solidFill>
-                <a:latin typeface="IBM Plex Sans" pitchFamily="34" charset="0"/>
-                <a:ea typeface="IBM Plex Sans" pitchFamily="34" charset="-122"/>
-                <a:cs typeface="IBM Plex Sans" pitchFamily="34" charset="-120"/>
+                  <a:srgbClr val="1D5C9A"/>
+                </a:solidFill>
+                <a:latin typeface="Arial" pitchFamily="34" charset="0"/>
+                <a:ea typeface="Arial" pitchFamily="34" charset="-122"/>
+                <a:cs typeface="Arial" pitchFamily="34" charset="-120"/>
               </a:rPr>
               <a:t>WD</a:t>
             </a:r>
@@ -1324,11 +1502,11 @@
             <a:r>
               <a:rPr lang="en-US" sz="1200" b="1" dirty="0">
                 <a:solidFill>
-                  <a:srgbClr val="EEF1F4"/>
-                </a:solidFill>
-                <a:latin typeface="IBM Plex Sans" pitchFamily="34" charset="0"/>
-                <a:ea typeface="IBM Plex Sans" pitchFamily="34" charset="-122"/>
-                <a:cs typeface="IBM Plex Sans" pitchFamily="34" charset="-120"/>
+                  <a:srgbClr val="171B20"/>
+                </a:solidFill>
+                <a:latin typeface="Arial" pitchFamily="34" charset="0"/>
+                <a:ea typeface="Arial" pitchFamily="34" charset="-122"/>
+                <a:cs typeface="Arial" pitchFamily="34" charset="-120"/>
               </a:rPr>
               <a:t>WhatDaDev</a:t>
             </a:r>
@@ -1363,13 +1541,13 @@
             <a:r>
               <a:rPr lang="en-US" sz="900" spc="200" kern="0" dirty="0">
                 <a:solidFill>
-                  <a:srgbClr val="AEC2D3"/>
-                </a:solidFill>
-                <a:latin typeface="IBM Plex Mono" pitchFamily="34" charset="0"/>
-                <a:ea typeface="IBM Plex Mono" pitchFamily="34" charset="-122"/>
-                <a:cs typeface="IBM Plex Mono" pitchFamily="34" charset="-120"/>
-              </a:rPr>
-              <a:t>О компании</a:t>
+                  <a:srgbClr val="59626B"/>
+                </a:solidFill>
+                <a:latin typeface="Courier New" pitchFamily="34" charset="0"/>
+                <a:ea typeface="Courier New" pitchFamily="34" charset="-122"/>
+                <a:cs typeface="Courier New" pitchFamily="34" charset="-120"/>
+              </a:rPr>
+              <a:t>Проблема</a:t>
             </a:r>
             <a:endParaRPr lang="en-US" sz="900" dirty="0"/>
           </a:p>
@@ -1402,11 +1580,11 @@
             <a:r>
               <a:rPr lang="en-US" sz="850" dirty="0">
                 <a:solidFill>
-                  <a:srgbClr val="AEC2D3"/>
-                </a:solidFill>
-                <a:latin typeface="IBM Plex Mono" pitchFamily="34" charset="0"/>
-                <a:ea typeface="IBM Plex Mono" pitchFamily="34" charset="-122"/>
-                <a:cs typeface="IBM Plex Mono" pitchFamily="34" charset="-120"/>
+                  <a:srgbClr val="59626B"/>
+                </a:solidFill>
+                <a:latin typeface="Courier New" pitchFamily="34" charset="0"/>
+                <a:ea typeface="Courier New" pitchFamily="34" charset="-122"/>
+                <a:cs typeface="Courier New" pitchFamily="34" charset="-120"/>
               </a:rPr>
               <a:t>whatdadev.ru</a:t>
             </a:r>
@@ -1441,13 +1619,13 @@
             <a:r>
               <a:rPr lang="en-US" sz="850" dirty="0">
                 <a:solidFill>
-                  <a:srgbClr val="AEC2D3"/>
-                </a:solidFill>
-                <a:latin typeface="IBM Plex Mono" pitchFamily="34" charset="0"/>
-                <a:ea typeface="IBM Plex Mono" pitchFamily="34" charset="-122"/>
-                <a:cs typeface="IBM Plex Mono" pitchFamily="34" charset="-120"/>
-              </a:rPr>
-              <a:t>01 / 05</a:t>
+                  <a:srgbClr val="59626B"/>
+                </a:solidFill>
+                <a:latin typeface="Courier New" pitchFamily="34" charset="0"/>
+                <a:ea typeface="Courier New" pitchFamily="34" charset="-122"/>
+                <a:cs typeface="Courier New" pitchFamily="34" charset="-120"/>
+              </a:rPr>
+              <a:t>01 / 07</a:t>
             </a:r>
             <a:endParaRPr lang="en-US" sz="850" dirty="0"/>
           </a:p>
@@ -1455,14 +1633,34 @@
       </p:sp>
       <p:sp>
         <p:nvSpPr>
-          <p:cNvPr id="8" name="Text 6"/>
-          <p:cNvSpPr/>
-          <p:nvPr/>
-        </p:nvSpPr>
-        <p:spPr>
-          <a:xfrm>
-            <a:off x="438912" y="868680"/>
-            <a:ext cx="7315200" cy="960120"/>
+          <p:cNvPr id="8" name="Shape 6"/>
+          <p:cNvSpPr/>
+          <p:nvPr/>
+        </p:nvSpPr>
+        <p:spPr>
+          <a:xfrm>
+            <a:off x="457200" y="914400"/>
+            <a:ext cx="100584" cy="100584"/>
+          </a:xfrm>
+          <a:prstGeom prst="rect">
+            <a:avLst/>
+          </a:prstGeom>
+          <a:solidFill>
+            <a:srgbClr val="B25A1E"/>
+          </a:solidFill>
+          <a:ln/>
+        </p:spPr>
+      </p:sp>
+      <p:sp>
+        <p:nvSpPr>
+          <p:cNvPr id="9" name="Text 7"/>
+          <p:cNvSpPr/>
+          <p:nvPr/>
+        </p:nvSpPr>
+        <p:spPr>
+          <a:xfrm>
+            <a:off x="658368" y="850392"/>
+            <a:ext cx="7772400" cy="237744"/>
           </a:xfrm>
           <a:prstGeom prst="rect">
             <a:avLst/>
@@ -1478,459 +1676,459 @@
               <a:buNone/>
             </a:pPr>
             <a:r>
-              <a:rPr lang="en-US" sz="5400" b="1" spc="-100" kern="0" dirty="0">
-                <a:solidFill>
-                  <a:srgbClr val="EEF1F4"/>
-                </a:solidFill>
-                <a:latin typeface="IBM Plex Sans" pitchFamily="34" charset="0"/>
-                <a:ea typeface="IBM Plex Sans" pitchFamily="34" charset="-122"/>
-                <a:cs typeface="IBM Plex Sans" pitchFamily="34" charset="-120"/>
-              </a:rPr>
-              <a:t>WhatDaDev</a:t>
-            </a:r>
-            <a:endParaRPr lang="en-US" sz="5400" dirty="0"/>
-          </a:p>
-        </p:txBody>
-      </p:sp>
-      <p:sp>
-        <p:nvSpPr>
-          <p:cNvPr id="9" name="Text 7"/>
-          <p:cNvSpPr/>
-          <p:nvPr/>
-        </p:nvSpPr>
-        <p:spPr>
-          <a:xfrm>
-            <a:off x="457200" y="1847088"/>
-            <a:ext cx="7315200" cy="365760"/>
-          </a:xfrm>
-          <a:prstGeom prst="rect">
-            <a:avLst/>
-          </a:prstGeom>
-          <a:noFill/>
-          <a:ln/>
-        </p:spPr>
-        <p:txBody>
-          <a:bodyPr wrap="square" lIns="0" tIns="0" rIns="0" bIns="0" rtlCol="0" anchor="ctr"/>
-          <a:lstStyle/>
-          <a:p>
-            <a:pPr indent="0" marL="0">
-              <a:buNone/>
-            </a:pPr>
-            <a:r>
-              <a:rPr lang="en-US" sz="1500" dirty="0">
-                <a:solidFill>
-                  <a:srgbClr val="AEC2D3"/>
-                </a:solidFill>
-                <a:latin typeface="IBM Plex Sans" pitchFamily="34" charset="0"/>
-                <a:ea typeface="IBM Plex Sans" pitchFamily="34" charset="-122"/>
-                <a:cs typeface="IBM Plex Sans" pitchFamily="34" charset="-120"/>
-              </a:rPr>
-              <a:t>Внедрение ELMA365 · документооборот из коробки</a:t>
-            </a:r>
-            <a:endParaRPr lang="en-US" sz="1500" dirty="0"/>
-          </a:p>
-        </p:txBody>
-      </p:sp>
-      <p:sp>
-        <p:nvSpPr>
-          <p:cNvPr id="10" name="Shape 8"/>
-          <p:cNvSpPr/>
-          <p:nvPr/>
-        </p:nvSpPr>
-        <p:spPr>
-          <a:xfrm>
-            <a:off x="457200" y="2395728"/>
-            <a:ext cx="2621280" cy="1298448"/>
+              <a:rPr lang="en-US" sz="1050" spc="200" kern="0" dirty="0">
+                <a:solidFill>
+                  <a:srgbClr val="B25A1E"/>
+                </a:solidFill>
+                <a:latin typeface="Courier New" pitchFamily="34" charset="0"/>
+                <a:ea typeface="Courier New" pitchFamily="34" charset="-122"/>
+                <a:cs typeface="Courier New" pitchFamily="34" charset="-120"/>
+              </a:rPr>
+              <a:t>С ЧЕГО ВСЁ НАЧИНАЕТСЯ</a:t>
+            </a:r>
+            <a:endParaRPr lang="en-US" sz="1050" dirty="0"/>
+          </a:p>
+        </p:txBody>
+      </p:sp>
+      <p:sp>
+        <p:nvSpPr>
+          <p:cNvPr id="10" name="Text 8"/>
+          <p:cNvSpPr/>
+          <p:nvPr/>
+        </p:nvSpPr>
+        <p:spPr>
+          <a:xfrm>
+            <a:off x="457200" y="1170432"/>
+            <a:ext cx="8229600" cy="914400"/>
+          </a:xfrm>
+          <a:prstGeom prst="rect">
+            <a:avLst/>
+          </a:prstGeom>
+          <a:noFill/>
+          <a:ln/>
+        </p:spPr>
+        <p:txBody>
+          <a:bodyPr wrap="square" lIns="0" tIns="0" rIns="0" bIns="0" rtlCol="0" anchor="t"/>
+          <a:lstStyle/>
+          <a:p>
+            <a:pPr indent="0" marL="0">
+              <a:lnSpc>
+                <a:spcPts val="3150"/>
+              </a:lnSpc>
+              <a:buNone/>
+            </a:pPr>
+            <a:r>
+              <a:rPr lang="en-US" sz="3000" b="1" dirty="0">
+                <a:solidFill>
+                  <a:srgbClr val="171B20"/>
+                </a:solidFill>
+                <a:latin typeface="Arial" pitchFamily="34" charset="0"/>
+                <a:ea typeface="Arial" pitchFamily="34" charset="-122"/>
+                <a:cs typeface="Arial" pitchFamily="34" charset="-120"/>
+              </a:rPr>
+              <a:t>Согласование договора тянется неделями</a:t>
+            </a:r>
+            <a:endParaRPr lang="en-US" sz="3000" dirty="0"/>
+          </a:p>
+        </p:txBody>
+      </p:sp>
+      <p:sp>
+        <p:nvSpPr>
+          <p:cNvPr id="11" name="Text 9"/>
+          <p:cNvSpPr/>
+          <p:nvPr/>
+        </p:nvSpPr>
+        <p:spPr>
+          <a:xfrm>
+            <a:off x="457200" y="2148840"/>
+            <a:ext cx="6766560" cy="640080"/>
+          </a:xfrm>
+          <a:prstGeom prst="rect">
+            <a:avLst/>
+          </a:prstGeom>
+          <a:noFill/>
+          <a:ln/>
+        </p:spPr>
+        <p:txBody>
+          <a:bodyPr wrap="square" lIns="0" tIns="0" rIns="0" bIns="0" rtlCol="0" anchor="t"/>
+          <a:lstStyle/>
+          <a:p>
+            <a:pPr indent="0" marL="0">
+              <a:lnSpc>
+                <a:spcPct val="112000"/>
+              </a:lnSpc>
+              <a:buNone/>
+            </a:pPr>
+            <a:r>
+              <a:rPr lang="en-US" sz="1300" dirty="0">
+                <a:solidFill>
+                  <a:srgbClr val="59626B"/>
+                </a:solidFill>
+                <a:latin typeface="Arial" pitchFamily="34" charset="0"/>
+                <a:ea typeface="Arial" pitchFamily="34" charset="-122"/>
+                <a:cs typeface="Arial" pitchFamily="34" charset="-120"/>
+              </a:rPr>
+              <a:t>Почта, бумага, версии в разных местах — не видно, у кого документ и когда будет готово.</a:t>
+            </a:r>
+            <a:endParaRPr lang="en-US" sz="1300" dirty="0"/>
+          </a:p>
+        </p:txBody>
+      </p:sp>
+      <p:sp>
+        <p:nvSpPr>
+          <p:cNvPr id="12" name="Shape 10"/>
+          <p:cNvSpPr/>
+          <p:nvPr/>
+        </p:nvSpPr>
+        <p:spPr>
+          <a:xfrm>
+            <a:off x="457200" y="2743200"/>
+            <a:ext cx="3611880" cy="1783080"/>
           </a:xfrm>
           <a:prstGeom prst="roundRect">
             <a:avLst>
-              <a:gd name="adj" fmla="val 3521"/>
+              <a:gd name="adj" fmla="val 3077"/>
             </a:avLst>
           </a:prstGeom>
           <a:solidFill>
-            <a:srgbClr val="1B5482"/>
+            <a:srgbClr val="ECEEF0"/>
           </a:solidFill>
           <a:ln/>
         </p:spPr>
       </p:sp>
       <p:sp>
         <p:nvSpPr>
-          <p:cNvPr id="11" name="Text 9"/>
-          <p:cNvSpPr/>
-          <p:nvPr/>
-        </p:nvSpPr>
-        <p:spPr>
-          <a:xfrm>
-            <a:off x="493776" y="2395728"/>
-            <a:ext cx="2548128" cy="1298448"/>
-          </a:xfrm>
-          <a:prstGeom prst="rect">
-            <a:avLst/>
-          </a:prstGeom>
-          <a:noFill/>
-          <a:ln/>
-        </p:spPr>
-        <p:txBody>
-          <a:bodyPr wrap="square" lIns="2032" tIns="2032" rIns="2032" bIns="2032" rtlCol="0" anchor="t"/>
+          <p:cNvPr id="13" name="Text 11"/>
+          <p:cNvSpPr/>
+          <p:nvPr/>
+        </p:nvSpPr>
+        <p:spPr>
+          <a:xfrm>
+            <a:off x="457200" y="2743200"/>
+            <a:ext cx="3611880" cy="1783080"/>
+          </a:xfrm>
+          <a:prstGeom prst="rect">
+            <a:avLst/>
+          </a:prstGeom>
+          <a:noFill/>
+          <a:ln/>
+        </p:spPr>
+        <p:txBody>
+          <a:bodyPr wrap="square" lIns="2540" tIns="2540" rIns="2540" bIns="2540" rtlCol="0" anchor="t"/>
           <a:lstStyle/>
           <a:p>
             <a:pPr indent="0" marL="0">
               <a:lnSpc>
-                <a:spcPct val="108000"/>
+                <a:spcPct val="115000"/>
               </a:lnSpc>
-              <a:buNone/>
-            </a:pPr>
-            <a:r>
-              <a:rPr lang="en-US" sz="1250" b="1" dirty="0">
-                <a:solidFill>
-                  <a:srgbClr val="EEF1F4"/>
-                </a:solidFill>
-                <a:latin typeface="IBM Plex Sans" pitchFamily="34" charset="0"/>
-                <a:ea typeface="IBM Plex Sans" pitchFamily="34" charset="-122"/>
-                <a:cs typeface="IBM Plex Sans" pitchFamily="34" charset="-120"/>
-              </a:rPr>
-              <a:t>Сами живём в ELMA365</a:t>
-            </a:r>
-            <a:endParaRPr lang="en-US" sz="1250" dirty="0"/>
+              <a:spcAft>
+                <a:spcPts val="800"/>
+              </a:spcAft>
+              <a:buNone/>
+            </a:pPr>
+            <a:r>
+              <a:rPr lang="en-US" sz="950" spc="100" kern="0" dirty="0">
+                <a:solidFill>
+                  <a:srgbClr val="59626B"/>
+                </a:solidFill>
+                <a:latin typeface="Courier New" pitchFamily="34" charset="0"/>
+                <a:ea typeface="Courier New" pitchFamily="34" charset="-122"/>
+                <a:cs typeface="Courier New" pitchFamily="34" charset="-120"/>
+              </a:rPr>
+              <a:t>КАК СЕЙЧАС</a:t>
+            </a:r>
+            <a:endParaRPr lang="en-US" sz="950" dirty="0"/>
           </a:p>
           <a:p>
             <a:pPr indent="0" marL="0">
               <a:lnSpc>
-                <a:spcPct val="108000"/>
+                <a:spcPct val="115000"/>
               </a:lnSpc>
               <a:buNone/>
             </a:pPr>
             <a:r>
-              <a:rPr lang="en-US" sz="950" dirty="0">
-                <a:solidFill>
-                  <a:srgbClr val="D4E1EC"/>
-                </a:solidFill>
-                <a:latin typeface="IBM Plex Sans" pitchFamily="34" charset="0"/>
-                <a:ea typeface="IBM Plex Sans" pitchFamily="34" charset="-122"/>
-                <a:cs typeface="IBM Plex Sans" pitchFamily="34" charset="-120"/>
-              </a:rPr>
-              <a:t>Свой документооборот, задачи и процессы ведём в системе, которую внедряем.</a:t>
-            </a:r>
-            <a:endParaRPr lang="en-US" sz="1250" dirty="0"/>
-          </a:p>
-        </p:txBody>
-      </p:sp>
-      <p:sp>
-        <p:nvSpPr>
-          <p:cNvPr id="12" name="Shape 10"/>
-          <p:cNvSpPr/>
-          <p:nvPr/>
-        </p:nvSpPr>
-        <p:spPr>
-          <a:xfrm>
-            <a:off x="3261360" y="2395728"/>
-            <a:ext cx="2621280" cy="1298448"/>
+              <a:rPr lang="en-US" sz="1100" dirty="0">
+                <a:solidFill>
+                  <a:srgbClr val="171B20"/>
+                </a:solidFill>
+                <a:latin typeface="Arial" pitchFamily="34" charset="0"/>
+                <a:ea typeface="Arial" pitchFamily="34" charset="-122"/>
+                <a:cs typeface="Arial" pitchFamily="34" charset="-120"/>
+              </a:rPr>
+              <a:t>—  Правки и версии теряются в почте</a:t>
+            </a:r>
+            <a:endParaRPr lang="en-US" sz="950" dirty="0"/>
+          </a:p>
+          <a:p>
+            <a:pPr indent="0" marL="0">
+              <a:lnSpc>
+                <a:spcPct val="115000"/>
+              </a:lnSpc>
+              <a:buNone/>
+            </a:pPr>
+            <a:r>
+              <a:rPr lang="en-US" sz="1100" dirty="0">
+                <a:solidFill>
+                  <a:srgbClr val="171B20"/>
+                </a:solidFill>
+                <a:latin typeface="Arial" pitchFamily="34" charset="0"/>
+                <a:ea typeface="Arial" pitchFamily="34" charset="-122"/>
+                <a:cs typeface="Arial" pitchFamily="34" charset="-120"/>
+              </a:rPr>
+              <a:t>—  Сроки плывут, эскалации нет</a:t>
+            </a:r>
+            <a:endParaRPr lang="en-US" sz="950" dirty="0"/>
+          </a:p>
+          <a:p>
+            <a:pPr indent="0" marL="0">
+              <a:lnSpc>
+                <a:spcPct val="115000"/>
+              </a:lnSpc>
+              <a:buNone/>
+            </a:pPr>
+            <a:r>
+              <a:rPr lang="en-US" sz="1100" dirty="0">
+                <a:solidFill>
+                  <a:srgbClr val="171B20"/>
+                </a:solidFill>
+                <a:latin typeface="Arial" pitchFamily="34" charset="0"/>
+                <a:ea typeface="Arial" pitchFamily="34" charset="-122"/>
+                <a:cs typeface="Arial" pitchFamily="34" charset="-120"/>
+              </a:rPr>
+              <a:t>—  Не видно, у кого документ</a:t>
+            </a:r>
+            <a:endParaRPr lang="en-US" sz="950" dirty="0"/>
+          </a:p>
+          <a:p>
+            <a:pPr indent="0" marL="0">
+              <a:lnSpc>
+                <a:spcPct val="115000"/>
+              </a:lnSpc>
+              <a:buNone/>
+            </a:pPr>
+            <a:r>
+              <a:rPr lang="en-US" sz="1100" dirty="0">
+                <a:solidFill>
+                  <a:srgbClr val="171B20"/>
+                </a:solidFill>
+                <a:latin typeface="Arial" pitchFamily="34" charset="0"/>
+                <a:ea typeface="Arial" pitchFamily="34" charset="-122"/>
+                <a:cs typeface="Arial" pitchFamily="34" charset="-120"/>
+              </a:rPr>
+              <a:t>—  Каждая доработка — задача разработчику</a:t>
+            </a:r>
+            <a:endParaRPr lang="en-US" sz="950" dirty="0"/>
+          </a:p>
+        </p:txBody>
+      </p:sp>
+      <p:sp>
+        <p:nvSpPr>
+          <p:cNvPr id="14" name="Shape 12"/>
+          <p:cNvSpPr/>
+          <p:nvPr/>
+        </p:nvSpPr>
+        <p:spPr>
+          <a:xfrm>
+            <a:off x="4206240" y="3401568"/>
+            <a:ext cx="502920" cy="502920"/>
+          </a:xfrm>
+          <a:prstGeom prst="ellipse">
+            <a:avLst/>
+          </a:prstGeom>
+          <a:solidFill>
+            <a:srgbClr val="B25A1E"/>
+          </a:solidFill>
+          <a:ln/>
+        </p:spPr>
+      </p:sp>
+      <p:sp>
+        <p:nvSpPr>
+          <p:cNvPr id="15" name="Text 13"/>
+          <p:cNvSpPr/>
+          <p:nvPr/>
+        </p:nvSpPr>
+        <p:spPr>
+          <a:xfrm>
+            <a:off x="4206240" y="3401568"/>
+            <a:ext cx="502920" cy="502920"/>
+          </a:xfrm>
+          <a:prstGeom prst="rect">
+            <a:avLst/>
+          </a:prstGeom>
+          <a:noFill/>
+          <a:ln/>
+        </p:spPr>
+        <p:txBody>
+          <a:bodyPr wrap="square" lIns="0" tIns="0" rIns="0" bIns="0" rtlCol="0" anchor="ctr"/>
+          <a:lstStyle/>
+          <a:p>
+            <a:pPr algn="ctr" indent="0" marL="0">
+              <a:buNone/>
+            </a:pPr>
+            <a:r>
+              <a:rPr lang="en-US" sz="2000" b="1" dirty="0">
+                <a:solidFill>
+                  <a:srgbClr val="FFFFFF"/>
+                </a:solidFill>
+                <a:latin typeface="Arial" pitchFamily="34" charset="0"/>
+                <a:ea typeface="Arial" pitchFamily="34" charset="-122"/>
+                <a:cs typeface="Arial" pitchFamily="34" charset="-120"/>
+              </a:rPr>
+              <a:t>→</a:t>
+            </a:r>
+            <a:endParaRPr lang="en-US" sz="2000" dirty="0"/>
+          </a:p>
+        </p:txBody>
+      </p:sp>
+      <p:sp>
+        <p:nvSpPr>
+          <p:cNvPr id="16" name="Shape 14"/>
+          <p:cNvSpPr/>
+          <p:nvPr/>
+        </p:nvSpPr>
+        <p:spPr>
+          <a:xfrm>
+            <a:off x="4846320" y="2743200"/>
+            <a:ext cx="3840480" cy="1783080"/>
           </a:xfrm>
           <a:prstGeom prst="roundRect">
             <a:avLst>
-              <a:gd name="adj" fmla="val 3521"/>
+              <a:gd name="adj" fmla="val 3077"/>
             </a:avLst>
           </a:prstGeom>
           <a:solidFill>
-            <a:srgbClr val="1B5482"/>
+            <a:srgbClr val="EAF1F8"/>
           </a:solidFill>
-          <a:ln/>
-        </p:spPr>
-      </p:sp>
-      <p:sp>
-        <p:nvSpPr>
-          <p:cNvPr id="13" name="Text 11"/>
-          <p:cNvSpPr/>
-          <p:nvPr/>
-        </p:nvSpPr>
-        <p:spPr>
-          <a:xfrm>
-            <a:off x="3297936" y="2395728"/>
-            <a:ext cx="2548128" cy="1298448"/>
-          </a:xfrm>
-          <a:prstGeom prst="rect">
-            <a:avLst/>
-          </a:prstGeom>
-          <a:noFill/>
-          <a:ln/>
-        </p:spPr>
-        <p:txBody>
-          <a:bodyPr wrap="square" lIns="2032" tIns="2032" rIns="2032" bIns="2032" rtlCol="0" anchor="t"/>
+          <a:ln w="12700">
+            <a:solidFill>
+              <a:srgbClr val="CBDCEC"/>
+            </a:solidFill>
+            <a:prstDash val="solid"/>
+          </a:ln>
+        </p:spPr>
+      </p:sp>
+      <p:sp>
+        <p:nvSpPr>
+          <p:cNvPr id="17" name="Text 15"/>
+          <p:cNvSpPr/>
+          <p:nvPr/>
+        </p:nvSpPr>
+        <p:spPr>
+          <a:xfrm>
+            <a:off x="4846320" y="2743200"/>
+            <a:ext cx="3840480" cy="1783080"/>
+          </a:xfrm>
+          <a:prstGeom prst="rect">
+            <a:avLst/>
+          </a:prstGeom>
+          <a:noFill/>
+          <a:ln/>
+        </p:spPr>
+        <p:txBody>
+          <a:bodyPr wrap="square" lIns="2540" tIns="2540" rIns="2540" bIns="2540" rtlCol="0" anchor="t"/>
           <a:lstStyle/>
           <a:p>
             <a:pPr indent="0" marL="0">
               <a:lnSpc>
-                <a:spcPct val="108000"/>
+                <a:spcPct val="115000"/>
               </a:lnSpc>
-              <a:buNone/>
-            </a:pPr>
-            <a:r>
-              <a:rPr lang="en-US" sz="1250" b="1" dirty="0">
-                <a:solidFill>
-                  <a:srgbClr val="EEF1F4"/>
-                </a:solidFill>
-                <a:latin typeface="IBM Plex Sans" pitchFamily="34" charset="0"/>
-                <a:ea typeface="IBM Plex Sans" pitchFamily="34" charset="-122"/>
-                <a:cs typeface="IBM Plex Sans" pitchFamily="34" charset="-120"/>
-              </a:rPr>
-              <a:t>Сертифицированная команда</a:t>
-            </a:r>
-            <a:endParaRPr lang="en-US" sz="1250" dirty="0"/>
+              <a:spcAft>
+                <a:spcPts val="800"/>
+              </a:spcAft>
+              <a:buNone/>
+            </a:pPr>
+            <a:r>
+              <a:rPr lang="en-US" sz="950" spc="100" kern="0" dirty="0">
+                <a:solidFill>
+                  <a:srgbClr val="1D5C9A"/>
+                </a:solidFill>
+                <a:latin typeface="Courier New" pitchFamily="34" charset="0"/>
+                <a:ea typeface="Courier New" pitchFamily="34" charset="-122"/>
+                <a:cs typeface="Courier New" pitchFamily="34" charset="-120"/>
+              </a:rPr>
+              <a:t>С COORDO НА ELMA365</a:t>
+            </a:r>
+            <a:endParaRPr lang="en-US" sz="950" dirty="0"/>
           </a:p>
           <a:p>
             <a:pPr indent="0" marL="0">
               <a:lnSpc>
-                <a:spcPct val="108000"/>
+                <a:spcPct val="115000"/>
               </a:lnSpc>
               <a:buNone/>
             </a:pPr>
             <a:r>
-              <a:rPr lang="en-US" sz="950" dirty="0">
-                <a:solidFill>
-                  <a:srgbClr val="D4E1EC"/>
-                </a:solidFill>
-                <a:latin typeface="IBM Plex Sans" pitchFamily="34" charset="0"/>
-                <a:ea typeface="IBM Plex Sans" pitchFamily="34" charset="-122"/>
-                <a:cs typeface="IBM Plex Sans" pitchFamily="34" charset="-120"/>
-              </a:rPr>
-              <a:t>Аналитики и low-code разработчики. У разработчиков — 10+ сертификатов ELMA.</a:t>
-            </a:r>
-            <a:endParaRPr lang="en-US" sz="1250" dirty="0"/>
-          </a:p>
-        </p:txBody>
-      </p:sp>
-      <p:sp>
-        <p:nvSpPr>
-          <p:cNvPr id="14" name="Shape 12"/>
-          <p:cNvSpPr/>
-          <p:nvPr/>
-        </p:nvSpPr>
-        <p:spPr>
-          <a:xfrm>
-            <a:off x="6065520" y="2395728"/>
-            <a:ext cx="2621280" cy="1298448"/>
-          </a:xfrm>
-          <a:prstGeom prst="roundRect">
-            <a:avLst>
-              <a:gd name="adj" fmla="val 3521"/>
-            </a:avLst>
-          </a:prstGeom>
-          <a:solidFill>
-            <a:srgbClr val="1B5482"/>
-          </a:solidFill>
-          <a:ln/>
-        </p:spPr>
-      </p:sp>
-      <p:sp>
-        <p:nvSpPr>
-          <p:cNvPr id="15" name="Text 13"/>
-          <p:cNvSpPr/>
-          <p:nvPr/>
-        </p:nvSpPr>
-        <p:spPr>
-          <a:xfrm>
-            <a:off x="6102096" y="2395728"/>
-            <a:ext cx="2548128" cy="1298448"/>
-          </a:xfrm>
-          <a:prstGeom prst="rect">
-            <a:avLst/>
-          </a:prstGeom>
-          <a:noFill/>
-          <a:ln/>
-        </p:spPr>
-        <p:txBody>
-          <a:bodyPr wrap="square" lIns="2032" tIns="2032" rIns="2032" bIns="2032" rtlCol="0" anchor="t"/>
-          <a:lstStyle/>
+              <a:rPr lang="en-US" sz="1100" dirty="0">
+                <a:solidFill>
+                  <a:srgbClr val="171B20"/>
+                </a:solidFill>
+                <a:latin typeface="Arial" pitchFamily="34" charset="0"/>
+                <a:ea typeface="Arial" pitchFamily="34" charset="-122"/>
+                <a:cs typeface="Arial" pitchFamily="34" charset="-120"/>
+              </a:rPr>
+              <a:t>✓  Единый маршрут и реестр</a:t>
+            </a:r>
+            <a:endParaRPr lang="en-US" sz="950" dirty="0"/>
+          </a:p>
           <a:p>
             <a:pPr indent="0" marL="0">
               <a:lnSpc>
-                <a:spcPct val="108000"/>
+                <a:spcPct val="115000"/>
               </a:lnSpc>
               <a:buNone/>
             </a:pPr>
             <a:r>
-              <a:rPr lang="en-US" sz="1250" b="1" dirty="0">
-                <a:solidFill>
-                  <a:srgbClr val="EEF1F4"/>
-                </a:solidFill>
-                <a:latin typeface="IBM Plex Sans" pitchFamily="34" charset="0"/>
-                <a:ea typeface="IBM Plex Sans" pitchFamily="34" charset="-122"/>
-                <a:cs typeface="IBM Plex Sans" pitchFamily="34" charset="-120"/>
-              </a:rPr>
-              <a:t>Продукт и услуги</a:t>
-            </a:r>
-            <a:endParaRPr lang="en-US" sz="1250" dirty="0"/>
+              <a:rPr lang="en-US" sz="1100" dirty="0">
+                <a:solidFill>
+                  <a:srgbClr val="171B20"/>
+                </a:solidFill>
+                <a:latin typeface="Arial" pitchFamily="34" charset="0"/>
+                <a:ea typeface="Arial" pitchFamily="34" charset="-122"/>
+                <a:cs typeface="Arial" pitchFamily="34" charset="-120"/>
+              </a:rPr>
+              <a:t>✓  Сроки, эскалация, делегирование</a:t>
+            </a:r>
+            <a:endParaRPr lang="en-US" sz="950" dirty="0"/>
           </a:p>
           <a:p>
             <a:pPr indent="0" marL="0">
               <a:lnSpc>
-                <a:spcPct val="108000"/>
+                <a:spcPct val="115000"/>
               </a:lnSpc>
               <a:buNone/>
             </a:pPr>
             <a:r>
-              <a:rPr lang="en-US" sz="950" dirty="0">
-                <a:solidFill>
-                  <a:srgbClr val="D4E1EC"/>
-                </a:solidFill>
-                <a:latin typeface="IBM Plex Sans" pitchFamily="34" charset="0"/>
-                <a:ea typeface="IBM Plex Sans" pitchFamily="34" charset="-122"/>
-                <a:cs typeface="IBM Plex Sans" pitchFamily="34" charset="-120"/>
-              </a:rPr>
-              <a:t>Внедрение под ключ и готовые коробочные контуры документооборота.</a:t>
-            </a:r>
-            <a:endParaRPr lang="en-US" sz="1250" dirty="0"/>
-          </a:p>
-        </p:txBody>
-      </p:sp>
-      <p:sp>
-        <p:nvSpPr>
-          <p:cNvPr id="16" name="Text 14"/>
-          <p:cNvSpPr/>
-          <p:nvPr/>
-        </p:nvSpPr>
-        <p:spPr>
-          <a:xfrm>
-            <a:off x="457200" y="3977640"/>
-            <a:ext cx="8229600" cy="274320"/>
-          </a:xfrm>
-          <a:prstGeom prst="rect">
-            <a:avLst/>
-          </a:prstGeom>
-          <a:noFill/>
-          <a:ln/>
-        </p:spPr>
-        <p:txBody>
-          <a:bodyPr wrap="square" lIns="0" tIns="0" rIns="0" bIns="0" rtlCol="0" anchor="ctr"/>
-          <a:lstStyle/>
-          <a:p>
-            <a:pPr indent="0" marL="0">
-              <a:buNone/>
-            </a:pPr>
-            <a:r>
-              <a:rPr lang="en-US" sz="1000" b="1" dirty="0">
-                <a:solidFill>
-                  <a:srgbClr val="EEF1F4"/>
-                </a:solidFill>
-                <a:latin typeface="IBM Plex Mono" pitchFamily="34" charset="0"/>
-                <a:ea typeface="IBM Plex Mono" pitchFamily="34" charset="-122"/>
-                <a:cs typeface="IBM Plex Mono" pitchFamily="34" charset="-120"/>
-              </a:rPr>
-              <a:t>Россия</a:t>
-            </a:r>
-            <a:pPr indent="0" marL="0">
-              <a:buNone/>
-            </a:pPr>
-            <a:r>
-              <a:rPr lang="en-US" sz="1000" dirty="0">
-                <a:solidFill>
-                  <a:srgbClr val="AEC2D3"/>
-                </a:solidFill>
-                <a:latin typeface="IBM Plex Mono" pitchFamily="34" charset="0"/>
-                <a:ea typeface="IBM Plex Mono" pitchFamily="34" charset="-122"/>
-                <a:cs typeface="IBM Plex Mono" pitchFamily="34" charset="-120"/>
-              </a:rPr>
-              <a:t> и </a:t>
-            </a:r>
-            <a:pPr indent="0" marL="0">
-              <a:buNone/>
-            </a:pPr>
-            <a:r>
-              <a:rPr lang="en-US" sz="1000" b="1" dirty="0">
-                <a:solidFill>
-                  <a:srgbClr val="EEF1F4"/>
-                </a:solidFill>
-                <a:latin typeface="IBM Plex Mono" pitchFamily="34" charset="0"/>
-                <a:ea typeface="IBM Plex Mono" pitchFamily="34" charset="-122"/>
-                <a:cs typeface="IBM Plex Mono" pitchFamily="34" charset="-120"/>
-              </a:rPr>
-              <a:t>Казахстан</a:t>
-            </a:r>
-            <a:pPr indent="0" marL="0">
-              <a:buNone/>
-            </a:pPr>
-            <a:r>
-              <a:rPr lang="en-US" sz="1000" dirty="0">
-                <a:solidFill>
-                  <a:srgbClr val="AEC2D3"/>
-                </a:solidFill>
-                <a:latin typeface="IBM Plex Mono" pitchFamily="34" charset="0"/>
-                <a:ea typeface="IBM Plex Mono" pitchFamily="34" charset="-122"/>
-                <a:cs typeface="IBM Plex Mono" pitchFamily="34" charset="-120"/>
-              </a:rPr>
-              <a:t>      Руководитель — </a:t>
-            </a:r>
-            <a:pPr indent="0" marL="0">
-              <a:buNone/>
-            </a:pPr>
-            <a:r>
-              <a:rPr lang="en-US" sz="1000" b="1" dirty="0">
-                <a:solidFill>
-                  <a:srgbClr val="EEF1F4"/>
-                </a:solidFill>
-                <a:latin typeface="IBM Plex Mono" pitchFamily="34" charset="0"/>
-                <a:ea typeface="IBM Plex Mono" pitchFamily="34" charset="-122"/>
-                <a:cs typeface="IBM Plex Mono" pitchFamily="34" charset="-120"/>
-              </a:rPr>
-              <a:t>5 лет</a:t>
-            </a:r>
-            <a:pPr indent="0" marL="0">
-              <a:buNone/>
-            </a:pPr>
-            <a:r>
-              <a:rPr lang="en-US" sz="1000" dirty="0">
-                <a:solidFill>
-                  <a:srgbClr val="AEC2D3"/>
-                </a:solidFill>
-                <a:latin typeface="IBM Plex Mono" pitchFamily="34" charset="0"/>
-                <a:ea typeface="IBM Plex Mono" pitchFamily="34" charset="-122"/>
-                <a:cs typeface="IBM Plex Mono" pitchFamily="34" charset="-120"/>
-              </a:rPr>
-              <a:t> в ELMA365</a:t>
-            </a:r>
-            <a:pPr indent="0" marL="0">
-              <a:buNone/>
-            </a:pPr>
-            <a:r>
-              <a:rPr lang="en-US" sz="1000" dirty="0">
-                <a:solidFill>
-                  <a:srgbClr val="AEC2D3"/>
-                </a:solidFill>
-                <a:latin typeface="IBM Plex Mono" pitchFamily="34" charset="0"/>
-                <a:ea typeface="IBM Plex Mono" pitchFamily="34" charset="-122"/>
-                <a:cs typeface="IBM Plex Mono" pitchFamily="34" charset="-120"/>
-              </a:rPr>
-              <a:t>      Внедрение </a:t>
-            </a:r>
-            <a:pPr indent="0" marL="0">
-              <a:buNone/>
-            </a:pPr>
-            <a:r>
-              <a:rPr lang="en-US" sz="1000" b="1" dirty="0">
-                <a:solidFill>
-                  <a:srgbClr val="EEF1F4"/>
-                </a:solidFill>
-                <a:latin typeface="IBM Plex Mono" pitchFamily="34" charset="0"/>
-                <a:ea typeface="IBM Plex Mono" pitchFamily="34" charset="-122"/>
-                <a:cs typeface="IBM Plex Mono" pitchFamily="34" charset="-120"/>
-              </a:rPr>
-              <a:t>+</a:t>
-            </a:r>
-            <a:pPr indent="0" marL="0">
-              <a:buNone/>
-            </a:pPr>
-            <a:r>
-              <a:rPr lang="en-US" sz="1000" dirty="0">
-                <a:solidFill>
-                  <a:srgbClr val="AEC2D3"/>
-                </a:solidFill>
-                <a:latin typeface="IBM Plex Mono" pitchFamily="34" charset="0"/>
-                <a:ea typeface="IBM Plex Mono" pitchFamily="34" charset="-122"/>
-                <a:cs typeface="IBM Plex Mono" pitchFamily="34" charset="-120"/>
-              </a:rPr>
-              <a:t> продукт</a:t>
-            </a:r>
-            <a:endParaRPr lang="en-US" sz="1000" dirty="0"/>
+              <a:rPr lang="en-US" sz="1100" dirty="0">
+                <a:solidFill>
+                  <a:srgbClr val="171B20"/>
+                </a:solidFill>
+                <a:latin typeface="Arial" pitchFamily="34" charset="0"/>
+                <a:ea typeface="Arial" pitchFamily="34" charset="-122"/>
+                <a:cs typeface="Arial" pitchFamily="34" charset="-120"/>
+              </a:rPr>
+              <a:t>✓  Видно статус на каждом этапе</a:t>
+            </a:r>
+            <a:endParaRPr lang="en-US" sz="950" dirty="0"/>
+          </a:p>
+          <a:p>
+            <a:pPr indent="0" marL="0">
+              <a:lnSpc>
+                <a:spcPct val="115000"/>
+              </a:lnSpc>
+              <a:buNone/>
+            </a:pPr>
+            <a:r>
+              <a:rPr lang="en-US" sz="1100" dirty="0">
+                <a:solidFill>
+                  <a:srgbClr val="171B20"/>
+                </a:solidFill>
+                <a:latin typeface="Arial" pitchFamily="34" charset="0"/>
+                <a:ea typeface="Arial" pitchFamily="34" charset="-122"/>
+                <a:cs typeface="Arial" pitchFamily="34" charset="-120"/>
+              </a:rPr>
+              <a:t>✓  Маршруты меняются без кода</a:t>
+            </a:r>
+            <a:endParaRPr lang="en-US" sz="950" dirty="0"/>
           </a:p>
         </p:txBody>
       </p:sp>
@@ -2022,9 +2220,9 @@
                 <a:solidFill>
                   <a:srgbClr val="1D5C9A"/>
                 </a:solidFill>
-                <a:latin typeface="IBM Plex Sans" pitchFamily="34" charset="0"/>
-                <a:ea typeface="IBM Plex Sans" pitchFamily="34" charset="-122"/>
-                <a:cs typeface="IBM Plex Sans" pitchFamily="34" charset="-120"/>
+                <a:latin typeface="Arial" pitchFamily="34" charset="0"/>
+                <a:ea typeface="Arial" pitchFamily="34" charset="-122"/>
+                <a:cs typeface="Arial" pitchFamily="34" charset="-120"/>
               </a:rPr>
               <a:t>WD</a:t>
             </a:r>
@@ -2061,9 +2259,9 @@
                 <a:solidFill>
                   <a:srgbClr val="171B20"/>
                 </a:solidFill>
-                <a:latin typeface="IBM Plex Sans" pitchFamily="34" charset="0"/>
-                <a:ea typeface="IBM Plex Sans" pitchFamily="34" charset="-122"/>
-                <a:cs typeface="IBM Plex Sans" pitchFamily="34" charset="-120"/>
+                <a:latin typeface="Arial" pitchFamily="34" charset="0"/>
+                <a:ea typeface="Arial" pitchFamily="34" charset="-122"/>
+                <a:cs typeface="Arial" pitchFamily="34" charset="-120"/>
               </a:rPr>
               <a:t>WhatDaDev</a:t>
             </a:r>
@@ -2100,11 +2298,11 @@
                 <a:solidFill>
                   <a:srgbClr val="59626B"/>
                 </a:solidFill>
-                <a:latin typeface="IBM Plex Mono" pitchFamily="34" charset="0"/>
-                <a:ea typeface="IBM Plex Mono" pitchFamily="34" charset="-122"/>
-                <a:cs typeface="IBM Plex Mono" pitchFamily="34" charset="-120"/>
-              </a:rPr>
-              <a:t>Платформа</a:t>
+                <a:latin typeface="Courier New" pitchFamily="34" charset="0"/>
+                <a:ea typeface="Courier New" pitchFamily="34" charset="-122"/>
+                <a:cs typeface="Courier New" pitchFamily="34" charset="-120"/>
+              </a:rPr>
+              <a:t>О компании</a:t>
             </a:r>
             <a:endParaRPr lang="en-US" sz="900" dirty="0"/>
           </a:p>
@@ -2139,9 +2337,9 @@
                 <a:solidFill>
                   <a:srgbClr val="59626B"/>
                 </a:solidFill>
-                <a:latin typeface="IBM Plex Mono" pitchFamily="34" charset="0"/>
-                <a:ea typeface="IBM Plex Mono" pitchFamily="34" charset="-122"/>
-                <a:cs typeface="IBM Plex Mono" pitchFamily="34" charset="-120"/>
+                <a:latin typeface="Courier New" pitchFamily="34" charset="0"/>
+                <a:ea typeface="Courier New" pitchFamily="34" charset="-122"/>
+                <a:cs typeface="Courier New" pitchFamily="34" charset="-120"/>
               </a:rPr>
               <a:t>whatdadev.ru</a:t>
             </a:r>
@@ -2178,11 +2376,11 @@
                 <a:solidFill>
                   <a:srgbClr val="59626B"/>
                 </a:solidFill>
-                <a:latin typeface="IBM Plex Mono" pitchFamily="34" charset="0"/>
-                <a:ea typeface="IBM Plex Mono" pitchFamily="34" charset="-122"/>
-                <a:cs typeface="IBM Plex Mono" pitchFamily="34" charset="-120"/>
-              </a:rPr>
-              <a:t>02 / 05</a:t>
+                <a:latin typeface="Courier New" pitchFamily="34" charset="0"/>
+                <a:ea typeface="Courier New" pitchFamily="34" charset="-122"/>
+                <a:cs typeface="Courier New" pitchFamily="34" charset="-120"/>
+              </a:rPr>
+              <a:t>02 / 07</a:t>
             </a:r>
             <a:endParaRPr lang="en-US" sz="850" dirty="0"/>
           </a:p>
@@ -2196,14 +2394,14 @@
         </p:nvSpPr>
         <p:spPr>
           <a:xfrm>
-            <a:off x="457200" y="937260"/>
+            <a:off x="457200" y="914400"/>
             <a:ext cx="100584" cy="100584"/>
           </a:xfrm>
           <a:prstGeom prst="rect">
             <a:avLst/>
           </a:prstGeom>
           <a:solidFill>
-            <a:srgbClr val="1D5C9A"/>
+            <a:srgbClr val="B25A1E"/>
           </a:solidFill>
           <a:ln/>
         </p:spPr>
@@ -2216,8 +2414,8 @@
         </p:nvSpPr>
         <p:spPr>
           <a:xfrm>
-            <a:off x="658368" y="896112"/>
-            <a:ext cx="7315200" cy="219456"/>
+            <a:off x="658368" y="850392"/>
+            <a:ext cx="7772400" cy="237744"/>
           </a:xfrm>
           <a:prstGeom prst="rect">
             <a:avLst/>
@@ -2235,13 +2433,13 @@
             <a:r>
               <a:rPr lang="en-US" sz="1050" spc="200" kern="0" dirty="0">
                 <a:solidFill>
-                  <a:srgbClr val="1D5C9A"/>
-                </a:solidFill>
-                <a:latin typeface="IBM Plex Mono" pitchFamily="34" charset="0"/>
-                <a:ea typeface="IBM Plex Mono" pitchFamily="34" charset="-122"/>
-                <a:cs typeface="IBM Plex Mono" pitchFamily="34" charset="-120"/>
-              </a:rPr>
-              <a:t>НА ЧЁМ МЫ РАБОТАЕМ</a:t>
+                  <a:srgbClr val="B25A1E"/>
+                </a:solidFill>
+                <a:latin typeface="Courier New" pitchFamily="34" charset="0"/>
+                <a:ea typeface="Courier New" pitchFamily="34" charset="-122"/>
+                <a:cs typeface="Courier New" pitchFamily="34" charset="-120"/>
+              </a:rPr>
+              <a:t>КТО ЭТО РЕШАЕТ</a:t>
             </a:r>
             <a:endParaRPr lang="en-US" sz="1050" dirty="0"/>
           </a:p>
@@ -2255,8 +2453,8 @@
         </p:nvSpPr>
         <p:spPr>
           <a:xfrm>
-            <a:off x="457200" y="1188720"/>
-            <a:ext cx="8229600" cy="566928"/>
+            <a:off x="457200" y="1170432"/>
+            <a:ext cx="8229600" cy="685800"/>
           </a:xfrm>
           <a:prstGeom prst="rect">
             <a:avLst/>
@@ -2269,20 +2467,23 @@
           <a:lstStyle/>
           <a:p>
             <a:pPr indent="0" marL="0">
-              <a:buNone/>
-            </a:pPr>
-            <a:r>
-              <a:rPr lang="en-US" sz="2500" b="1" dirty="0">
+              <a:lnSpc>
+                <a:spcPts val="2415"/>
+              </a:lnSpc>
+              <a:buNone/>
+            </a:pPr>
+            <a:r>
+              <a:rPr lang="en-US" sz="2300" b="1" dirty="0">
                 <a:solidFill>
                   <a:srgbClr val="171B20"/>
                 </a:solidFill>
-                <a:latin typeface="IBM Plex Sans" pitchFamily="34" charset="0"/>
-                <a:ea typeface="IBM Plex Sans" pitchFamily="34" charset="-122"/>
-                <a:cs typeface="IBM Plex Sans" pitchFamily="34" charset="-120"/>
-              </a:rPr>
-              <a:t>ELMA365 — платформа автоматизации</a:t>
-            </a:r>
-            <a:endParaRPr lang="en-US" sz="2500" dirty="0"/>
+                <a:latin typeface="Arial" pitchFamily="34" charset="0"/>
+                <a:ea typeface="Arial" pitchFamily="34" charset="-122"/>
+                <a:cs typeface="Arial" pitchFamily="34" charset="-120"/>
+              </a:rPr>
+              <a:t>Не подрядчик со стороны — мы сами живём в ELMA365</a:t>
+            </a:r>
+            <a:endParaRPr lang="en-US" sz="2300" dirty="0"/>
           </a:p>
         </p:txBody>
       </p:sp>
@@ -2294,8 +2495,8 @@
         </p:nvSpPr>
         <p:spPr>
           <a:xfrm>
-            <a:off x="457200" y="1783080"/>
-            <a:ext cx="7680960" cy="685800"/>
+            <a:off x="457200" y="2148840"/>
+            <a:ext cx="6766560" cy="640080"/>
           </a:xfrm>
           <a:prstGeom prst="rect">
             <a:avLst/>
@@ -2318,11 +2519,11 @@
                 <a:solidFill>
                   <a:srgbClr val="59626B"/>
                 </a:solidFill>
-                <a:latin typeface="IBM Plex Sans" pitchFamily="34" charset="0"/>
-                <a:ea typeface="IBM Plex Sans" pitchFamily="34" charset="-122"/>
-                <a:cs typeface="IBM Plex Sans" pitchFamily="34" charset="-120"/>
-              </a:rPr>
-              <a:t>Российская low-code платформа для бизнес-процессов. Один инструмент вместо зоопарка систем: процессы, документы, продажи и сервис — в одном контуре.</a:t>
+                <a:latin typeface="Arial" pitchFamily="34" charset="0"/>
+                <a:ea typeface="Arial" pitchFamily="34" charset="-122"/>
+                <a:cs typeface="Arial" pitchFamily="34" charset="-120"/>
+              </a:rPr>
+              <a:t>Свой документооборот, задачи и процессы ведём в системе, которую внедряем. Поэтому — по опыту, а не по учебнику.</a:t>
             </a:r>
             <a:endParaRPr lang="en-US" sz="1300" dirty="0"/>
           </a:p>
@@ -2336,12 +2537,12 @@
         </p:nvSpPr>
         <p:spPr>
           <a:xfrm>
-            <a:off x="457200" y="2606040"/>
-            <a:ext cx="1947672" cy="896112"/>
+            <a:off x="457200" y="2788920"/>
+            <a:ext cx="2621280" cy="1371600"/>
           </a:xfrm>
           <a:prstGeom prst="roundRect">
             <a:avLst>
-              <a:gd name="adj" fmla="val 5102"/>
+              <a:gd name="adj" fmla="val 3333"/>
             </a:avLst>
           </a:prstGeom>
           <a:solidFill>
@@ -2370,77 +2571,86 @@
         </p:nvSpPr>
         <p:spPr>
           <a:xfrm>
-            <a:off x="475488" y="2606040"/>
-            <a:ext cx="1911096" cy="896112"/>
-          </a:xfrm>
-          <a:prstGeom prst="rect">
-            <a:avLst/>
-          </a:prstGeom>
-          <a:noFill/>
-          <a:ln/>
-        </p:spPr>
-        <p:txBody>
-          <a:bodyPr wrap="square" lIns="1397" tIns="1397" rIns="1397" bIns="1397" rtlCol="0" anchor="ctr"/>
+            <a:off x="475488" y="2788920"/>
+            <a:ext cx="2584704" cy="1371600"/>
+          </a:xfrm>
+          <a:prstGeom prst="rect">
+            <a:avLst/>
+          </a:prstGeom>
+          <a:noFill/>
+          <a:ln/>
+        </p:spPr>
+        <p:txBody>
+          <a:bodyPr wrap="square" lIns="2032" tIns="2032" rIns="2032" bIns="2032" rtlCol="0" anchor="t"/>
           <a:lstStyle/>
           <a:p>
             <a:pPr indent="0" marL="0">
               <a:lnSpc>
                 <a:spcPct val="105000"/>
               </a:lnSpc>
-              <a:buNone/>
-            </a:pPr>
-            <a:r>
-              <a:rPr lang="en-US" sz="850" dirty="0">
-                <a:solidFill>
-                  <a:srgbClr val="1D5C9A"/>
-                </a:solidFill>
-                <a:latin typeface="IBM Plex Mono" pitchFamily="34" charset="0"/>
-                <a:ea typeface="IBM Plex Mono" pitchFamily="34" charset="-122"/>
-                <a:cs typeface="IBM Plex Mono" pitchFamily="34" charset="-120"/>
+              <a:spcAft>
+                <a:spcPts val="500"/>
+              </a:spcAft>
+              <a:buNone/>
+            </a:pPr>
+            <a:r>
+              <a:rPr lang="en-US" sz="900" dirty="0">
+                <a:solidFill>
+                  <a:srgbClr val="B25A1E"/>
+                </a:solidFill>
+                <a:latin typeface="Courier New" pitchFamily="34" charset="0"/>
+                <a:ea typeface="Courier New" pitchFamily="34" charset="-122"/>
+                <a:cs typeface="Courier New" pitchFamily="34" charset="-120"/>
               </a:rPr>
               <a:t>01</a:t>
             </a:r>
-            <a:endParaRPr lang="en-US" sz="850" dirty="0"/>
+            <a:endParaRPr lang="en-US" sz="900" dirty="0"/>
           </a:p>
           <a:p>
             <a:pPr indent="0" marL="0">
               <a:lnSpc>
                 <a:spcPct val="105000"/>
               </a:lnSpc>
-              <a:buNone/>
-            </a:pPr>
-            <a:r>
-              <a:rPr lang="en-US" sz="1150" b="1" dirty="0">
+              <a:spcAft>
+                <a:spcPts val="500"/>
+              </a:spcAft>
+              <a:buNone/>
+            </a:pPr>
+            <a:r>
+              <a:rPr lang="en-US" sz="1400" b="1" dirty="0">
                 <a:solidFill>
                   <a:srgbClr val="171B20"/>
                 </a:solidFill>
-                <a:latin typeface="IBM Plex Sans" pitchFamily="34" charset="0"/>
-                <a:ea typeface="IBM Plex Sans" pitchFamily="34" charset="-122"/>
-                <a:cs typeface="IBM Plex Sans" pitchFamily="34" charset="-120"/>
-              </a:rPr>
-              <a:t>Процессы (BPM)</a:t>
-            </a:r>
-            <a:endParaRPr lang="en-US" sz="850" dirty="0"/>
+                <a:latin typeface="Arial" pitchFamily="34" charset="0"/>
+                <a:ea typeface="Arial" pitchFamily="34" charset="-122"/>
+                <a:cs typeface="Arial" pitchFamily="34" charset="-120"/>
+              </a:rPr>
+              <a:t>Сами живём в ELMA365</a:t>
+            </a:r>
+            <a:endParaRPr lang="en-US" sz="900" dirty="0"/>
           </a:p>
           <a:p>
             <a:pPr indent="0" marL="0">
               <a:lnSpc>
                 <a:spcPct val="105000"/>
               </a:lnSpc>
-              <a:buNone/>
-            </a:pPr>
-            <a:r>
-              <a:rPr lang="en-US" sz="900" dirty="0">
+              <a:spcAft>
+                <a:spcPts val="500"/>
+              </a:spcAft>
+              <a:buNone/>
+            </a:pPr>
+            <a:r>
+              <a:rPr lang="en-US" sz="1000" dirty="0">
                 <a:solidFill>
                   <a:srgbClr val="59626B"/>
                 </a:solidFill>
-                <a:latin typeface="IBM Plex Sans" pitchFamily="34" charset="0"/>
-                <a:ea typeface="IBM Plex Sans" pitchFamily="34" charset="-122"/>
-                <a:cs typeface="IBM Plex Sans" pitchFamily="34" charset="-120"/>
-              </a:rPr>
-              <a:t>Маршруты и регламенты без кода</a:t>
-            </a:r>
-            <a:endParaRPr lang="en-US" sz="850" dirty="0"/>
+                <a:latin typeface="Arial" pitchFamily="34" charset="0"/>
+                <a:ea typeface="Arial" pitchFamily="34" charset="-122"/>
+                <a:cs typeface="Arial" pitchFamily="34" charset="-120"/>
+              </a:rPr>
+              <a:t>Работаем на том, что внедряем — знаем систему изнутри.</a:t>
+            </a:r>
+            <a:endParaRPr lang="en-US" sz="900" dirty="0"/>
           </a:p>
         </p:txBody>
       </p:sp>
@@ -2452,12 +2662,12 @@
         </p:nvSpPr>
         <p:spPr>
           <a:xfrm>
-            <a:off x="2551176" y="2606040"/>
-            <a:ext cx="1947672" cy="896112"/>
+            <a:off x="3261360" y="2788920"/>
+            <a:ext cx="2621280" cy="1371600"/>
           </a:xfrm>
           <a:prstGeom prst="roundRect">
             <a:avLst>
-              <a:gd name="adj" fmla="val 5102"/>
+              <a:gd name="adj" fmla="val 3333"/>
             </a:avLst>
           </a:prstGeom>
           <a:solidFill>
@@ -2486,77 +2696,86 @@
         </p:nvSpPr>
         <p:spPr>
           <a:xfrm>
-            <a:off x="2569464" y="2606040"/>
-            <a:ext cx="1911096" cy="896112"/>
-          </a:xfrm>
-          <a:prstGeom prst="rect">
-            <a:avLst/>
-          </a:prstGeom>
-          <a:noFill/>
-          <a:ln/>
-        </p:spPr>
-        <p:txBody>
-          <a:bodyPr wrap="square" lIns="1397" tIns="1397" rIns="1397" bIns="1397" rtlCol="0" anchor="ctr"/>
+            <a:off x="3279648" y="2788920"/>
+            <a:ext cx="2584704" cy="1371600"/>
+          </a:xfrm>
+          <a:prstGeom prst="rect">
+            <a:avLst/>
+          </a:prstGeom>
+          <a:noFill/>
+          <a:ln/>
+        </p:spPr>
+        <p:txBody>
+          <a:bodyPr wrap="square" lIns="2032" tIns="2032" rIns="2032" bIns="2032" rtlCol="0" anchor="t"/>
           <a:lstStyle/>
           <a:p>
             <a:pPr indent="0" marL="0">
               <a:lnSpc>
                 <a:spcPct val="105000"/>
               </a:lnSpc>
-              <a:buNone/>
-            </a:pPr>
-            <a:r>
-              <a:rPr lang="en-US" sz="850" dirty="0">
-                <a:solidFill>
-                  <a:srgbClr val="1D5C9A"/>
-                </a:solidFill>
-                <a:latin typeface="IBM Plex Mono" pitchFamily="34" charset="0"/>
-                <a:ea typeface="IBM Plex Mono" pitchFamily="34" charset="-122"/>
-                <a:cs typeface="IBM Plex Mono" pitchFamily="34" charset="-120"/>
+              <a:spcAft>
+                <a:spcPts val="500"/>
+              </a:spcAft>
+              <a:buNone/>
+            </a:pPr>
+            <a:r>
+              <a:rPr lang="en-US" sz="900" dirty="0">
+                <a:solidFill>
+                  <a:srgbClr val="B25A1E"/>
+                </a:solidFill>
+                <a:latin typeface="Courier New" pitchFamily="34" charset="0"/>
+                <a:ea typeface="Courier New" pitchFamily="34" charset="-122"/>
+                <a:cs typeface="Courier New" pitchFamily="34" charset="-120"/>
               </a:rPr>
               <a:t>02</a:t>
             </a:r>
-            <a:endParaRPr lang="en-US" sz="850" dirty="0"/>
+            <a:endParaRPr lang="en-US" sz="900" dirty="0"/>
           </a:p>
           <a:p>
             <a:pPr indent="0" marL="0">
               <a:lnSpc>
                 <a:spcPct val="105000"/>
               </a:lnSpc>
-              <a:buNone/>
-            </a:pPr>
-            <a:r>
-              <a:rPr lang="en-US" sz="1150" b="1" dirty="0">
+              <a:spcAft>
+                <a:spcPts val="500"/>
+              </a:spcAft>
+              <a:buNone/>
+            </a:pPr>
+            <a:r>
+              <a:rPr lang="en-US" sz="1400" b="1" dirty="0">
                 <a:solidFill>
                   <a:srgbClr val="171B20"/>
                 </a:solidFill>
-                <a:latin typeface="IBM Plex Sans" pitchFamily="34" charset="0"/>
-                <a:ea typeface="IBM Plex Sans" pitchFamily="34" charset="-122"/>
-                <a:cs typeface="IBM Plex Sans" pitchFamily="34" charset="-120"/>
-              </a:rPr>
-              <a:t>CRM</a:t>
-            </a:r>
-            <a:endParaRPr lang="en-US" sz="850" dirty="0"/>
+                <a:latin typeface="Arial" pitchFamily="34" charset="0"/>
+                <a:ea typeface="Arial" pitchFamily="34" charset="-122"/>
+                <a:cs typeface="Arial" pitchFamily="34" charset="-120"/>
+              </a:rPr>
+              <a:t>Сертифицированная команда</a:t>
+            </a:r>
+            <a:endParaRPr lang="en-US" sz="900" dirty="0"/>
           </a:p>
           <a:p>
             <a:pPr indent="0" marL="0">
               <a:lnSpc>
                 <a:spcPct val="105000"/>
               </a:lnSpc>
-              <a:buNone/>
-            </a:pPr>
-            <a:r>
-              <a:rPr lang="en-US" sz="900" dirty="0">
+              <a:spcAft>
+                <a:spcPts val="500"/>
+              </a:spcAft>
+              <a:buNone/>
+            </a:pPr>
+            <a:r>
+              <a:rPr lang="en-US" sz="1000" dirty="0">
                 <a:solidFill>
                   <a:srgbClr val="59626B"/>
                 </a:solidFill>
-                <a:latin typeface="IBM Plex Sans" pitchFamily="34" charset="0"/>
-                <a:ea typeface="IBM Plex Sans" pitchFamily="34" charset="-122"/>
-                <a:cs typeface="IBM Plex Sans" pitchFamily="34" charset="-120"/>
-              </a:rPr>
-              <a:t>Воронки, сделки, клиенты</a:t>
-            </a:r>
-            <a:endParaRPr lang="en-US" sz="850" dirty="0"/>
+                <a:latin typeface="Arial" pitchFamily="34" charset="0"/>
+                <a:ea typeface="Arial" pitchFamily="34" charset="-122"/>
+                <a:cs typeface="Arial" pitchFamily="34" charset="-120"/>
+              </a:rPr>
+              <a:t>Аналитики и low-code разработчики, 10+ сертификатов ELMA.</a:t>
+            </a:r>
+            <a:endParaRPr lang="en-US" sz="900" dirty="0"/>
           </a:p>
         </p:txBody>
       </p:sp>
@@ -2568,12 +2787,12 @@
         </p:nvSpPr>
         <p:spPr>
           <a:xfrm>
-            <a:off x="4645152" y="2606040"/>
-            <a:ext cx="1947672" cy="896112"/>
+            <a:off x="6065520" y="2788920"/>
+            <a:ext cx="2621280" cy="1371600"/>
           </a:xfrm>
           <a:prstGeom prst="roundRect">
             <a:avLst>
-              <a:gd name="adj" fmla="val 5102"/>
+              <a:gd name="adj" fmla="val 3333"/>
             </a:avLst>
           </a:prstGeom>
           <a:solidFill>
@@ -2602,657 +2821,209 @@
         </p:nvSpPr>
         <p:spPr>
           <a:xfrm>
-            <a:off x="4663440" y="2606040"/>
-            <a:ext cx="1911096" cy="896112"/>
-          </a:xfrm>
-          <a:prstGeom prst="rect">
-            <a:avLst/>
-          </a:prstGeom>
-          <a:noFill/>
-          <a:ln/>
-        </p:spPr>
-        <p:txBody>
-          <a:bodyPr wrap="square" lIns="1397" tIns="1397" rIns="1397" bIns="1397" rtlCol="0" anchor="ctr"/>
+            <a:off x="6083808" y="2788920"/>
+            <a:ext cx="2584704" cy="1371600"/>
+          </a:xfrm>
+          <a:prstGeom prst="rect">
+            <a:avLst/>
+          </a:prstGeom>
+          <a:noFill/>
+          <a:ln/>
+        </p:spPr>
+        <p:txBody>
+          <a:bodyPr wrap="square" lIns="2032" tIns="2032" rIns="2032" bIns="2032" rtlCol="0" anchor="t"/>
           <a:lstStyle/>
           <a:p>
             <a:pPr indent="0" marL="0">
               <a:lnSpc>
                 <a:spcPct val="105000"/>
               </a:lnSpc>
-              <a:buNone/>
-            </a:pPr>
-            <a:r>
-              <a:rPr lang="en-US" sz="850" dirty="0">
-                <a:solidFill>
-                  <a:srgbClr val="1D5C9A"/>
-                </a:solidFill>
-                <a:latin typeface="IBM Plex Mono" pitchFamily="34" charset="0"/>
-                <a:ea typeface="IBM Plex Mono" pitchFamily="34" charset="-122"/>
-                <a:cs typeface="IBM Plex Mono" pitchFamily="34" charset="-120"/>
+              <a:spcAft>
+                <a:spcPts val="500"/>
+              </a:spcAft>
+              <a:buNone/>
+            </a:pPr>
+            <a:r>
+              <a:rPr lang="en-US" sz="900" dirty="0">
+                <a:solidFill>
+                  <a:srgbClr val="B25A1E"/>
+                </a:solidFill>
+                <a:latin typeface="Courier New" pitchFamily="34" charset="0"/>
+                <a:ea typeface="Courier New" pitchFamily="34" charset="-122"/>
+                <a:cs typeface="Courier New" pitchFamily="34" charset="-120"/>
               </a:rPr>
               <a:t>03</a:t>
             </a:r>
-            <a:endParaRPr lang="en-US" sz="850" dirty="0"/>
+            <a:endParaRPr lang="en-US" sz="900" dirty="0"/>
           </a:p>
           <a:p>
             <a:pPr indent="0" marL="0">
               <a:lnSpc>
                 <a:spcPct val="105000"/>
               </a:lnSpc>
-              <a:buNone/>
-            </a:pPr>
-            <a:r>
-              <a:rPr lang="en-US" sz="1150" b="1" dirty="0">
+              <a:spcAft>
+                <a:spcPts val="500"/>
+              </a:spcAft>
+              <a:buNone/>
+            </a:pPr>
+            <a:r>
+              <a:rPr lang="en-US" sz="1400" b="1" dirty="0">
                 <a:solidFill>
                   <a:srgbClr val="171B20"/>
                 </a:solidFill>
-                <a:latin typeface="IBM Plex Sans" pitchFamily="34" charset="0"/>
-                <a:ea typeface="IBM Plex Sans" pitchFamily="34" charset="-122"/>
-                <a:cs typeface="IBM Plex Sans" pitchFamily="34" charset="-120"/>
-              </a:rPr>
-              <a:t>ЭДО и КЭДО</a:t>
-            </a:r>
-            <a:endParaRPr lang="en-US" sz="850" dirty="0"/>
+                <a:latin typeface="Arial" pitchFamily="34" charset="0"/>
+                <a:ea typeface="Arial" pitchFamily="34" charset="-122"/>
+                <a:cs typeface="Arial" pitchFamily="34" charset="-120"/>
+              </a:rPr>
+              <a:t>Продукт и услуги</a:t>
+            </a:r>
+            <a:endParaRPr lang="en-US" sz="900" dirty="0"/>
           </a:p>
           <a:p>
             <a:pPr indent="0" marL="0">
               <a:lnSpc>
                 <a:spcPct val="105000"/>
               </a:lnSpc>
-              <a:buNone/>
-            </a:pPr>
-            <a:r>
-              <a:rPr lang="en-US" sz="900" dirty="0">
+              <a:spcAft>
+                <a:spcPts val="500"/>
+              </a:spcAft>
+              <a:buNone/>
+            </a:pPr>
+            <a:r>
+              <a:rPr lang="en-US" sz="1000" dirty="0">
                 <a:solidFill>
                   <a:srgbClr val="59626B"/>
                 </a:solidFill>
-                <a:latin typeface="IBM Plex Sans" pitchFamily="34" charset="0"/>
-                <a:ea typeface="IBM Plex Sans" pitchFamily="34" charset="-122"/>
-                <a:cs typeface="IBM Plex Sans" pitchFamily="34" charset="-120"/>
-              </a:rPr>
-              <a:t>Документы и кадровый ЭДО</a:t>
-            </a:r>
-            <a:endParaRPr lang="en-US" sz="850" dirty="0"/>
-          </a:p>
-        </p:txBody>
-      </p:sp>
-      <p:sp>
-        <p:nvSpPr>
-          <p:cNvPr id="18" name="Shape 16"/>
-          <p:cNvSpPr/>
-          <p:nvPr/>
-        </p:nvSpPr>
-        <p:spPr>
-          <a:xfrm>
-            <a:off x="6739128" y="2606040"/>
-            <a:ext cx="1947672" cy="896112"/>
-          </a:xfrm>
-          <a:prstGeom prst="roundRect">
-            <a:avLst>
-              <a:gd name="adj" fmla="val 5102"/>
-            </a:avLst>
-          </a:prstGeom>
-          <a:solidFill>
-            <a:srgbClr val="FFFFFF"/>
-          </a:solidFill>
-          <a:ln w="9525">
-            <a:solidFill>
-              <a:srgbClr val="D7DCE1"/>
-            </a:solidFill>
-            <a:prstDash val="solid"/>
-          </a:ln>
-          <a:effectLst>
-            <a:outerShdw sx="100000" sy="100000" kx="0" ky="0" algn="bl" rotWithShape="0" blurRad="88900" dist="25400" dir="5400000">
-              <a:srgbClr val="1A2A3A">
-                <a:alpha val="10000"/>
-              </a:srgbClr>
-            </a:outerShdw>
-          </a:effectLst>
-        </p:spPr>
-      </p:sp>
-      <p:sp>
-        <p:nvSpPr>
-          <p:cNvPr id="19" name="Text 17"/>
-          <p:cNvSpPr/>
-          <p:nvPr/>
-        </p:nvSpPr>
-        <p:spPr>
-          <a:xfrm>
-            <a:off x="6757416" y="2606040"/>
-            <a:ext cx="1911096" cy="896112"/>
-          </a:xfrm>
-          <a:prstGeom prst="rect">
-            <a:avLst/>
-          </a:prstGeom>
-          <a:noFill/>
-          <a:ln/>
-        </p:spPr>
-        <p:txBody>
-          <a:bodyPr wrap="square" lIns="1397" tIns="1397" rIns="1397" bIns="1397" rtlCol="0" anchor="ctr"/>
-          <a:lstStyle/>
-          <a:p>
-            <a:pPr indent="0" marL="0">
-              <a:lnSpc>
-                <a:spcPct val="105000"/>
-              </a:lnSpc>
-              <a:buNone/>
-            </a:pPr>
-            <a:r>
-              <a:rPr lang="en-US" sz="850" dirty="0">
-                <a:solidFill>
-                  <a:srgbClr val="1D5C9A"/>
-                </a:solidFill>
-                <a:latin typeface="IBM Plex Mono" pitchFamily="34" charset="0"/>
-                <a:ea typeface="IBM Plex Mono" pitchFamily="34" charset="-122"/>
-                <a:cs typeface="IBM Plex Mono" pitchFamily="34" charset="-120"/>
-              </a:rPr>
-              <a:t>04</a:t>
-            </a:r>
-            <a:endParaRPr lang="en-US" sz="850" dirty="0"/>
-          </a:p>
-          <a:p>
-            <a:pPr indent="0" marL="0">
-              <a:lnSpc>
-                <a:spcPct val="105000"/>
-              </a:lnSpc>
-              <a:buNone/>
-            </a:pPr>
-            <a:r>
-              <a:rPr lang="en-US" sz="1150" b="1" dirty="0">
+                <a:latin typeface="Arial" pitchFamily="34" charset="0"/>
+                <a:ea typeface="Arial" pitchFamily="34" charset="-122"/>
+                <a:cs typeface="Arial" pitchFamily="34" charset="-120"/>
+              </a:rPr>
+              <a:t>Внедрение под ключ и готовый коробочный ЭДО Coordo.</a:t>
+            </a:r>
+            <a:endParaRPr lang="en-US" sz="900" dirty="0"/>
+          </a:p>
+        </p:txBody>
+      </p:sp>
+      <p:sp>
+        <p:nvSpPr>
+          <p:cNvPr id="18" name="Text 16"/>
+          <p:cNvSpPr/>
+          <p:nvPr/>
+        </p:nvSpPr>
+        <p:spPr>
+          <a:xfrm>
+            <a:off x="457200" y="4343400"/>
+            <a:ext cx="8229600" cy="274320"/>
+          </a:xfrm>
+          <a:prstGeom prst="rect">
+            <a:avLst/>
+          </a:prstGeom>
+          <a:noFill/>
+          <a:ln/>
+        </p:spPr>
+        <p:txBody>
+          <a:bodyPr wrap="square" lIns="0" tIns="0" rIns="0" bIns="0" rtlCol="0" anchor="ctr"/>
+          <a:lstStyle/>
+          <a:p>
+            <a:pPr indent="0" marL="0">
+              <a:buNone/>
+            </a:pPr>
+            <a:r>
+              <a:rPr lang="en-US" sz="1000" b="1" dirty="0">
                 <a:solidFill>
                   <a:srgbClr val="171B20"/>
                 </a:solidFill>
-                <a:latin typeface="IBM Plex Sans" pitchFamily="34" charset="0"/>
-                <a:ea typeface="IBM Plex Sans" pitchFamily="34" charset="-122"/>
-                <a:cs typeface="IBM Plex Sans" pitchFamily="34" charset="-120"/>
-              </a:rPr>
-              <a:t>ServiceDesk</a:t>
-            </a:r>
-            <a:endParaRPr lang="en-US" sz="850" dirty="0"/>
-          </a:p>
-          <a:p>
-            <a:pPr indent="0" marL="0">
-              <a:lnSpc>
-                <a:spcPct val="105000"/>
-              </a:lnSpc>
-              <a:buNone/>
-            </a:pPr>
-            <a:r>
-              <a:rPr lang="en-US" sz="900" dirty="0">
+                <a:latin typeface="Courier New" pitchFamily="34" charset="0"/>
+                <a:ea typeface="Courier New" pitchFamily="34" charset="-122"/>
+                <a:cs typeface="Courier New" pitchFamily="34" charset="-120"/>
+              </a:rPr>
+              <a:t>Россия и Казахстан</a:t>
+            </a:r>
+            <a:pPr indent="0" marL="0">
+              <a:buNone/>
+            </a:pPr>
+            <a:r>
+              <a:rPr lang="en-US" sz="1000" dirty="0">
+                <a:solidFill>
+                  <a:srgbClr val="D7DCE1"/>
+                </a:solidFill>
+                <a:latin typeface="Courier New" pitchFamily="34" charset="0"/>
+                <a:ea typeface="Courier New" pitchFamily="34" charset="-122"/>
+                <a:cs typeface="Courier New" pitchFamily="34" charset="-120"/>
+              </a:rPr>
+              <a:t>      ·      </a:t>
+            </a:r>
+            <a:pPr indent="0" marL="0">
+              <a:buNone/>
+            </a:pPr>
+            <a:r>
+              <a:rPr lang="en-US" sz="1000" dirty="0">
                 <a:solidFill>
                   <a:srgbClr val="59626B"/>
                 </a:solidFill>
-                <a:latin typeface="IBM Plex Sans" pitchFamily="34" charset="0"/>
-                <a:ea typeface="IBM Plex Sans" pitchFamily="34" charset="-122"/>
-                <a:cs typeface="IBM Plex Sans" pitchFamily="34" charset="-120"/>
-              </a:rPr>
-              <a:t>Заявки, SLA, база знаний</a:t>
-            </a:r>
-            <a:endParaRPr lang="en-US" sz="850" dirty="0"/>
-          </a:p>
-        </p:txBody>
-      </p:sp>
-      <p:sp>
-        <p:nvSpPr>
-          <p:cNvPr id="20" name="Shape 18"/>
-          <p:cNvSpPr/>
-          <p:nvPr/>
-        </p:nvSpPr>
-        <p:spPr>
-          <a:xfrm>
-            <a:off x="457200" y="3648456"/>
-            <a:ext cx="1947672" cy="896112"/>
-          </a:xfrm>
-          <a:prstGeom prst="roundRect">
-            <a:avLst>
-              <a:gd name="adj" fmla="val 5102"/>
-            </a:avLst>
-          </a:prstGeom>
-          <a:solidFill>
-            <a:srgbClr val="FFFFFF"/>
-          </a:solidFill>
-          <a:ln w="9525">
-            <a:solidFill>
-              <a:srgbClr val="D7DCE1"/>
-            </a:solidFill>
-            <a:prstDash val="solid"/>
-          </a:ln>
-          <a:effectLst>
-            <a:outerShdw sx="100000" sy="100000" kx="0" ky="0" algn="bl" rotWithShape="0" blurRad="88900" dist="25400" dir="5400000">
-              <a:srgbClr val="1A2A3A">
-                <a:alpha val="10000"/>
-              </a:srgbClr>
-            </a:outerShdw>
-          </a:effectLst>
-        </p:spPr>
-      </p:sp>
-      <p:sp>
-        <p:nvSpPr>
-          <p:cNvPr id="21" name="Text 19"/>
-          <p:cNvSpPr/>
-          <p:nvPr/>
-        </p:nvSpPr>
-        <p:spPr>
-          <a:xfrm>
-            <a:off x="475488" y="3648456"/>
-            <a:ext cx="1911096" cy="896112"/>
-          </a:xfrm>
-          <a:prstGeom prst="rect">
-            <a:avLst/>
-          </a:prstGeom>
-          <a:noFill/>
-          <a:ln/>
-        </p:spPr>
-        <p:txBody>
-          <a:bodyPr wrap="square" lIns="1397" tIns="1397" rIns="1397" bIns="1397" rtlCol="0" anchor="ctr"/>
-          <a:lstStyle/>
-          <a:p>
-            <a:pPr indent="0" marL="0">
-              <a:lnSpc>
-                <a:spcPct val="105000"/>
-              </a:lnSpc>
-              <a:buNone/>
-            </a:pPr>
-            <a:r>
-              <a:rPr lang="en-US" sz="850" dirty="0">
-                <a:solidFill>
-                  <a:srgbClr val="1D5C9A"/>
-                </a:solidFill>
-                <a:latin typeface="IBM Plex Mono" pitchFamily="34" charset="0"/>
-                <a:ea typeface="IBM Plex Mono" pitchFamily="34" charset="-122"/>
-                <a:cs typeface="IBM Plex Mono" pitchFamily="34" charset="-120"/>
-              </a:rPr>
-              <a:t>05</a:t>
-            </a:r>
-            <a:endParaRPr lang="en-US" sz="850" dirty="0"/>
-          </a:p>
-          <a:p>
-            <a:pPr indent="0" marL="0">
-              <a:lnSpc>
-                <a:spcPct val="105000"/>
-              </a:lnSpc>
-              <a:buNone/>
-            </a:pPr>
-            <a:r>
-              <a:rPr lang="en-US" sz="1150" b="1" dirty="0">
+                <a:latin typeface="Courier New" pitchFamily="34" charset="0"/>
+                <a:ea typeface="Courier New" pitchFamily="34" charset="-122"/>
+                <a:cs typeface="Courier New" pitchFamily="34" charset="-120"/>
+              </a:rPr>
+              <a:t>Руководитель — </a:t>
+            </a:r>
+            <a:pPr indent="0" marL="0">
+              <a:buNone/>
+            </a:pPr>
+            <a:r>
+              <a:rPr lang="en-US" sz="1000" b="1" dirty="0">
                 <a:solidFill>
                   <a:srgbClr val="171B20"/>
                 </a:solidFill>
-                <a:latin typeface="IBM Plex Sans" pitchFamily="34" charset="0"/>
-                <a:ea typeface="IBM Plex Sans" pitchFamily="34" charset="-122"/>
-                <a:cs typeface="IBM Plex Sans" pitchFamily="34" charset="-120"/>
-              </a:rPr>
-              <a:t>Закупки</a:t>
-            </a:r>
-            <a:endParaRPr lang="en-US" sz="850" dirty="0"/>
-          </a:p>
-          <a:p>
-            <a:pPr indent="0" marL="0">
-              <a:lnSpc>
-                <a:spcPct val="105000"/>
-              </a:lnSpc>
-              <a:buNone/>
-            </a:pPr>
-            <a:r>
-              <a:rPr lang="en-US" sz="900" dirty="0">
+                <a:latin typeface="Courier New" pitchFamily="34" charset="0"/>
+                <a:ea typeface="Courier New" pitchFamily="34" charset="-122"/>
+                <a:cs typeface="Courier New" pitchFamily="34" charset="-120"/>
+              </a:rPr>
+              <a:t>5 лет</a:t>
+            </a:r>
+            <a:pPr indent="0" marL="0">
+              <a:buNone/>
+            </a:pPr>
+            <a:r>
+              <a:rPr lang="en-US" sz="1000" dirty="0">
                 <a:solidFill>
                   <a:srgbClr val="59626B"/>
                 </a:solidFill>
-                <a:latin typeface="IBM Plex Sans" pitchFamily="34" charset="0"/>
-                <a:ea typeface="IBM Plex Sans" pitchFamily="34" charset="-122"/>
-                <a:cs typeface="IBM Plex Sans" pitchFamily="34" charset="-120"/>
-              </a:rPr>
-              <a:t>Заявки, поставщики, договоры</a:t>
-            </a:r>
-            <a:endParaRPr lang="en-US" sz="850" dirty="0"/>
-          </a:p>
-        </p:txBody>
-      </p:sp>
-      <p:sp>
-        <p:nvSpPr>
-          <p:cNvPr id="22" name="Shape 20"/>
-          <p:cNvSpPr/>
-          <p:nvPr/>
-        </p:nvSpPr>
-        <p:spPr>
-          <a:xfrm>
-            <a:off x="2551176" y="3648456"/>
-            <a:ext cx="1947672" cy="896112"/>
-          </a:xfrm>
-          <a:prstGeom prst="roundRect">
-            <a:avLst>
-              <a:gd name="adj" fmla="val 5102"/>
-            </a:avLst>
-          </a:prstGeom>
-          <a:solidFill>
-            <a:srgbClr val="FFFFFF"/>
-          </a:solidFill>
-          <a:ln w="9525">
-            <a:solidFill>
-              <a:srgbClr val="D7DCE1"/>
-            </a:solidFill>
-            <a:prstDash val="solid"/>
-          </a:ln>
-          <a:effectLst>
-            <a:outerShdw sx="100000" sy="100000" kx="0" ky="0" algn="bl" rotWithShape="0" blurRad="88900" dist="25400" dir="5400000">
-              <a:srgbClr val="1A2A3A">
-                <a:alpha val="10000"/>
-              </a:srgbClr>
-            </a:outerShdw>
-          </a:effectLst>
-        </p:spPr>
-      </p:sp>
-      <p:sp>
-        <p:nvSpPr>
-          <p:cNvPr id="23" name="Text 21"/>
-          <p:cNvSpPr/>
-          <p:nvPr/>
-        </p:nvSpPr>
-        <p:spPr>
-          <a:xfrm>
-            <a:off x="2569464" y="3648456"/>
-            <a:ext cx="1911096" cy="896112"/>
-          </a:xfrm>
-          <a:prstGeom prst="rect">
-            <a:avLst/>
-          </a:prstGeom>
-          <a:noFill/>
-          <a:ln/>
-        </p:spPr>
-        <p:txBody>
-          <a:bodyPr wrap="square" lIns="1397" tIns="1397" rIns="1397" bIns="1397" rtlCol="0" anchor="ctr"/>
-          <a:lstStyle/>
-          <a:p>
-            <a:pPr indent="0" marL="0">
-              <a:lnSpc>
-                <a:spcPct val="105000"/>
-              </a:lnSpc>
-              <a:buNone/>
-            </a:pPr>
-            <a:r>
-              <a:rPr lang="en-US" sz="850" dirty="0">
-                <a:solidFill>
-                  <a:srgbClr val="1D5C9A"/>
-                </a:solidFill>
-                <a:latin typeface="IBM Plex Mono" pitchFamily="34" charset="0"/>
-                <a:ea typeface="IBM Plex Mono" pitchFamily="34" charset="-122"/>
-                <a:cs typeface="IBM Plex Mono" pitchFamily="34" charset="-120"/>
-              </a:rPr>
-              <a:t>06</a:t>
-            </a:r>
-            <a:endParaRPr lang="en-US" sz="850" dirty="0"/>
-          </a:p>
-          <a:p>
-            <a:pPr indent="0" marL="0">
-              <a:lnSpc>
-                <a:spcPct val="105000"/>
-              </a:lnSpc>
-              <a:buNone/>
-            </a:pPr>
-            <a:r>
-              <a:rPr lang="en-US" sz="1150" b="1" dirty="0">
-                <a:solidFill>
-                  <a:srgbClr val="171B20"/>
-                </a:solidFill>
-                <a:latin typeface="IBM Plex Sans" pitchFamily="34" charset="0"/>
-                <a:ea typeface="IBM Plex Sans" pitchFamily="34" charset="-122"/>
-                <a:cs typeface="IBM Plex Sans" pitchFamily="34" charset="-120"/>
-              </a:rPr>
-              <a:t>Проекты</a:t>
-            </a:r>
-            <a:endParaRPr lang="en-US" sz="850" dirty="0"/>
-          </a:p>
-          <a:p>
-            <a:pPr indent="0" marL="0">
-              <a:lnSpc>
-                <a:spcPct val="105000"/>
-              </a:lnSpc>
-              <a:buNone/>
-            </a:pPr>
-            <a:r>
-              <a:rPr lang="en-US" sz="900" dirty="0">
+                <a:latin typeface="Courier New" pitchFamily="34" charset="0"/>
+                <a:ea typeface="Courier New" pitchFamily="34" charset="-122"/>
+                <a:cs typeface="Courier New" pitchFamily="34" charset="-120"/>
+              </a:rPr>
+              <a:t> в ELMA365</a:t>
+            </a:r>
+            <a:pPr indent="0" marL="0">
+              <a:buNone/>
+            </a:pPr>
+            <a:r>
+              <a:rPr lang="en-US" sz="1000" dirty="0">
+                <a:solidFill>
+                  <a:srgbClr val="D7DCE1"/>
+                </a:solidFill>
+                <a:latin typeface="Courier New" pitchFamily="34" charset="0"/>
+                <a:ea typeface="Courier New" pitchFamily="34" charset="-122"/>
+                <a:cs typeface="Courier New" pitchFamily="34" charset="-120"/>
+              </a:rPr>
+              <a:t>      ·      </a:t>
+            </a:r>
+            <a:pPr indent="0" marL="0">
+              <a:buNone/>
+            </a:pPr>
+            <a:r>
+              <a:rPr lang="en-US" sz="1000" dirty="0">
                 <a:solidFill>
                   <a:srgbClr val="59626B"/>
                 </a:solidFill>
-                <a:latin typeface="IBM Plex Sans" pitchFamily="34" charset="0"/>
-                <a:ea typeface="IBM Plex Sans" pitchFamily="34" charset="-122"/>
-                <a:cs typeface="IBM Plex Sans" pitchFamily="34" charset="-120"/>
-              </a:rPr>
-              <a:t>Задачи, сроки, ресурсы</a:t>
-            </a:r>
-            <a:endParaRPr lang="en-US" sz="850" dirty="0"/>
-          </a:p>
-        </p:txBody>
-      </p:sp>
-      <p:sp>
-        <p:nvSpPr>
-          <p:cNvPr id="24" name="Shape 22"/>
-          <p:cNvSpPr/>
-          <p:nvPr/>
-        </p:nvSpPr>
-        <p:spPr>
-          <a:xfrm>
-            <a:off x="4645152" y="3648456"/>
-            <a:ext cx="1947672" cy="896112"/>
-          </a:xfrm>
-          <a:prstGeom prst="roundRect">
-            <a:avLst>
-              <a:gd name="adj" fmla="val 5102"/>
-            </a:avLst>
-          </a:prstGeom>
-          <a:solidFill>
-            <a:srgbClr val="FFFFFF"/>
-          </a:solidFill>
-          <a:ln w="9525">
-            <a:solidFill>
-              <a:srgbClr val="D7DCE1"/>
-            </a:solidFill>
-            <a:prstDash val="solid"/>
-          </a:ln>
-          <a:effectLst>
-            <a:outerShdw sx="100000" sy="100000" kx="0" ky="0" algn="bl" rotWithShape="0" blurRad="88900" dist="25400" dir="5400000">
-              <a:srgbClr val="1A2A3A">
-                <a:alpha val="10000"/>
-              </a:srgbClr>
-            </a:outerShdw>
-          </a:effectLst>
-        </p:spPr>
-      </p:sp>
-      <p:sp>
-        <p:nvSpPr>
-          <p:cNvPr id="25" name="Text 23"/>
-          <p:cNvSpPr/>
-          <p:nvPr/>
-        </p:nvSpPr>
-        <p:spPr>
-          <a:xfrm>
-            <a:off x="4663440" y="3648456"/>
-            <a:ext cx="1911096" cy="896112"/>
-          </a:xfrm>
-          <a:prstGeom prst="rect">
-            <a:avLst/>
-          </a:prstGeom>
-          <a:noFill/>
-          <a:ln/>
-        </p:spPr>
-        <p:txBody>
-          <a:bodyPr wrap="square" lIns="1397" tIns="1397" rIns="1397" bIns="1397" rtlCol="0" anchor="ctr"/>
-          <a:lstStyle/>
-          <a:p>
-            <a:pPr indent="0" marL="0">
-              <a:lnSpc>
-                <a:spcPct val="105000"/>
-              </a:lnSpc>
-              <a:buNone/>
-            </a:pPr>
-            <a:r>
-              <a:rPr lang="en-US" sz="850" dirty="0">
-                <a:solidFill>
-                  <a:srgbClr val="1D5C9A"/>
-                </a:solidFill>
-                <a:latin typeface="IBM Plex Mono" pitchFamily="34" charset="0"/>
-                <a:ea typeface="IBM Plex Mono" pitchFamily="34" charset="-122"/>
-                <a:cs typeface="IBM Plex Mono" pitchFamily="34" charset="-120"/>
-              </a:rPr>
-              <a:t>07</a:t>
-            </a:r>
-            <a:endParaRPr lang="en-US" sz="850" dirty="0"/>
-          </a:p>
-          <a:p>
-            <a:pPr indent="0" marL="0">
-              <a:lnSpc>
-                <a:spcPct val="105000"/>
-              </a:lnSpc>
-              <a:buNone/>
-            </a:pPr>
-            <a:r>
-              <a:rPr lang="en-US" sz="1150" b="1" dirty="0">
-                <a:solidFill>
-                  <a:srgbClr val="171B20"/>
-                </a:solidFill>
-                <a:latin typeface="IBM Plex Sans" pitchFamily="34" charset="0"/>
-                <a:ea typeface="IBM Plex Sans" pitchFamily="34" charset="-122"/>
-                <a:cs typeface="IBM Plex Sans" pitchFamily="34" charset="-120"/>
-              </a:rPr>
-              <a:t>Корпортал</a:t>
-            </a:r>
-            <a:endParaRPr lang="en-US" sz="850" dirty="0"/>
-          </a:p>
-          <a:p>
-            <a:pPr indent="0" marL="0">
-              <a:lnSpc>
-                <a:spcPct val="105000"/>
-              </a:lnSpc>
-              <a:buNone/>
-            </a:pPr>
-            <a:r>
-              <a:rPr lang="en-US" sz="900" dirty="0">
-                <a:solidFill>
-                  <a:srgbClr val="59626B"/>
-                </a:solidFill>
-                <a:latin typeface="IBM Plex Sans" pitchFamily="34" charset="0"/>
-                <a:ea typeface="IBM Plex Sans" pitchFamily="34" charset="-122"/>
-                <a:cs typeface="IBM Plex Sans" pitchFamily="34" charset="-120"/>
-              </a:rPr>
-              <a:t>Портал, чат-боты, сервисы</a:t>
-            </a:r>
-            <a:endParaRPr lang="en-US" sz="850" dirty="0"/>
-          </a:p>
-        </p:txBody>
-      </p:sp>
-      <p:sp>
-        <p:nvSpPr>
-          <p:cNvPr id="26" name="Shape 24"/>
-          <p:cNvSpPr/>
-          <p:nvPr/>
-        </p:nvSpPr>
-        <p:spPr>
-          <a:xfrm>
-            <a:off x="6739128" y="3648456"/>
-            <a:ext cx="1947672" cy="896112"/>
-          </a:xfrm>
-          <a:prstGeom prst="roundRect">
-            <a:avLst>
-              <a:gd name="adj" fmla="val 5102"/>
-            </a:avLst>
-          </a:prstGeom>
-          <a:solidFill>
-            <a:srgbClr val="FFFFFF"/>
-          </a:solidFill>
-          <a:ln w="9525">
-            <a:solidFill>
-              <a:srgbClr val="D7DCE1"/>
-            </a:solidFill>
-            <a:prstDash val="solid"/>
-          </a:ln>
-          <a:effectLst>
-            <a:outerShdw sx="100000" sy="100000" kx="0" ky="0" algn="bl" rotWithShape="0" blurRad="88900" dist="25400" dir="5400000">
-              <a:srgbClr val="1A2A3A">
-                <a:alpha val="10000"/>
-              </a:srgbClr>
-            </a:outerShdw>
-          </a:effectLst>
-        </p:spPr>
-      </p:sp>
-      <p:sp>
-        <p:nvSpPr>
-          <p:cNvPr id="27" name="Text 25"/>
-          <p:cNvSpPr/>
-          <p:nvPr/>
-        </p:nvSpPr>
-        <p:spPr>
-          <a:xfrm>
-            <a:off x="6757416" y="3648456"/>
-            <a:ext cx="1911096" cy="896112"/>
-          </a:xfrm>
-          <a:prstGeom prst="rect">
-            <a:avLst/>
-          </a:prstGeom>
-          <a:noFill/>
-          <a:ln/>
-        </p:spPr>
-        <p:txBody>
-          <a:bodyPr wrap="square" lIns="1397" tIns="1397" rIns="1397" bIns="1397" rtlCol="0" anchor="ctr"/>
-          <a:lstStyle/>
-          <a:p>
-            <a:pPr indent="0" marL="0">
-              <a:lnSpc>
-                <a:spcPct val="105000"/>
-              </a:lnSpc>
-              <a:buNone/>
-            </a:pPr>
-            <a:r>
-              <a:rPr lang="en-US" sz="850" dirty="0">
-                <a:solidFill>
-                  <a:srgbClr val="1D5C9A"/>
-                </a:solidFill>
-                <a:latin typeface="IBM Plex Mono" pitchFamily="34" charset="0"/>
-                <a:ea typeface="IBM Plex Mono" pitchFamily="34" charset="-122"/>
-                <a:cs typeface="IBM Plex Mono" pitchFamily="34" charset="-120"/>
-              </a:rPr>
-              <a:t>+</a:t>
-            </a:r>
-            <a:endParaRPr lang="en-US" sz="850" dirty="0"/>
-          </a:p>
-          <a:p>
-            <a:pPr indent="0" marL="0">
-              <a:lnSpc>
-                <a:spcPct val="105000"/>
-              </a:lnSpc>
-              <a:buNone/>
-            </a:pPr>
-            <a:r>
-              <a:rPr lang="en-US" sz="1150" b="1" dirty="0">
-                <a:solidFill>
-                  <a:srgbClr val="171B20"/>
-                </a:solidFill>
-                <a:latin typeface="IBM Plex Sans" pitchFamily="34" charset="0"/>
-                <a:ea typeface="IBM Plex Sans" pitchFamily="34" charset="-122"/>
-                <a:cs typeface="IBM Plex Sans" pitchFamily="34" charset="-120"/>
-              </a:rPr>
-              <a:t>Настройка без кода</a:t>
-            </a:r>
-            <a:endParaRPr lang="en-US" sz="850" dirty="0"/>
-          </a:p>
-          <a:p>
-            <a:pPr indent="0" marL="0">
-              <a:lnSpc>
-                <a:spcPct val="105000"/>
-              </a:lnSpc>
-              <a:buNone/>
-            </a:pPr>
-            <a:r>
-              <a:rPr lang="en-US" sz="900" dirty="0">
-                <a:solidFill>
-                  <a:srgbClr val="59626B"/>
-                </a:solidFill>
-                <a:latin typeface="IBM Plex Sans" pitchFamily="34" charset="0"/>
-                <a:ea typeface="IBM Plex Sans" pitchFamily="34" charset="-122"/>
-                <a:cs typeface="IBM Plex Sans" pitchFamily="34" charset="-120"/>
-              </a:rPr>
-              <a:t>Облако или on-premise</a:t>
-            </a:r>
-            <a:endParaRPr lang="en-US" sz="850" dirty="0"/>
+                <a:latin typeface="Courier New" pitchFamily="34" charset="0"/>
+                <a:ea typeface="Courier New" pitchFamily="34" charset="-122"/>
+                <a:cs typeface="Courier New" pitchFamily="34" charset="-120"/>
+              </a:rPr>
+              <a:t>Внедрение + продукт</a:t>
+            </a:r>
+            <a:endParaRPr lang="en-US" sz="1000" dirty="0"/>
           </a:p>
         </p:txBody>
       </p:sp>
@@ -3344,9 +3115,9 @@
                 <a:solidFill>
                   <a:srgbClr val="1D5C9A"/>
                 </a:solidFill>
-                <a:latin typeface="IBM Plex Sans" pitchFamily="34" charset="0"/>
-                <a:ea typeface="IBM Plex Sans" pitchFamily="34" charset="-122"/>
-                <a:cs typeface="IBM Plex Sans" pitchFamily="34" charset="-120"/>
+                <a:latin typeface="Arial" pitchFamily="34" charset="0"/>
+                <a:ea typeface="Arial" pitchFamily="34" charset="-122"/>
+                <a:cs typeface="Arial" pitchFamily="34" charset="-120"/>
               </a:rPr>
               <a:t>WD</a:t>
             </a:r>
@@ -3383,9 +3154,9 @@
                 <a:solidFill>
                   <a:srgbClr val="171B20"/>
                 </a:solidFill>
-                <a:latin typeface="IBM Plex Sans" pitchFamily="34" charset="0"/>
-                <a:ea typeface="IBM Plex Sans" pitchFamily="34" charset="-122"/>
-                <a:cs typeface="IBM Plex Sans" pitchFamily="34" charset="-120"/>
+                <a:latin typeface="Arial" pitchFamily="34" charset="0"/>
+                <a:ea typeface="Arial" pitchFamily="34" charset="-122"/>
+                <a:cs typeface="Arial" pitchFamily="34" charset="-120"/>
               </a:rPr>
               <a:t>WhatDaDev</a:t>
             </a:r>
@@ -3422,11 +3193,11 @@
                 <a:solidFill>
                   <a:srgbClr val="59626B"/>
                 </a:solidFill>
-                <a:latin typeface="IBM Plex Mono" pitchFamily="34" charset="0"/>
-                <a:ea typeface="IBM Plex Mono" pitchFamily="34" charset="-122"/>
-                <a:cs typeface="IBM Plex Mono" pitchFamily="34" charset="-120"/>
-              </a:rPr>
-              <a:t>Продукт · Экспресс внедрение</a:t>
+                <a:latin typeface="Courier New" pitchFamily="34" charset="0"/>
+                <a:ea typeface="Courier New" pitchFamily="34" charset="-122"/>
+                <a:cs typeface="Courier New" pitchFamily="34" charset="-120"/>
+              </a:rPr>
+              <a:t>Платформа</a:t>
             </a:r>
             <a:endParaRPr lang="en-US" sz="900" dirty="0"/>
           </a:p>
@@ -3461,9 +3232,9 @@
                 <a:solidFill>
                   <a:srgbClr val="59626B"/>
                 </a:solidFill>
-                <a:latin typeface="IBM Plex Mono" pitchFamily="34" charset="0"/>
-                <a:ea typeface="IBM Plex Mono" pitchFamily="34" charset="-122"/>
-                <a:cs typeface="IBM Plex Mono" pitchFamily="34" charset="-120"/>
+                <a:latin typeface="Courier New" pitchFamily="34" charset="0"/>
+                <a:ea typeface="Courier New" pitchFamily="34" charset="-122"/>
+                <a:cs typeface="Courier New" pitchFamily="34" charset="-120"/>
               </a:rPr>
               <a:t>whatdadev.ru</a:t>
             </a:r>
@@ -3500,11 +3271,11 @@
                 <a:solidFill>
                   <a:srgbClr val="59626B"/>
                 </a:solidFill>
-                <a:latin typeface="IBM Plex Mono" pitchFamily="34" charset="0"/>
-                <a:ea typeface="IBM Plex Mono" pitchFamily="34" charset="-122"/>
-                <a:cs typeface="IBM Plex Mono" pitchFamily="34" charset="-120"/>
-              </a:rPr>
-              <a:t>03 / 05</a:t>
+                <a:latin typeface="Courier New" pitchFamily="34" charset="0"/>
+                <a:ea typeface="Courier New" pitchFamily="34" charset="-122"/>
+                <a:cs typeface="Courier New" pitchFamily="34" charset="-120"/>
+              </a:rPr>
+              <a:t>03 / 07</a:t>
             </a:r>
             <a:endParaRPr lang="en-US" sz="850" dirty="0"/>
           </a:p>
@@ -3518,14 +3289,14 @@
         </p:nvSpPr>
         <p:spPr>
           <a:xfrm>
-            <a:off x="457200" y="937260"/>
+            <a:off x="457200" y="914400"/>
             <a:ext cx="100584" cy="100584"/>
           </a:xfrm>
           <a:prstGeom prst="rect">
             <a:avLst/>
           </a:prstGeom>
           <a:solidFill>
-            <a:srgbClr val="1D5C9A"/>
+            <a:srgbClr val="B25A1E"/>
           </a:solidFill>
           <a:ln/>
         </p:spPr>
@@ -3538,8 +3309,8 @@
         </p:nvSpPr>
         <p:spPr>
           <a:xfrm>
-            <a:off x="658368" y="896112"/>
-            <a:ext cx="7315200" cy="219456"/>
+            <a:off x="658368" y="850392"/>
+            <a:ext cx="7772400" cy="237744"/>
           </a:xfrm>
           <a:prstGeom prst="rect">
             <a:avLst/>
@@ -3557,13 +3328,13 @@
             <a:r>
               <a:rPr lang="en-US" sz="1050" spc="200" kern="0" dirty="0">
                 <a:solidFill>
-                  <a:srgbClr val="1D5C9A"/>
-                </a:solidFill>
-                <a:latin typeface="IBM Plex Mono" pitchFamily="34" charset="0"/>
-                <a:ea typeface="IBM Plex Mono" pitchFamily="34" charset="-122"/>
-                <a:cs typeface="IBM Plex Mono" pitchFamily="34" charset="-120"/>
-              </a:rPr>
-              <a:t>НАШ ПРОДУКТ</a:t>
+                  <a:srgbClr val="B25A1E"/>
+                </a:solidFill>
+                <a:latin typeface="Courier New" pitchFamily="34" charset="0"/>
+                <a:ea typeface="Courier New" pitchFamily="34" charset="-122"/>
+                <a:cs typeface="Courier New" pitchFamily="34" charset="-120"/>
+              </a:rPr>
+              <a:t>ПЛАТФОРМА, КОТОРОЙ ДОВЕРЯЮТ</a:t>
             </a:r>
             <a:endParaRPr lang="en-US" sz="1050" dirty="0"/>
           </a:p>
@@ -3577,8 +3348,8 @@
         </p:nvSpPr>
         <p:spPr>
           <a:xfrm>
-            <a:off x="457200" y="1188720"/>
-            <a:ext cx="8229600" cy="566928"/>
+            <a:off x="457200" y="1170432"/>
+            <a:ext cx="8229600" cy="685800"/>
           </a:xfrm>
           <a:prstGeom prst="rect">
             <a:avLst/>
@@ -3591,20 +3362,23 @@
           <a:lstStyle/>
           <a:p>
             <a:pPr indent="0" marL="0">
-              <a:buNone/>
-            </a:pPr>
-            <a:r>
-              <a:rPr lang="en-US" sz="2500" b="1" dirty="0">
+              <a:lnSpc>
+                <a:spcPts val="2415"/>
+              </a:lnSpc>
+              <a:buNone/>
+            </a:pPr>
+            <a:r>
+              <a:rPr lang="en-US" sz="2300" b="1" dirty="0">
                 <a:solidFill>
                   <a:srgbClr val="171B20"/>
                 </a:solidFill>
-                <a:latin typeface="IBM Plex Sans" pitchFamily="34" charset="0"/>
-                <a:ea typeface="IBM Plex Sans" pitchFamily="34" charset="-122"/>
-                <a:cs typeface="IBM Plex Sans" pitchFamily="34" charset="-120"/>
-              </a:rPr>
-              <a:t>Coordo — готовый ЭДО из коробки</a:t>
-            </a:r>
-            <a:endParaRPr lang="en-US" sz="2500" dirty="0"/>
+                <a:latin typeface="Arial" pitchFamily="34" charset="0"/>
+                <a:ea typeface="Arial" pitchFamily="34" charset="-122"/>
+                <a:cs typeface="Arial" pitchFamily="34" charset="-120"/>
+              </a:rPr>
+              <a:t>Внедряем ELMA365 — №1 BPM-платформа в СНГ</a:t>
+            </a:r>
+            <a:endParaRPr lang="en-US" sz="2300" dirty="0"/>
           </a:p>
         </p:txBody>
       </p:sp>
@@ -3616,54 +3390,136 @@
         </p:nvSpPr>
         <p:spPr>
           <a:xfrm>
-            <a:off x="457200" y="1783080"/>
-            <a:ext cx="7498080" cy="685800"/>
-          </a:xfrm>
-          <a:prstGeom prst="rect">
-            <a:avLst/>
-          </a:prstGeom>
-          <a:noFill/>
-          <a:ln/>
-        </p:spPr>
-        <p:txBody>
-          <a:bodyPr wrap="square" lIns="0" tIns="0" rIns="0" bIns="0" rtlCol="0" anchor="t"/>
+            <a:off x="420624" y="1965960"/>
+            <a:ext cx="4206240" cy="1051560"/>
+          </a:xfrm>
+          <a:prstGeom prst="rect">
+            <a:avLst/>
+          </a:prstGeom>
+          <a:noFill/>
+          <a:ln/>
+        </p:spPr>
+        <p:txBody>
+          <a:bodyPr wrap="square" lIns="0" tIns="0" rIns="0" bIns="0" rtlCol="0" anchor="ctr"/>
+          <a:lstStyle/>
+          <a:p>
+            <a:pPr indent="0" marL="0">
+              <a:buNone/>
+            </a:pPr>
+            <a:r>
+              <a:rPr lang="en-US" sz="7200" b="1" dirty="0">
+                <a:solidFill>
+                  <a:srgbClr val="134C7A"/>
+                </a:solidFill>
+                <a:latin typeface="Arial" pitchFamily="34" charset="0"/>
+                <a:ea typeface="Arial" pitchFamily="34" charset="-122"/>
+                <a:cs typeface="Arial" pitchFamily="34" charset="-120"/>
+              </a:rPr>
+              <a:t>4000+</a:t>
+            </a:r>
+            <a:endParaRPr lang="en-US" sz="7200" dirty="0"/>
+          </a:p>
+        </p:txBody>
+      </p:sp>
+      <p:sp>
+        <p:nvSpPr>
+          <p:cNvPr id="12" name="Shape 10"/>
+          <p:cNvSpPr/>
+          <p:nvPr/>
+        </p:nvSpPr>
+        <p:spPr>
+          <a:xfrm>
+            <a:off x="502920" y="2999232"/>
+            <a:ext cx="1737360" cy="64008"/>
+          </a:xfrm>
+          <a:prstGeom prst="rect">
+            <a:avLst/>
+          </a:prstGeom>
+          <a:solidFill>
+            <a:srgbClr val="B25A1E"/>
+          </a:solidFill>
+          <a:ln/>
+        </p:spPr>
+      </p:sp>
+      <p:sp>
+        <p:nvSpPr>
+          <p:cNvPr id="13" name="Text 11"/>
+          <p:cNvSpPr/>
+          <p:nvPr/>
+        </p:nvSpPr>
+        <p:spPr>
+          <a:xfrm>
+            <a:off x="4617720" y="2011680"/>
+            <a:ext cx="4023360" cy="1005840"/>
+          </a:xfrm>
+          <a:prstGeom prst="rect">
+            <a:avLst/>
+          </a:prstGeom>
+          <a:noFill/>
+          <a:ln/>
+        </p:spPr>
+        <p:txBody>
+          <a:bodyPr wrap="square" lIns="0" tIns="0" rIns="0" bIns="0" rtlCol="0" anchor="ctr"/>
           <a:lstStyle/>
           <a:p>
             <a:pPr indent="0" marL="0">
               <a:lnSpc>
-                <a:spcPct val="112000"/>
+                <a:spcPct val="110000"/>
               </a:lnSpc>
-              <a:buNone/>
-            </a:pPr>
-            <a:r>
-              <a:rPr lang="en-US" sz="1300" dirty="0">
+              <a:spcAft>
+                <a:spcPts val="400"/>
+              </a:spcAft>
+              <a:buNone/>
+            </a:pPr>
+            <a:r>
+              <a:rPr lang="en-US" sz="1600" b="1" dirty="0">
+                <a:solidFill>
+                  <a:srgbClr val="171B20"/>
+                </a:solidFill>
+                <a:latin typeface="Arial" pitchFamily="34" charset="0"/>
+                <a:ea typeface="Arial" pitchFamily="34" charset="-122"/>
+                <a:cs typeface="Arial" pitchFamily="34" charset="-120"/>
+              </a:rPr>
+              <a:t>компаний уже работают на ELMA365</a:t>
+            </a:r>
+            <a:endParaRPr lang="en-US" sz="1600" dirty="0"/>
+          </a:p>
+          <a:p>
+            <a:pPr indent="0" marL="0">
+              <a:lnSpc>
+                <a:spcPct val="110000"/>
+              </a:lnSpc>
+              <a:buNone/>
+            </a:pPr>
+            <a:r>
+              <a:rPr lang="en-US" sz="1200" dirty="0">
                 <a:solidFill>
                   <a:srgbClr val="59626B"/>
                 </a:solidFill>
-                <a:latin typeface="IBM Plex Sans" pitchFamily="34" charset="0"/>
-                <a:ea typeface="IBM Plex Sans" pitchFamily="34" charset="-122"/>
-                <a:cs typeface="IBM Plex Sans" pitchFamily="34" charset="-120"/>
-              </a:rPr>
-              <a:t>Упакованная экспертиза наших внедрений: документооборот на ELMA365, который запускается за недели, а не месяцы.</a:t>
-            </a:r>
-            <a:endParaRPr lang="en-US" sz="1300" dirty="0"/>
-          </a:p>
-        </p:txBody>
-      </p:sp>
-      <p:sp>
-        <p:nvSpPr>
-          <p:cNvPr id="12" name="Shape 10"/>
-          <p:cNvSpPr/>
-          <p:nvPr/>
-        </p:nvSpPr>
-        <p:spPr>
-          <a:xfrm>
-            <a:off x="457200" y="2514600"/>
-            <a:ext cx="2621280" cy="1417320"/>
+                <a:latin typeface="Arial" pitchFamily="34" charset="0"/>
+                <a:ea typeface="Arial" pitchFamily="34" charset="-122"/>
+                <a:cs typeface="Arial" pitchFamily="34" charset="-120"/>
+              </a:rPr>
+              <a:t>Мы внедряем платформу, которой доверяет рынок, — не эксперимент.</a:t>
+            </a:r>
+            <a:endParaRPr lang="en-US" sz="1600" dirty="0"/>
+          </a:p>
+        </p:txBody>
+      </p:sp>
+      <p:sp>
+        <p:nvSpPr>
+          <p:cNvPr id="14" name="Shape 12"/>
+          <p:cNvSpPr/>
+          <p:nvPr/>
+        </p:nvSpPr>
+        <p:spPr>
+          <a:xfrm>
+            <a:off x="457200" y="3337560"/>
+            <a:ext cx="8229600" cy="841248"/>
           </a:xfrm>
           <a:prstGeom prst="roundRect">
             <a:avLst>
-              <a:gd name="adj" fmla="val 3226"/>
+              <a:gd name="adj" fmla="val 5435"/>
             </a:avLst>
           </a:prstGeom>
           <a:solidFill>
@@ -3686,203 +3542,346 @@
       </p:sp>
       <p:sp>
         <p:nvSpPr>
-          <p:cNvPr id="13" name="Text 11"/>
-          <p:cNvSpPr/>
-          <p:nvPr/>
-        </p:nvSpPr>
-        <p:spPr>
-          <a:xfrm>
-            <a:off x="475488" y="2514600"/>
-            <a:ext cx="2584704" cy="1417320"/>
-          </a:xfrm>
-          <a:prstGeom prst="rect">
-            <a:avLst/>
-          </a:prstGeom>
-          <a:noFill/>
-          <a:ln/>
-        </p:spPr>
-        <p:txBody>
-          <a:bodyPr wrap="square" lIns="2032" tIns="2032" rIns="2032" bIns="2032" rtlCol="0" anchor="t"/>
+          <p:cNvPr id="15" name="Text 13"/>
+          <p:cNvSpPr/>
+          <p:nvPr/>
+        </p:nvSpPr>
+        <p:spPr>
+          <a:xfrm>
+            <a:off x="594360" y="3337560"/>
+            <a:ext cx="1783080" cy="841248"/>
+          </a:xfrm>
+          <a:prstGeom prst="rect">
+            <a:avLst/>
+          </a:prstGeom>
+          <a:noFill/>
+          <a:ln/>
+        </p:spPr>
+        <p:txBody>
+          <a:bodyPr wrap="square" lIns="0" tIns="0" rIns="0" bIns="0" rtlCol="0" anchor="ctr"/>
           <a:lstStyle/>
           <a:p>
             <a:pPr indent="0" marL="0">
               <a:lnSpc>
-                <a:spcPct val="106000"/>
+                <a:spcPct val="110000"/>
               </a:lnSpc>
               <a:spcAft>
-                <a:spcPts val="400"/>
+                <a:spcPts val="300"/>
               </a:spcAft>
               <a:buNone/>
             </a:pPr>
             <a:r>
-              <a:rPr lang="en-US" sz="900" dirty="0">
+              <a:rPr lang="en-US" sz="2000" b="1" dirty="0">
                 <a:solidFill>
                   <a:srgbClr val="1D5C9A"/>
                 </a:solidFill>
-                <a:latin typeface="IBM Plex Mono" pitchFamily="34" charset="0"/>
-                <a:ea typeface="IBM Plex Mono" pitchFamily="34" charset="-122"/>
-                <a:cs typeface="IBM Plex Mono" pitchFamily="34" charset="-120"/>
-              </a:rPr>
-              <a:t>Контур 01</a:t>
-            </a:r>
-            <a:endParaRPr lang="en-US" sz="900" dirty="0"/>
+                <a:latin typeface="Arial" pitchFamily="34" charset="0"/>
+                <a:ea typeface="Arial" pitchFamily="34" charset="-122"/>
+                <a:cs typeface="Arial" pitchFamily="34" charset="-120"/>
+              </a:rPr>
+              <a:t>№1</a:t>
+            </a:r>
+            <a:endParaRPr lang="en-US" sz="2000" dirty="0"/>
           </a:p>
           <a:p>
             <a:pPr indent="0" marL="0">
               <a:lnSpc>
-                <a:spcPct val="106000"/>
+                <a:spcPct val="110000"/>
+              </a:lnSpc>
+              <a:buNone/>
+            </a:pPr>
+            <a:r>
+              <a:rPr lang="en-US" sz="850" dirty="0">
+                <a:solidFill>
+                  <a:srgbClr val="59626B"/>
+                </a:solidFill>
+                <a:latin typeface="Courier New" pitchFamily="34" charset="0"/>
+                <a:ea typeface="Courier New" pitchFamily="34" charset="-122"/>
+                <a:cs typeface="Courier New" pitchFamily="34" charset="-120"/>
+              </a:rPr>
+              <a:t>BPM в СНГ · TAdviser</a:t>
+            </a:r>
+            <a:endParaRPr lang="en-US" sz="2000" dirty="0"/>
+          </a:p>
+        </p:txBody>
+      </p:sp>
+      <p:sp>
+        <p:nvSpPr>
+          <p:cNvPr id="16" name="Shape 14"/>
+          <p:cNvSpPr/>
+          <p:nvPr/>
+        </p:nvSpPr>
+        <p:spPr>
+          <a:xfrm>
+            <a:off x="2514600" y="3447288"/>
+            <a:ext cx="7315" cy="621792"/>
+          </a:xfrm>
+          <a:prstGeom prst="rect">
+            <a:avLst/>
+          </a:prstGeom>
+          <a:solidFill>
+            <a:srgbClr val="D7DCE1"/>
+          </a:solidFill>
+          <a:ln/>
+        </p:spPr>
+      </p:sp>
+      <p:sp>
+        <p:nvSpPr>
+          <p:cNvPr id="17" name="Text 15"/>
+          <p:cNvSpPr/>
+          <p:nvPr/>
+        </p:nvSpPr>
+        <p:spPr>
+          <a:xfrm>
+            <a:off x="2651760" y="3337560"/>
+            <a:ext cx="1783080" cy="841248"/>
+          </a:xfrm>
+          <a:prstGeom prst="rect">
+            <a:avLst/>
+          </a:prstGeom>
+          <a:noFill/>
+          <a:ln/>
+        </p:spPr>
+        <p:txBody>
+          <a:bodyPr wrap="square" lIns="0" tIns="0" rIns="0" bIns="0" rtlCol="0" anchor="ctr"/>
+          <a:lstStyle/>
+          <a:p>
+            <a:pPr indent="0" marL="0">
+              <a:lnSpc>
+                <a:spcPct val="110000"/>
               </a:lnSpc>
               <a:spcAft>
-                <a:spcPts val="400"/>
+                <a:spcPts val="300"/>
               </a:spcAft>
               <a:buNone/>
             </a:pPr>
             <a:r>
-              <a:rPr lang="en-US" sz="1500" b="1" dirty="0">
-                <a:solidFill>
-                  <a:srgbClr val="171B20"/>
-                </a:solidFill>
-                <a:latin typeface="IBM Plex Sans" pitchFamily="34" charset="0"/>
-                <a:ea typeface="IBM Plex Sans" pitchFamily="34" charset="-122"/>
-                <a:cs typeface="IBM Plex Sans" pitchFamily="34" charset="-120"/>
-              </a:rPr>
-              <a:t>Управление договорами</a:t>
-            </a:r>
-            <a:endParaRPr lang="en-US" sz="900" dirty="0"/>
+              <a:rPr lang="en-US" sz="2000" b="1" dirty="0">
+                <a:solidFill>
+                  <a:srgbClr val="1D5C9A"/>
+                </a:solidFill>
+                <a:latin typeface="Arial" pitchFamily="34" charset="0"/>
+                <a:ea typeface="Arial" pitchFamily="34" charset="-122"/>
+                <a:cs typeface="Arial" pitchFamily="34" charset="-120"/>
+              </a:rPr>
+              <a:t>50 000+</a:t>
+            </a:r>
+            <a:endParaRPr lang="en-US" sz="2000" dirty="0"/>
           </a:p>
           <a:p>
             <a:pPr indent="0" marL="0">
               <a:lnSpc>
-                <a:spcPct val="106000"/>
+                <a:spcPct val="110000"/>
+              </a:lnSpc>
+              <a:buNone/>
+            </a:pPr>
+            <a:r>
+              <a:rPr lang="en-US" sz="850" dirty="0">
+                <a:solidFill>
+                  <a:srgbClr val="59626B"/>
+                </a:solidFill>
+                <a:latin typeface="Courier New" pitchFamily="34" charset="0"/>
+                <a:ea typeface="Courier New" pitchFamily="34" charset="-122"/>
+                <a:cs typeface="Courier New" pitchFamily="34" charset="-120"/>
+              </a:rPr>
+              <a:t>пользователей на инсталляцию</a:t>
+            </a:r>
+            <a:endParaRPr lang="en-US" sz="2000" dirty="0"/>
+          </a:p>
+        </p:txBody>
+      </p:sp>
+      <p:sp>
+        <p:nvSpPr>
+          <p:cNvPr id="18" name="Shape 16"/>
+          <p:cNvSpPr/>
+          <p:nvPr/>
+        </p:nvSpPr>
+        <p:spPr>
+          <a:xfrm>
+            <a:off x="4572000" y="3447288"/>
+            <a:ext cx="7315" cy="621792"/>
+          </a:xfrm>
+          <a:prstGeom prst="rect">
+            <a:avLst/>
+          </a:prstGeom>
+          <a:solidFill>
+            <a:srgbClr val="D7DCE1"/>
+          </a:solidFill>
+          <a:ln/>
+        </p:spPr>
+      </p:sp>
+      <p:sp>
+        <p:nvSpPr>
+          <p:cNvPr id="19" name="Text 17"/>
+          <p:cNvSpPr/>
+          <p:nvPr/>
+        </p:nvSpPr>
+        <p:spPr>
+          <a:xfrm>
+            <a:off x="4709160" y="3337560"/>
+            <a:ext cx="1783080" cy="841248"/>
+          </a:xfrm>
+          <a:prstGeom prst="rect">
+            <a:avLst/>
+          </a:prstGeom>
+          <a:noFill/>
+          <a:ln/>
+        </p:spPr>
+        <p:txBody>
+          <a:bodyPr wrap="square" lIns="0" tIns="0" rIns="0" bIns="0" rtlCol="0" anchor="ctr"/>
+          <a:lstStyle/>
+          <a:p>
+            <a:pPr indent="0" marL="0">
+              <a:lnSpc>
+                <a:spcPct val="110000"/>
               </a:lnSpc>
               <a:spcAft>
-                <a:spcPts val="400"/>
+                <a:spcPts val="300"/>
               </a:spcAft>
               <a:buNone/>
             </a:pPr>
             <a:r>
-              <a:rPr lang="en-US" sz="1000" dirty="0">
+              <a:rPr lang="en-US" sz="2000" b="1" dirty="0">
+                <a:solidFill>
+                  <a:srgbClr val="1D5C9A"/>
+                </a:solidFill>
+                <a:latin typeface="Arial" pitchFamily="34" charset="0"/>
+                <a:ea typeface="Arial" pitchFamily="34" charset="-122"/>
+                <a:cs typeface="Arial" pitchFamily="34" charset="-120"/>
+              </a:rPr>
+              <a:t>250+</a:t>
+            </a:r>
+            <a:endParaRPr lang="en-US" sz="2000" dirty="0"/>
+          </a:p>
+          <a:p>
+            <a:pPr indent="0" marL="0">
+              <a:lnSpc>
+                <a:spcPct val="110000"/>
+              </a:lnSpc>
+              <a:buNone/>
+            </a:pPr>
+            <a:r>
+              <a:rPr lang="en-US" sz="850" dirty="0">
                 <a:solidFill>
                   <a:srgbClr val="59626B"/>
                 </a:solidFill>
-                <a:latin typeface="IBM Plex Sans" pitchFamily="34" charset="0"/>
-                <a:ea typeface="IBM Plex Sans" pitchFamily="34" charset="-122"/>
-                <a:cs typeface="IBM Plex Sans" pitchFamily="34" charset="-120"/>
-              </a:rPr>
-              <a:t>Полный цикл от инициации до архива: маршрут согласования, сроки, единый реестр.</a:t>
-            </a:r>
-            <a:endParaRPr lang="en-US" sz="900" dirty="0"/>
-          </a:p>
-        </p:txBody>
-      </p:sp>
-      <p:sp>
-        <p:nvSpPr>
-          <p:cNvPr id="14" name="Shape 12"/>
-          <p:cNvSpPr/>
-          <p:nvPr/>
-        </p:nvSpPr>
-        <p:spPr>
-          <a:xfrm>
-            <a:off x="3261360" y="2514600"/>
-            <a:ext cx="2621280" cy="1417320"/>
-          </a:xfrm>
-          <a:prstGeom prst="roundRect">
-            <a:avLst>
-              <a:gd name="adj" fmla="val 3226"/>
-            </a:avLst>
+                <a:latin typeface="Courier New" pitchFamily="34" charset="0"/>
+                <a:ea typeface="Courier New" pitchFamily="34" charset="-122"/>
+                <a:cs typeface="Courier New" pitchFamily="34" charset="-120"/>
+              </a:rPr>
+              <a:t>партнёров-интеграторов</a:t>
+            </a:r>
+            <a:endParaRPr lang="en-US" sz="2000" dirty="0"/>
+          </a:p>
+        </p:txBody>
+      </p:sp>
+      <p:sp>
+        <p:nvSpPr>
+          <p:cNvPr id="20" name="Shape 18"/>
+          <p:cNvSpPr/>
+          <p:nvPr/>
+        </p:nvSpPr>
+        <p:spPr>
+          <a:xfrm>
+            <a:off x="6629400" y="3447288"/>
+            <a:ext cx="7315" cy="621792"/>
+          </a:xfrm>
+          <a:prstGeom prst="rect">
+            <a:avLst/>
           </a:prstGeom>
           <a:solidFill>
-            <a:srgbClr val="FFFFFF"/>
+            <a:srgbClr val="D7DCE1"/>
           </a:solidFill>
-          <a:ln w="9525">
-            <a:solidFill>
-              <a:srgbClr val="D7DCE1"/>
-            </a:solidFill>
-            <a:prstDash val="solid"/>
-          </a:ln>
-          <a:effectLst>
-            <a:outerShdw sx="100000" sy="100000" kx="0" ky="0" algn="bl" rotWithShape="0" blurRad="88900" dist="25400" dir="5400000">
-              <a:srgbClr val="1A2A3A">
-                <a:alpha val="10000"/>
-              </a:srgbClr>
-            </a:outerShdw>
-          </a:effectLst>
-        </p:spPr>
-      </p:sp>
-      <p:sp>
-        <p:nvSpPr>
-          <p:cNvPr id="15" name="Text 13"/>
-          <p:cNvSpPr/>
-          <p:nvPr/>
-        </p:nvSpPr>
-        <p:spPr>
-          <a:xfrm>
-            <a:off x="3279648" y="2514600"/>
-            <a:ext cx="2584704" cy="1417320"/>
-          </a:xfrm>
-          <a:prstGeom prst="rect">
-            <a:avLst/>
-          </a:prstGeom>
-          <a:noFill/>
-          <a:ln/>
-        </p:spPr>
-        <p:txBody>
-          <a:bodyPr wrap="square" lIns="2032" tIns="2032" rIns="2032" bIns="2032" rtlCol="0" anchor="t"/>
+          <a:ln/>
+        </p:spPr>
+      </p:sp>
+      <p:sp>
+        <p:nvSpPr>
+          <p:cNvPr id="21" name="Text 19"/>
+          <p:cNvSpPr/>
+          <p:nvPr/>
+        </p:nvSpPr>
+        <p:spPr>
+          <a:xfrm>
+            <a:off x="6766560" y="3337560"/>
+            <a:ext cx="1783080" cy="841248"/>
+          </a:xfrm>
+          <a:prstGeom prst="rect">
+            <a:avLst/>
+          </a:prstGeom>
+          <a:noFill/>
+          <a:ln/>
+        </p:spPr>
+        <p:txBody>
+          <a:bodyPr wrap="square" lIns="0" tIns="0" rIns="0" bIns="0" rtlCol="0" anchor="ctr"/>
           <a:lstStyle/>
           <a:p>
             <a:pPr indent="0" marL="0">
               <a:lnSpc>
-                <a:spcPct val="106000"/>
+                <a:spcPct val="110000"/>
               </a:lnSpc>
               <a:spcAft>
-                <a:spcPts val="400"/>
+                <a:spcPts val="300"/>
               </a:spcAft>
               <a:buNone/>
             </a:pPr>
             <a:r>
-              <a:rPr lang="en-US" sz="900" dirty="0">
+              <a:rPr lang="en-US" sz="2000" b="1" dirty="0">
                 <a:solidFill>
                   <a:srgbClr val="1D5C9A"/>
                 </a:solidFill>
-                <a:latin typeface="IBM Plex Mono" pitchFamily="34" charset="0"/>
-                <a:ea typeface="IBM Plex Mono" pitchFamily="34" charset="-122"/>
-                <a:cs typeface="IBM Plex Mono" pitchFamily="34" charset="-120"/>
-              </a:rPr>
-              <a:t>Контур 02</a:t>
-            </a:r>
-            <a:endParaRPr lang="en-US" sz="900" dirty="0"/>
+                <a:latin typeface="Arial" pitchFamily="34" charset="0"/>
+                <a:ea typeface="Arial" pitchFamily="34" charset="-122"/>
+                <a:cs typeface="Arial" pitchFamily="34" charset="-120"/>
+              </a:rPr>
+              <a:t>РФ + КЗ</a:t>
+            </a:r>
+            <a:endParaRPr lang="en-US" sz="2000" dirty="0"/>
           </a:p>
           <a:p>
             <a:pPr indent="0" marL="0">
               <a:lnSpc>
-                <a:spcPct val="106000"/>
+                <a:spcPct val="110000"/>
               </a:lnSpc>
-              <a:spcAft>
-                <a:spcPts val="400"/>
-              </a:spcAft>
-              <a:buNone/>
-            </a:pPr>
-            <a:r>
-              <a:rPr lang="en-US" sz="1500" b="1" dirty="0">
-                <a:solidFill>
-                  <a:srgbClr val="171B20"/>
-                </a:solidFill>
-                <a:latin typeface="IBM Plex Sans" pitchFamily="34" charset="0"/>
-                <a:ea typeface="IBM Plex Sans" pitchFamily="34" charset="-122"/>
-                <a:cs typeface="IBM Plex Sans" pitchFamily="34" charset="-120"/>
-              </a:rPr>
-              <a:t>ОРД и приказы</a:t>
-            </a:r>
-            <a:endParaRPr lang="en-US" sz="900" dirty="0"/>
-          </a:p>
-          <a:p>
-            <a:pPr indent="0" marL="0">
-              <a:lnSpc>
-                <a:spcPct val="106000"/>
-              </a:lnSpc>
-              <a:spcAft>
-                <a:spcPts val="400"/>
-              </a:spcAft>
+              <a:buNone/>
+            </a:pPr>
+            <a:r>
+              <a:rPr lang="en-US" sz="850" dirty="0">
+                <a:solidFill>
+                  <a:srgbClr val="59626B"/>
+                </a:solidFill>
+                <a:latin typeface="Courier New" pitchFamily="34" charset="0"/>
+                <a:ea typeface="Courier New" pitchFamily="34" charset="-122"/>
+                <a:cs typeface="Courier New" pitchFamily="34" charset="-120"/>
+              </a:rPr>
+              <a:t>облако или on-premise</a:t>
+            </a:r>
+            <a:endParaRPr lang="en-US" sz="2000" dirty="0"/>
+          </a:p>
+        </p:txBody>
+      </p:sp>
+      <p:sp>
+        <p:nvSpPr>
+          <p:cNvPr id="22" name="Text 20"/>
+          <p:cNvSpPr/>
+          <p:nvPr/>
+        </p:nvSpPr>
+        <p:spPr>
+          <a:xfrm>
+            <a:off x="457200" y="4343400"/>
+            <a:ext cx="8229600" cy="274320"/>
+          </a:xfrm>
+          <a:prstGeom prst="rect">
+            <a:avLst/>
+          </a:prstGeom>
+          <a:noFill/>
+          <a:ln/>
+        </p:spPr>
+        <p:txBody>
+          <a:bodyPr wrap="square" lIns="0" tIns="0" rIns="0" bIns="0" rtlCol="0" anchor="ctr"/>
+          <a:lstStyle/>
+          <a:p>
+            <a:pPr indent="0" marL="0">
               <a:buNone/>
             </a:pPr>
             <a:r>
@@ -3890,177 +3889,13 @@
                 <a:solidFill>
                   <a:srgbClr val="59626B"/>
                 </a:solidFill>
-                <a:latin typeface="IBM Plex Sans" pitchFamily="34" charset="0"/>
-                <a:ea typeface="IBM Plex Sans" pitchFamily="34" charset="-122"/>
-                <a:cs typeface="IBM Plex Sans" pitchFamily="34" charset="-120"/>
-              </a:rPr>
-              <a:t>Согласование и ознакомление с распорядительными документами, контроль исполнения.</a:t>
-            </a:r>
-            <a:endParaRPr lang="en-US" sz="900" dirty="0"/>
-          </a:p>
-        </p:txBody>
-      </p:sp>
-      <p:sp>
-        <p:nvSpPr>
-          <p:cNvPr id="16" name="Shape 14"/>
-          <p:cNvSpPr/>
-          <p:nvPr/>
-        </p:nvSpPr>
-        <p:spPr>
-          <a:xfrm>
-            <a:off x="6065520" y="2514600"/>
-            <a:ext cx="2621280" cy="1417320"/>
-          </a:xfrm>
-          <a:prstGeom prst="roundRect">
-            <a:avLst>
-              <a:gd name="adj" fmla="val 3226"/>
-            </a:avLst>
-          </a:prstGeom>
-          <a:solidFill>
-            <a:srgbClr val="FFFFFF"/>
-          </a:solidFill>
-          <a:ln w="9525">
-            <a:solidFill>
-              <a:srgbClr val="D7DCE1"/>
-            </a:solidFill>
-            <a:prstDash val="solid"/>
-          </a:ln>
-          <a:effectLst>
-            <a:outerShdw sx="100000" sy="100000" kx="0" ky="0" algn="bl" rotWithShape="0" blurRad="88900" dist="25400" dir="5400000">
-              <a:srgbClr val="1A2A3A">
-                <a:alpha val="10000"/>
-              </a:srgbClr>
-            </a:outerShdw>
-          </a:effectLst>
-        </p:spPr>
-      </p:sp>
-      <p:sp>
-        <p:nvSpPr>
-          <p:cNvPr id="17" name="Text 15"/>
-          <p:cNvSpPr/>
-          <p:nvPr/>
-        </p:nvSpPr>
-        <p:spPr>
-          <a:xfrm>
-            <a:off x="6083808" y="2514600"/>
-            <a:ext cx="2584704" cy="1417320"/>
-          </a:xfrm>
-          <a:prstGeom prst="rect">
-            <a:avLst/>
-          </a:prstGeom>
-          <a:noFill/>
-          <a:ln/>
-        </p:spPr>
-        <p:txBody>
-          <a:bodyPr wrap="square" lIns="2032" tIns="2032" rIns="2032" bIns="2032" rtlCol="0" anchor="t"/>
-          <a:lstStyle/>
-          <a:p>
-            <a:pPr indent="0" marL="0">
-              <a:lnSpc>
-                <a:spcPct val="106000"/>
-              </a:lnSpc>
-              <a:spcAft>
-                <a:spcPts val="400"/>
-              </a:spcAft>
-              <a:buNone/>
-            </a:pPr>
-            <a:r>
-              <a:rPr lang="en-US" sz="900" dirty="0">
-                <a:solidFill>
-                  <a:srgbClr val="1D5C9A"/>
-                </a:solidFill>
-                <a:latin typeface="IBM Plex Mono" pitchFamily="34" charset="0"/>
-                <a:ea typeface="IBM Plex Mono" pitchFamily="34" charset="-122"/>
-                <a:cs typeface="IBM Plex Mono" pitchFamily="34" charset="-120"/>
-              </a:rPr>
-              <a:t>Контур 03</a:t>
-            </a:r>
-            <a:endParaRPr lang="en-US" sz="900" dirty="0"/>
-          </a:p>
-          <a:p>
-            <a:pPr indent="0" marL="0">
-              <a:lnSpc>
-                <a:spcPct val="106000"/>
-              </a:lnSpc>
-              <a:spcAft>
-                <a:spcPts val="400"/>
-              </a:spcAft>
-              <a:buNone/>
-            </a:pPr>
-            <a:r>
-              <a:rPr lang="en-US" sz="1500" b="1" dirty="0">
-                <a:solidFill>
-                  <a:srgbClr val="171B20"/>
-                </a:solidFill>
-                <a:latin typeface="IBM Plex Sans" pitchFamily="34" charset="0"/>
-                <a:ea typeface="IBM Plex Sans" pitchFamily="34" charset="-122"/>
-                <a:cs typeface="IBM Plex Sans" pitchFamily="34" charset="-120"/>
-              </a:rPr>
-              <a:t>Корреспонденция</a:t>
-            </a:r>
-            <a:endParaRPr lang="en-US" sz="900" dirty="0"/>
-          </a:p>
-          <a:p>
-            <a:pPr indent="0" marL="0">
-              <a:lnSpc>
-                <a:spcPct val="106000"/>
-              </a:lnSpc>
-              <a:spcAft>
-                <a:spcPts val="400"/>
-              </a:spcAft>
-              <a:buNone/>
-            </a:pPr>
-            <a:r>
-              <a:rPr lang="en-US" sz="1000" dirty="0">
-                <a:solidFill>
-                  <a:srgbClr val="59626B"/>
-                </a:solidFill>
-                <a:latin typeface="IBM Plex Sans" pitchFamily="34" charset="0"/>
-                <a:ea typeface="IBM Plex Sans" pitchFamily="34" charset="-122"/>
-                <a:cs typeface="IBM Plex Sans" pitchFamily="34" charset="-120"/>
-              </a:rPr>
-              <a:t>Регистрация входящих и исходящих, поручения, журналы.</a:t>
-            </a:r>
-            <a:endParaRPr lang="en-US" sz="900" dirty="0"/>
-          </a:p>
-        </p:txBody>
-      </p:sp>
-      <p:sp>
-        <p:nvSpPr>
-          <p:cNvPr id="18" name="Text 16"/>
-          <p:cNvSpPr/>
-          <p:nvPr/>
-        </p:nvSpPr>
-        <p:spPr>
-          <a:xfrm>
-            <a:off x="457200" y="4160520"/>
-            <a:ext cx="8229600" cy="320040"/>
-          </a:xfrm>
-          <a:prstGeom prst="rect">
-            <a:avLst/>
-          </a:prstGeom>
-          <a:noFill/>
-          <a:ln/>
-        </p:spPr>
-        <p:txBody>
-          <a:bodyPr wrap="square" lIns="0" tIns="0" rIns="0" bIns="0" rtlCol="0" anchor="ctr"/>
-          <a:lstStyle/>
-          <a:p>
-            <a:pPr indent="0" marL="0">
-              <a:buNone/>
-            </a:pPr>
-            <a:r>
-              <a:rPr lang="en-US" sz="1050" dirty="0">
-                <a:solidFill>
-                  <a:srgbClr val="171B20"/>
-                </a:solidFill>
-                <a:latin typeface="IBM Plex Mono" pitchFamily="34" charset="0"/>
-                <a:ea typeface="IBM Plex Mono" pitchFamily="34" charset="-122"/>
-                <a:cs typeface="IBM Plex Mono" pitchFamily="34" charset="-120"/>
-              </a:rPr>
-              <a:t>Маршруты без кода   ·   Мобильное приложение в комплекте   ·   Один раз, без подписки   ·   On-premise, ЭП, аудит-трейл</a:t>
-            </a:r>
-            <a:endParaRPr lang="en-US" sz="1050" dirty="0"/>
+                <a:latin typeface="Courier New" pitchFamily="34" charset="0"/>
+                <a:ea typeface="Courier New" pitchFamily="34" charset="-122"/>
+                <a:cs typeface="Courier New" pitchFamily="34" charset="-120"/>
+              </a:rPr>
+              <a:t>Российское ПО · реестр отеч. ПО · замена SAP, Salesforce, MS Dynamics</a:t>
+            </a:r>
+            <a:endParaRPr lang="en-US" sz="1000" dirty="0"/>
           </a:p>
         </p:txBody>
       </p:sp>
@@ -4152,9 +3987,9 @@
                 <a:solidFill>
                   <a:srgbClr val="1D5C9A"/>
                 </a:solidFill>
-                <a:latin typeface="IBM Plex Sans" pitchFamily="34" charset="0"/>
-                <a:ea typeface="IBM Plex Sans" pitchFamily="34" charset="-122"/>
-                <a:cs typeface="IBM Plex Sans" pitchFamily="34" charset="-120"/>
+                <a:latin typeface="Arial" pitchFamily="34" charset="0"/>
+                <a:ea typeface="Arial" pitchFamily="34" charset="-122"/>
+                <a:cs typeface="Arial" pitchFamily="34" charset="-120"/>
               </a:rPr>
               <a:t>WD</a:t>
             </a:r>
@@ -4191,9 +4026,9 @@
                 <a:solidFill>
                   <a:srgbClr val="171B20"/>
                 </a:solidFill>
-                <a:latin typeface="IBM Plex Sans" pitchFamily="34" charset="0"/>
-                <a:ea typeface="IBM Plex Sans" pitchFamily="34" charset="-122"/>
-                <a:cs typeface="IBM Plex Sans" pitchFamily="34" charset="-120"/>
+                <a:latin typeface="Arial" pitchFamily="34" charset="0"/>
+                <a:ea typeface="Arial" pitchFamily="34" charset="-122"/>
+                <a:cs typeface="Arial" pitchFamily="34" charset="-120"/>
               </a:rPr>
               <a:t>WhatDaDev</a:t>
             </a:r>
@@ -4230,11 +4065,11 @@
                 <a:solidFill>
                   <a:srgbClr val="59626B"/>
                 </a:solidFill>
-                <a:latin typeface="IBM Plex Mono" pitchFamily="34" charset="0"/>
-                <a:ea typeface="IBM Plex Mono" pitchFamily="34" charset="-122"/>
-                <a:cs typeface="IBM Plex Mono" pitchFamily="34" charset="-120"/>
-              </a:rPr>
-              <a:t>Проекты · предварительно</a:t>
+                <a:latin typeface="Courier New" pitchFamily="34" charset="0"/>
+                <a:ea typeface="Courier New" pitchFamily="34" charset="-122"/>
+                <a:cs typeface="Courier New" pitchFamily="34" charset="-120"/>
+              </a:rPr>
+              <a:t>Продукт · Coordo</a:t>
             </a:r>
             <a:endParaRPr lang="en-US" sz="900" dirty="0"/>
           </a:p>
@@ -4269,9 +4104,9 @@
                 <a:solidFill>
                   <a:srgbClr val="59626B"/>
                 </a:solidFill>
-                <a:latin typeface="IBM Plex Mono" pitchFamily="34" charset="0"/>
-                <a:ea typeface="IBM Plex Mono" pitchFamily="34" charset="-122"/>
-                <a:cs typeface="IBM Plex Mono" pitchFamily="34" charset="-120"/>
+                <a:latin typeface="Courier New" pitchFamily="34" charset="0"/>
+                <a:ea typeface="Courier New" pitchFamily="34" charset="-122"/>
+                <a:cs typeface="Courier New" pitchFamily="34" charset="-120"/>
               </a:rPr>
               <a:t>whatdadev.ru</a:t>
             </a:r>
@@ -4308,11 +4143,11 @@
                 <a:solidFill>
                   <a:srgbClr val="59626B"/>
                 </a:solidFill>
-                <a:latin typeface="IBM Plex Mono" pitchFamily="34" charset="0"/>
-                <a:ea typeface="IBM Plex Mono" pitchFamily="34" charset="-122"/>
-                <a:cs typeface="IBM Plex Mono" pitchFamily="34" charset="-120"/>
-              </a:rPr>
-              <a:t>04 / 05</a:t>
+                <a:latin typeface="Courier New" pitchFamily="34" charset="0"/>
+                <a:ea typeface="Courier New" pitchFamily="34" charset="-122"/>
+                <a:cs typeface="Courier New" pitchFamily="34" charset="-120"/>
+              </a:rPr>
+              <a:t>04 / 07</a:t>
             </a:r>
             <a:endParaRPr lang="en-US" sz="850" dirty="0"/>
           </a:p>
@@ -4326,14 +4161,14 @@
         </p:nvSpPr>
         <p:spPr>
           <a:xfrm>
-            <a:off x="457200" y="937260"/>
+            <a:off x="457200" y="914400"/>
             <a:ext cx="100584" cy="100584"/>
           </a:xfrm>
           <a:prstGeom prst="rect">
             <a:avLst/>
           </a:prstGeom>
           <a:solidFill>
-            <a:srgbClr val="1D5C9A"/>
+            <a:srgbClr val="B25A1E"/>
           </a:solidFill>
           <a:ln/>
         </p:spPr>
@@ -4346,8 +4181,8 @@
         </p:nvSpPr>
         <p:spPr>
           <a:xfrm>
-            <a:off x="658368" y="896112"/>
-            <a:ext cx="7315200" cy="219456"/>
+            <a:off x="658368" y="850392"/>
+            <a:ext cx="7772400" cy="237744"/>
           </a:xfrm>
           <a:prstGeom prst="rect">
             <a:avLst/>
@@ -4365,13 +4200,13 @@
             <a:r>
               <a:rPr lang="en-US" sz="1050" spc="200" kern="0" dirty="0">
                 <a:solidFill>
-                  <a:srgbClr val="1D5C9A"/>
-                </a:solidFill>
-                <a:latin typeface="IBM Plex Mono" pitchFamily="34" charset="0"/>
-                <a:ea typeface="IBM Plex Mono" pitchFamily="34" charset="-122"/>
-                <a:cs typeface="IBM Plex Mono" pitchFamily="34" charset="-120"/>
-              </a:rPr>
-              <a:t>ЧТО МЫ ДЕЛАЕМ НА ПРАКТИКЕ</a:t>
+                  <a:srgbClr val="B25A1E"/>
+                </a:solidFill>
+                <a:latin typeface="Courier New" pitchFamily="34" charset="0"/>
+                <a:ea typeface="Courier New" pitchFamily="34" charset="-122"/>
+                <a:cs typeface="Courier New" pitchFamily="34" charset="-120"/>
+              </a:rPr>
+              <a:t>КАК ЗАПУСКАЕМ</a:t>
             </a:r>
             <a:endParaRPr lang="en-US" sz="1050" dirty="0"/>
           </a:p>
@@ -4385,8 +4220,8 @@
         </p:nvSpPr>
         <p:spPr>
           <a:xfrm>
-            <a:off x="457200" y="1188720"/>
-            <a:ext cx="8229600" cy="566928"/>
+            <a:off x="457200" y="1170432"/>
+            <a:ext cx="8229600" cy="685800"/>
           </a:xfrm>
           <a:prstGeom prst="rect">
             <a:avLst/>
@@ -4399,32 +4234,152 @@
           <a:lstStyle/>
           <a:p>
             <a:pPr indent="0" marL="0">
-              <a:buNone/>
-            </a:pPr>
-            <a:r>
-              <a:rPr lang="en-US" sz="2500" b="1" dirty="0">
+              <a:lnSpc>
+                <a:spcPts val="2415"/>
+              </a:lnSpc>
+              <a:buNone/>
+            </a:pPr>
+            <a:r>
+              <a:rPr lang="en-US" sz="2300" b="1" dirty="0">
                 <a:solidFill>
                   <a:srgbClr val="171B20"/>
                 </a:solidFill>
-                <a:latin typeface="IBM Plex Sans" pitchFamily="34" charset="0"/>
-                <a:ea typeface="IBM Plex Sans" pitchFamily="34" charset="-122"/>
-                <a:cs typeface="IBM Plex Sans" pitchFamily="34" charset="-120"/>
-              </a:rPr>
-              <a:t>Наши проекты</a:t>
-            </a:r>
-            <a:endParaRPr lang="en-US" sz="2500" dirty="0"/>
-          </a:p>
-        </p:txBody>
-      </p:sp>
-      <p:sp>
-        <p:nvSpPr>
-          <p:cNvPr id="11" name="Shape 9"/>
-          <p:cNvSpPr/>
-          <p:nvPr/>
-        </p:nvSpPr>
-        <p:spPr>
-          <a:xfrm>
-            <a:off x="457200" y="1874520"/>
+                <a:latin typeface="Arial" pitchFamily="34" charset="0"/>
+                <a:ea typeface="Arial" pitchFamily="34" charset="-122"/>
+                <a:cs typeface="Arial" pitchFamily="34" charset="-120"/>
+              </a:rPr>
+              <a:t>Документооборот за недели, а не месяцы</a:t>
+            </a:r>
+            <a:endParaRPr lang="en-US" sz="2300" dirty="0"/>
+          </a:p>
+        </p:txBody>
+      </p:sp>
+      <p:sp>
+        <p:nvSpPr>
+          <p:cNvPr id="11" name="Text 9"/>
+          <p:cNvSpPr/>
+          <p:nvPr/>
+        </p:nvSpPr>
+        <p:spPr>
+          <a:xfrm>
+            <a:off x="457200" y="1965960"/>
+            <a:ext cx="2194560" cy="731520"/>
+          </a:xfrm>
+          <a:prstGeom prst="rect">
+            <a:avLst/>
+          </a:prstGeom>
+          <a:noFill/>
+          <a:ln/>
+        </p:spPr>
+        <p:txBody>
+          <a:bodyPr wrap="square" lIns="0" tIns="0" rIns="0" bIns="0" rtlCol="0" anchor="ctr"/>
+          <a:lstStyle/>
+          <a:p>
+            <a:pPr indent="0" marL="0">
+              <a:buNone/>
+            </a:pPr>
+            <a:r>
+              <a:rPr lang="en-US" sz="3200" b="1" strike="sngStrike" dirty="0">
+                <a:solidFill>
+                  <a:srgbClr val="AEB3B8"/>
+                </a:solidFill>
+                <a:latin typeface="Arial" pitchFamily="34" charset="0"/>
+                <a:ea typeface="Arial" pitchFamily="34" charset="-122"/>
+                <a:cs typeface="Arial" pitchFamily="34" charset="-120"/>
+              </a:rPr>
+              <a:t>Месяцы</a:t>
+            </a:r>
+            <a:endParaRPr lang="en-US" sz="3200" dirty="0"/>
+          </a:p>
+        </p:txBody>
+      </p:sp>
+      <p:sp>
+        <p:nvSpPr>
+          <p:cNvPr id="12" name="Text 10"/>
+          <p:cNvSpPr/>
+          <p:nvPr/>
+        </p:nvSpPr>
+        <p:spPr>
+          <a:xfrm>
+            <a:off x="2743200" y="1965960"/>
+            <a:ext cx="640080" cy="731520"/>
+          </a:xfrm>
+          <a:prstGeom prst="rect">
+            <a:avLst/>
+          </a:prstGeom>
+          <a:noFill/>
+          <a:ln/>
+        </p:spPr>
+        <p:txBody>
+          <a:bodyPr wrap="square" lIns="0" tIns="0" rIns="0" bIns="0" rtlCol="0" anchor="ctr"/>
+          <a:lstStyle/>
+          <a:p>
+            <a:pPr algn="ctr" indent="0" marL="0">
+              <a:buNone/>
+            </a:pPr>
+            <a:r>
+              <a:rPr lang="en-US" sz="2600" b="1" dirty="0">
+                <a:solidFill>
+                  <a:srgbClr val="B25A1E"/>
+                </a:solidFill>
+                <a:latin typeface="Arial" pitchFamily="34" charset="0"/>
+                <a:ea typeface="Arial" pitchFamily="34" charset="-122"/>
+                <a:cs typeface="Arial" pitchFamily="34" charset="-120"/>
+              </a:rPr>
+              <a:t>→</a:t>
+            </a:r>
+            <a:endParaRPr lang="en-US" sz="2600" dirty="0"/>
+          </a:p>
+        </p:txBody>
+      </p:sp>
+      <p:sp>
+        <p:nvSpPr>
+          <p:cNvPr id="13" name="Text 11"/>
+          <p:cNvSpPr/>
+          <p:nvPr/>
+        </p:nvSpPr>
+        <p:spPr>
+          <a:xfrm>
+            <a:off x="3429000" y="1920240"/>
+            <a:ext cx="2926080" cy="822960"/>
+          </a:xfrm>
+          <a:prstGeom prst="rect">
+            <a:avLst/>
+          </a:prstGeom>
+          <a:noFill/>
+          <a:ln/>
+        </p:spPr>
+        <p:txBody>
+          <a:bodyPr wrap="square" lIns="0" tIns="0" rIns="0" bIns="0" rtlCol="0" anchor="ctr"/>
+          <a:lstStyle/>
+          <a:p>
+            <a:pPr indent="0" marL="0">
+              <a:buNone/>
+            </a:pPr>
+            <a:r>
+              <a:rPr lang="en-US" sz="4000" b="1" dirty="0">
+                <a:solidFill>
+                  <a:srgbClr val="134C7A"/>
+                </a:solidFill>
+                <a:latin typeface="Arial" pitchFamily="34" charset="0"/>
+                <a:ea typeface="Arial" pitchFamily="34" charset="-122"/>
+                <a:cs typeface="Arial" pitchFamily="34" charset="-120"/>
+              </a:rPr>
+              <a:t>Недели</a:t>
+            </a:r>
+            <a:endParaRPr lang="en-US" sz="4000" dirty="0"/>
+          </a:p>
+        </p:txBody>
+      </p:sp>
+      <p:sp>
+        <p:nvSpPr>
+          <p:cNvPr id="14" name="Shape 12"/>
+          <p:cNvSpPr/>
+          <p:nvPr/>
+        </p:nvSpPr>
+        <p:spPr>
+          <a:xfrm>
+            <a:off x="457200" y="2926080"/>
             <a:ext cx="2621280" cy="1371600"/>
           </a:xfrm>
           <a:prstGeom prst="roundRect">
@@ -4452,13 +4407,13 @@
       </p:sp>
       <p:sp>
         <p:nvSpPr>
-          <p:cNvPr id="12" name="Text 10"/>
-          <p:cNvSpPr/>
-          <p:nvPr/>
-        </p:nvSpPr>
-        <p:spPr>
-          <a:xfrm>
-            <a:off x="475488" y="1874520"/>
+          <p:cNvPr id="15" name="Text 13"/>
+          <p:cNvSpPr/>
+          <p:nvPr/>
+        </p:nvSpPr>
+        <p:spPr>
+          <a:xfrm>
+            <a:off x="475488" y="2926080"/>
             <a:ext cx="2584704" cy="1371600"/>
           </a:xfrm>
           <a:prstGeom prst="rect">
@@ -4468,7 +4423,7 @@
           <a:ln/>
         </p:spPr>
         <p:txBody>
-          <a:bodyPr wrap="square" lIns="1905" tIns="1905" rIns="1905" bIns="1905" rtlCol="0" anchor="t"/>
+          <a:bodyPr wrap="square" lIns="2032" tIns="2032" rIns="2032" bIns="2032" rtlCol="0" anchor="t"/>
           <a:lstStyle/>
           <a:p>
             <a:pPr indent="0" marL="0">
@@ -4476,22 +4431,22 @@
                 <a:spcPct val="105000"/>
               </a:lnSpc>
               <a:spcAft>
-                <a:spcPts val="400"/>
+                <a:spcPts val="500"/>
               </a:spcAft>
               <a:buNone/>
             </a:pPr>
             <a:r>
-              <a:rPr lang="en-US" sz="850" spc="100" kern="0" dirty="0">
-                <a:solidFill>
-                  <a:srgbClr val="1D5C9A"/>
-                </a:solidFill>
-                <a:latin typeface="IBM Plex Mono" pitchFamily="34" charset="0"/>
-                <a:ea typeface="IBM Plex Mono" pitchFamily="34" charset="-122"/>
-                <a:cs typeface="IBM Plex Mono" pitchFamily="34" charset="-120"/>
-              </a:rPr>
-              <a:t>ПРОИЗВОДСТВО</a:t>
-            </a:r>
-            <a:endParaRPr lang="en-US" sz="850" dirty="0"/>
+              <a:rPr lang="en-US" sz="900" dirty="0">
+                <a:solidFill>
+                  <a:srgbClr val="B25A1E"/>
+                </a:solidFill>
+                <a:latin typeface="Courier New" pitchFamily="34" charset="0"/>
+                <a:ea typeface="Courier New" pitchFamily="34" charset="-122"/>
+                <a:cs typeface="Courier New" pitchFamily="34" charset="-120"/>
+              </a:rPr>
+              <a:t>ШАГ 01</a:t>
+            </a:r>
+            <a:endParaRPr lang="en-US" sz="900" dirty="0"/>
           </a:p>
           <a:p>
             <a:pPr indent="0" marL="0">
@@ -4499,22 +4454,22 @@
                 <a:spcPct val="105000"/>
               </a:lnSpc>
               <a:spcAft>
-                <a:spcPts val="400"/>
+                <a:spcPts val="500"/>
               </a:spcAft>
               <a:buNone/>
             </a:pPr>
             <a:r>
-              <a:rPr lang="en-US" sz="1300" b="1" dirty="0">
+              <a:rPr lang="en-US" sz="1400" b="1" dirty="0">
                 <a:solidFill>
                   <a:srgbClr val="171B20"/>
                 </a:solidFill>
-                <a:latin typeface="IBM Plex Sans" pitchFamily="34" charset="0"/>
-                <a:ea typeface="IBM Plex Sans" pitchFamily="34" charset="-122"/>
-                <a:cs typeface="IBM Plex Sans" pitchFamily="34" charset="-120"/>
-              </a:rPr>
-              <a:t>Согласование договоров</a:t>
-            </a:r>
-            <a:endParaRPr lang="en-US" sz="850" dirty="0"/>
+                <a:latin typeface="Arial" pitchFamily="34" charset="0"/>
+                <a:ea typeface="Arial" pitchFamily="34" charset="-122"/>
+                <a:cs typeface="Arial" pitchFamily="34" charset="-120"/>
+              </a:rPr>
+              <a:t>Берём готовый контур</a:t>
+            </a:r>
+            <a:endParaRPr lang="en-US" sz="900" dirty="0"/>
           </a:p>
           <a:p>
             <a:pPr indent="0" marL="0">
@@ -4522,34 +4477,34 @@
                 <a:spcPct val="105000"/>
               </a:lnSpc>
               <a:spcAft>
-                <a:spcPts val="400"/>
+                <a:spcPts val="500"/>
               </a:spcAft>
               <a:buNone/>
             </a:pPr>
             <a:r>
-              <a:rPr lang="en-US" sz="950" dirty="0">
+              <a:rPr lang="en-US" sz="1000" dirty="0">
                 <a:solidFill>
                   <a:srgbClr val="59626B"/>
                 </a:solidFill>
-                <a:latin typeface="IBM Plex Sans" pitchFamily="34" charset="0"/>
-                <a:ea typeface="IBM Plex Sans" pitchFamily="34" charset="-122"/>
-                <a:cs typeface="IBM Plex Sans" pitchFamily="34" charset="-120"/>
-              </a:rPr>
-              <a:t>Единый маршрут и реестр вместо переписки и бумаги. Прозрачные сроки на каждом этапе.</a:t>
-            </a:r>
-            <a:endParaRPr lang="en-US" sz="850" dirty="0"/>
-          </a:p>
-        </p:txBody>
-      </p:sp>
-      <p:sp>
-        <p:nvSpPr>
-          <p:cNvPr id="13" name="Shape 11"/>
-          <p:cNvSpPr/>
-          <p:nvPr/>
-        </p:nvSpPr>
-        <p:spPr>
-          <a:xfrm>
-            <a:off x="3261360" y="1874520"/>
+                <a:latin typeface="Arial" pitchFamily="34" charset="0"/>
+                <a:ea typeface="Arial" pitchFamily="34" charset="-122"/>
+                <a:cs typeface="Arial" pitchFamily="34" charset="-120"/>
+              </a:rPr>
+              <a:t>Договоры, ОРД или корреспонденция — из коробки.</a:t>
+            </a:r>
+            <a:endParaRPr lang="en-US" sz="900" dirty="0"/>
+          </a:p>
+        </p:txBody>
+      </p:sp>
+      <p:sp>
+        <p:nvSpPr>
+          <p:cNvPr id="16" name="Shape 14"/>
+          <p:cNvSpPr/>
+          <p:nvPr/>
+        </p:nvSpPr>
+        <p:spPr>
+          <a:xfrm>
+            <a:off x="3261360" y="2926080"/>
             <a:ext cx="2621280" cy="1371600"/>
           </a:xfrm>
           <a:prstGeom prst="roundRect">
@@ -4577,13 +4532,13 @@
       </p:sp>
       <p:sp>
         <p:nvSpPr>
-          <p:cNvPr id="14" name="Text 12"/>
-          <p:cNvSpPr/>
-          <p:nvPr/>
-        </p:nvSpPr>
-        <p:spPr>
-          <a:xfrm>
-            <a:off x="3279648" y="1874520"/>
+          <p:cNvPr id="17" name="Text 15"/>
+          <p:cNvSpPr/>
+          <p:nvPr/>
+        </p:nvSpPr>
+        <p:spPr>
+          <a:xfrm>
+            <a:off x="3279648" y="2926080"/>
             <a:ext cx="2584704" cy="1371600"/>
           </a:xfrm>
           <a:prstGeom prst="rect">
@@ -4593,7 +4548,7 @@
           <a:ln/>
         </p:spPr>
         <p:txBody>
-          <a:bodyPr wrap="square" lIns="1905" tIns="1905" rIns="1905" bIns="1905" rtlCol="0" anchor="t"/>
+          <a:bodyPr wrap="square" lIns="2032" tIns="2032" rIns="2032" bIns="2032" rtlCol="0" anchor="t"/>
           <a:lstStyle/>
           <a:p>
             <a:pPr indent="0" marL="0">
@@ -4601,22 +4556,22 @@
                 <a:spcPct val="105000"/>
               </a:lnSpc>
               <a:spcAft>
-                <a:spcPts val="400"/>
+                <a:spcPts val="500"/>
               </a:spcAft>
               <a:buNone/>
             </a:pPr>
             <a:r>
-              <a:rPr lang="en-US" sz="850" spc="100" kern="0" dirty="0">
-                <a:solidFill>
-                  <a:srgbClr val="1D5C9A"/>
-                </a:solidFill>
-                <a:latin typeface="IBM Plex Mono" pitchFamily="34" charset="0"/>
-                <a:ea typeface="IBM Plex Mono" pitchFamily="34" charset="-122"/>
-                <a:cs typeface="IBM Plex Mono" pitchFamily="34" charset="-120"/>
-              </a:rPr>
-              <a:t>РИТЕЙЛ · СЕТЬ</a:t>
-            </a:r>
-            <a:endParaRPr lang="en-US" sz="850" dirty="0"/>
+              <a:rPr lang="en-US" sz="900" dirty="0">
+                <a:solidFill>
+                  <a:srgbClr val="B25A1E"/>
+                </a:solidFill>
+                <a:latin typeface="Courier New" pitchFamily="34" charset="0"/>
+                <a:ea typeface="Courier New" pitchFamily="34" charset="-122"/>
+                <a:cs typeface="Courier New" pitchFamily="34" charset="-120"/>
+              </a:rPr>
+              <a:t>ШАГ 02</a:t>
+            </a:r>
+            <a:endParaRPr lang="en-US" sz="900" dirty="0"/>
           </a:p>
           <a:p>
             <a:pPr indent="0" marL="0">
@@ -4624,22 +4579,22 @@
                 <a:spcPct val="105000"/>
               </a:lnSpc>
               <a:spcAft>
-                <a:spcPts val="400"/>
+                <a:spcPts val="500"/>
               </a:spcAft>
               <a:buNone/>
             </a:pPr>
             <a:r>
-              <a:rPr lang="en-US" sz="1300" b="1" dirty="0">
+              <a:rPr lang="en-US" sz="1400" b="1" dirty="0">
                 <a:solidFill>
                   <a:srgbClr val="171B20"/>
                 </a:solidFill>
-                <a:latin typeface="IBM Plex Sans" pitchFamily="34" charset="0"/>
-                <a:ea typeface="IBM Plex Sans" pitchFamily="34" charset="-122"/>
-                <a:cs typeface="IBM Plex Sans" pitchFamily="34" charset="-120"/>
-              </a:rPr>
-              <a:t>ОРД и приказы</a:t>
-            </a:r>
-            <a:endParaRPr lang="en-US" sz="850" dirty="0"/>
+                <a:latin typeface="Arial" pitchFamily="34" charset="0"/>
+                <a:ea typeface="Arial" pitchFamily="34" charset="-122"/>
+                <a:cs typeface="Arial" pitchFamily="34" charset="-120"/>
+              </a:rPr>
+              <a:t>Настраиваем маршруты</a:t>
+            </a:r>
+            <a:endParaRPr lang="en-US" sz="900" dirty="0"/>
           </a:p>
           <a:p>
             <a:pPr indent="0" marL="0">
@@ -4647,34 +4602,34 @@
                 <a:spcPct val="105000"/>
               </a:lnSpc>
               <a:spcAft>
-                <a:spcPts val="400"/>
+                <a:spcPts val="500"/>
               </a:spcAft>
               <a:buNone/>
             </a:pPr>
             <a:r>
-              <a:rPr lang="en-US" sz="950" dirty="0">
+              <a:rPr lang="en-US" sz="1000" dirty="0">
                 <a:solidFill>
                   <a:srgbClr val="59626B"/>
                 </a:solidFill>
-                <a:latin typeface="IBM Plex Sans" pitchFamily="34" charset="0"/>
-                <a:ea typeface="IBM Plex Sans" pitchFamily="34" charset="-122"/>
-                <a:cs typeface="IBM Plex Sans" pitchFamily="34" charset="-120"/>
-              </a:rPr>
-              <a:t>Контроль ознакомления и исполнения распорядительных документов по всей сети.</a:t>
-            </a:r>
-            <a:endParaRPr lang="en-US" sz="850" dirty="0"/>
-          </a:p>
-        </p:txBody>
-      </p:sp>
-      <p:sp>
-        <p:nvSpPr>
-          <p:cNvPr id="15" name="Shape 13"/>
-          <p:cNvSpPr/>
-          <p:nvPr/>
-        </p:nvSpPr>
-        <p:spPr>
-          <a:xfrm>
-            <a:off x="6065520" y="1874520"/>
+                <a:latin typeface="Arial" pitchFamily="34" charset="0"/>
+                <a:ea typeface="Arial" pitchFamily="34" charset="-122"/>
+                <a:cs typeface="Arial" pitchFamily="34" charset="-120"/>
+              </a:rPr>
+              <a:t>Этапы, сроки, согласующие — без кода.</a:t>
+            </a:r>
+            <a:endParaRPr lang="en-US" sz="900" dirty="0"/>
+          </a:p>
+        </p:txBody>
+      </p:sp>
+      <p:sp>
+        <p:nvSpPr>
+          <p:cNvPr id="18" name="Shape 16"/>
+          <p:cNvSpPr/>
+          <p:nvPr/>
+        </p:nvSpPr>
+        <p:spPr>
+          <a:xfrm>
+            <a:off x="6065520" y="2926080"/>
             <a:ext cx="2621280" cy="1371600"/>
           </a:xfrm>
           <a:prstGeom prst="roundRect">
@@ -4702,13 +4657,13 @@
       </p:sp>
       <p:sp>
         <p:nvSpPr>
-          <p:cNvPr id="16" name="Text 14"/>
-          <p:cNvSpPr/>
-          <p:nvPr/>
-        </p:nvSpPr>
-        <p:spPr>
-          <a:xfrm>
-            <a:off x="6083808" y="1874520"/>
+          <p:cNvPr id="19" name="Text 17"/>
+          <p:cNvSpPr/>
+          <p:nvPr/>
+        </p:nvSpPr>
+        <p:spPr>
+          <a:xfrm>
+            <a:off x="6083808" y="2926080"/>
             <a:ext cx="2584704" cy="1371600"/>
           </a:xfrm>
           <a:prstGeom prst="rect">
@@ -4718,7 +4673,7 @@
           <a:ln/>
         </p:spPr>
         <p:txBody>
-          <a:bodyPr wrap="square" lIns="1905" tIns="1905" rIns="1905" bIns="1905" rtlCol="0" anchor="t"/>
+          <a:bodyPr wrap="square" lIns="2032" tIns="2032" rIns="2032" bIns="2032" rtlCol="0" anchor="t"/>
           <a:lstStyle/>
           <a:p>
             <a:pPr indent="0" marL="0">
@@ -4726,22 +4681,22 @@
                 <a:spcPct val="105000"/>
               </a:lnSpc>
               <a:spcAft>
-                <a:spcPts val="400"/>
+                <a:spcPts val="500"/>
               </a:spcAft>
               <a:buNone/>
             </a:pPr>
             <a:r>
-              <a:rPr lang="en-US" sz="850" spc="100" kern="0" dirty="0">
-                <a:solidFill>
-                  <a:srgbClr val="1D5C9A"/>
-                </a:solidFill>
-                <a:latin typeface="IBM Plex Mono" pitchFamily="34" charset="0"/>
-                <a:ea typeface="IBM Plex Mono" pitchFamily="34" charset="-122"/>
-                <a:cs typeface="IBM Plex Mono" pitchFamily="34" charset="-120"/>
-              </a:rPr>
-              <a:t>ЛОГИСТИКА</a:t>
-            </a:r>
-            <a:endParaRPr lang="en-US" sz="850" dirty="0"/>
+              <a:rPr lang="en-US" sz="900" dirty="0">
+                <a:solidFill>
+                  <a:srgbClr val="B25A1E"/>
+                </a:solidFill>
+                <a:latin typeface="Courier New" pitchFamily="34" charset="0"/>
+                <a:ea typeface="Courier New" pitchFamily="34" charset="-122"/>
+                <a:cs typeface="Courier New" pitchFamily="34" charset="-120"/>
+              </a:rPr>
+              <a:t>ШАГ 03</a:t>
+            </a:r>
+            <a:endParaRPr lang="en-US" sz="900" dirty="0"/>
           </a:p>
           <a:p>
             <a:pPr indent="0" marL="0">
@@ -4749,22 +4704,22 @@
                 <a:spcPct val="105000"/>
               </a:lnSpc>
               <a:spcAft>
-                <a:spcPts val="400"/>
+                <a:spcPts val="500"/>
               </a:spcAft>
               <a:buNone/>
             </a:pPr>
             <a:r>
-              <a:rPr lang="en-US" sz="1300" b="1" dirty="0">
+              <a:rPr lang="en-US" sz="1400" b="1" dirty="0">
                 <a:solidFill>
                   <a:srgbClr val="171B20"/>
                 </a:solidFill>
-                <a:latin typeface="IBM Plex Sans" pitchFamily="34" charset="0"/>
-                <a:ea typeface="IBM Plex Sans" pitchFamily="34" charset="-122"/>
-                <a:cs typeface="IBM Plex Sans" pitchFamily="34" charset="-120"/>
-              </a:rPr>
-              <a:t>Корреспонденция</a:t>
-            </a:r>
-            <a:endParaRPr lang="en-US" sz="850" dirty="0"/>
+                <a:latin typeface="Arial" pitchFamily="34" charset="0"/>
+                <a:ea typeface="Arial" pitchFamily="34" charset="-122"/>
+                <a:cs typeface="Arial" pitchFamily="34" charset="-120"/>
+              </a:rPr>
+              <a:t>Запуск и адаптация</a:t>
+            </a:r>
+            <a:endParaRPr lang="en-US" sz="900" dirty="0"/>
           </a:p>
           <a:p>
             <a:pPr indent="0" marL="0">
@@ -4772,430 +4727,75 @@
                 <a:spcPct val="105000"/>
               </a:lnSpc>
               <a:spcAft>
-                <a:spcPts val="400"/>
+                <a:spcPts val="500"/>
               </a:spcAft>
               <a:buNone/>
             </a:pPr>
             <a:r>
+              <a:rPr lang="en-US" sz="1000" dirty="0">
+                <a:solidFill>
+                  <a:srgbClr val="59626B"/>
+                </a:solidFill>
+                <a:latin typeface="Arial" pitchFamily="34" charset="0"/>
+                <a:ea typeface="Arial" pitchFamily="34" charset="-122"/>
+                <a:cs typeface="Arial" pitchFamily="34" charset="-120"/>
+              </a:rPr>
+              <a:t>Обучение, поддержка, обновления.</a:t>
+            </a:r>
+            <a:endParaRPr lang="en-US" sz="900" dirty="0"/>
+          </a:p>
+        </p:txBody>
+      </p:sp>
+      <p:sp>
+        <p:nvSpPr>
+          <p:cNvPr id="20" name="Text 18"/>
+          <p:cNvSpPr/>
+          <p:nvPr/>
+        </p:nvSpPr>
+        <p:spPr>
+          <a:xfrm>
+            <a:off x="457200" y="4434840"/>
+            <a:ext cx="8229600" cy="274320"/>
+          </a:xfrm>
+          <a:prstGeom prst="rect">
+            <a:avLst/>
+          </a:prstGeom>
+          <a:noFill/>
+          <a:ln/>
+        </p:spPr>
+        <p:txBody>
+          <a:bodyPr wrap="square" lIns="0" tIns="0" rIns="0" bIns="0" rtlCol="0" anchor="ctr"/>
+          <a:lstStyle/>
+          <a:p>
+            <a:pPr indent="0" marL="0">
+              <a:buNone/>
+            </a:pPr>
+            <a:r>
               <a:rPr lang="en-US" sz="950" dirty="0">
                 <a:solidFill>
                   <a:srgbClr val="59626B"/>
                 </a:solidFill>
-                <a:latin typeface="IBM Plex Sans" pitchFamily="34" charset="0"/>
-                <a:ea typeface="IBM Plex Sans" pitchFamily="34" charset="-122"/>
-                <a:cs typeface="IBM Plex Sans" pitchFamily="34" charset="-120"/>
-              </a:rPr>
-              <a:t>Единый учёт входящих и исходящих, поручения и журналы — ничего не теряется.</a:t>
-            </a:r>
-            <a:endParaRPr lang="en-US" sz="850" dirty="0"/>
-          </a:p>
-        </p:txBody>
-      </p:sp>
-      <p:sp>
-        <p:nvSpPr>
-          <p:cNvPr id="17" name="Text 15"/>
-          <p:cNvSpPr/>
-          <p:nvPr/>
-        </p:nvSpPr>
-        <p:spPr>
-          <a:xfrm>
-            <a:off x="457200" y="3520440"/>
-            <a:ext cx="822960" cy="457200"/>
-          </a:xfrm>
-          <a:prstGeom prst="rect">
-            <a:avLst/>
-          </a:prstGeom>
-          <a:noFill/>
-          <a:ln/>
-        </p:spPr>
-        <p:txBody>
-          <a:bodyPr wrap="square" lIns="0" tIns="0" rIns="0" bIns="0" rtlCol="0" anchor="ctr"/>
-          <a:lstStyle/>
-          <a:p>
-            <a:pPr indent="0" marL="0">
-              <a:buNone/>
-            </a:pPr>
-            <a:r>
-              <a:rPr lang="en-US" sz="950" dirty="0">
-                <a:solidFill>
-                  <a:srgbClr val="59626B"/>
-                </a:solidFill>
-                <a:latin typeface="IBM Plex Mono" pitchFamily="34" charset="0"/>
-                <a:ea typeface="IBM Plex Mono" pitchFamily="34" charset="-122"/>
-                <a:cs typeface="IBM Plex Mono" pitchFamily="34" charset="-120"/>
-              </a:rPr>
-              <a:t>Клиенты:</a:t>
+                <a:latin typeface="Courier New" pitchFamily="34" charset="0"/>
+                <a:ea typeface="Courier New" pitchFamily="34" charset="-122"/>
+                <a:cs typeface="Courier New" pitchFamily="34" charset="-120"/>
+              </a:rPr>
+              <a:t>На готовых модулях ELMA365 · мобильное приложение в комплекте · один раз, </a:t>
+            </a:r>
+            <a:pPr indent="0" marL="0">
+              <a:buNone/>
+            </a:pPr>
+            <a:r>
+              <a:rPr lang="en-US" sz="950" b="1" dirty="0">
+                <a:solidFill>
+                  <a:srgbClr val="171B20"/>
+                </a:solidFill>
+                <a:latin typeface="Courier New" pitchFamily="34" charset="0"/>
+                <a:ea typeface="Courier New" pitchFamily="34" charset="-122"/>
+                <a:cs typeface="Courier New" pitchFamily="34" charset="-120"/>
+              </a:rPr>
+              <a:t>без подписки</a:t>
             </a:r>
             <a:endParaRPr lang="en-US" sz="950" dirty="0"/>
-          </a:p>
-        </p:txBody>
-      </p:sp>
-      <p:sp>
-        <p:nvSpPr>
-          <p:cNvPr id="18" name="Shape 16"/>
-          <p:cNvSpPr/>
-          <p:nvPr/>
-        </p:nvSpPr>
-        <p:spPr>
-          <a:xfrm>
-            <a:off x="1280160" y="3520440"/>
-            <a:ext cx="1364285" cy="457200"/>
-          </a:xfrm>
-          <a:prstGeom prst="roundRect">
-            <a:avLst>
-              <a:gd name="adj" fmla="val 8000"/>
-            </a:avLst>
-          </a:prstGeom>
-          <a:solidFill>
-            <a:srgbClr val="F3F5F6"/>
-          </a:solidFill>
-          <a:ln w="12700">
-            <a:solidFill>
-              <a:srgbClr val="D7DCE1"/>
-            </a:solidFill>
-            <a:prstDash val="dash"/>
-          </a:ln>
-        </p:spPr>
-      </p:sp>
-      <p:sp>
-        <p:nvSpPr>
-          <p:cNvPr id="19" name="Text 17"/>
-          <p:cNvSpPr/>
-          <p:nvPr/>
-        </p:nvSpPr>
-        <p:spPr>
-          <a:xfrm>
-            <a:off x="1280160" y="3520440"/>
-            <a:ext cx="1364285" cy="457200"/>
-          </a:xfrm>
-          <a:prstGeom prst="rect">
-            <a:avLst/>
-          </a:prstGeom>
-          <a:noFill/>
-          <a:ln/>
-        </p:spPr>
-        <p:txBody>
-          <a:bodyPr wrap="square" lIns="0" tIns="0" rIns="0" bIns="0" rtlCol="0" anchor="ctr"/>
-          <a:lstStyle/>
-          <a:p>
-            <a:pPr algn="ctr" indent="0" marL="0">
-              <a:buNone/>
-            </a:pPr>
-            <a:r>
-              <a:rPr lang="en-US" sz="900" dirty="0">
-                <a:solidFill>
-                  <a:srgbClr val="A7AEB4"/>
-                </a:solidFill>
-                <a:latin typeface="IBM Plex Mono" pitchFamily="34" charset="0"/>
-                <a:ea typeface="IBM Plex Mono" pitchFamily="34" charset="-122"/>
-                <a:cs typeface="IBM Plex Mono" pitchFamily="34" charset="-120"/>
-              </a:rPr>
-              <a:t>лого</a:t>
-            </a:r>
-            <a:endParaRPr lang="en-US" sz="900" dirty="0"/>
-          </a:p>
-        </p:txBody>
-      </p:sp>
-      <p:sp>
-        <p:nvSpPr>
-          <p:cNvPr id="20" name="Shape 18"/>
-          <p:cNvSpPr/>
-          <p:nvPr/>
-        </p:nvSpPr>
-        <p:spPr>
-          <a:xfrm>
-            <a:off x="2790749" y="3520440"/>
-            <a:ext cx="1364285" cy="457200"/>
-          </a:xfrm>
-          <a:prstGeom prst="roundRect">
-            <a:avLst>
-              <a:gd name="adj" fmla="val 8000"/>
-            </a:avLst>
-          </a:prstGeom>
-          <a:solidFill>
-            <a:srgbClr val="F3F5F6"/>
-          </a:solidFill>
-          <a:ln w="12700">
-            <a:solidFill>
-              <a:srgbClr val="D7DCE1"/>
-            </a:solidFill>
-            <a:prstDash val="dash"/>
-          </a:ln>
-        </p:spPr>
-      </p:sp>
-      <p:sp>
-        <p:nvSpPr>
-          <p:cNvPr id="21" name="Text 19"/>
-          <p:cNvSpPr/>
-          <p:nvPr/>
-        </p:nvSpPr>
-        <p:spPr>
-          <a:xfrm>
-            <a:off x="2790749" y="3520440"/>
-            <a:ext cx="1364285" cy="457200"/>
-          </a:xfrm>
-          <a:prstGeom prst="rect">
-            <a:avLst/>
-          </a:prstGeom>
-          <a:noFill/>
-          <a:ln/>
-        </p:spPr>
-        <p:txBody>
-          <a:bodyPr wrap="square" lIns="0" tIns="0" rIns="0" bIns="0" rtlCol="0" anchor="ctr"/>
-          <a:lstStyle/>
-          <a:p>
-            <a:pPr algn="ctr" indent="0" marL="0">
-              <a:buNone/>
-            </a:pPr>
-            <a:r>
-              <a:rPr lang="en-US" sz="900" dirty="0">
-                <a:solidFill>
-                  <a:srgbClr val="A7AEB4"/>
-                </a:solidFill>
-                <a:latin typeface="IBM Plex Mono" pitchFamily="34" charset="0"/>
-                <a:ea typeface="IBM Plex Mono" pitchFamily="34" charset="-122"/>
-                <a:cs typeface="IBM Plex Mono" pitchFamily="34" charset="-120"/>
-              </a:rPr>
-              <a:t>лого</a:t>
-            </a:r>
-            <a:endParaRPr lang="en-US" sz="900" dirty="0"/>
-          </a:p>
-        </p:txBody>
-      </p:sp>
-      <p:sp>
-        <p:nvSpPr>
-          <p:cNvPr id="22" name="Shape 20"/>
-          <p:cNvSpPr/>
-          <p:nvPr/>
-        </p:nvSpPr>
-        <p:spPr>
-          <a:xfrm>
-            <a:off x="4301338" y="3520440"/>
-            <a:ext cx="1364285" cy="457200"/>
-          </a:xfrm>
-          <a:prstGeom prst="roundRect">
-            <a:avLst>
-              <a:gd name="adj" fmla="val 8000"/>
-            </a:avLst>
-          </a:prstGeom>
-          <a:solidFill>
-            <a:srgbClr val="F3F5F6"/>
-          </a:solidFill>
-          <a:ln w="12700">
-            <a:solidFill>
-              <a:srgbClr val="D7DCE1"/>
-            </a:solidFill>
-            <a:prstDash val="dash"/>
-          </a:ln>
-        </p:spPr>
-      </p:sp>
-      <p:sp>
-        <p:nvSpPr>
-          <p:cNvPr id="23" name="Text 21"/>
-          <p:cNvSpPr/>
-          <p:nvPr/>
-        </p:nvSpPr>
-        <p:spPr>
-          <a:xfrm>
-            <a:off x="4301338" y="3520440"/>
-            <a:ext cx="1364285" cy="457200"/>
-          </a:xfrm>
-          <a:prstGeom prst="rect">
-            <a:avLst/>
-          </a:prstGeom>
-          <a:noFill/>
-          <a:ln/>
-        </p:spPr>
-        <p:txBody>
-          <a:bodyPr wrap="square" lIns="0" tIns="0" rIns="0" bIns="0" rtlCol="0" anchor="ctr"/>
-          <a:lstStyle/>
-          <a:p>
-            <a:pPr algn="ctr" indent="0" marL="0">
-              <a:buNone/>
-            </a:pPr>
-            <a:r>
-              <a:rPr lang="en-US" sz="900" dirty="0">
-                <a:solidFill>
-                  <a:srgbClr val="A7AEB4"/>
-                </a:solidFill>
-                <a:latin typeface="IBM Plex Mono" pitchFamily="34" charset="0"/>
-                <a:ea typeface="IBM Plex Mono" pitchFamily="34" charset="-122"/>
-                <a:cs typeface="IBM Plex Mono" pitchFamily="34" charset="-120"/>
-              </a:rPr>
-              <a:t>лого</a:t>
-            </a:r>
-            <a:endParaRPr lang="en-US" sz="900" dirty="0"/>
-          </a:p>
-        </p:txBody>
-      </p:sp>
-      <p:sp>
-        <p:nvSpPr>
-          <p:cNvPr id="24" name="Shape 22"/>
-          <p:cNvSpPr/>
-          <p:nvPr/>
-        </p:nvSpPr>
-        <p:spPr>
-          <a:xfrm>
-            <a:off x="5811926" y="3520440"/>
-            <a:ext cx="1364285" cy="457200"/>
-          </a:xfrm>
-          <a:prstGeom prst="roundRect">
-            <a:avLst>
-              <a:gd name="adj" fmla="val 8000"/>
-            </a:avLst>
-          </a:prstGeom>
-          <a:solidFill>
-            <a:srgbClr val="F3F5F6"/>
-          </a:solidFill>
-          <a:ln w="12700">
-            <a:solidFill>
-              <a:srgbClr val="D7DCE1"/>
-            </a:solidFill>
-            <a:prstDash val="dash"/>
-          </a:ln>
-        </p:spPr>
-      </p:sp>
-      <p:sp>
-        <p:nvSpPr>
-          <p:cNvPr id="25" name="Text 23"/>
-          <p:cNvSpPr/>
-          <p:nvPr/>
-        </p:nvSpPr>
-        <p:spPr>
-          <a:xfrm>
-            <a:off x="5811926" y="3520440"/>
-            <a:ext cx="1364285" cy="457200"/>
-          </a:xfrm>
-          <a:prstGeom prst="rect">
-            <a:avLst/>
-          </a:prstGeom>
-          <a:noFill/>
-          <a:ln/>
-        </p:spPr>
-        <p:txBody>
-          <a:bodyPr wrap="square" lIns="0" tIns="0" rIns="0" bIns="0" rtlCol="0" anchor="ctr"/>
-          <a:lstStyle/>
-          <a:p>
-            <a:pPr algn="ctr" indent="0" marL="0">
-              <a:buNone/>
-            </a:pPr>
-            <a:r>
-              <a:rPr lang="en-US" sz="900" dirty="0">
-                <a:solidFill>
-                  <a:srgbClr val="A7AEB4"/>
-                </a:solidFill>
-                <a:latin typeface="IBM Plex Mono" pitchFamily="34" charset="0"/>
-                <a:ea typeface="IBM Plex Mono" pitchFamily="34" charset="-122"/>
-                <a:cs typeface="IBM Plex Mono" pitchFamily="34" charset="-120"/>
-              </a:rPr>
-              <a:t>лого</a:t>
-            </a:r>
-            <a:endParaRPr lang="en-US" sz="900" dirty="0"/>
-          </a:p>
-        </p:txBody>
-      </p:sp>
-      <p:sp>
-        <p:nvSpPr>
-          <p:cNvPr id="26" name="Shape 24"/>
-          <p:cNvSpPr/>
-          <p:nvPr/>
-        </p:nvSpPr>
-        <p:spPr>
-          <a:xfrm>
-            <a:off x="7322515" y="3520440"/>
-            <a:ext cx="1364285" cy="457200"/>
-          </a:xfrm>
-          <a:prstGeom prst="roundRect">
-            <a:avLst>
-              <a:gd name="adj" fmla="val 8000"/>
-            </a:avLst>
-          </a:prstGeom>
-          <a:solidFill>
-            <a:srgbClr val="F3F5F6"/>
-          </a:solidFill>
-          <a:ln w="12700">
-            <a:solidFill>
-              <a:srgbClr val="D7DCE1"/>
-            </a:solidFill>
-            <a:prstDash val="dash"/>
-          </a:ln>
-        </p:spPr>
-      </p:sp>
-      <p:sp>
-        <p:nvSpPr>
-          <p:cNvPr id="27" name="Text 25"/>
-          <p:cNvSpPr/>
-          <p:nvPr/>
-        </p:nvSpPr>
-        <p:spPr>
-          <a:xfrm>
-            <a:off x="7322515" y="3520440"/>
-            <a:ext cx="1364285" cy="457200"/>
-          </a:xfrm>
-          <a:prstGeom prst="rect">
-            <a:avLst/>
-          </a:prstGeom>
-          <a:noFill/>
-          <a:ln/>
-        </p:spPr>
-        <p:txBody>
-          <a:bodyPr wrap="square" lIns="0" tIns="0" rIns="0" bIns="0" rtlCol="0" anchor="ctr"/>
-          <a:lstStyle/>
-          <a:p>
-            <a:pPr algn="ctr" indent="0" marL="0">
-              <a:buNone/>
-            </a:pPr>
-            <a:r>
-              <a:rPr lang="en-US" sz="900" dirty="0">
-                <a:solidFill>
-                  <a:srgbClr val="A7AEB4"/>
-                </a:solidFill>
-                <a:latin typeface="IBM Plex Mono" pitchFamily="34" charset="0"/>
-                <a:ea typeface="IBM Plex Mono" pitchFamily="34" charset="-122"/>
-                <a:cs typeface="IBM Plex Mono" pitchFamily="34" charset="-120"/>
-              </a:rPr>
-              <a:t>лого</a:t>
-            </a:r>
-            <a:endParaRPr lang="en-US" sz="900" dirty="0"/>
-          </a:p>
-        </p:txBody>
-      </p:sp>
-      <p:sp>
-        <p:nvSpPr>
-          <p:cNvPr id="28" name="Text 26"/>
-          <p:cNvSpPr/>
-          <p:nvPr/>
-        </p:nvSpPr>
-        <p:spPr>
-          <a:xfrm>
-            <a:off x="457200" y="4114800"/>
-            <a:ext cx="8229600" cy="274320"/>
-          </a:xfrm>
-          <a:prstGeom prst="rect">
-            <a:avLst/>
-          </a:prstGeom>
-          <a:noFill/>
-          <a:ln/>
-        </p:spPr>
-        <p:txBody>
-          <a:bodyPr wrap="square" lIns="0" tIns="0" rIns="0" bIns="0" rtlCol="0" anchor="ctr"/>
-          <a:lstStyle/>
-          <a:p>
-            <a:pPr indent="0" marL="0">
-              <a:buNone/>
-            </a:pPr>
-            <a:r>
-              <a:rPr lang="en-US" sz="1000" i="1" dirty="0">
-                <a:solidFill>
-                  <a:srgbClr val="59626B"/>
-                </a:solidFill>
-                <a:latin typeface="IBM Plex Sans" pitchFamily="34" charset="0"/>
-                <a:ea typeface="IBM Plex Sans" pitchFamily="34" charset="-122"/>
-                <a:cs typeface="IBM Plex Sans" pitchFamily="34" charset="-120"/>
-              </a:rPr>
-              <a:t>Кейсы с названиями компаний, логотипами и цифрами добавим по согласованию с клиентами.</a:t>
-            </a:r>
-            <a:endParaRPr lang="en-US" sz="1000" dirty="0"/>
           </a:p>
         </p:txBody>
       </p:sp>
@@ -5287,9 +4887,9 @@
                 <a:solidFill>
                   <a:srgbClr val="1D5C9A"/>
                 </a:solidFill>
-                <a:latin typeface="IBM Plex Sans" pitchFamily="34" charset="0"/>
-                <a:ea typeface="IBM Plex Sans" pitchFamily="34" charset="-122"/>
-                <a:cs typeface="IBM Plex Sans" pitchFamily="34" charset="-120"/>
+                <a:latin typeface="Arial" pitchFamily="34" charset="0"/>
+                <a:ea typeface="Arial" pitchFamily="34" charset="-122"/>
+                <a:cs typeface="Arial" pitchFamily="34" charset="-120"/>
               </a:rPr>
               <a:t>WD</a:t>
             </a:r>
@@ -5326,9 +4926,9 @@
                 <a:solidFill>
                   <a:srgbClr val="171B20"/>
                 </a:solidFill>
-                <a:latin typeface="IBM Plex Sans" pitchFamily="34" charset="0"/>
-                <a:ea typeface="IBM Plex Sans" pitchFamily="34" charset="-122"/>
-                <a:cs typeface="IBM Plex Sans" pitchFamily="34" charset="-120"/>
+                <a:latin typeface="Arial" pitchFamily="34" charset="0"/>
+                <a:ea typeface="Arial" pitchFamily="34" charset="-122"/>
+                <a:cs typeface="Arial" pitchFamily="34" charset="-120"/>
               </a:rPr>
               <a:t>WhatDaDev</a:t>
             </a:r>
@@ -5365,11 +4965,11 @@
                 <a:solidFill>
                   <a:srgbClr val="59626B"/>
                 </a:solidFill>
-                <a:latin typeface="IBM Plex Mono" pitchFamily="34" charset="0"/>
-                <a:ea typeface="IBM Plex Mono" pitchFamily="34" charset="-122"/>
-                <a:cs typeface="IBM Plex Mono" pitchFamily="34" charset="-120"/>
-              </a:rPr>
-              <a:t>Экосистема</a:t>
+                <a:latin typeface="Courier New" pitchFamily="34" charset="0"/>
+                <a:ea typeface="Courier New" pitchFamily="34" charset="-122"/>
+                <a:cs typeface="Courier New" pitchFamily="34" charset="-120"/>
+              </a:rPr>
+              <a:t>Проекты · предварительно</a:t>
             </a:r>
             <a:endParaRPr lang="en-US" sz="900" dirty="0"/>
           </a:p>
@@ -5377,34 +4977,112 @@
       </p:sp>
       <p:sp>
         <p:nvSpPr>
-          <p:cNvPr id="6" name="Shape 4"/>
-          <p:cNvSpPr/>
-          <p:nvPr/>
-        </p:nvSpPr>
-        <p:spPr>
-          <a:xfrm>
-            <a:off x="457200" y="937260"/>
+          <p:cNvPr id="6" name="Text 4"/>
+          <p:cNvSpPr/>
+          <p:nvPr/>
+        </p:nvSpPr>
+        <p:spPr>
+          <a:xfrm>
+            <a:off x="457200" y="4736592"/>
+            <a:ext cx="3657600" cy="274320"/>
+          </a:xfrm>
+          <a:prstGeom prst="rect">
+            <a:avLst/>
+          </a:prstGeom>
+          <a:noFill/>
+          <a:ln/>
+        </p:spPr>
+        <p:txBody>
+          <a:bodyPr wrap="square" lIns="0" tIns="0" rIns="0" bIns="0" rtlCol="0" anchor="ctr"/>
+          <a:lstStyle/>
+          <a:p>
+            <a:pPr indent="0" marL="0">
+              <a:buNone/>
+            </a:pPr>
+            <a:r>
+              <a:rPr lang="en-US" sz="850" dirty="0">
+                <a:solidFill>
+                  <a:srgbClr val="59626B"/>
+                </a:solidFill>
+                <a:latin typeface="Courier New" pitchFamily="34" charset="0"/>
+                <a:ea typeface="Courier New" pitchFamily="34" charset="-122"/>
+                <a:cs typeface="Courier New" pitchFamily="34" charset="-120"/>
+              </a:rPr>
+              <a:t>whatdadev.ru</a:t>
+            </a:r>
+            <a:endParaRPr lang="en-US" sz="850" dirty="0"/>
+          </a:p>
+        </p:txBody>
+      </p:sp>
+      <p:sp>
+        <p:nvSpPr>
+          <p:cNvPr id="7" name="Text 5"/>
+          <p:cNvSpPr/>
+          <p:nvPr/>
+        </p:nvSpPr>
+        <p:spPr>
+          <a:xfrm>
+            <a:off x="5029200" y="4736592"/>
+            <a:ext cx="3657600" cy="274320"/>
+          </a:xfrm>
+          <a:prstGeom prst="rect">
+            <a:avLst/>
+          </a:prstGeom>
+          <a:noFill/>
+          <a:ln/>
+        </p:spPr>
+        <p:txBody>
+          <a:bodyPr wrap="square" lIns="0" tIns="0" rIns="0" bIns="0" rtlCol="0" anchor="ctr"/>
+          <a:lstStyle/>
+          <a:p>
+            <a:pPr algn="r" indent="0" marL="0">
+              <a:buNone/>
+            </a:pPr>
+            <a:r>
+              <a:rPr lang="en-US" sz="850" dirty="0">
+                <a:solidFill>
+                  <a:srgbClr val="59626B"/>
+                </a:solidFill>
+                <a:latin typeface="Courier New" pitchFamily="34" charset="0"/>
+                <a:ea typeface="Courier New" pitchFamily="34" charset="-122"/>
+                <a:cs typeface="Courier New" pitchFamily="34" charset="-120"/>
+              </a:rPr>
+              <a:t>05 / 07</a:t>
+            </a:r>
+            <a:endParaRPr lang="en-US" sz="850" dirty="0"/>
+          </a:p>
+        </p:txBody>
+      </p:sp>
+      <p:sp>
+        <p:nvSpPr>
+          <p:cNvPr id="8" name="Shape 6"/>
+          <p:cNvSpPr/>
+          <p:nvPr/>
+        </p:nvSpPr>
+        <p:spPr>
+          <a:xfrm>
+            <a:off x="457200" y="914400"/>
             <a:ext cx="100584" cy="100584"/>
           </a:xfrm>
           <a:prstGeom prst="rect">
             <a:avLst/>
           </a:prstGeom>
           <a:solidFill>
-            <a:srgbClr val="1D5C9A"/>
+            <a:srgbClr val="B25A1E"/>
           </a:solidFill>
           <a:ln/>
         </p:spPr>
       </p:sp>
       <p:sp>
         <p:nvSpPr>
-          <p:cNvPr id="7" name="Text 5"/>
-          <p:cNvSpPr/>
-          <p:nvPr/>
-        </p:nvSpPr>
-        <p:spPr>
-          <a:xfrm>
-            <a:off x="658368" y="896112"/>
-            <a:ext cx="7315200" cy="219456"/>
+          <p:cNvPr id="9" name="Text 7"/>
+          <p:cNvSpPr/>
+          <p:nvPr/>
+        </p:nvSpPr>
+        <p:spPr>
+          <a:xfrm>
+            <a:off x="658368" y="850392"/>
+            <a:ext cx="7772400" cy="237744"/>
           </a:xfrm>
           <a:prstGeom prst="rect">
             <a:avLst/>
@@ -5422,13 +5100,13 @@
             <a:r>
               <a:rPr lang="en-US" sz="1050" spc="200" kern="0" dirty="0">
                 <a:solidFill>
-                  <a:srgbClr val="1D5C9A"/>
-                </a:solidFill>
-                <a:latin typeface="IBM Plex Mono" pitchFamily="34" charset="0"/>
-                <a:ea typeface="IBM Plex Mono" pitchFamily="34" charset="-122"/>
-                <a:cs typeface="IBM Plex Mono" pitchFamily="34" charset="-120"/>
-              </a:rPr>
-              <a:t>ВЕСЬ КОНТУР НА ОДНОЙ ПЛАТФОРМЕ</a:t>
+                  <a:srgbClr val="B25A1E"/>
+                </a:solidFill>
+                <a:latin typeface="Courier New" pitchFamily="34" charset="0"/>
+                <a:ea typeface="Courier New" pitchFamily="34" charset="-122"/>
+                <a:cs typeface="Courier New" pitchFamily="34" charset="-120"/>
+              </a:rPr>
+              <a:t>РЕЗУЛЬТАТ, А НЕ СЛАЙДЫ</a:t>
             </a:r>
             <a:endParaRPr lang="en-US" sz="1050" dirty="0"/>
           </a:p>
@@ -5436,14 +5114,14 @@
       </p:sp>
       <p:sp>
         <p:nvSpPr>
-          <p:cNvPr id="8" name="Text 6"/>
-          <p:cNvSpPr/>
-          <p:nvPr/>
-        </p:nvSpPr>
-        <p:spPr>
-          <a:xfrm>
-            <a:off x="457200" y="1188720"/>
-            <a:ext cx="8229600" cy="566928"/>
+          <p:cNvPr id="10" name="Text 8"/>
+          <p:cNvSpPr/>
+          <p:nvPr/>
+        </p:nvSpPr>
+        <p:spPr>
+          <a:xfrm>
+            <a:off x="457200" y="1170432"/>
+            <a:ext cx="8229600" cy="685800"/>
           </a:xfrm>
           <a:prstGeom prst="rect">
             <a:avLst/>
@@ -5456,79 +5134,40 @@
           <a:lstStyle/>
           <a:p>
             <a:pPr indent="0" marL="0">
-              <a:buNone/>
-            </a:pPr>
-            <a:r>
-              <a:rPr lang="en-US" sz="2500" b="1" dirty="0">
+              <a:lnSpc>
+                <a:spcPts val="2415"/>
+              </a:lnSpc>
+              <a:buNone/>
+            </a:pPr>
+            <a:r>
+              <a:rPr lang="en-US" sz="2300" b="1" dirty="0">
                 <a:solidFill>
                   <a:srgbClr val="171B20"/>
                 </a:solidFill>
-                <a:latin typeface="IBM Plex Sans" pitchFamily="34" charset="0"/>
-                <a:ea typeface="IBM Plex Sans" pitchFamily="34" charset="-122"/>
-                <a:cs typeface="IBM Plex Sans" pitchFamily="34" charset="-120"/>
-              </a:rPr>
-              <a:t>Автоматизация на ELMA365 — не только ЭДО</a:t>
-            </a:r>
-            <a:endParaRPr lang="en-US" sz="2500" dirty="0"/>
-          </a:p>
-        </p:txBody>
-      </p:sp>
-      <p:sp>
-        <p:nvSpPr>
-          <p:cNvPr id="9" name="Text 7"/>
-          <p:cNvSpPr/>
-          <p:nvPr/>
-        </p:nvSpPr>
-        <p:spPr>
-          <a:xfrm>
-            <a:off x="457200" y="1755648"/>
-            <a:ext cx="7680960" cy="685800"/>
-          </a:xfrm>
-          <a:prstGeom prst="rect">
-            <a:avLst/>
-          </a:prstGeom>
-          <a:noFill/>
-          <a:ln/>
-        </p:spPr>
-        <p:txBody>
-          <a:bodyPr wrap="square" lIns="0" tIns="0" rIns="0" bIns="0" rtlCol="0" anchor="t"/>
-          <a:lstStyle/>
-          <a:p>
-            <a:pPr indent="0" marL="0">
-              <a:lnSpc>
-                <a:spcPct val="112000"/>
-              </a:lnSpc>
-              <a:buNone/>
-            </a:pPr>
-            <a:r>
-              <a:rPr lang="en-US" sz="1300" dirty="0">
-                <a:solidFill>
-                  <a:srgbClr val="59626B"/>
-                </a:solidFill>
-                <a:latin typeface="IBM Plex Sans" pitchFamily="34" charset="0"/>
-                <a:ea typeface="IBM Plex Sans" pitchFamily="34" charset="-122"/>
-                <a:cs typeface="IBM Plex Sans" pitchFamily="34" charset="-120"/>
-              </a:rPr>
-              <a:t>Документооборот — это вход. На той же платформе закрываем остальные процессы, без смены систем.</a:t>
-            </a:r>
-            <a:endParaRPr lang="en-US" sz="1300" dirty="0"/>
-          </a:p>
-        </p:txBody>
-      </p:sp>
-      <p:sp>
-        <p:nvSpPr>
-          <p:cNvPr id="10" name="Shape 8"/>
-          <p:cNvSpPr/>
-          <p:nvPr/>
-        </p:nvSpPr>
-        <p:spPr>
-          <a:xfrm>
-            <a:off x="457200" y="2286000"/>
-            <a:ext cx="1947672" cy="713232"/>
+                <a:latin typeface="Arial" pitchFamily="34" charset="0"/>
+                <a:ea typeface="Arial" pitchFamily="34" charset="-122"/>
+                <a:cs typeface="Arial" pitchFamily="34" charset="-120"/>
+              </a:rPr>
+              <a:t>Что меняется после внедрения</a:t>
+            </a:r>
+            <a:endParaRPr lang="en-US" sz="2300" dirty="0"/>
+          </a:p>
+        </p:txBody>
+      </p:sp>
+      <p:sp>
+        <p:nvSpPr>
+          <p:cNvPr id="11" name="Shape 9"/>
+          <p:cNvSpPr/>
+          <p:nvPr/>
+        </p:nvSpPr>
+        <p:spPr>
+          <a:xfrm>
+            <a:off x="457200" y="1920240"/>
+            <a:ext cx="8229600" cy="914400"/>
           </a:xfrm>
           <a:prstGeom prst="roundRect">
             <a:avLst>
-              <a:gd name="adj" fmla="val 6410"/>
+              <a:gd name="adj" fmla="val 6000"/>
             </a:avLst>
           </a:prstGeom>
           <a:solidFill>
@@ -5551,43 +5190,197 @@
       </p:sp>
       <p:sp>
         <p:nvSpPr>
-          <p:cNvPr id="11" name="Text 9"/>
-          <p:cNvSpPr/>
-          <p:nvPr/>
-        </p:nvSpPr>
-        <p:spPr>
-          <a:xfrm>
-            <a:off x="475488" y="2286000"/>
-            <a:ext cx="1911096" cy="713232"/>
-          </a:xfrm>
-          <a:prstGeom prst="rect">
-            <a:avLst/>
-          </a:prstGeom>
-          <a:noFill/>
-          <a:ln/>
-        </p:spPr>
-        <p:txBody>
-          <a:bodyPr wrap="square" lIns="1397" tIns="1397" rIns="1397" bIns="1397" rtlCol="0" anchor="ctr"/>
+          <p:cNvPr id="12" name="Text 10"/>
+          <p:cNvSpPr/>
+          <p:nvPr/>
+        </p:nvSpPr>
+        <p:spPr>
+          <a:xfrm>
+            <a:off x="685800" y="1920240"/>
+            <a:ext cx="1371600" cy="914400"/>
+          </a:xfrm>
+          <a:prstGeom prst="rect">
+            <a:avLst/>
+          </a:prstGeom>
+          <a:noFill/>
+          <a:ln/>
+        </p:spPr>
+        <p:txBody>
+          <a:bodyPr wrap="square" lIns="0" tIns="0" rIns="0" bIns="0" rtlCol="0" anchor="ctr"/>
+          <a:lstStyle/>
+          <a:p>
+            <a:pPr indent="0" marL="0">
+              <a:lnSpc>
+                <a:spcPct val="120000"/>
+              </a:lnSpc>
+              <a:buNone/>
+            </a:pPr>
+            <a:r>
+              <a:rPr lang="en-US" sz="900" spc="100" kern="0" dirty="0">
+                <a:solidFill>
+                  <a:srgbClr val="B25A1E"/>
+                </a:solidFill>
+                <a:latin typeface="Courier New" pitchFamily="34" charset="0"/>
+                <a:ea typeface="Courier New" pitchFamily="34" charset="-122"/>
+                <a:cs typeface="Courier New" pitchFamily="34" charset="-120"/>
+              </a:rPr>
+              <a:t>ПРОИЗВОДСТВО</a:t>
+            </a:r>
+            <a:endParaRPr lang="en-US" sz="900" dirty="0"/>
+          </a:p>
+          <a:p>
+            <a:pPr indent="0" marL="0">
+              <a:lnSpc>
+                <a:spcPct val="120000"/>
+              </a:lnSpc>
+              <a:buNone/>
+            </a:pPr>
+            <a:r>
+              <a:rPr lang="en-US" sz="900" dirty="0">
+                <a:solidFill>
+                  <a:srgbClr val="B25A1E"/>
+                </a:solidFill>
+                <a:latin typeface="Courier New" pitchFamily="34" charset="0"/>
+                <a:ea typeface="Courier New" pitchFamily="34" charset="-122"/>
+                <a:cs typeface="Courier New" pitchFamily="34" charset="-120"/>
+              </a:rPr>
+              <a:t>договоры</a:t>
+            </a:r>
+            <a:endParaRPr lang="en-US" sz="900" dirty="0"/>
+          </a:p>
+        </p:txBody>
+      </p:sp>
+      <p:sp>
+        <p:nvSpPr>
+          <p:cNvPr id="13" name="Shape 11"/>
+          <p:cNvSpPr/>
+          <p:nvPr/>
+        </p:nvSpPr>
+        <p:spPr>
+          <a:xfrm>
+            <a:off x="2148840" y="2121408"/>
+            <a:ext cx="7315" cy="512064"/>
+          </a:xfrm>
+          <a:prstGeom prst="rect">
+            <a:avLst/>
+          </a:prstGeom>
+          <a:solidFill>
+            <a:srgbClr val="D7DCE1"/>
+          </a:solidFill>
+          <a:ln/>
+        </p:spPr>
+      </p:sp>
+      <p:sp>
+        <p:nvSpPr>
+          <p:cNvPr id="14" name="Text 12"/>
+          <p:cNvSpPr/>
+          <p:nvPr/>
+        </p:nvSpPr>
+        <p:spPr>
+          <a:xfrm>
+            <a:off x="2377440" y="1920240"/>
+            <a:ext cx="6126480" cy="914400"/>
+          </a:xfrm>
+          <a:prstGeom prst="rect">
+            <a:avLst/>
+          </a:prstGeom>
+          <a:noFill/>
+          <a:ln/>
+        </p:spPr>
+        <p:txBody>
+          <a:bodyPr wrap="square" lIns="0" tIns="0" rIns="0" bIns="0" rtlCol="0" anchor="ctr"/>
+          <a:lstStyle/>
+          <a:p>
+            <a:pPr indent="0" marL="0">
+              <a:lnSpc>
+                <a:spcPct val="115000"/>
+              </a:lnSpc>
+              <a:buNone/>
+            </a:pPr>
+            <a:r>
+              <a:rPr lang="en-US" sz="1500" b="1" dirty="0">
+                <a:solidFill>
+                  <a:srgbClr val="171B20"/>
+                </a:solidFill>
+                <a:latin typeface="Arial" pitchFamily="34" charset="0"/>
+                <a:ea typeface="Arial" pitchFamily="34" charset="-122"/>
+                <a:cs typeface="Arial" pitchFamily="34" charset="-120"/>
+              </a:rPr>
+              <a:t>Единый маршрут согласования, прозрачные сроки и общий реестр — вместо переписки и потерянных версий.</a:t>
+            </a:r>
+            <a:endParaRPr lang="en-US" sz="1500" dirty="0"/>
+          </a:p>
+        </p:txBody>
+      </p:sp>
+      <p:sp>
+        <p:nvSpPr>
+          <p:cNvPr id="15" name="Shape 13"/>
+          <p:cNvSpPr/>
+          <p:nvPr/>
+        </p:nvSpPr>
+        <p:spPr>
+          <a:xfrm>
+            <a:off x="457200" y="2971800"/>
+            <a:ext cx="4023360" cy="868680"/>
+          </a:xfrm>
+          <a:prstGeom prst="roundRect">
+            <a:avLst>
+              <a:gd name="adj" fmla="val 5263"/>
+            </a:avLst>
+          </a:prstGeom>
+          <a:solidFill>
+            <a:srgbClr val="FFFFFF"/>
+          </a:solidFill>
+          <a:ln w="9525">
+            <a:solidFill>
+              <a:srgbClr val="D7DCE1"/>
+            </a:solidFill>
+            <a:prstDash val="solid"/>
+          </a:ln>
+        </p:spPr>
+      </p:sp>
+      <p:sp>
+        <p:nvSpPr>
+          <p:cNvPr id="16" name="Text 14"/>
+          <p:cNvSpPr/>
+          <p:nvPr/>
+        </p:nvSpPr>
+        <p:spPr>
+          <a:xfrm>
+            <a:off x="475488" y="2971800"/>
+            <a:ext cx="3986784" cy="868680"/>
+          </a:xfrm>
+          <a:prstGeom prst="rect">
+            <a:avLst/>
+          </a:prstGeom>
+          <a:noFill/>
+          <a:ln/>
+        </p:spPr>
+        <p:txBody>
+          <a:bodyPr wrap="square" lIns="2032" tIns="2032" rIns="2032" bIns="2032" rtlCol="0" anchor="ctr"/>
           <a:lstStyle/>
           <a:p>
             <a:pPr indent="0" marL="0">
               <a:lnSpc>
                 <a:spcPct val="105000"/>
               </a:lnSpc>
-              <a:buNone/>
-            </a:pPr>
-            <a:r>
-              <a:rPr lang="en-US" sz="1150" b="1" dirty="0">
-                <a:solidFill>
-                  <a:srgbClr val="171B20"/>
-                </a:solidFill>
-                <a:latin typeface="IBM Plex Sans" pitchFamily="34" charset="0"/>
-                <a:ea typeface="IBM Plex Sans" pitchFamily="34" charset="-122"/>
-                <a:cs typeface="IBM Plex Sans" pitchFamily="34" charset="-120"/>
-              </a:rPr>
-              <a:t>CRM</a:t>
-            </a:r>
-            <a:endParaRPr lang="en-US" sz="1150" dirty="0"/>
+              <a:spcAft>
+                <a:spcPts val="300"/>
+              </a:spcAft>
+              <a:buNone/>
+            </a:pPr>
+            <a:r>
+              <a:rPr lang="en-US" sz="850" spc="100" kern="0" dirty="0">
+                <a:solidFill>
+                  <a:srgbClr val="1D5C9A"/>
+                </a:solidFill>
+                <a:latin typeface="Courier New" pitchFamily="34" charset="0"/>
+                <a:ea typeface="Courier New" pitchFamily="34" charset="-122"/>
+                <a:cs typeface="Courier New" pitchFamily="34" charset="-120"/>
+              </a:rPr>
+              <a:t>Ритейл · сеть</a:t>
+            </a:r>
+            <a:endParaRPr lang="en-US" sz="850" dirty="0"/>
           </a:p>
           <a:p>
             <a:pPr indent="0" marL="0">
@@ -5597,34 +5390,929 @@
               <a:buNone/>
             </a:pPr>
             <a:r>
-              <a:rPr lang="en-US" sz="900" dirty="0">
+              <a:rPr lang="en-US" sz="1300" b="1" dirty="0">
+                <a:solidFill>
+                  <a:srgbClr val="171B20"/>
+                </a:solidFill>
+                <a:latin typeface="Arial" pitchFamily="34" charset="0"/>
+                <a:ea typeface="Arial" pitchFamily="34" charset="-122"/>
+                <a:cs typeface="Arial" pitchFamily="34" charset="-120"/>
+              </a:rPr>
+              <a:t>ОРД и приказы</a:t>
+            </a:r>
+            <a:endParaRPr lang="en-US" sz="850" dirty="0"/>
+          </a:p>
+          <a:p>
+            <a:pPr indent="0" marL="0">
+              <a:lnSpc>
+                <a:spcPct val="105000"/>
+              </a:lnSpc>
+              <a:buNone/>
+            </a:pPr>
+            <a:r>
+              <a:rPr lang="en-US" sz="1000" dirty="0">
                 <a:solidFill>
                   <a:srgbClr val="59626B"/>
                 </a:solidFill>
-                <a:latin typeface="IBM Plex Sans" pitchFamily="34" charset="0"/>
-                <a:ea typeface="IBM Plex Sans" pitchFamily="34" charset="-122"/>
-                <a:cs typeface="IBM Plex Sans" pitchFamily="34" charset="-120"/>
-              </a:rPr>
-              <a:t>Продажи и клиенты</a:t>
-            </a:r>
-            <a:endParaRPr lang="en-US" sz="1150" dirty="0"/>
-          </a:p>
-        </p:txBody>
-      </p:sp>
-      <p:sp>
-        <p:nvSpPr>
-          <p:cNvPr id="12" name="Shape 10"/>
-          <p:cNvSpPr/>
-          <p:nvPr/>
-        </p:nvSpPr>
-        <p:spPr>
-          <a:xfrm>
-            <a:off x="2551176" y="2286000"/>
-            <a:ext cx="1947672" cy="713232"/>
+                <a:latin typeface="Arial" pitchFamily="34" charset="0"/>
+                <a:ea typeface="Arial" pitchFamily="34" charset="-122"/>
+                <a:cs typeface="Arial" pitchFamily="34" charset="-120"/>
+              </a:rPr>
+              <a:t>Контроль ознакомления и исполнения по всей сети.</a:t>
+            </a:r>
+            <a:endParaRPr lang="en-US" sz="850" dirty="0"/>
+          </a:p>
+        </p:txBody>
+      </p:sp>
+      <p:sp>
+        <p:nvSpPr>
+          <p:cNvPr id="17" name="Shape 15"/>
+          <p:cNvSpPr/>
+          <p:nvPr/>
+        </p:nvSpPr>
+        <p:spPr>
+          <a:xfrm>
+            <a:off x="4663440" y="2971800"/>
+            <a:ext cx="4023360" cy="868680"/>
           </a:xfrm>
           <a:prstGeom prst="roundRect">
             <a:avLst>
-              <a:gd name="adj" fmla="val 6410"/>
+              <a:gd name="adj" fmla="val 5263"/>
+            </a:avLst>
+          </a:prstGeom>
+          <a:solidFill>
+            <a:srgbClr val="FFFFFF"/>
+          </a:solidFill>
+          <a:ln w="9525">
+            <a:solidFill>
+              <a:srgbClr val="D7DCE1"/>
+            </a:solidFill>
+            <a:prstDash val="solid"/>
+          </a:ln>
+        </p:spPr>
+      </p:sp>
+      <p:sp>
+        <p:nvSpPr>
+          <p:cNvPr id="18" name="Text 16"/>
+          <p:cNvSpPr/>
+          <p:nvPr/>
+        </p:nvSpPr>
+        <p:spPr>
+          <a:xfrm>
+            <a:off x="4681728" y="2971800"/>
+            <a:ext cx="3986784" cy="868680"/>
+          </a:xfrm>
+          <a:prstGeom prst="rect">
+            <a:avLst/>
+          </a:prstGeom>
+          <a:noFill/>
+          <a:ln/>
+        </p:spPr>
+        <p:txBody>
+          <a:bodyPr wrap="square" lIns="2032" tIns="2032" rIns="2032" bIns="2032" rtlCol="0" anchor="ctr"/>
+          <a:lstStyle/>
+          <a:p>
+            <a:pPr indent="0" marL="0">
+              <a:lnSpc>
+                <a:spcPct val="105000"/>
+              </a:lnSpc>
+              <a:spcAft>
+                <a:spcPts val="300"/>
+              </a:spcAft>
+              <a:buNone/>
+            </a:pPr>
+            <a:r>
+              <a:rPr lang="en-US" sz="850" spc="100" kern="0" dirty="0">
+                <a:solidFill>
+                  <a:srgbClr val="1D5C9A"/>
+                </a:solidFill>
+                <a:latin typeface="Courier New" pitchFamily="34" charset="0"/>
+                <a:ea typeface="Courier New" pitchFamily="34" charset="-122"/>
+                <a:cs typeface="Courier New" pitchFamily="34" charset="-120"/>
+              </a:rPr>
+              <a:t>Логистика</a:t>
+            </a:r>
+            <a:endParaRPr lang="en-US" sz="850" dirty="0"/>
+          </a:p>
+          <a:p>
+            <a:pPr indent="0" marL="0">
+              <a:lnSpc>
+                <a:spcPct val="105000"/>
+              </a:lnSpc>
+              <a:buNone/>
+            </a:pPr>
+            <a:r>
+              <a:rPr lang="en-US" sz="1300" b="1" dirty="0">
+                <a:solidFill>
+                  <a:srgbClr val="171B20"/>
+                </a:solidFill>
+                <a:latin typeface="Arial" pitchFamily="34" charset="0"/>
+                <a:ea typeface="Arial" pitchFamily="34" charset="-122"/>
+                <a:cs typeface="Arial" pitchFamily="34" charset="-120"/>
+              </a:rPr>
+              <a:t>Корреспонденция</a:t>
+            </a:r>
+            <a:endParaRPr lang="en-US" sz="850" dirty="0"/>
+          </a:p>
+          <a:p>
+            <a:pPr indent="0" marL="0">
+              <a:lnSpc>
+                <a:spcPct val="105000"/>
+              </a:lnSpc>
+              <a:buNone/>
+            </a:pPr>
+            <a:r>
+              <a:rPr lang="en-US" sz="1000" dirty="0">
+                <a:solidFill>
+                  <a:srgbClr val="59626B"/>
+                </a:solidFill>
+                <a:latin typeface="Arial" pitchFamily="34" charset="0"/>
+                <a:ea typeface="Arial" pitchFamily="34" charset="-122"/>
+                <a:cs typeface="Arial" pitchFamily="34" charset="-120"/>
+              </a:rPr>
+              <a:t>Единый учёт входящих и исходящих — ничего не теряется.</a:t>
+            </a:r>
+            <a:endParaRPr lang="en-US" sz="850" dirty="0"/>
+          </a:p>
+        </p:txBody>
+      </p:sp>
+      <p:sp>
+        <p:nvSpPr>
+          <p:cNvPr id="19" name="Text 17"/>
+          <p:cNvSpPr/>
+          <p:nvPr/>
+        </p:nvSpPr>
+        <p:spPr>
+          <a:xfrm>
+            <a:off x="457200" y="3977640"/>
+            <a:ext cx="822960" cy="384048"/>
+          </a:xfrm>
+          <a:prstGeom prst="rect">
+            <a:avLst/>
+          </a:prstGeom>
+          <a:noFill/>
+          <a:ln/>
+        </p:spPr>
+        <p:txBody>
+          <a:bodyPr wrap="square" lIns="0" tIns="0" rIns="0" bIns="0" rtlCol="0" anchor="ctr"/>
+          <a:lstStyle/>
+          <a:p>
+            <a:pPr indent="0" marL="0">
+              <a:buNone/>
+            </a:pPr>
+            <a:r>
+              <a:rPr lang="en-US" sz="900" dirty="0">
+                <a:solidFill>
+                  <a:srgbClr val="59626B"/>
+                </a:solidFill>
+                <a:latin typeface="Courier New" pitchFamily="34" charset="0"/>
+                <a:ea typeface="Courier New" pitchFamily="34" charset="-122"/>
+                <a:cs typeface="Courier New" pitchFamily="34" charset="-120"/>
+              </a:rPr>
+              <a:t>Клиенты:</a:t>
+            </a:r>
+            <a:endParaRPr lang="en-US" sz="900" dirty="0"/>
+          </a:p>
+        </p:txBody>
+      </p:sp>
+      <p:sp>
+        <p:nvSpPr>
+          <p:cNvPr id="20" name="Shape 18"/>
+          <p:cNvSpPr/>
+          <p:nvPr/>
+        </p:nvSpPr>
+        <p:spPr>
+          <a:xfrm>
+            <a:off x="1280160" y="3977640"/>
+            <a:ext cx="1364285" cy="384048"/>
+          </a:xfrm>
+          <a:prstGeom prst="roundRect">
+            <a:avLst>
+              <a:gd name="adj" fmla="val 7143"/>
+            </a:avLst>
+          </a:prstGeom>
+          <a:solidFill>
+            <a:srgbClr val="F3F5F6"/>
+          </a:solidFill>
+          <a:ln w="12700">
+            <a:solidFill>
+              <a:srgbClr val="D7DCE1"/>
+            </a:solidFill>
+            <a:prstDash val="dash"/>
+          </a:ln>
+        </p:spPr>
+      </p:sp>
+      <p:sp>
+        <p:nvSpPr>
+          <p:cNvPr id="21" name="Text 19"/>
+          <p:cNvSpPr/>
+          <p:nvPr/>
+        </p:nvSpPr>
+        <p:spPr>
+          <a:xfrm>
+            <a:off x="1280160" y="3977640"/>
+            <a:ext cx="1364285" cy="384048"/>
+          </a:xfrm>
+          <a:prstGeom prst="rect">
+            <a:avLst/>
+          </a:prstGeom>
+          <a:noFill/>
+          <a:ln/>
+        </p:spPr>
+        <p:txBody>
+          <a:bodyPr wrap="square" lIns="0" tIns="0" rIns="0" bIns="0" rtlCol="0" anchor="ctr"/>
+          <a:lstStyle/>
+          <a:p>
+            <a:pPr algn="ctr" indent="0" marL="0">
+              <a:buNone/>
+            </a:pPr>
+            <a:r>
+              <a:rPr lang="en-US" sz="850" dirty="0">
+                <a:solidFill>
+                  <a:srgbClr val="A7AEB4"/>
+                </a:solidFill>
+                <a:latin typeface="Courier New" pitchFamily="34" charset="0"/>
+                <a:ea typeface="Courier New" pitchFamily="34" charset="-122"/>
+                <a:cs typeface="Courier New" pitchFamily="34" charset="-120"/>
+              </a:rPr>
+              <a:t>лого</a:t>
+            </a:r>
+            <a:endParaRPr lang="en-US" sz="850" dirty="0"/>
+          </a:p>
+        </p:txBody>
+      </p:sp>
+      <p:sp>
+        <p:nvSpPr>
+          <p:cNvPr id="22" name="Shape 20"/>
+          <p:cNvSpPr/>
+          <p:nvPr/>
+        </p:nvSpPr>
+        <p:spPr>
+          <a:xfrm>
+            <a:off x="2790749" y="3977640"/>
+            <a:ext cx="1364285" cy="384048"/>
+          </a:xfrm>
+          <a:prstGeom prst="roundRect">
+            <a:avLst>
+              <a:gd name="adj" fmla="val 7143"/>
+            </a:avLst>
+          </a:prstGeom>
+          <a:solidFill>
+            <a:srgbClr val="F3F5F6"/>
+          </a:solidFill>
+          <a:ln w="12700">
+            <a:solidFill>
+              <a:srgbClr val="D7DCE1"/>
+            </a:solidFill>
+            <a:prstDash val="dash"/>
+          </a:ln>
+        </p:spPr>
+      </p:sp>
+      <p:sp>
+        <p:nvSpPr>
+          <p:cNvPr id="23" name="Text 21"/>
+          <p:cNvSpPr/>
+          <p:nvPr/>
+        </p:nvSpPr>
+        <p:spPr>
+          <a:xfrm>
+            <a:off x="2790749" y="3977640"/>
+            <a:ext cx="1364285" cy="384048"/>
+          </a:xfrm>
+          <a:prstGeom prst="rect">
+            <a:avLst/>
+          </a:prstGeom>
+          <a:noFill/>
+          <a:ln/>
+        </p:spPr>
+        <p:txBody>
+          <a:bodyPr wrap="square" lIns="0" tIns="0" rIns="0" bIns="0" rtlCol="0" anchor="ctr"/>
+          <a:lstStyle/>
+          <a:p>
+            <a:pPr algn="ctr" indent="0" marL="0">
+              <a:buNone/>
+            </a:pPr>
+            <a:r>
+              <a:rPr lang="en-US" sz="850" dirty="0">
+                <a:solidFill>
+                  <a:srgbClr val="A7AEB4"/>
+                </a:solidFill>
+                <a:latin typeface="Courier New" pitchFamily="34" charset="0"/>
+                <a:ea typeface="Courier New" pitchFamily="34" charset="-122"/>
+                <a:cs typeface="Courier New" pitchFamily="34" charset="-120"/>
+              </a:rPr>
+              <a:t>лого</a:t>
+            </a:r>
+            <a:endParaRPr lang="en-US" sz="850" dirty="0"/>
+          </a:p>
+        </p:txBody>
+      </p:sp>
+      <p:sp>
+        <p:nvSpPr>
+          <p:cNvPr id="24" name="Shape 22"/>
+          <p:cNvSpPr/>
+          <p:nvPr/>
+        </p:nvSpPr>
+        <p:spPr>
+          <a:xfrm>
+            <a:off x="4301338" y="3977640"/>
+            <a:ext cx="1364285" cy="384048"/>
+          </a:xfrm>
+          <a:prstGeom prst="roundRect">
+            <a:avLst>
+              <a:gd name="adj" fmla="val 7143"/>
+            </a:avLst>
+          </a:prstGeom>
+          <a:solidFill>
+            <a:srgbClr val="F3F5F6"/>
+          </a:solidFill>
+          <a:ln w="12700">
+            <a:solidFill>
+              <a:srgbClr val="D7DCE1"/>
+            </a:solidFill>
+            <a:prstDash val="dash"/>
+          </a:ln>
+        </p:spPr>
+      </p:sp>
+      <p:sp>
+        <p:nvSpPr>
+          <p:cNvPr id="25" name="Text 23"/>
+          <p:cNvSpPr/>
+          <p:nvPr/>
+        </p:nvSpPr>
+        <p:spPr>
+          <a:xfrm>
+            <a:off x="4301338" y="3977640"/>
+            <a:ext cx="1364285" cy="384048"/>
+          </a:xfrm>
+          <a:prstGeom prst="rect">
+            <a:avLst/>
+          </a:prstGeom>
+          <a:noFill/>
+          <a:ln/>
+        </p:spPr>
+        <p:txBody>
+          <a:bodyPr wrap="square" lIns="0" tIns="0" rIns="0" bIns="0" rtlCol="0" anchor="ctr"/>
+          <a:lstStyle/>
+          <a:p>
+            <a:pPr algn="ctr" indent="0" marL="0">
+              <a:buNone/>
+            </a:pPr>
+            <a:r>
+              <a:rPr lang="en-US" sz="850" dirty="0">
+                <a:solidFill>
+                  <a:srgbClr val="A7AEB4"/>
+                </a:solidFill>
+                <a:latin typeface="Courier New" pitchFamily="34" charset="0"/>
+                <a:ea typeface="Courier New" pitchFamily="34" charset="-122"/>
+                <a:cs typeface="Courier New" pitchFamily="34" charset="-120"/>
+              </a:rPr>
+              <a:t>лого</a:t>
+            </a:r>
+            <a:endParaRPr lang="en-US" sz="850" dirty="0"/>
+          </a:p>
+        </p:txBody>
+      </p:sp>
+      <p:sp>
+        <p:nvSpPr>
+          <p:cNvPr id="26" name="Shape 24"/>
+          <p:cNvSpPr/>
+          <p:nvPr/>
+        </p:nvSpPr>
+        <p:spPr>
+          <a:xfrm>
+            <a:off x="5811926" y="3977640"/>
+            <a:ext cx="1364285" cy="384048"/>
+          </a:xfrm>
+          <a:prstGeom prst="roundRect">
+            <a:avLst>
+              <a:gd name="adj" fmla="val 7143"/>
+            </a:avLst>
+          </a:prstGeom>
+          <a:solidFill>
+            <a:srgbClr val="F3F5F6"/>
+          </a:solidFill>
+          <a:ln w="12700">
+            <a:solidFill>
+              <a:srgbClr val="D7DCE1"/>
+            </a:solidFill>
+            <a:prstDash val="dash"/>
+          </a:ln>
+        </p:spPr>
+      </p:sp>
+      <p:sp>
+        <p:nvSpPr>
+          <p:cNvPr id="27" name="Text 25"/>
+          <p:cNvSpPr/>
+          <p:nvPr/>
+        </p:nvSpPr>
+        <p:spPr>
+          <a:xfrm>
+            <a:off x="5811926" y="3977640"/>
+            <a:ext cx="1364285" cy="384048"/>
+          </a:xfrm>
+          <a:prstGeom prst="rect">
+            <a:avLst/>
+          </a:prstGeom>
+          <a:noFill/>
+          <a:ln/>
+        </p:spPr>
+        <p:txBody>
+          <a:bodyPr wrap="square" lIns="0" tIns="0" rIns="0" bIns="0" rtlCol="0" anchor="ctr"/>
+          <a:lstStyle/>
+          <a:p>
+            <a:pPr algn="ctr" indent="0" marL="0">
+              <a:buNone/>
+            </a:pPr>
+            <a:r>
+              <a:rPr lang="en-US" sz="850" dirty="0">
+                <a:solidFill>
+                  <a:srgbClr val="A7AEB4"/>
+                </a:solidFill>
+                <a:latin typeface="Courier New" pitchFamily="34" charset="0"/>
+                <a:ea typeface="Courier New" pitchFamily="34" charset="-122"/>
+                <a:cs typeface="Courier New" pitchFamily="34" charset="-120"/>
+              </a:rPr>
+              <a:t>лого</a:t>
+            </a:r>
+            <a:endParaRPr lang="en-US" sz="850" dirty="0"/>
+          </a:p>
+        </p:txBody>
+      </p:sp>
+      <p:sp>
+        <p:nvSpPr>
+          <p:cNvPr id="28" name="Shape 26"/>
+          <p:cNvSpPr/>
+          <p:nvPr/>
+        </p:nvSpPr>
+        <p:spPr>
+          <a:xfrm>
+            <a:off x="7322515" y="3977640"/>
+            <a:ext cx="1364285" cy="384048"/>
+          </a:xfrm>
+          <a:prstGeom prst="roundRect">
+            <a:avLst>
+              <a:gd name="adj" fmla="val 7143"/>
+            </a:avLst>
+          </a:prstGeom>
+          <a:solidFill>
+            <a:srgbClr val="F3F5F6"/>
+          </a:solidFill>
+          <a:ln w="12700">
+            <a:solidFill>
+              <a:srgbClr val="D7DCE1"/>
+            </a:solidFill>
+            <a:prstDash val="dash"/>
+          </a:ln>
+        </p:spPr>
+      </p:sp>
+      <p:sp>
+        <p:nvSpPr>
+          <p:cNvPr id="29" name="Text 27"/>
+          <p:cNvSpPr/>
+          <p:nvPr/>
+        </p:nvSpPr>
+        <p:spPr>
+          <a:xfrm>
+            <a:off x="7322515" y="3977640"/>
+            <a:ext cx="1364285" cy="384048"/>
+          </a:xfrm>
+          <a:prstGeom prst="rect">
+            <a:avLst/>
+          </a:prstGeom>
+          <a:noFill/>
+          <a:ln/>
+        </p:spPr>
+        <p:txBody>
+          <a:bodyPr wrap="square" lIns="0" tIns="0" rIns="0" bIns="0" rtlCol="0" anchor="ctr"/>
+          <a:lstStyle/>
+          <a:p>
+            <a:pPr algn="ctr" indent="0" marL="0">
+              <a:buNone/>
+            </a:pPr>
+            <a:r>
+              <a:rPr lang="en-US" sz="850" dirty="0">
+                <a:solidFill>
+                  <a:srgbClr val="A7AEB4"/>
+                </a:solidFill>
+                <a:latin typeface="Courier New" pitchFamily="34" charset="0"/>
+                <a:ea typeface="Courier New" pitchFamily="34" charset="-122"/>
+                <a:cs typeface="Courier New" pitchFamily="34" charset="-120"/>
+              </a:rPr>
+              <a:t>лого</a:t>
+            </a:r>
+            <a:endParaRPr lang="en-US" sz="850" dirty="0"/>
+          </a:p>
+        </p:txBody>
+      </p:sp>
+      <p:sp>
+        <p:nvSpPr>
+          <p:cNvPr id="30" name="Text 28"/>
+          <p:cNvSpPr/>
+          <p:nvPr/>
+        </p:nvSpPr>
+        <p:spPr>
+          <a:xfrm>
+            <a:off x="457200" y="4480560"/>
+            <a:ext cx="8229600" cy="256032"/>
+          </a:xfrm>
+          <a:prstGeom prst="rect">
+            <a:avLst/>
+          </a:prstGeom>
+          <a:noFill/>
+          <a:ln/>
+        </p:spPr>
+        <p:txBody>
+          <a:bodyPr wrap="square" lIns="0" tIns="0" rIns="0" bIns="0" rtlCol="0" anchor="ctr"/>
+          <a:lstStyle/>
+          <a:p>
+            <a:pPr indent="0" marL="0">
+              <a:buNone/>
+            </a:pPr>
+            <a:r>
+              <a:rPr lang="en-US" sz="950" i="1" dirty="0">
+                <a:solidFill>
+                  <a:srgbClr val="59626B"/>
+                </a:solidFill>
+                <a:latin typeface="Arial" pitchFamily="34" charset="0"/>
+                <a:ea typeface="Arial" pitchFamily="34" charset="-122"/>
+                <a:cs typeface="Arial" pitchFamily="34" charset="-120"/>
+              </a:rPr>
+              <a:t>Названия компаний, логотипы и цифры эффекта добавим по согласованию с клиентами.</a:t>
+            </a:r>
+            <a:endParaRPr lang="en-US" sz="950" dirty="0"/>
+          </a:p>
+        </p:txBody>
+      </p:sp>
+    </p:spTree>
+  </p:cSld>
+  <p:clrMapOvr>
+    <a:masterClrMapping/>
+  </p:clrMapOvr>
+</p:sld>
+</file>
+
+<file path=ppt/slides/slide6.xml><?xml version="1.0" encoding="utf-8"?>
+<p:sld xmlns:a="http://schemas.openxmlformats.org/drawingml/2006/main" xmlns:r="http://schemas.openxmlformats.org/officeDocument/2006/relationships" xmlns:p="http://schemas.openxmlformats.org/presentationml/2006/main">
+  <p:cSld name="Slide 6">
+    <p:bg>
+      <p:bgPr>
+        <a:solidFill>
+          <a:srgbClr val="F3F5F6"/>
+        </a:solidFill>
+      </p:bgPr>
+    </p:bg>
+    <p:spTree>
+      <p:nvGrpSpPr>
+        <p:cNvPr id="1" name=""/>
+        <p:cNvGrpSpPr/>
+        <p:nvPr/>
+      </p:nvGrpSpPr>
+      <p:grpSpPr>
+        <a:xfrm>
+          <a:off x="0" y="0"/>
+          <a:ext cx="0" cy="0"/>
+          <a:chOff x="0" y="0"/>
+          <a:chExt cx="0" cy="0"/>
+        </a:xfrm>
+      </p:grpSpPr>
+      <p:sp>
+        <p:nvSpPr>
+          <p:cNvPr id="2" name="Shape 0"/>
+          <p:cNvSpPr/>
+          <p:nvPr/>
+        </p:nvSpPr>
+        <p:spPr>
+          <a:xfrm>
+            <a:off x="457200" y="274320"/>
+            <a:ext cx="292608" cy="292608"/>
+          </a:xfrm>
+          <a:prstGeom prst="roundRect">
+            <a:avLst>
+              <a:gd name="adj" fmla="val 12500"/>
+            </a:avLst>
+          </a:prstGeom>
+          <a:solidFill>
+            <a:srgbClr val="F3F5F6"/>
+          </a:solidFill>
+          <a:ln w="15875">
+            <a:solidFill>
+              <a:srgbClr val="1D5C9A"/>
+            </a:solidFill>
+            <a:prstDash val="solid"/>
+          </a:ln>
+        </p:spPr>
+      </p:sp>
+      <p:sp>
+        <p:nvSpPr>
+          <p:cNvPr id="3" name="Text 1"/>
+          <p:cNvSpPr/>
+          <p:nvPr/>
+        </p:nvSpPr>
+        <p:spPr>
+          <a:xfrm>
+            <a:off x="457200" y="274320"/>
+            <a:ext cx="292608" cy="292608"/>
+          </a:xfrm>
+          <a:prstGeom prst="rect">
+            <a:avLst/>
+          </a:prstGeom>
+          <a:noFill/>
+          <a:ln/>
+        </p:spPr>
+        <p:txBody>
+          <a:bodyPr wrap="square" lIns="0" tIns="0" rIns="0" bIns="0" rtlCol="0" anchor="ctr"/>
+          <a:lstStyle/>
+          <a:p>
+            <a:pPr algn="ctr" indent="0" marL="0">
+              <a:buNone/>
+            </a:pPr>
+            <a:r>
+              <a:rPr lang="en-US" sz="1100" b="1" dirty="0">
+                <a:solidFill>
+                  <a:srgbClr val="1D5C9A"/>
+                </a:solidFill>
+                <a:latin typeface="Arial" pitchFamily="34" charset="0"/>
+                <a:ea typeface="Arial" pitchFamily="34" charset="-122"/>
+                <a:cs typeface="Arial" pitchFamily="34" charset="-120"/>
+              </a:rPr>
+              <a:t>WD</a:t>
+            </a:r>
+            <a:endParaRPr lang="en-US" sz="1100" dirty="0"/>
+          </a:p>
+        </p:txBody>
+      </p:sp>
+      <p:sp>
+        <p:nvSpPr>
+          <p:cNvPr id="4" name="Text 2"/>
+          <p:cNvSpPr/>
+          <p:nvPr/>
+        </p:nvSpPr>
+        <p:spPr>
+          <a:xfrm>
+            <a:off x="822960" y="274320"/>
+            <a:ext cx="2743200" cy="292608"/>
+          </a:xfrm>
+          <a:prstGeom prst="rect">
+            <a:avLst/>
+          </a:prstGeom>
+          <a:noFill/>
+          <a:ln/>
+        </p:spPr>
+        <p:txBody>
+          <a:bodyPr wrap="square" lIns="0" tIns="0" rIns="0" bIns="0" rtlCol="0" anchor="ctr"/>
+          <a:lstStyle/>
+          <a:p>
+            <a:pPr indent="0" marL="0">
+              <a:buNone/>
+            </a:pPr>
+            <a:r>
+              <a:rPr lang="en-US" sz="1200" b="1" dirty="0">
+                <a:solidFill>
+                  <a:srgbClr val="171B20"/>
+                </a:solidFill>
+                <a:latin typeface="Arial" pitchFamily="34" charset="0"/>
+                <a:ea typeface="Arial" pitchFamily="34" charset="-122"/>
+                <a:cs typeface="Arial" pitchFamily="34" charset="-120"/>
+              </a:rPr>
+              <a:t>WhatDaDev</a:t>
+            </a:r>
+            <a:endParaRPr lang="en-US" sz="1200" dirty="0"/>
+          </a:p>
+        </p:txBody>
+      </p:sp>
+      <p:sp>
+        <p:nvSpPr>
+          <p:cNvPr id="5" name="Text 3"/>
+          <p:cNvSpPr/>
+          <p:nvPr/>
+        </p:nvSpPr>
+        <p:spPr>
+          <a:xfrm>
+            <a:off x="5029200" y="274320"/>
+            <a:ext cx="3657600" cy="292608"/>
+          </a:xfrm>
+          <a:prstGeom prst="rect">
+            <a:avLst/>
+          </a:prstGeom>
+          <a:noFill/>
+          <a:ln/>
+        </p:spPr>
+        <p:txBody>
+          <a:bodyPr wrap="square" lIns="0" tIns="0" rIns="0" bIns="0" rtlCol="0" anchor="ctr"/>
+          <a:lstStyle/>
+          <a:p>
+            <a:pPr algn="r" indent="0" marL="0">
+              <a:buNone/>
+            </a:pPr>
+            <a:r>
+              <a:rPr lang="en-US" sz="900" spc="200" kern="0" dirty="0">
+                <a:solidFill>
+                  <a:srgbClr val="59626B"/>
+                </a:solidFill>
+                <a:latin typeface="Courier New" pitchFamily="34" charset="0"/>
+                <a:ea typeface="Courier New" pitchFamily="34" charset="-122"/>
+                <a:cs typeface="Courier New" pitchFamily="34" charset="-120"/>
+              </a:rPr>
+              <a:t>Экосистема</a:t>
+            </a:r>
+            <a:endParaRPr lang="en-US" sz="900" dirty="0"/>
+          </a:p>
+        </p:txBody>
+      </p:sp>
+      <p:sp>
+        <p:nvSpPr>
+          <p:cNvPr id="6" name="Text 4"/>
+          <p:cNvSpPr/>
+          <p:nvPr/>
+        </p:nvSpPr>
+        <p:spPr>
+          <a:xfrm>
+            <a:off x="457200" y="4736592"/>
+            <a:ext cx="3657600" cy="274320"/>
+          </a:xfrm>
+          <a:prstGeom prst="rect">
+            <a:avLst/>
+          </a:prstGeom>
+          <a:noFill/>
+          <a:ln/>
+        </p:spPr>
+        <p:txBody>
+          <a:bodyPr wrap="square" lIns="0" tIns="0" rIns="0" bIns="0" rtlCol="0" anchor="ctr"/>
+          <a:lstStyle/>
+          <a:p>
+            <a:pPr indent="0" marL="0">
+              <a:buNone/>
+            </a:pPr>
+            <a:r>
+              <a:rPr lang="en-US" sz="850" dirty="0">
+                <a:solidFill>
+                  <a:srgbClr val="59626B"/>
+                </a:solidFill>
+                <a:latin typeface="Courier New" pitchFamily="34" charset="0"/>
+                <a:ea typeface="Courier New" pitchFamily="34" charset="-122"/>
+                <a:cs typeface="Courier New" pitchFamily="34" charset="-120"/>
+              </a:rPr>
+              <a:t>whatdadev.ru</a:t>
+            </a:r>
+            <a:endParaRPr lang="en-US" sz="850" dirty="0"/>
+          </a:p>
+        </p:txBody>
+      </p:sp>
+      <p:sp>
+        <p:nvSpPr>
+          <p:cNvPr id="7" name="Text 5"/>
+          <p:cNvSpPr/>
+          <p:nvPr/>
+        </p:nvSpPr>
+        <p:spPr>
+          <a:xfrm>
+            <a:off x="5029200" y="4736592"/>
+            <a:ext cx="3657600" cy="274320"/>
+          </a:xfrm>
+          <a:prstGeom prst="rect">
+            <a:avLst/>
+          </a:prstGeom>
+          <a:noFill/>
+          <a:ln/>
+        </p:spPr>
+        <p:txBody>
+          <a:bodyPr wrap="square" lIns="0" tIns="0" rIns="0" bIns="0" rtlCol="0" anchor="ctr"/>
+          <a:lstStyle/>
+          <a:p>
+            <a:pPr algn="r" indent="0" marL="0">
+              <a:buNone/>
+            </a:pPr>
+            <a:r>
+              <a:rPr lang="en-US" sz="850" dirty="0">
+                <a:solidFill>
+                  <a:srgbClr val="59626B"/>
+                </a:solidFill>
+                <a:latin typeface="Courier New" pitchFamily="34" charset="0"/>
+                <a:ea typeface="Courier New" pitchFamily="34" charset="-122"/>
+                <a:cs typeface="Courier New" pitchFamily="34" charset="-120"/>
+              </a:rPr>
+              <a:t>06 / 07</a:t>
+            </a:r>
+            <a:endParaRPr lang="en-US" sz="850" dirty="0"/>
+          </a:p>
+        </p:txBody>
+      </p:sp>
+      <p:sp>
+        <p:nvSpPr>
+          <p:cNvPr id="8" name="Shape 6"/>
+          <p:cNvSpPr/>
+          <p:nvPr/>
+        </p:nvSpPr>
+        <p:spPr>
+          <a:xfrm>
+            <a:off x="457200" y="914400"/>
+            <a:ext cx="100584" cy="100584"/>
+          </a:xfrm>
+          <a:prstGeom prst="rect">
+            <a:avLst/>
+          </a:prstGeom>
+          <a:solidFill>
+            <a:srgbClr val="B25A1E"/>
+          </a:solidFill>
+          <a:ln/>
+        </p:spPr>
+      </p:sp>
+      <p:sp>
+        <p:nvSpPr>
+          <p:cNvPr id="9" name="Text 7"/>
+          <p:cNvSpPr/>
+          <p:nvPr/>
+        </p:nvSpPr>
+        <p:spPr>
+          <a:xfrm>
+            <a:off x="658368" y="850392"/>
+            <a:ext cx="7772400" cy="237744"/>
+          </a:xfrm>
+          <a:prstGeom prst="rect">
+            <a:avLst/>
+          </a:prstGeom>
+          <a:noFill/>
+          <a:ln/>
+        </p:spPr>
+        <p:txBody>
+          <a:bodyPr wrap="square" lIns="0" tIns="0" rIns="0" bIns="0" rtlCol="0" anchor="ctr"/>
+          <a:lstStyle/>
+          <a:p>
+            <a:pPr indent="0" marL="0">
+              <a:buNone/>
+            </a:pPr>
+            <a:r>
+              <a:rPr lang="en-US" sz="1050" spc="200" kern="0" dirty="0">
+                <a:solidFill>
+                  <a:srgbClr val="B25A1E"/>
+                </a:solidFill>
+                <a:latin typeface="Courier New" pitchFamily="34" charset="0"/>
+                <a:ea typeface="Courier New" pitchFamily="34" charset="-122"/>
+                <a:cs typeface="Courier New" pitchFamily="34" charset="-120"/>
+              </a:rPr>
+              <a:t>БОЛЬШЕ, ЧЕМ ДОКУМЕНТООБОРОТ</a:t>
+            </a:r>
+            <a:endParaRPr lang="en-US" sz="1050" dirty="0"/>
+          </a:p>
+        </p:txBody>
+      </p:sp>
+      <p:sp>
+        <p:nvSpPr>
+          <p:cNvPr id="10" name="Text 8"/>
+          <p:cNvSpPr/>
+          <p:nvPr/>
+        </p:nvSpPr>
+        <p:spPr>
+          <a:xfrm>
+            <a:off x="457200" y="1170432"/>
+            <a:ext cx="8229600" cy="685800"/>
+          </a:xfrm>
+          <a:prstGeom prst="rect">
+            <a:avLst/>
+          </a:prstGeom>
+          <a:noFill/>
+          <a:ln/>
+        </p:spPr>
+        <p:txBody>
+          <a:bodyPr wrap="square" lIns="0" tIns="0" rIns="0" bIns="0" rtlCol="0" anchor="t"/>
+          <a:lstStyle/>
+          <a:p>
+            <a:pPr indent="0" marL="0">
+              <a:lnSpc>
+                <a:spcPts val="2415"/>
+              </a:lnSpc>
+              <a:buNone/>
+            </a:pPr>
+            <a:r>
+              <a:rPr lang="en-US" sz="2300" b="1" dirty="0">
+                <a:solidFill>
+                  <a:srgbClr val="171B20"/>
+                </a:solidFill>
+                <a:latin typeface="Arial" pitchFamily="34" charset="0"/>
+                <a:ea typeface="Arial" pitchFamily="34" charset="-122"/>
+                <a:cs typeface="Arial" pitchFamily="34" charset="-120"/>
+              </a:rPr>
+              <a:t>Начинаете с ЭДО — растёте на одной платформе</a:t>
+            </a:r>
+            <a:endParaRPr lang="en-US" sz="2300" dirty="0"/>
+          </a:p>
+        </p:txBody>
+      </p:sp>
+      <p:sp>
+        <p:nvSpPr>
+          <p:cNvPr id="11" name="Shape 9"/>
+          <p:cNvSpPr/>
+          <p:nvPr/>
+        </p:nvSpPr>
+        <p:spPr>
+          <a:xfrm>
+            <a:off x="457200" y="2148840"/>
+            <a:ext cx="1947672" cy="749808"/>
+          </a:xfrm>
+          <a:prstGeom prst="roundRect">
+            <a:avLst>
+              <a:gd name="adj" fmla="val 6098"/>
             </a:avLst>
           </a:prstGeom>
           <a:solidFill>
@@ -5647,80 +6335,77 @@
       </p:sp>
       <p:sp>
         <p:nvSpPr>
-          <p:cNvPr id="13" name="Text 11"/>
-          <p:cNvSpPr/>
-          <p:nvPr/>
-        </p:nvSpPr>
-        <p:spPr>
-          <a:xfrm>
-            <a:off x="2569464" y="2286000"/>
-            <a:ext cx="1911096" cy="713232"/>
-          </a:xfrm>
-          <a:prstGeom prst="rect">
-            <a:avLst/>
-          </a:prstGeom>
-          <a:noFill/>
-          <a:ln/>
-        </p:spPr>
-        <p:txBody>
-          <a:bodyPr wrap="square" lIns="1397" tIns="1397" rIns="1397" bIns="1397" rtlCol="0" anchor="ctr"/>
-          <a:lstStyle/>
-          <a:p>
-            <a:pPr indent="0" marL="0">
-              <a:lnSpc>
-                <a:spcPct val="105000"/>
-              </a:lnSpc>
-              <a:buNone/>
-            </a:pPr>
-            <a:r>
-              <a:rPr lang="en-US" sz="1150" b="1" dirty="0">
+          <p:cNvPr id="12" name="Text 10"/>
+          <p:cNvSpPr/>
+          <p:nvPr/>
+        </p:nvSpPr>
+        <p:spPr>
+          <a:xfrm>
+            <a:off x="475488" y="2148840"/>
+            <a:ext cx="1911096" cy="749808"/>
+          </a:xfrm>
+          <a:prstGeom prst="rect">
+            <a:avLst/>
+          </a:prstGeom>
+          <a:noFill/>
+          <a:ln/>
+        </p:spPr>
+        <p:txBody>
+          <a:bodyPr wrap="square" lIns="1778" tIns="1778" rIns="1778" bIns="1778" rtlCol="0" anchor="ctr"/>
+          <a:lstStyle/>
+          <a:p>
+            <a:pPr indent="0" marL="0">
+              <a:spcAft>
+                <a:spcPts val="200"/>
+              </a:spcAft>
+              <a:buNone/>
+            </a:pPr>
+            <a:r>
+              <a:rPr lang="en-US" sz="1300" b="1" dirty="0">
                 <a:solidFill>
                   <a:srgbClr val="171B20"/>
                 </a:solidFill>
-                <a:latin typeface="IBM Plex Sans" pitchFamily="34" charset="0"/>
-                <a:ea typeface="IBM Plex Sans" pitchFamily="34" charset="-122"/>
-                <a:cs typeface="IBM Plex Sans" pitchFamily="34" charset="-120"/>
-              </a:rPr>
-              <a:t>ЭДО</a:t>
-            </a:r>
-            <a:endParaRPr lang="en-US" sz="1150" dirty="0"/>
-          </a:p>
-          <a:p>
-            <a:pPr indent="0" marL="0">
-              <a:lnSpc>
-                <a:spcPct val="105000"/>
-              </a:lnSpc>
-              <a:buNone/>
-            </a:pPr>
-            <a:r>
-              <a:rPr lang="en-US" sz="900" dirty="0">
+                <a:latin typeface="Arial" pitchFamily="34" charset="0"/>
+                <a:ea typeface="Arial" pitchFamily="34" charset="-122"/>
+                <a:cs typeface="Arial" pitchFamily="34" charset="-120"/>
+              </a:rPr>
+              <a:t>CRM</a:t>
+            </a:r>
+            <a:endParaRPr lang="en-US" sz="1300" dirty="0"/>
+          </a:p>
+          <a:p>
+            <a:pPr indent="0" marL="0">
+              <a:buNone/>
+            </a:pPr>
+            <a:r>
+              <a:rPr lang="en-US" sz="950" dirty="0">
                 <a:solidFill>
                   <a:srgbClr val="59626B"/>
                 </a:solidFill>
-                <a:latin typeface="IBM Plex Sans" pitchFamily="34" charset="0"/>
-                <a:ea typeface="IBM Plex Sans" pitchFamily="34" charset="-122"/>
-                <a:cs typeface="IBM Plex Sans" pitchFamily="34" charset="-120"/>
-              </a:rPr>
-              <a:t>Документооборот</a:t>
-            </a:r>
-            <a:endParaRPr lang="en-US" sz="1150" dirty="0"/>
-          </a:p>
-        </p:txBody>
-      </p:sp>
-      <p:sp>
-        <p:nvSpPr>
-          <p:cNvPr id="14" name="Shape 12"/>
-          <p:cNvSpPr/>
-          <p:nvPr/>
-        </p:nvSpPr>
-        <p:spPr>
-          <a:xfrm>
-            <a:off x="4645152" y="2286000"/>
-            <a:ext cx="1947672" cy="713232"/>
+                <a:latin typeface="Arial" pitchFamily="34" charset="0"/>
+                <a:ea typeface="Arial" pitchFamily="34" charset="-122"/>
+                <a:cs typeface="Arial" pitchFamily="34" charset="-120"/>
+              </a:rPr>
+              <a:t>Продажи и клиенты</a:t>
+            </a:r>
+            <a:endParaRPr lang="en-US" sz="1300" dirty="0"/>
+          </a:p>
+        </p:txBody>
+      </p:sp>
+      <p:sp>
+        <p:nvSpPr>
+          <p:cNvPr id="13" name="Shape 11"/>
+          <p:cNvSpPr/>
+          <p:nvPr/>
+        </p:nvSpPr>
+        <p:spPr>
+          <a:xfrm>
+            <a:off x="2551176" y="2148840"/>
+            <a:ext cx="1947672" cy="749808"/>
           </a:xfrm>
           <a:prstGeom prst="roundRect">
             <a:avLst>
-              <a:gd name="adj" fmla="val 6410"/>
+              <a:gd name="adj" fmla="val 6098"/>
             </a:avLst>
           </a:prstGeom>
           <a:solidFill>
@@ -5743,80 +6428,77 @@
       </p:sp>
       <p:sp>
         <p:nvSpPr>
-          <p:cNvPr id="15" name="Text 13"/>
-          <p:cNvSpPr/>
-          <p:nvPr/>
-        </p:nvSpPr>
-        <p:spPr>
-          <a:xfrm>
-            <a:off x="4663440" y="2286000"/>
-            <a:ext cx="1911096" cy="713232"/>
-          </a:xfrm>
-          <a:prstGeom prst="rect">
-            <a:avLst/>
-          </a:prstGeom>
-          <a:noFill/>
-          <a:ln/>
-        </p:spPr>
-        <p:txBody>
-          <a:bodyPr wrap="square" lIns="1397" tIns="1397" rIns="1397" bIns="1397" rtlCol="0" anchor="ctr"/>
-          <a:lstStyle/>
-          <a:p>
-            <a:pPr indent="0" marL="0">
-              <a:lnSpc>
-                <a:spcPct val="105000"/>
-              </a:lnSpc>
-              <a:buNone/>
-            </a:pPr>
-            <a:r>
-              <a:rPr lang="en-US" sz="1150" b="1" dirty="0">
+          <p:cNvPr id="14" name="Text 12"/>
+          <p:cNvSpPr/>
+          <p:nvPr/>
+        </p:nvSpPr>
+        <p:spPr>
+          <a:xfrm>
+            <a:off x="2569464" y="2148840"/>
+            <a:ext cx="1911096" cy="749808"/>
+          </a:xfrm>
+          <a:prstGeom prst="rect">
+            <a:avLst/>
+          </a:prstGeom>
+          <a:noFill/>
+          <a:ln/>
+        </p:spPr>
+        <p:txBody>
+          <a:bodyPr wrap="square" lIns="1778" tIns="1778" rIns="1778" bIns="1778" rtlCol="0" anchor="ctr"/>
+          <a:lstStyle/>
+          <a:p>
+            <a:pPr indent="0" marL="0">
+              <a:spcAft>
+                <a:spcPts val="200"/>
+              </a:spcAft>
+              <a:buNone/>
+            </a:pPr>
+            <a:r>
+              <a:rPr lang="en-US" sz="1300" b="1" dirty="0">
                 <a:solidFill>
                   <a:srgbClr val="171B20"/>
                 </a:solidFill>
-                <a:latin typeface="IBM Plex Sans" pitchFamily="34" charset="0"/>
-                <a:ea typeface="IBM Plex Sans" pitchFamily="34" charset="-122"/>
-                <a:cs typeface="IBM Plex Sans" pitchFamily="34" charset="-120"/>
-              </a:rPr>
-              <a:t>КЭДО</a:t>
-            </a:r>
-            <a:endParaRPr lang="en-US" sz="1150" dirty="0"/>
-          </a:p>
-          <a:p>
-            <a:pPr indent="0" marL="0">
-              <a:lnSpc>
-                <a:spcPct val="105000"/>
-              </a:lnSpc>
-              <a:buNone/>
-            </a:pPr>
-            <a:r>
-              <a:rPr lang="en-US" sz="900" dirty="0">
+                <a:latin typeface="Arial" pitchFamily="34" charset="0"/>
+                <a:ea typeface="Arial" pitchFamily="34" charset="-122"/>
+                <a:cs typeface="Arial" pitchFamily="34" charset="-120"/>
+              </a:rPr>
+              <a:t>ЭДО</a:t>
+            </a:r>
+            <a:endParaRPr lang="en-US" sz="1300" dirty="0"/>
+          </a:p>
+          <a:p>
+            <a:pPr indent="0" marL="0">
+              <a:buNone/>
+            </a:pPr>
+            <a:r>
+              <a:rPr lang="en-US" sz="950" dirty="0">
                 <a:solidFill>
                   <a:srgbClr val="59626B"/>
                 </a:solidFill>
-                <a:latin typeface="IBM Plex Sans" pitchFamily="34" charset="0"/>
-                <a:ea typeface="IBM Plex Sans" pitchFamily="34" charset="-122"/>
-                <a:cs typeface="IBM Plex Sans" pitchFamily="34" charset="-120"/>
-              </a:rPr>
-              <a:t>Кадровый ЭДО</a:t>
-            </a:r>
-            <a:endParaRPr lang="en-US" sz="1150" dirty="0"/>
-          </a:p>
-        </p:txBody>
-      </p:sp>
-      <p:sp>
-        <p:nvSpPr>
-          <p:cNvPr id="16" name="Shape 14"/>
-          <p:cNvSpPr/>
-          <p:nvPr/>
-        </p:nvSpPr>
-        <p:spPr>
-          <a:xfrm>
-            <a:off x="6739128" y="2286000"/>
-            <a:ext cx="1947672" cy="713232"/>
+                <a:latin typeface="Arial" pitchFamily="34" charset="0"/>
+                <a:ea typeface="Arial" pitchFamily="34" charset="-122"/>
+                <a:cs typeface="Arial" pitchFamily="34" charset="-120"/>
+              </a:rPr>
+              <a:t>Документооборот</a:t>
+            </a:r>
+            <a:endParaRPr lang="en-US" sz="1300" dirty="0"/>
+          </a:p>
+        </p:txBody>
+      </p:sp>
+      <p:sp>
+        <p:nvSpPr>
+          <p:cNvPr id="15" name="Shape 13"/>
+          <p:cNvSpPr/>
+          <p:nvPr/>
+        </p:nvSpPr>
+        <p:spPr>
+          <a:xfrm>
+            <a:off x="4645152" y="2148840"/>
+            <a:ext cx="1947672" cy="749808"/>
           </a:xfrm>
           <a:prstGeom prst="roundRect">
             <a:avLst>
-              <a:gd name="adj" fmla="val 6410"/>
+              <a:gd name="adj" fmla="val 6098"/>
             </a:avLst>
           </a:prstGeom>
           <a:solidFill>
@@ -5839,80 +6521,77 @@
       </p:sp>
       <p:sp>
         <p:nvSpPr>
-          <p:cNvPr id="17" name="Text 15"/>
-          <p:cNvSpPr/>
-          <p:nvPr/>
-        </p:nvSpPr>
-        <p:spPr>
-          <a:xfrm>
-            <a:off x="6757416" y="2286000"/>
-            <a:ext cx="1911096" cy="713232"/>
-          </a:xfrm>
-          <a:prstGeom prst="rect">
-            <a:avLst/>
-          </a:prstGeom>
-          <a:noFill/>
-          <a:ln/>
-        </p:spPr>
-        <p:txBody>
-          <a:bodyPr wrap="square" lIns="1397" tIns="1397" rIns="1397" bIns="1397" rtlCol="0" anchor="ctr"/>
-          <a:lstStyle/>
-          <a:p>
-            <a:pPr indent="0" marL="0">
-              <a:lnSpc>
-                <a:spcPct val="105000"/>
-              </a:lnSpc>
-              <a:buNone/>
-            </a:pPr>
-            <a:r>
-              <a:rPr lang="en-US" sz="1150" b="1" dirty="0">
+          <p:cNvPr id="16" name="Text 14"/>
+          <p:cNvSpPr/>
+          <p:nvPr/>
+        </p:nvSpPr>
+        <p:spPr>
+          <a:xfrm>
+            <a:off x="4663440" y="2148840"/>
+            <a:ext cx="1911096" cy="749808"/>
+          </a:xfrm>
+          <a:prstGeom prst="rect">
+            <a:avLst/>
+          </a:prstGeom>
+          <a:noFill/>
+          <a:ln/>
+        </p:spPr>
+        <p:txBody>
+          <a:bodyPr wrap="square" lIns="1778" tIns="1778" rIns="1778" bIns="1778" rtlCol="0" anchor="ctr"/>
+          <a:lstStyle/>
+          <a:p>
+            <a:pPr indent="0" marL="0">
+              <a:spcAft>
+                <a:spcPts val="200"/>
+              </a:spcAft>
+              <a:buNone/>
+            </a:pPr>
+            <a:r>
+              <a:rPr lang="en-US" sz="1300" b="1" dirty="0">
                 <a:solidFill>
                   <a:srgbClr val="171B20"/>
                 </a:solidFill>
-                <a:latin typeface="IBM Plex Sans" pitchFamily="34" charset="0"/>
-                <a:ea typeface="IBM Plex Sans" pitchFamily="34" charset="-122"/>
-                <a:cs typeface="IBM Plex Sans" pitchFamily="34" charset="-120"/>
-              </a:rPr>
-              <a:t>ServiceDesk</a:t>
-            </a:r>
-            <a:endParaRPr lang="en-US" sz="1150" dirty="0"/>
-          </a:p>
-          <a:p>
-            <a:pPr indent="0" marL="0">
-              <a:lnSpc>
-                <a:spcPct val="105000"/>
-              </a:lnSpc>
-              <a:buNone/>
-            </a:pPr>
-            <a:r>
-              <a:rPr lang="en-US" sz="900" dirty="0">
+                <a:latin typeface="Arial" pitchFamily="34" charset="0"/>
+                <a:ea typeface="Arial" pitchFamily="34" charset="-122"/>
+                <a:cs typeface="Arial" pitchFamily="34" charset="-120"/>
+              </a:rPr>
+              <a:t>КЭДО</a:t>
+            </a:r>
+            <a:endParaRPr lang="en-US" sz="1300" dirty="0"/>
+          </a:p>
+          <a:p>
+            <a:pPr indent="0" marL="0">
+              <a:buNone/>
+            </a:pPr>
+            <a:r>
+              <a:rPr lang="en-US" sz="950" dirty="0">
                 <a:solidFill>
                   <a:srgbClr val="59626B"/>
                 </a:solidFill>
-                <a:latin typeface="IBM Plex Sans" pitchFamily="34" charset="0"/>
-                <a:ea typeface="IBM Plex Sans" pitchFamily="34" charset="-122"/>
-                <a:cs typeface="IBM Plex Sans" pitchFamily="34" charset="-120"/>
-              </a:rPr>
-              <a:t>Заявки и SLA</a:t>
-            </a:r>
-            <a:endParaRPr lang="en-US" sz="1150" dirty="0"/>
-          </a:p>
-        </p:txBody>
-      </p:sp>
-      <p:sp>
-        <p:nvSpPr>
-          <p:cNvPr id="18" name="Shape 16"/>
-          <p:cNvSpPr/>
-          <p:nvPr/>
-        </p:nvSpPr>
-        <p:spPr>
-          <a:xfrm>
-            <a:off x="457200" y="3145536"/>
-            <a:ext cx="1947672" cy="713232"/>
+                <a:latin typeface="Arial" pitchFamily="34" charset="0"/>
+                <a:ea typeface="Arial" pitchFamily="34" charset="-122"/>
+                <a:cs typeface="Arial" pitchFamily="34" charset="-120"/>
+              </a:rPr>
+              <a:t>Кадровый ЭДО</a:t>
+            </a:r>
+            <a:endParaRPr lang="en-US" sz="1300" dirty="0"/>
+          </a:p>
+        </p:txBody>
+      </p:sp>
+      <p:sp>
+        <p:nvSpPr>
+          <p:cNvPr id="17" name="Shape 15"/>
+          <p:cNvSpPr/>
+          <p:nvPr/>
+        </p:nvSpPr>
+        <p:spPr>
+          <a:xfrm>
+            <a:off x="6739128" y="2148840"/>
+            <a:ext cx="1947672" cy="749808"/>
           </a:xfrm>
           <a:prstGeom prst="roundRect">
             <a:avLst>
-              <a:gd name="adj" fmla="val 6410"/>
+              <a:gd name="adj" fmla="val 6098"/>
             </a:avLst>
           </a:prstGeom>
           <a:solidFill>
@@ -5935,80 +6614,77 @@
       </p:sp>
       <p:sp>
         <p:nvSpPr>
-          <p:cNvPr id="19" name="Text 17"/>
-          <p:cNvSpPr/>
-          <p:nvPr/>
-        </p:nvSpPr>
-        <p:spPr>
-          <a:xfrm>
-            <a:off x="475488" y="3145536"/>
-            <a:ext cx="1911096" cy="713232"/>
-          </a:xfrm>
-          <a:prstGeom prst="rect">
-            <a:avLst/>
-          </a:prstGeom>
-          <a:noFill/>
-          <a:ln/>
-        </p:spPr>
-        <p:txBody>
-          <a:bodyPr wrap="square" lIns="1397" tIns="1397" rIns="1397" bIns="1397" rtlCol="0" anchor="ctr"/>
-          <a:lstStyle/>
-          <a:p>
-            <a:pPr indent="0" marL="0">
-              <a:lnSpc>
-                <a:spcPct val="105000"/>
-              </a:lnSpc>
-              <a:buNone/>
-            </a:pPr>
-            <a:r>
-              <a:rPr lang="en-US" sz="1150" b="1" dirty="0">
+          <p:cNvPr id="18" name="Text 16"/>
+          <p:cNvSpPr/>
+          <p:nvPr/>
+        </p:nvSpPr>
+        <p:spPr>
+          <a:xfrm>
+            <a:off x="6757416" y="2148840"/>
+            <a:ext cx="1911096" cy="749808"/>
+          </a:xfrm>
+          <a:prstGeom prst="rect">
+            <a:avLst/>
+          </a:prstGeom>
+          <a:noFill/>
+          <a:ln/>
+        </p:spPr>
+        <p:txBody>
+          <a:bodyPr wrap="square" lIns="1778" tIns="1778" rIns="1778" bIns="1778" rtlCol="0" anchor="ctr"/>
+          <a:lstStyle/>
+          <a:p>
+            <a:pPr indent="0" marL="0">
+              <a:spcAft>
+                <a:spcPts val="200"/>
+              </a:spcAft>
+              <a:buNone/>
+            </a:pPr>
+            <a:r>
+              <a:rPr lang="en-US" sz="1300" b="1" dirty="0">
                 <a:solidFill>
                   <a:srgbClr val="171B20"/>
                 </a:solidFill>
-                <a:latin typeface="IBM Plex Sans" pitchFamily="34" charset="0"/>
-                <a:ea typeface="IBM Plex Sans" pitchFamily="34" charset="-122"/>
-                <a:cs typeface="IBM Plex Sans" pitchFamily="34" charset="-120"/>
-              </a:rPr>
-              <a:t>Закупки</a:t>
-            </a:r>
-            <a:endParaRPr lang="en-US" sz="1150" dirty="0"/>
-          </a:p>
-          <a:p>
-            <a:pPr indent="0" marL="0">
-              <a:lnSpc>
-                <a:spcPct val="105000"/>
-              </a:lnSpc>
-              <a:buNone/>
-            </a:pPr>
-            <a:r>
-              <a:rPr lang="en-US" sz="900" dirty="0">
+                <a:latin typeface="Arial" pitchFamily="34" charset="0"/>
+                <a:ea typeface="Arial" pitchFamily="34" charset="-122"/>
+                <a:cs typeface="Arial" pitchFamily="34" charset="-120"/>
+              </a:rPr>
+              <a:t>ServiceDesk</a:t>
+            </a:r>
+            <a:endParaRPr lang="en-US" sz="1300" dirty="0"/>
+          </a:p>
+          <a:p>
+            <a:pPr indent="0" marL="0">
+              <a:buNone/>
+            </a:pPr>
+            <a:r>
+              <a:rPr lang="en-US" sz="950" dirty="0">
                 <a:solidFill>
                   <a:srgbClr val="59626B"/>
                 </a:solidFill>
-                <a:latin typeface="IBM Plex Sans" pitchFamily="34" charset="0"/>
-                <a:ea typeface="IBM Plex Sans" pitchFamily="34" charset="-122"/>
-                <a:cs typeface="IBM Plex Sans" pitchFamily="34" charset="-120"/>
-              </a:rPr>
-              <a:t>Снабжение</a:t>
-            </a:r>
-            <a:endParaRPr lang="en-US" sz="1150" dirty="0"/>
-          </a:p>
-        </p:txBody>
-      </p:sp>
-      <p:sp>
-        <p:nvSpPr>
-          <p:cNvPr id="20" name="Shape 18"/>
-          <p:cNvSpPr/>
-          <p:nvPr/>
-        </p:nvSpPr>
-        <p:spPr>
-          <a:xfrm>
-            <a:off x="2551176" y="3145536"/>
-            <a:ext cx="1947672" cy="713232"/>
+                <a:latin typeface="Arial" pitchFamily="34" charset="0"/>
+                <a:ea typeface="Arial" pitchFamily="34" charset="-122"/>
+                <a:cs typeface="Arial" pitchFamily="34" charset="-120"/>
+              </a:rPr>
+              <a:t>Заявки и SLA</a:t>
+            </a:r>
+            <a:endParaRPr lang="en-US" sz="1300" dirty="0"/>
+          </a:p>
+        </p:txBody>
+      </p:sp>
+      <p:sp>
+        <p:nvSpPr>
+          <p:cNvPr id="19" name="Shape 17"/>
+          <p:cNvSpPr/>
+          <p:nvPr/>
+        </p:nvSpPr>
+        <p:spPr>
+          <a:xfrm>
+            <a:off x="457200" y="3044952"/>
+            <a:ext cx="1947672" cy="749808"/>
           </a:xfrm>
           <a:prstGeom prst="roundRect">
             <a:avLst>
-              <a:gd name="adj" fmla="val 6410"/>
+              <a:gd name="adj" fmla="val 6098"/>
             </a:avLst>
           </a:prstGeom>
           <a:solidFill>
@@ -6031,80 +6707,77 @@
       </p:sp>
       <p:sp>
         <p:nvSpPr>
-          <p:cNvPr id="21" name="Text 19"/>
-          <p:cNvSpPr/>
-          <p:nvPr/>
-        </p:nvSpPr>
-        <p:spPr>
-          <a:xfrm>
-            <a:off x="2569464" y="3145536"/>
-            <a:ext cx="1911096" cy="713232"/>
-          </a:xfrm>
-          <a:prstGeom prst="rect">
-            <a:avLst/>
-          </a:prstGeom>
-          <a:noFill/>
-          <a:ln/>
-        </p:spPr>
-        <p:txBody>
-          <a:bodyPr wrap="square" lIns="1397" tIns="1397" rIns="1397" bIns="1397" rtlCol="0" anchor="ctr"/>
-          <a:lstStyle/>
-          <a:p>
-            <a:pPr indent="0" marL="0">
-              <a:lnSpc>
-                <a:spcPct val="105000"/>
-              </a:lnSpc>
-              <a:buNone/>
-            </a:pPr>
-            <a:r>
-              <a:rPr lang="en-US" sz="1150" b="1" dirty="0">
+          <p:cNvPr id="20" name="Text 18"/>
+          <p:cNvSpPr/>
+          <p:nvPr/>
+        </p:nvSpPr>
+        <p:spPr>
+          <a:xfrm>
+            <a:off x="475488" y="3044952"/>
+            <a:ext cx="1911096" cy="749808"/>
+          </a:xfrm>
+          <a:prstGeom prst="rect">
+            <a:avLst/>
+          </a:prstGeom>
+          <a:noFill/>
+          <a:ln/>
+        </p:spPr>
+        <p:txBody>
+          <a:bodyPr wrap="square" lIns="1778" tIns="1778" rIns="1778" bIns="1778" rtlCol="0" anchor="ctr"/>
+          <a:lstStyle/>
+          <a:p>
+            <a:pPr indent="0" marL="0">
+              <a:spcAft>
+                <a:spcPts val="200"/>
+              </a:spcAft>
+              <a:buNone/>
+            </a:pPr>
+            <a:r>
+              <a:rPr lang="en-US" sz="1300" b="1" dirty="0">
                 <a:solidFill>
                   <a:srgbClr val="171B20"/>
                 </a:solidFill>
-                <a:latin typeface="IBM Plex Sans" pitchFamily="34" charset="0"/>
-                <a:ea typeface="IBM Plex Sans" pitchFamily="34" charset="-122"/>
-                <a:cs typeface="IBM Plex Sans" pitchFamily="34" charset="-120"/>
-              </a:rPr>
-              <a:t>Маркетинг</a:t>
-            </a:r>
-            <a:endParaRPr lang="en-US" sz="1150" dirty="0"/>
-          </a:p>
-          <a:p>
-            <a:pPr indent="0" marL="0">
-              <a:lnSpc>
-                <a:spcPct val="105000"/>
-              </a:lnSpc>
-              <a:buNone/>
-            </a:pPr>
-            <a:r>
-              <a:rPr lang="en-US" sz="900" dirty="0">
+                <a:latin typeface="Arial" pitchFamily="34" charset="0"/>
+                <a:ea typeface="Arial" pitchFamily="34" charset="-122"/>
+                <a:cs typeface="Arial" pitchFamily="34" charset="-120"/>
+              </a:rPr>
+              <a:t>Закупки</a:t>
+            </a:r>
+            <a:endParaRPr lang="en-US" sz="1300" dirty="0"/>
+          </a:p>
+          <a:p>
+            <a:pPr indent="0" marL="0">
+              <a:buNone/>
+            </a:pPr>
+            <a:r>
+              <a:rPr lang="en-US" sz="950" dirty="0">
                 <a:solidFill>
                   <a:srgbClr val="59626B"/>
                 </a:solidFill>
-                <a:latin typeface="IBM Plex Sans" pitchFamily="34" charset="0"/>
-                <a:ea typeface="IBM Plex Sans" pitchFamily="34" charset="-122"/>
-                <a:cs typeface="IBM Plex Sans" pitchFamily="34" charset="-120"/>
-              </a:rPr>
-              <a:t>Лиды и кампании</a:t>
-            </a:r>
-            <a:endParaRPr lang="en-US" sz="1150" dirty="0"/>
-          </a:p>
-        </p:txBody>
-      </p:sp>
-      <p:sp>
-        <p:nvSpPr>
-          <p:cNvPr id="22" name="Shape 20"/>
-          <p:cNvSpPr/>
-          <p:nvPr/>
-        </p:nvSpPr>
-        <p:spPr>
-          <a:xfrm>
-            <a:off x="4645152" y="3145536"/>
-            <a:ext cx="1947672" cy="713232"/>
+                <a:latin typeface="Arial" pitchFamily="34" charset="0"/>
+                <a:ea typeface="Arial" pitchFamily="34" charset="-122"/>
+                <a:cs typeface="Arial" pitchFamily="34" charset="-120"/>
+              </a:rPr>
+              <a:t>Снабжение</a:t>
+            </a:r>
+            <a:endParaRPr lang="en-US" sz="1300" dirty="0"/>
+          </a:p>
+        </p:txBody>
+      </p:sp>
+      <p:sp>
+        <p:nvSpPr>
+          <p:cNvPr id="21" name="Shape 19"/>
+          <p:cNvSpPr/>
+          <p:nvPr/>
+        </p:nvSpPr>
+        <p:spPr>
+          <a:xfrm>
+            <a:off x="2551176" y="3044952"/>
+            <a:ext cx="1947672" cy="749808"/>
           </a:xfrm>
           <a:prstGeom prst="roundRect">
             <a:avLst>
-              <a:gd name="adj" fmla="val 6410"/>
+              <a:gd name="adj" fmla="val 6098"/>
             </a:avLst>
           </a:prstGeom>
           <a:solidFill>
@@ -6127,80 +6800,77 @@
       </p:sp>
       <p:sp>
         <p:nvSpPr>
-          <p:cNvPr id="23" name="Text 21"/>
-          <p:cNvSpPr/>
-          <p:nvPr/>
-        </p:nvSpPr>
-        <p:spPr>
-          <a:xfrm>
-            <a:off x="4663440" y="3145536"/>
-            <a:ext cx="1911096" cy="713232"/>
-          </a:xfrm>
-          <a:prstGeom prst="rect">
-            <a:avLst/>
-          </a:prstGeom>
-          <a:noFill/>
-          <a:ln/>
-        </p:spPr>
-        <p:txBody>
-          <a:bodyPr wrap="square" lIns="1397" tIns="1397" rIns="1397" bIns="1397" rtlCol="0" anchor="ctr"/>
-          <a:lstStyle/>
-          <a:p>
-            <a:pPr indent="0" marL="0">
-              <a:lnSpc>
-                <a:spcPct val="105000"/>
-              </a:lnSpc>
-              <a:buNone/>
-            </a:pPr>
-            <a:r>
-              <a:rPr lang="en-US" sz="1150" b="1" dirty="0">
+          <p:cNvPr id="22" name="Text 20"/>
+          <p:cNvSpPr/>
+          <p:nvPr/>
+        </p:nvSpPr>
+        <p:spPr>
+          <a:xfrm>
+            <a:off x="2569464" y="3044952"/>
+            <a:ext cx="1911096" cy="749808"/>
+          </a:xfrm>
+          <a:prstGeom prst="rect">
+            <a:avLst/>
+          </a:prstGeom>
+          <a:noFill/>
+          <a:ln/>
+        </p:spPr>
+        <p:txBody>
+          <a:bodyPr wrap="square" lIns="1778" tIns="1778" rIns="1778" bIns="1778" rtlCol="0" anchor="ctr"/>
+          <a:lstStyle/>
+          <a:p>
+            <a:pPr indent="0" marL="0">
+              <a:spcAft>
+                <a:spcPts val="200"/>
+              </a:spcAft>
+              <a:buNone/>
+            </a:pPr>
+            <a:r>
+              <a:rPr lang="en-US" sz="1300" b="1" dirty="0">
                 <a:solidFill>
                   <a:srgbClr val="171B20"/>
                 </a:solidFill>
-                <a:latin typeface="IBM Plex Sans" pitchFamily="34" charset="0"/>
-                <a:ea typeface="IBM Plex Sans" pitchFamily="34" charset="-122"/>
-                <a:cs typeface="IBM Plex Sans" pitchFamily="34" charset="-120"/>
-              </a:rPr>
-              <a:t>Проекты</a:t>
-            </a:r>
-            <a:endParaRPr lang="en-US" sz="1150" dirty="0"/>
-          </a:p>
-          <a:p>
-            <a:pPr indent="0" marL="0">
-              <a:lnSpc>
-                <a:spcPct val="105000"/>
-              </a:lnSpc>
-              <a:buNone/>
-            </a:pPr>
-            <a:r>
-              <a:rPr lang="en-US" sz="900" dirty="0">
+                <a:latin typeface="Arial" pitchFamily="34" charset="0"/>
+                <a:ea typeface="Arial" pitchFamily="34" charset="-122"/>
+                <a:cs typeface="Arial" pitchFamily="34" charset="-120"/>
+              </a:rPr>
+              <a:t>Маркетинг</a:t>
+            </a:r>
+            <a:endParaRPr lang="en-US" sz="1300" dirty="0"/>
+          </a:p>
+          <a:p>
+            <a:pPr indent="0" marL="0">
+              <a:buNone/>
+            </a:pPr>
+            <a:r>
+              <a:rPr lang="en-US" sz="950" dirty="0">
                 <a:solidFill>
                   <a:srgbClr val="59626B"/>
                 </a:solidFill>
-                <a:latin typeface="IBM Plex Sans" pitchFamily="34" charset="0"/>
-                <a:ea typeface="IBM Plex Sans" pitchFamily="34" charset="-122"/>
-                <a:cs typeface="IBM Plex Sans" pitchFamily="34" charset="-120"/>
-              </a:rPr>
-              <a:t>Задачи и сроки</a:t>
-            </a:r>
-            <a:endParaRPr lang="en-US" sz="1150" dirty="0"/>
-          </a:p>
-        </p:txBody>
-      </p:sp>
-      <p:sp>
-        <p:nvSpPr>
-          <p:cNvPr id="24" name="Shape 22"/>
-          <p:cNvSpPr/>
-          <p:nvPr/>
-        </p:nvSpPr>
-        <p:spPr>
-          <a:xfrm>
-            <a:off x="6739128" y="3145536"/>
-            <a:ext cx="1947672" cy="713232"/>
+                <a:latin typeface="Arial" pitchFamily="34" charset="0"/>
+                <a:ea typeface="Arial" pitchFamily="34" charset="-122"/>
+                <a:cs typeface="Arial" pitchFamily="34" charset="-120"/>
+              </a:rPr>
+              <a:t>Лиды и кампании</a:t>
+            </a:r>
+            <a:endParaRPr lang="en-US" sz="1300" dirty="0"/>
+          </a:p>
+        </p:txBody>
+      </p:sp>
+      <p:sp>
+        <p:nvSpPr>
+          <p:cNvPr id="23" name="Shape 21"/>
+          <p:cNvSpPr/>
+          <p:nvPr/>
+        </p:nvSpPr>
+        <p:spPr>
+          <a:xfrm>
+            <a:off x="4645152" y="3044952"/>
+            <a:ext cx="1947672" cy="749808"/>
           </a:xfrm>
           <a:prstGeom prst="roundRect">
             <a:avLst>
-              <a:gd name="adj" fmla="val 6410"/>
+              <a:gd name="adj" fmla="val 6098"/>
             </a:avLst>
           </a:prstGeom>
           <a:solidFill>
@@ -6223,96 +6893,311 @@
       </p:sp>
       <p:sp>
         <p:nvSpPr>
-          <p:cNvPr id="25" name="Text 23"/>
-          <p:cNvSpPr/>
-          <p:nvPr/>
-        </p:nvSpPr>
-        <p:spPr>
-          <a:xfrm>
-            <a:off x="6757416" y="3145536"/>
-            <a:ext cx="1911096" cy="713232"/>
-          </a:xfrm>
-          <a:prstGeom prst="rect">
-            <a:avLst/>
-          </a:prstGeom>
-          <a:noFill/>
-          <a:ln/>
-        </p:spPr>
-        <p:txBody>
-          <a:bodyPr wrap="square" lIns="1397" tIns="1397" rIns="1397" bIns="1397" rtlCol="0" anchor="ctr"/>
+          <p:cNvPr id="24" name="Text 22"/>
+          <p:cNvSpPr/>
+          <p:nvPr/>
+        </p:nvSpPr>
+        <p:spPr>
+          <a:xfrm>
+            <a:off x="4663440" y="3044952"/>
+            <a:ext cx="1911096" cy="749808"/>
+          </a:xfrm>
+          <a:prstGeom prst="rect">
+            <a:avLst/>
+          </a:prstGeom>
+          <a:noFill/>
+          <a:ln/>
+        </p:spPr>
+        <p:txBody>
+          <a:bodyPr wrap="square" lIns="1778" tIns="1778" rIns="1778" bIns="1778" rtlCol="0" anchor="ctr"/>
+          <a:lstStyle/>
+          <a:p>
+            <a:pPr indent="0" marL="0">
+              <a:spcAft>
+                <a:spcPts val="200"/>
+              </a:spcAft>
+              <a:buNone/>
+            </a:pPr>
+            <a:r>
+              <a:rPr lang="en-US" sz="1300" b="1" dirty="0">
+                <a:solidFill>
+                  <a:srgbClr val="171B20"/>
+                </a:solidFill>
+                <a:latin typeface="Arial" pitchFamily="34" charset="0"/>
+                <a:ea typeface="Arial" pitchFamily="34" charset="-122"/>
+                <a:cs typeface="Arial" pitchFamily="34" charset="-120"/>
+              </a:rPr>
+              <a:t>Проекты</a:t>
+            </a:r>
+            <a:endParaRPr lang="en-US" sz="1300" dirty="0"/>
+          </a:p>
+          <a:p>
+            <a:pPr indent="0" marL="0">
+              <a:buNone/>
+            </a:pPr>
+            <a:r>
+              <a:rPr lang="en-US" sz="950" dirty="0">
+                <a:solidFill>
+                  <a:srgbClr val="59626B"/>
+                </a:solidFill>
+                <a:latin typeface="Arial" pitchFamily="34" charset="0"/>
+                <a:ea typeface="Arial" pitchFamily="34" charset="-122"/>
+                <a:cs typeface="Arial" pitchFamily="34" charset="-120"/>
+              </a:rPr>
+              <a:t>Задачи и сроки</a:t>
+            </a:r>
+            <a:endParaRPr lang="en-US" sz="1300" dirty="0"/>
+          </a:p>
+        </p:txBody>
+      </p:sp>
+      <p:sp>
+        <p:nvSpPr>
+          <p:cNvPr id="25" name="Shape 23"/>
+          <p:cNvSpPr/>
+          <p:nvPr/>
+        </p:nvSpPr>
+        <p:spPr>
+          <a:xfrm>
+            <a:off x="6739128" y="3044952"/>
+            <a:ext cx="1947672" cy="749808"/>
+          </a:xfrm>
+          <a:prstGeom prst="roundRect">
+            <a:avLst>
+              <a:gd name="adj" fmla="val 6098"/>
+            </a:avLst>
+          </a:prstGeom>
+          <a:solidFill>
+            <a:srgbClr val="FFFFFF"/>
+          </a:solidFill>
+          <a:ln w="9525">
+            <a:solidFill>
+              <a:srgbClr val="D7DCE1"/>
+            </a:solidFill>
+            <a:prstDash val="solid"/>
+          </a:ln>
+          <a:effectLst>
+            <a:outerShdw sx="100000" sy="100000" kx="0" ky="0" algn="bl" rotWithShape="0" blurRad="88900" dist="25400" dir="5400000">
+              <a:srgbClr val="1A2A3A">
+                <a:alpha val="10000"/>
+              </a:srgbClr>
+            </a:outerShdw>
+          </a:effectLst>
+        </p:spPr>
+      </p:sp>
+      <p:sp>
+        <p:nvSpPr>
+          <p:cNvPr id="26" name="Text 24"/>
+          <p:cNvSpPr/>
+          <p:nvPr/>
+        </p:nvSpPr>
+        <p:spPr>
+          <a:xfrm>
+            <a:off x="6757416" y="3044952"/>
+            <a:ext cx="1911096" cy="749808"/>
+          </a:xfrm>
+          <a:prstGeom prst="rect">
+            <a:avLst/>
+          </a:prstGeom>
+          <a:noFill/>
+          <a:ln/>
+        </p:spPr>
+        <p:txBody>
+          <a:bodyPr wrap="square" lIns="1778" tIns="1778" rIns="1778" bIns="1778" rtlCol="0" anchor="ctr"/>
+          <a:lstStyle/>
+          <a:p>
+            <a:pPr indent="0" marL="0">
+              <a:spcAft>
+                <a:spcPts val="200"/>
+              </a:spcAft>
+              <a:buNone/>
+            </a:pPr>
+            <a:r>
+              <a:rPr lang="en-US" sz="1300" b="1" dirty="0">
+                <a:solidFill>
+                  <a:srgbClr val="171B20"/>
+                </a:solidFill>
+                <a:latin typeface="Arial" pitchFamily="34" charset="0"/>
+                <a:ea typeface="Arial" pitchFamily="34" charset="-122"/>
+                <a:cs typeface="Arial" pitchFamily="34" charset="-120"/>
+              </a:rPr>
+              <a:t>Прочие процессы</a:t>
+            </a:r>
+            <a:endParaRPr lang="en-US" sz="1300" dirty="0"/>
+          </a:p>
+          <a:p>
+            <a:pPr indent="0" marL="0">
+              <a:buNone/>
+            </a:pPr>
+            <a:r>
+              <a:rPr lang="en-US" sz="950" dirty="0">
+                <a:solidFill>
+                  <a:srgbClr val="59626B"/>
+                </a:solidFill>
+                <a:latin typeface="Arial" pitchFamily="34" charset="0"/>
+                <a:ea typeface="Arial" pitchFamily="34" charset="-122"/>
+                <a:cs typeface="Arial" pitchFamily="34" charset="-120"/>
+              </a:rPr>
+              <a:t>Портал, боты</a:t>
+            </a:r>
+            <a:endParaRPr lang="en-US" sz="1300" dirty="0"/>
+          </a:p>
+        </p:txBody>
+      </p:sp>
+      <p:sp>
+        <p:nvSpPr>
+          <p:cNvPr id="27" name="Shape 25"/>
+          <p:cNvSpPr/>
+          <p:nvPr/>
+        </p:nvSpPr>
+        <p:spPr>
+          <a:xfrm>
+            <a:off x="457200" y="4069080"/>
+            <a:ext cx="8229600" cy="658368"/>
+          </a:xfrm>
+          <a:prstGeom prst="roundRect">
+            <a:avLst>
+              <a:gd name="adj" fmla="val 6944"/>
+            </a:avLst>
+          </a:prstGeom>
+          <a:solidFill>
+            <a:srgbClr val="FBEEE0"/>
+          </a:solidFill>
+          <a:ln w="12700">
+            <a:solidFill>
+              <a:srgbClr val="EAD6BF"/>
+            </a:solidFill>
+            <a:prstDash val="solid"/>
+          </a:ln>
+        </p:spPr>
+      </p:sp>
+      <p:sp>
+        <p:nvSpPr>
+          <p:cNvPr id="28" name="Text 26"/>
+          <p:cNvSpPr/>
+          <p:nvPr/>
+        </p:nvSpPr>
+        <p:spPr>
+          <a:xfrm>
+            <a:off x="640080" y="4069080"/>
+            <a:ext cx="7863840" cy="658368"/>
+          </a:xfrm>
+          <a:prstGeom prst="rect">
+            <a:avLst/>
+          </a:prstGeom>
+          <a:noFill/>
+          <a:ln/>
+        </p:spPr>
+        <p:txBody>
+          <a:bodyPr wrap="square" lIns="0" tIns="0" rIns="0" bIns="0" rtlCol="0" anchor="ctr"/>
           <a:lstStyle/>
           <a:p>
             <a:pPr indent="0" marL="0">
               <a:lnSpc>
-                <a:spcPct val="105000"/>
+                <a:spcPct val="120000"/>
               </a:lnSpc>
               <a:buNone/>
             </a:pPr>
             <a:r>
-              <a:rPr lang="en-US" sz="1150" b="1" dirty="0">
-                <a:solidFill>
-                  <a:srgbClr val="171B20"/>
-                </a:solidFill>
-                <a:latin typeface="IBM Plex Sans" pitchFamily="34" charset="0"/>
-                <a:ea typeface="IBM Plex Sans" pitchFamily="34" charset="-122"/>
-                <a:cs typeface="IBM Plex Sans" pitchFamily="34" charset="-120"/>
-              </a:rPr>
-              <a:t>Прочие процессы</a:t>
-            </a:r>
-            <a:endParaRPr lang="en-US" sz="1150" dirty="0"/>
-          </a:p>
-          <a:p>
+              <a:rPr lang="en-US" sz="1050" b="1" dirty="0">
+                <a:solidFill>
+                  <a:srgbClr val="5E3212"/>
+                </a:solidFill>
+                <a:latin typeface="Courier New" pitchFamily="34" charset="0"/>
+                <a:ea typeface="Courier New" pitchFamily="34" charset="-122"/>
+                <a:cs typeface="Courier New" pitchFamily="34" charset="-120"/>
+              </a:rPr>
+              <a:t>Российское ПО. </a:t>
+            </a:r>
             <a:pPr indent="0" marL="0">
               <a:lnSpc>
-                <a:spcPct val="105000"/>
+                <a:spcPct val="120000"/>
               </a:lnSpc>
               <a:buNone/>
             </a:pPr>
             <a:r>
-              <a:rPr lang="en-US" sz="900" dirty="0">
-                <a:solidFill>
-                  <a:srgbClr val="59626B"/>
-                </a:solidFill>
-                <a:latin typeface="IBM Plex Sans" pitchFamily="34" charset="0"/>
-                <a:ea typeface="IBM Plex Sans" pitchFamily="34" charset="-122"/>
-                <a:cs typeface="IBM Plex Sans" pitchFamily="34" charset="-120"/>
-              </a:rPr>
-              <a:t>Портал, боты, сервисы</a:t>
-            </a:r>
-            <a:endParaRPr lang="en-US" sz="1150" dirty="0"/>
-          </a:p>
-        </p:txBody>
-      </p:sp>
-      <p:sp>
-        <p:nvSpPr>
-          <p:cNvPr id="26" name="Shape 24"/>
-          <p:cNvSpPr/>
-          <p:nvPr/>
-        </p:nvSpPr>
-        <p:spPr>
-          <a:xfrm>
-            <a:off x="0" y="4133088"/>
-            <a:ext cx="9144000" cy="1010412"/>
-          </a:xfrm>
-          <a:prstGeom prst="rect">
-            <a:avLst/>
+              <a:rPr lang="en-US" sz="1050" dirty="0">
+                <a:solidFill>
+                  <a:srgbClr val="7A421A"/>
+                </a:solidFill>
+                <a:latin typeface="Courier New" pitchFamily="34" charset="0"/>
+                <a:ea typeface="Courier New" pitchFamily="34" charset="-122"/>
+                <a:cs typeface="Courier New" pitchFamily="34" charset="-120"/>
+              </a:rPr>
+              <a:t>В реестре отечественного ПО · замена SAP, Salesforce, MS Dynamics · облако или on-premise на вашем сервере.</a:t>
+            </a:r>
+            <a:endParaRPr lang="en-US" sz="1050" dirty="0"/>
+          </a:p>
+        </p:txBody>
+      </p:sp>
+    </p:spTree>
+  </p:cSld>
+  <p:clrMapOvr>
+    <a:masterClrMapping/>
+  </p:clrMapOvr>
+</p:sld>
+</file>
+
+<file path=ppt/slides/slide7.xml><?xml version="1.0" encoding="utf-8"?>
+<p:sld xmlns:a="http://schemas.openxmlformats.org/drawingml/2006/main" xmlns:r="http://schemas.openxmlformats.org/officeDocument/2006/relationships" xmlns:p="http://schemas.openxmlformats.org/presentationml/2006/main">
+  <p:cSld name="Slide 7">
+    <p:bg>
+      <p:bgPr>
+        <a:solidFill>
+          <a:srgbClr val="134C7A"/>
+        </a:solidFill>
+      </p:bgPr>
+    </p:bg>
+    <p:spTree>
+      <p:nvGrpSpPr>
+        <p:cNvPr id="1" name=""/>
+        <p:cNvGrpSpPr/>
+        <p:nvPr/>
+      </p:nvGrpSpPr>
+      <p:grpSpPr>
+        <a:xfrm>
+          <a:off x="0" y="0"/>
+          <a:ext cx="0" cy="0"/>
+          <a:chOff x="0" y="0"/>
+          <a:chExt cx="0" cy="0"/>
+        </a:xfrm>
+      </p:grpSpPr>
+      <p:sp>
+        <p:nvSpPr>
+          <p:cNvPr id="2" name="Shape 0"/>
+          <p:cNvSpPr/>
+          <p:nvPr/>
+        </p:nvSpPr>
+        <p:spPr>
+          <a:xfrm>
+            <a:off x="457200" y="274320"/>
+            <a:ext cx="292608" cy="292608"/>
+          </a:xfrm>
+          <a:prstGeom prst="roundRect">
+            <a:avLst>
+              <a:gd name="adj" fmla="val 12500"/>
+            </a:avLst>
           </a:prstGeom>
           <a:solidFill>
             <a:srgbClr val="134C7A"/>
           </a:solidFill>
-          <a:ln/>
-        </p:spPr>
-      </p:sp>
-      <p:sp>
-        <p:nvSpPr>
-          <p:cNvPr id="27" name="Text 25"/>
-          <p:cNvSpPr/>
-          <p:nvPr/>
-        </p:nvSpPr>
-        <p:spPr>
-          <a:xfrm>
-            <a:off x="457200" y="4224528"/>
-            <a:ext cx="4937760" cy="822960"/>
+          <a:ln w="15875">
+            <a:solidFill>
+              <a:srgbClr val="86B8E0"/>
+            </a:solidFill>
+            <a:prstDash val="solid"/>
+          </a:ln>
+        </p:spPr>
+      </p:sp>
+      <p:sp>
+        <p:nvSpPr>
+          <p:cNvPr id="3" name="Text 1"/>
+          <p:cNvSpPr/>
+          <p:nvPr/>
+        </p:nvSpPr>
+        <p:spPr>
+          <a:xfrm>
+            <a:off x="457200" y="274320"/>
+            <a:ext cx="292608" cy="292608"/>
           </a:xfrm>
           <a:prstGeom prst="rect">
             <a:avLst/>
@@ -6324,37 +7209,277 @@
           <a:bodyPr wrap="square" lIns="0" tIns="0" rIns="0" bIns="0" rtlCol="0" anchor="ctr"/>
           <a:lstStyle/>
           <a:p>
+            <a:pPr algn="ctr" indent="0" marL="0">
+              <a:buNone/>
+            </a:pPr>
+            <a:r>
+              <a:rPr lang="en-US" sz="1100" b="1" dirty="0">
+                <a:solidFill>
+                  <a:srgbClr val="86B8E0"/>
+                </a:solidFill>
+                <a:latin typeface="Arial" pitchFamily="34" charset="0"/>
+                <a:ea typeface="Arial" pitchFamily="34" charset="-122"/>
+                <a:cs typeface="Arial" pitchFamily="34" charset="-120"/>
+              </a:rPr>
+              <a:t>WD</a:t>
+            </a:r>
+            <a:endParaRPr lang="en-US" sz="1100" dirty="0"/>
+          </a:p>
+        </p:txBody>
+      </p:sp>
+      <p:sp>
+        <p:nvSpPr>
+          <p:cNvPr id="4" name="Text 2"/>
+          <p:cNvSpPr/>
+          <p:nvPr/>
+        </p:nvSpPr>
+        <p:spPr>
+          <a:xfrm>
+            <a:off x="822960" y="274320"/>
+            <a:ext cx="2743200" cy="292608"/>
+          </a:xfrm>
+          <a:prstGeom prst="rect">
+            <a:avLst/>
+          </a:prstGeom>
+          <a:noFill/>
+          <a:ln/>
+        </p:spPr>
+        <p:txBody>
+          <a:bodyPr wrap="square" lIns="0" tIns="0" rIns="0" bIns="0" rtlCol="0" anchor="ctr"/>
+          <a:lstStyle/>
+          <a:p>
+            <a:pPr indent="0" marL="0">
+              <a:buNone/>
+            </a:pPr>
+            <a:r>
+              <a:rPr lang="en-US" sz="1200" b="1" dirty="0">
+                <a:solidFill>
+                  <a:srgbClr val="EEF1F4"/>
+                </a:solidFill>
+                <a:latin typeface="Arial" pitchFamily="34" charset="0"/>
+                <a:ea typeface="Arial" pitchFamily="34" charset="-122"/>
+                <a:cs typeface="Arial" pitchFamily="34" charset="-120"/>
+              </a:rPr>
+              <a:t>WhatDaDev</a:t>
+            </a:r>
+            <a:endParaRPr lang="en-US" sz="1200" dirty="0"/>
+          </a:p>
+        </p:txBody>
+      </p:sp>
+      <p:sp>
+        <p:nvSpPr>
+          <p:cNvPr id="5" name="Text 3"/>
+          <p:cNvSpPr/>
+          <p:nvPr/>
+        </p:nvSpPr>
+        <p:spPr>
+          <a:xfrm>
+            <a:off x="5029200" y="274320"/>
+            <a:ext cx="3657600" cy="292608"/>
+          </a:xfrm>
+          <a:prstGeom prst="rect">
+            <a:avLst/>
+          </a:prstGeom>
+          <a:noFill/>
+          <a:ln/>
+        </p:spPr>
+        <p:txBody>
+          <a:bodyPr wrap="square" lIns="0" tIns="0" rIns="0" bIns="0" rtlCol="0" anchor="ctr"/>
+          <a:lstStyle/>
+          <a:p>
+            <a:pPr algn="r" indent="0" marL="0">
+              <a:buNone/>
+            </a:pPr>
+            <a:r>
+              <a:rPr lang="en-US" sz="900" spc="200" kern="0" dirty="0">
+                <a:solidFill>
+                  <a:srgbClr val="AEC2D3"/>
+                </a:solidFill>
+                <a:latin typeface="Courier New" pitchFamily="34" charset="0"/>
+                <a:ea typeface="Courier New" pitchFamily="34" charset="-122"/>
+                <a:cs typeface="Courier New" pitchFamily="34" charset="-120"/>
+              </a:rPr>
+              <a:t>Следующий шаг</a:t>
+            </a:r>
+            <a:endParaRPr lang="en-US" sz="900" dirty="0"/>
+          </a:p>
+        </p:txBody>
+      </p:sp>
+      <p:sp>
+        <p:nvSpPr>
+          <p:cNvPr id="6" name="Shape 4"/>
+          <p:cNvSpPr/>
+          <p:nvPr/>
+        </p:nvSpPr>
+        <p:spPr>
+          <a:xfrm>
+            <a:off x="457200" y="914400"/>
+            <a:ext cx="100584" cy="100584"/>
+          </a:xfrm>
+          <a:prstGeom prst="rect">
+            <a:avLst/>
+          </a:prstGeom>
+          <a:solidFill>
+            <a:srgbClr val="86B8E0"/>
+          </a:solidFill>
+          <a:ln/>
+        </p:spPr>
+      </p:sp>
+      <p:sp>
+        <p:nvSpPr>
+          <p:cNvPr id="7" name="Text 5"/>
+          <p:cNvSpPr/>
+          <p:nvPr/>
+        </p:nvSpPr>
+        <p:spPr>
+          <a:xfrm>
+            <a:off x="658368" y="850392"/>
+            <a:ext cx="7772400" cy="237744"/>
+          </a:xfrm>
+          <a:prstGeom prst="rect">
+            <a:avLst/>
+          </a:prstGeom>
+          <a:noFill/>
+          <a:ln/>
+        </p:spPr>
+        <p:txBody>
+          <a:bodyPr wrap="square" lIns="0" tIns="0" rIns="0" bIns="0" rtlCol="0" anchor="ctr"/>
+          <a:lstStyle/>
+          <a:p>
+            <a:pPr indent="0" marL="0">
+              <a:buNone/>
+            </a:pPr>
+            <a:r>
+              <a:rPr lang="en-US" sz="1050" spc="200" kern="0" dirty="0">
+                <a:solidFill>
+                  <a:srgbClr val="86B8E0"/>
+                </a:solidFill>
+                <a:latin typeface="Courier New" pitchFamily="34" charset="0"/>
+                <a:ea typeface="Courier New" pitchFamily="34" charset="-122"/>
+                <a:cs typeface="Courier New" pitchFamily="34" charset="-120"/>
+              </a:rPr>
+              <a:t>СЛЕДУЮЩИЙ ШАГ</a:t>
+            </a:r>
+            <a:endParaRPr lang="en-US" sz="1050" dirty="0"/>
+          </a:p>
+        </p:txBody>
+      </p:sp>
+      <p:sp>
+        <p:nvSpPr>
+          <p:cNvPr id="8" name="Text 6"/>
+          <p:cNvSpPr/>
+          <p:nvPr/>
+        </p:nvSpPr>
+        <p:spPr>
+          <a:xfrm>
+            <a:off x="457200" y="1170432"/>
+            <a:ext cx="8229600" cy="914400"/>
+          </a:xfrm>
+          <a:prstGeom prst="rect">
+            <a:avLst/>
+          </a:prstGeom>
+          <a:noFill/>
+          <a:ln/>
+        </p:spPr>
+        <p:txBody>
+          <a:bodyPr wrap="square" lIns="0" tIns="0" rIns="0" bIns="0" rtlCol="0" anchor="t"/>
+          <a:lstStyle/>
+          <a:p>
             <a:pPr indent="0" marL="0">
               <a:lnSpc>
-                <a:spcPct val="105000"/>
+                <a:spcPts val="3150"/>
               </a:lnSpc>
               <a:buNone/>
             </a:pPr>
             <a:r>
-              <a:rPr lang="en-US" sz="1600" b="1" dirty="0">
+              <a:rPr lang="en-US" sz="3000" b="1" dirty="0">
                 <a:solidFill>
                   <a:srgbClr val="EEF1F4"/>
                 </a:solidFill>
-                <a:latin typeface="IBM Plex Sans" pitchFamily="34" charset="0"/>
-                <a:ea typeface="IBM Plex Sans" pitchFamily="34" charset="-122"/>
-                <a:cs typeface="IBM Plex Sans" pitchFamily="34" charset="-120"/>
-              </a:rPr>
-              <a:t>Покажем на ваших документах — за один разбор процесса</a:t>
-            </a:r>
-            <a:endParaRPr lang="en-US" sz="1600" dirty="0"/>
-          </a:p>
-        </p:txBody>
-      </p:sp>
-      <p:sp>
-        <p:nvSpPr>
-          <p:cNvPr id="28" name="Text 26"/>
-          <p:cNvSpPr/>
-          <p:nvPr/>
-        </p:nvSpPr>
-        <p:spPr>
-          <a:xfrm>
-            <a:off x="5486400" y="4224528"/>
-            <a:ext cx="3200400" cy="822960"/>
+                <a:latin typeface="Arial" pitchFamily="34" charset="0"/>
+                <a:ea typeface="Arial" pitchFamily="34" charset="-122"/>
+                <a:cs typeface="Arial" pitchFamily="34" charset="-120"/>
+              </a:rPr>
+              <a:t>Покажем на ваших документах — за 30 минут</a:t>
+            </a:r>
+            <a:endParaRPr lang="en-US" sz="3000" dirty="0"/>
+          </a:p>
+        </p:txBody>
+      </p:sp>
+      <p:sp>
+        <p:nvSpPr>
+          <p:cNvPr id="9" name="Text 7"/>
+          <p:cNvSpPr/>
+          <p:nvPr/>
+        </p:nvSpPr>
+        <p:spPr>
+          <a:xfrm>
+            <a:off x="457200" y="2240280"/>
+            <a:ext cx="6766560" cy="640080"/>
+          </a:xfrm>
+          <a:prstGeom prst="rect">
+            <a:avLst/>
+          </a:prstGeom>
+          <a:noFill/>
+          <a:ln/>
+        </p:spPr>
+        <p:txBody>
+          <a:bodyPr wrap="square" lIns="0" tIns="0" rIns="0" bIns="0" rtlCol="0" anchor="t"/>
+          <a:lstStyle/>
+          <a:p>
+            <a:pPr indent="0" marL="0">
+              <a:lnSpc>
+                <a:spcPct val="112000"/>
+              </a:lnSpc>
+              <a:buNone/>
+            </a:pPr>
+            <a:r>
+              <a:rPr lang="en-US" sz="1300" dirty="0">
+                <a:solidFill>
+                  <a:srgbClr val="AEC2D3"/>
+                </a:solidFill>
+                <a:latin typeface="Arial" pitchFamily="34" charset="0"/>
+                <a:ea typeface="Arial" pitchFamily="34" charset="-122"/>
+                <a:cs typeface="Arial" pitchFamily="34" charset="-120"/>
+              </a:rPr>
+              <a:t>Разберём ваш процесс согласования и посчитаем эффект. Бесплатно, без обязательств.</a:t>
+            </a:r>
+            <a:endParaRPr lang="en-US" sz="1300" dirty="0"/>
+          </a:p>
+        </p:txBody>
+      </p:sp>
+      <p:sp>
+        <p:nvSpPr>
+          <p:cNvPr id="10" name="Shape 8"/>
+          <p:cNvSpPr/>
+          <p:nvPr/>
+        </p:nvSpPr>
+        <p:spPr>
+          <a:xfrm>
+            <a:off x="457200" y="3063240"/>
+            <a:ext cx="3017520" cy="566928"/>
+          </a:xfrm>
+          <a:prstGeom prst="roundRect">
+            <a:avLst>
+              <a:gd name="adj" fmla="val 8065"/>
+            </a:avLst>
+          </a:prstGeom>
+          <a:solidFill>
+            <a:srgbClr val="B25A1E"/>
+          </a:solidFill>
+          <a:ln/>
+        </p:spPr>
+      </p:sp>
+      <p:sp>
+        <p:nvSpPr>
+          <p:cNvPr id="11" name="Text 9"/>
+          <p:cNvSpPr/>
+          <p:nvPr/>
+        </p:nvSpPr>
+        <p:spPr>
+          <a:xfrm>
+            <a:off x="457200" y="3063240"/>
+            <a:ext cx="3017520" cy="566928"/>
           </a:xfrm>
           <a:prstGeom prst="rect">
             <a:avLst/>
@@ -6366,10 +7491,46 @@
           <a:bodyPr wrap="square" lIns="0" tIns="0" rIns="0" bIns="0" rtlCol="0" anchor="ctr"/>
           <a:lstStyle/>
           <a:p>
-            <a:pPr algn="r" indent="0" marL="0">
-              <a:lnSpc>
-                <a:spcPct val="115000"/>
-              </a:lnSpc>
+            <a:pPr algn="ctr" indent="0" marL="0">
+              <a:buNone/>
+            </a:pPr>
+            <a:r>
+              <a:rPr lang="en-US" sz="1500" b="1" dirty="0">
+                <a:solidFill>
+                  <a:srgbClr val="FFFFFF"/>
+                </a:solidFill>
+                <a:latin typeface="Arial" pitchFamily="34" charset="0"/>
+                <a:ea typeface="Arial" pitchFamily="34" charset="-122"/>
+                <a:cs typeface="Arial" pitchFamily="34" charset="-120"/>
+              </a:rPr>
+              <a:t>Записаться на разбор  →</a:t>
+            </a:r>
+            <a:endParaRPr lang="en-US" sz="1500" dirty="0"/>
+          </a:p>
+        </p:txBody>
+      </p:sp>
+      <p:sp>
+        <p:nvSpPr>
+          <p:cNvPr id="12" name="Text 10"/>
+          <p:cNvSpPr/>
+          <p:nvPr/>
+        </p:nvSpPr>
+        <p:spPr>
+          <a:xfrm>
+            <a:off x="457200" y="3977640"/>
+            <a:ext cx="8229600" cy="365760"/>
+          </a:xfrm>
+          <a:prstGeom prst="rect">
+            <a:avLst/>
+          </a:prstGeom>
+          <a:noFill/>
+          <a:ln/>
+        </p:spPr>
+        <p:txBody>
+          <a:bodyPr wrap="square" lIns="0" tIns="0" rIns="0" bIns="0" rtlCol="0" anchor="ctr"/>
+          <a:lstStyle/>
+          <a:p>
+            <a:pPr indent="0" marL="0">
               <a:buNone/>
             </a:pPr>
             <a:r>
@@ -6377,19 +7538,13 @@
                 <a:solidFill>
                   <a:srgbClr val="EEF1F4"/>
                 </a:solidFill>
-                <a:latin typeface="IBM Plex Mono" pitchFamily="34" charset="0"/>
-                <a:ea typeface="IBM Plex Mono" pitchFamily="34" charset="-122"/>
-                <a:cs typeface="IBM Plex Mono" pitchFamily="34" charset="-120"/>
+                <a:latin typeface="Courier New" pitchFamily="34" charset="0"/>
+                <a:ea typeface="Courier New" pitchFamily="34" charset="-122"/>
+                <a:cs typeface="Courier New" pitchFamily="34" charset="-120"/>
               </a:rPr>
               <a:t>sales@whatdadev.ru</a:t>
             </a:r>
-            <a:endParaRPr lang="en-US" sz="1150" dirty="0"/>
-          </a:p>
-          <a:p>
-            <a:pPr algn="r" indent="0" marL="0">
-              <a:lnSpc>
-                <a:spcPct val="115000"/>
-              </a:lnSpc>
+            <a:pPr indent="0" marL="0">
               <a:buNone/>
             </a:pPr>
             <a:r>
@@ -6397,19 +7552,13 @@
                 <a:solidFill>
                   <a:srgbClr val="EEF1F4"/>
                 </a:solidFill>
-                <a:latin typeface="IBM Plex Mono" pitchFamily="34" charset="0"/>
-                <a:ea typeface="IBM Plex Mono" pitchFamily="34" charset="-122"/>
-                <a:cs typeface="IBM Plex Mono" pitchFamily="34" charset="-120"/>
-              </a:rPr>
-              <a:t>+7 980 471-57-72</a:t>
-            </a:r>
-            <a:endParaRPr lang="en-US" sz="1150" dirty="0"/>
-          </a:p>
-          <a:p>
-            <a:pPr algn="r" indent="0" marL="0">
-              <a:lnSpc>
-                <a:spcPct val="115000"/>
-              </a:lnSpc>
+                <a:latin typeface="Courier New" pitchFamily="34" charset="0"/>
+                <a:ea typeface="Courier New" pitchFamily="34" charset="-122"/>
+                <a:cs typeface="Courier New" pitchFamily="34" charset="-120"/>
+              </a:rPr>
+              <a:t>      +7 980 471-57-72</a:t>
+            </a:r>
+            <a:pPr indent="0" marL="0">
               <a:buNone/>
             </a:pPr>
             <a:r>
@@ -6417,11 +7566,11 @@
                 <a:solidFill>
                   <a:srgbClr val="AEC2D3"/>
                 </a:solidFill>
-                <a:latin typeface="IBM Plex Mono" pitchFamily="34" charset="0"/>
-                <a:ea typeface="IBM Plex Mono" pitchFamily="34" charset="-122"/>
-                <a:cs typeface="IBM Plex Mono" pitchFamily="34" charset="-120"/>
-              </a:rPr>
-              <a:t>Telegram @WhatDaDev · whatdadev.ru</a:t>
+                <a:latin typeface="Courier New" pitchFamily="34" charset="0"/>
+                <a:ea typeface="Courier New" pitchFamily="34" charset="-122"/>
+                <a:cs typeface="Courier New" pitchFamily="34" charset="-120"/>
+              </a:rPr>
+              <a:t>      Telegram @WhatDaDev · whatdadev.ru</a:t>
             </a:r>
             <a:endParaRPr lang="en-US" sz="1150" dirty="0"/>
           </a:p>

--- a/deliverables/WhatDaDev_Презентация_Знакомство.pptx
+++ b/deliverables/WhatDaDev_Презентация_Знакомство.pptx
@@ -508,7 +508,7 @@
           <a:p>
             <a:r>
               <a:rPr lang="en-US" dirty="0"/>
-              <a:t>Открываем болью клиента, не собой. Before/After: как сейчас (хаос) → с Coordo (порядок).</a:t>
+              <a:t>Козырь доверия: dogfooding. Сертифицированная команда, продукт+услуги, РФ и КЗ.</a:t>
             </a:r>
             <a:endParaRPr lang="en-US" dirty="0"/>
           </a:p>
@@ -596,7 +596,7 @@
           <a:p>
             <a:r>
               <a:rPr lang="en-US" dirty="0"/>
-              <a:t>Козырь доверия: dogfooding. Сертифицированная команда, продукт+услуги, РФ и КЗ.</a:t>
+              <a:t>Открываем болью клиента, не собой. Before/After: как сейчас (хаос) → с Coordo (порядок).</a:t>
             </a:r>
             <a:endParaRPr lang="en-US" dirty="0"/>
           </a:p>
@@ -1391,7 +1391,7 @@
     <p:bg>
       <p:bgPr>
         <a:solidFill>
-          <a:srgbClr val="F3F5F6"/>
+          <a:srgbClr val="F5F8FC"/>
         </a:solidFill>
       </p:bgPr>
     </p:bg>
@@ -1426,11 +1426,11 @@
             </a:avLst>
           </a:prstGeom>
           <a:solidFill>
-            <a:srgbClr val="F3F5F6"/>
+            <a:srgbClr val="F5F8FC"/>
           </a:solidFill>
           <a:ln w="15875">
             <a:solidFill>
-              <a:srgbClr val="1D5C9A"/>
+              <a:srgbClr val="1668C0"/>
             </a:solidFill>
             <a:prstDash val="solid"/>
           </a:ln>
@@ -1463,7 +1463,7 @@
             <a:r>
               <a:rPr lang="en-US" sz="1100" b="1" dirty="0">
                 <a:solidFill>
-                  <a:srgbClr val="1D5C9A"/>
+                  <a:srgbClr val="1668C0"/>
                 </a:solidFill>
                 <a:latin typeface="Arial" pitchFamily="34" charset="0"/>
                 <a:ea typeface="Arial" pitchFamily="34" charset="-122"/>
@@ -1547,7 +1547,7 @@
                 <a:ea typeface="Courier New" pitchFamily="34" charset="-122"/>
                 <a:cs typeface="Courier New" pitchFamily="34" charset="-120"/>
               </a:rPr>
-              <a:t>Проблема</a:t>
+              <a:t>О компании</a:t>
             </a:r>
             <a:endParaRPr lang="en-US" sz="900" dirty="0"/>
           </a:p>
@@ -1646,7 +1646,7 @@
             <a:avLst/>
           </a:prstGeom>
           <a:solidFill>
-            <a:srgbClr val="B25A1E"/>
+            <a:srgbClr val="1668C0"/>
           </a:solidFill>
           <a:ln/>
         </p:spPr>
@@ -1678,13 +1678,13 @@
             <a:r>
               <a:rPr lang="en-US" sz="1050" spc="200" kern="0" dirty="0">
                 <a:solidFill>
-                  <a:srgbClr val="B25A1E"/>
+                  <a:srgbClr val="1668C0"/>
                 </a:solidFill>
                 <a:latin typeface="Courier New" pitchFamily="34" charset="0"/>
                 <a:ea typeface="Courier New" pitchFamily="34" charset="-122"/>
                 <a:cs typeface="Courier New" pitchFamily="34" charset="-120"/>
               </a:rPr>
-              <a:t>С ЧЕГО ВСЁ НАЧИНАЕТСЯ</a:t>
+              <a:t>КТО ЭТО РЕШАЕТ</a:t>
             </a:r>
             <a:endParaRPr lang="en-US" sz="1050" dirty="0"/>
           </a:p>
@@ -1699,7 +1699,7 @@
         <p:spPr>
           <a:xfrm>
             <a:off x="457200" y="1170432"/>
-            <a:ext cx="8229600" cy="914400"/>
+            <a:ext cx="8229600" cy="685800"/>
           </a:xfrm>
           <a:prstGeom prst="rect">
             <a:avLst/>
@@ -1713,12 +1713,12 @@
           <a:p>
             <a:pPr indent="0" marL="0">
               <a:lnSpc>
-                <a:spcPts val="3150"/>
+                <a:spcPts val="2415"/>
               </a:lnSpc>
               <a:buNone/>
             </a:pPr>
             <a:r>
-              <a:rPr lang="en-US" sz="3000" b="1" dirty="0">
+              <a:rPr lang="en-US" sz="2300" b="1" dirty="0">
                 <a:solidFill>
                   <a:srgbClr val="171B20"/>
                 </a:solidFill>
@@ -1726,9 +1726,9 @@
                 <a:ea typeface="Arial" pitchFamily="34" charset="-122"/>
                 <a:cs typeface="Arial" pitchFamily="34" charset="-120"/>
               </a:rPr>
-              <a:t>Согласование договора тянется неделями</a:t>
-            </a:r>
-            <a:endParaRPr lang="en-US" sz="3000" dirty="0"/>
+              <a:t>Не подрядчик со стороны — мы сами живём в ELMA365</a:t>
+            </a:r>
+            <a:endParaRPr lang="en-US" sz="2300" dirty="0"/>
           </a:p>
         </p:txBody>
       </p:sp>
@@ -1768,7 +1768,7 @@
                 <a:ea typeface="Arial" pitchFamily="34" charset="-122"/>
                 <a:cs typeface="Arial" pitchFamily="34" charset="-120"/>
               </a:rPr>
-              <a:t>Почта, бумага, версии в разных местах — не видно, у кого документ и когда будет готово.</a:t>
+              <a:t>Свой документооборот, задачи и процессы ведём в системе, которую внедряем. Поэтому — по опыту, а не по учебнику.</a:t>
             </a:r>
             <a:endParaRPr lang="en-US" sz="1300" dirty="0"/>
           </a:p>
@@ -1782,18 +1782,30 @@
         </p:nvSpPr>
         <p:spPr>
           <a:xfrm>
-            <a:off x="457200" y="2743200"/>
-            <a:ext cx="3611880" cy="1783080"/>
+            <a:off x="457200" y="2788920"/>
+            <a:ext cx="2621280" cy="1371600"/>
           </a:xfrm>
           <a:prstGeom prst="roundRect">
             <a:avLst>
-              <a:gd name="adj" fmla="val 3077"/>
+              <a:gd name="adj" fmla="val 3333"/>
             </a:avLst>
           </a:prstGeom>
           <a:solidFill>
-            <a:srgbClr val="ECEEF0"/>
+            <a:srgbClr val="FFFFFF"/>
           </a:solidFill>
-          <a:ln/>
+          <a:ln w="9525">
+            <a:solidFill>
+              <a:srgbClr val="D8E2EC"/>
+            </a:solidFill>
+            <a:prstDash val="solid"/>
+          </a:ln>
+          <a:effectLst>
+            <a:outerShdw sx="100000" sy="100000" kx="0" ky="0" algn="bl" rotWithShape="0" blurRad="88900" dist="25400" dir="5400000">
+              <a:srgbClr val="1A2A3A">
+                <a:alpha val="10000"/>
+              </a:srgbClr>
+            </a:outerShdw>
+          </a:effectLst>
         </p:spPr>
       </p:sp>
       <p:sp>
@@ -1804,50 +1816,53 @@
         </p:nvSpPr>
         <p:spPr>
           <a:xfrm>
-            <a:off x="457200" y="2743200"/>
-            <a:ext cx="3611880" cy="1783080"/>
-          </a:xfrm>
-          <a:prstGeom prst="rect">
-            <a:avLst/>
-          </a:prstGeom>
-          <a:noFill/>
-          <a:ln/>
-        </p:spPr>
-        <p:txBody>
-          <a:bodyPr wrap="square" lIns="2540" tIns="2540" rIns="2540" bIns="2540" rtlCol="0" anchor="t"/>
+            <a:off x="475488" y="2788920"/>
+            <a:ext cx="2584704" cy="1371600"/>
+          </a:xfrm>
+          <a:prstGeom prst="rect">
+            <a:avLst/>
+          </a:prstGeom>
+          <a:noFill/>
+          <a:ln/>
+        </p:spPr>
+        <p:txBody>
+          <a:bodyPr wrap="square" lIns="2032" tIns="2032" rIns="2032" bIns="2032" rtlCol="0" anchor="t"/>
           <a:lstStyle/>
           <a:p>
             <a:pPr indent="0" marL="0">
               <a:lnSpc>
-                <a:spcPct val="115000"/>
+                <a:spcPct val="105000"/>
               </a:lnSpc>
               <a:spcAft>
-                <a:spcPts val="800"/>
+                <a:spcPts val="500"/>
               </a:spcAft>
               <a:buNone/>
             </a:pPr>
             <a:r>
-              <a:rPr lang="en-US" sz="950" spc="100" kern="0" dirty="0">
-                <a:solidFill>
-                  <a:srgbClr val="59626B"/>
+              <a:rPr lang="en-US" sz="900" dirty="0">
+                <a:solidFill>
+                  <a:srgbClr val="1668C0"/>
                 </a:solidFill>
                 <a:latin typeface="Courier New" pitchFamily="34" charset="0"/>
                 <a:ea typeface="Courier New" pitchFamily="34" charset="-122"/>
                 <a:cs typeface="Courier New" pitchFamily="34" charset="-120"/>
               </a:rPr>
-              <a:t>КАК СЕЙЧАС</a:t>
-            </a:r>
-            <a:endParaRPr lang="en-US" sz="950" dirty="0"/>
+              <a:t>01</a:t>
+            </a:r>
+            <a:endParaRPr lang="en-US" sz="900" dirty="0"/>
           </a:p>
           <a:p>
             <a:pPr indent="0" marL="0">
               <a:lnSpc>
-                <a:spcPct val="115000"/>
+                <a:spcPct val="105000"/>
               </a:lnSpc>
-              <a:buNone/>
-            </a:pPr>
-            <a:r>
-              <a:rPr lang="en-US" sz="1100" dirty="0">
+              <a:spcAft>
+                <a:spcPts val="500"/>
+              </a:spcAft>
+              <a:buNone/>
+            </a:pPr>
+            <a:r>
+              <a:rPr lang="en-US" sz="1400" b="1" dirty="0">
                 <a:solidFill>
                   <a:srgbClr val="171B20"/>
                 </a:solidFill>
@@ -1855,39 +1870,124 @@
                 <a:ea typeface="Arial" pitchFamily="34" charset="-122"/>
                 <a:cs typeface="Arial" pitchFamily="34" charset="-120"/>
               </a:rPr>
-              <a:t>—  Правки и версии теряются в почте</a:t>
-            </a:r>
-            <a:endParaRPr lang="en-US" sz="950" dirty="0"/>
+              <a:t>Сами живём в ELMA365</a:t>
+            </a:r>
+            <a:endParaRPr lang="en-US" sz="900" dirty="0"/>
           </a:p>
           <a:p>
             <a:pPr indent="0" marL="0">
               <a:lnSpc>
-                <a:spcPct val="115000"/>
+                <a:spcPct val="105000"/>
               </a:lnSpc>
-              <a:buNone/>
-            </a:pPr>
-            <a:r>
-              <a:rPr lang="en-US" sz="1100" dirty="0">
-                <a:solidFill>
-                  <a:srgbClr val="171B20"/>
+              <a:spcAft>
+                <a:spcPts val="500"/>
+              </a:spcAft>
+              <a:buNone/>
+            </a:pPr>
+            <a:r>
+              <a:rPr lang="en-US" sz="1000" dirty="0">
+                <a:solidFill>
+                  <a:srgbClr val="59626B"/>
                 </a:solidFill>
                 <a:latin typeface="Arial" pitchFamily="34" charset="0"/>
                 <a:ea typeface="Arial" pitchFamily="34" charset="-122"/>
                 <a:cs typeface="Arial" pitchFamily="34" charset="-120"/>
               </a:rPr>
-              <a:t>—  Сроки плывут, эскалации нет</a:t>
-            </a:r>
-            <a:endParaRPr lang="en-US" sz="950" dirty="0"/>
-          </a:p>
+              <a:t>Работаем на том, что внедряем — знаем систему изнутри.</a:t>
+            </a:r>
+            <a:endParaRPr lang="en-US" sz="900" dirty="0"/>
+          </a:p>
+        </p:txBody>
+      </p:sp>
+      <p:sp>
+        <p:nvSpPr>
+          <p:cNvPr id="14" name="Shape 12"/>
+          <p:cNvSpPr/>
+          <p:nvPr/>
+        </p:nvSpPr>
+        <p:spPr>
+          <a:xfrm>
+            <a:off x="3261360" y="2788920"/>
+            <a:ext cx="2621280" cy="1371600"/>
+          </a:xfrm>
+          <a:prstGeom prst="roundRect">
+            <a:avLst>
+              <a:gd name="adj" fmla="val 3333"/>
+            </a:avLst>
+          </a:prstGeom>
+          <a:solidFill>
+            <a:srgbClr val="FFFFFF"/>
+          </a:solidFill>
+          <a:ln w="9525">
+            <a:solidFill>
+              <a:srgbClr val="D8E2EC"/>
+            </a:solidFill>
+            <a:prstDash val="solid"/>
+          </a:ln>
+          <a:effectLst>
+            <a:outerShdw sx="100000" sy="100000" kx="0" ky="0" algn="bl" rotWithShape="0" blurRad="88900" dist="25400" dir="5400000">
+              <a:srgbClr val="1A2A3A">
+                <a:alpha val="10000"/>
+              </a:srgbClr>
+            </a:outerShdw>
+          </a:effectLst>
+        </p:spPr>
+      </p:sp>
+      <p:sp>
+        <p:nvSpPr>
+          <p:cNvPr id="15" name="Text 13"/>
+          <p:cNvSpPr/>
+          <p:nvPr/>
+        </p:nvSpPr>
+        <p:spPr>
+          <a:xfrm>
+            <a:off x="3279648" y="2788920"/>
+            <a:ext cx="2584704" cy="1371600"/>
+          </a:xfrm>
+          <a:prstGeom prst="rect">
+            <a:avLst/>
+          </a:prstGeom>
+          <a:noFill/>
+          <a:ln/>
+        </p:spPr>
+        <p:txBody>
+          <a:bodyPr wrap="square" lIns="2032" tIns="2032" rIns="2032" bIns="2032" rtlCol="0" anchor="t"/>
+          <a:lstStyle/>
           <a:p>
             <a:pPr indent="0" marL="0">
               <a:lnSpc>
-                <a:spcPct val="115000"/>
+                <a:spcPct val="105000"/>
               </a:lnSpc>
-              <a:buNone/>
-            </a:pPr>
-            <a:r>
-              <a:rPr lang="en-US" sz="1100" dirty="0">
+              <a:spcAft>
+                <a:spcPts val="500"/>
+              </a:spcAft>
+              <a:buNone/>
+            </a:pPr>
+            <a:r>
+              <a:rPr lang="en-US" sz="900" dirty="0">
+                <a:solidFill>
+                  <a:srgbClr val="1668C0"/>
+                </a:solidFill>
+                <a:latin typeface="Courier New" pitchFamily="34" charset="0"/>
+                <a:ea typeface="Courier New" pitchFamily="34" charset="-122"/>
+                <a:cs typeface="Courier New" pitchFamily="34" charset="-120"/>
+              </a:rPr>
+              <a:t>02</a:t>
+            </a:r>
+            <a:endParaRPr lang="en-US" sz="900" dirty="0"/>
+          </a:p>
+          <a:p>
+            <a:pPr indent="0" marL="0">
+              <a:lnSpc>
+                <a:spcPct val="105000"/>
+              </a:lnSpc>
+              <a:spcAft>
+                <a:spcPts val="500"/>
+              </a:spcAft>
+              <a:buNone/>
+            </a:pPr>
+            <a:r>
+              <a:rPr lang="en-US" sz="1400" b="1" dirty="0">
                 <a:solidFill>
                   <a:srgbClr val="171B20"/>
                 </a:solidFill>
@@ -1895,240 +1995,280 @@
                 <a:ea typeface="Arial" pitchFamily="34" charset="-122"/>
                 <a:cs typeface="Arial" pitchFamily="34" charset="-120"/>
               </a:rPr>
-              <a:t>—  Не видно, у кого документ</a:t>
-            </a:r>
-            <a:endParaRPr lang="en-US" sz="950" dirty="0"/>
+              <a:t>Сертифицированная команда</a:t>
+            </a:r>
+            <a:endParaRPr lang="en-US" sz="900" dirty="0"/>
           </a:p>
           <a:p>
             <a:pPr indent="0" marL="0">
               <a:lnSpc>
-                <a:spcPct val="115000"/>
+                <a:spcPct val="105000"/>
               </a:lnSpc>
-              <a:buNone/>
-            </a:pPr>
-            <a:r>
-              <a:rPr lang="en-US" sz="1100" dirty="0">
-                <a:solidFill>
-                  <a:srgbClr val="171B20"/>
+              <a:spcAft>
+                <a:spcPts val="500"/>
+              </a:spcAft>
+              <a:buNone/>
+            </a:pPr>
+            <a:r>
+              <a:rPr lang="en-US" sz="1000" dirty="0">
+                <a:solidFill>
+                  <a:srgbClr val="59626B"/>
                 </a:solidFill>
                 <a:latin typeface="Arial" pitchFamily="34" charset="0"/>
                 <a:ea typeface="Arial" pitchFamily="34" charset="-122"/>
                 <a:cs typeface="Arial" pitchFamily="34" charset="-120"/>
               </a:rPr>
-              <a:t>—  Каждая доработка — задача разработчику</a:t>
-            </a:r>
-            <a:endParaRPr lang="en-US" sz="950" dirty="0"/>
-          </a:p>
-        </p:txBody>
-      </p:sp>
-      <p:sp>
-        <p:nvSpPr>
-          <p:cNvPr id="14" name="Shape 12"/>
-          <p:cNvSpPr/>
-          <p:nvPr/>
-        </p:nvSpPr>
-        <p:spPr>
-          <a:xfrm>
-            <a:off x="4206240" y="3401568"/>
-            <a:ext cx="502920" cy="502920"/>
-          </a:xfrm>
-          <a:prstGeom prst="ellipse">
-            <a:avLst/>
+              <a:t>Аналитики и low-code разработчики, 10+ сертификатов ELMA.</a:t>
+            </a:r>
+            <a:endParaRPr lang="en-US" sz="900" dirty="0"/>
+          </a:p>
+        </p:txBody>
+      </p:sp>
+      <p:sp>
+        <p:nvSpPr>
+          <p:cNvPr id="16" name="Shape 14"/>
+          <p:cNvSpPr/>
+          <p:nvPr/>
+        </p:nvSpPr>
+        <p:spPr>
+          <a:xfrm>
+            <a:off x="6065520" y="2788920"/>
+            <a:ext cx="2621280" cy="1371600"/>
+          </a:xfrm>
+          <a:prstGeom prst="roundRect">
+            <a:avLst>
+              <a:gd name="adj" fmla="val 3333"/>
+            </a:avLst>
           </a:prstGeom>
           <a:solidFill>
-            <a:srgbClr val="B25A1E"/>
+            <a:srgbClr val="FFFFFF"/>
           </a:solidFill>
-          <a:ln/>
-        </p:spPr>
-      </p:sp>
-      <p:sp>
-        <p:nvSpPr>
-          <p:cNvPr id="15" name="Text 13"/>
-          <p:cNvSpPr/>
-          <p:nvPr/>
-        </p:nvSpPr>
-        <p:spPr>
-          <a:xfrm>
-            <a:off x="4206240" y="3401568"/>
-            <a:ext cx="502920" cy="502920"/>
-          </a:xfrm>
-          <a:prstGeom prst="rect">
-            <a:avLst/>
-          </a:prstGeom>
-          <a:noFill/>
-          <a:ln/>
-        </p:spPr>
-        <p:txBody>
-          <a:bodyPr wrap="square" lIns="0" tIns="0" rIns="0" bIns="0" rtlCol="0" anchor="ctr"/>
-          <a:lstStyle/>
-          <a:p>
-            <a:pPr algn="ctr" indent="0" marL="0">
-              <a:buNone/>
-            </a:pPr>
-            <a:r>
-              <a:rPr lang="en-US" sz="2000" b="1" dirty="0">
-                <a:solidFill>
-                  <a:srgbClr val="FFFFFF"/>
+          <a:ln w="9525">
+            <a:solidFill>
+              <a:srgbClr val="D8E2EC"/>
+            </a:solidFill>
+            <a:prstDash val="solid"/>
+          </a:ln>
+          <a:effectLst>
+            <a:outerShdw sx="100000" sy="100000" kx="0" ky="0" algn="bl" rotWithShape="0" blurRad="88900" dist="25400" dir="5400000">
+              <a:srgbClr val="1A2A3A">
+                <a:alpha val="10000"/>
+              </a:srgbClr>
+            </a:outerShdw>
+          </a:effectLst>
+        </p:spPr>
+      </p:sp>
+      <p:sp>
+        <p:nvSpPr>
+          <p:cNvPr id="17" name="Text 15"/>
+          <p:cNvSpPr/>
+          <p:nvPr/>
+        </p:nvSpPr>
+        <p:spPr>
+          <a:xfrm>
+            <a:off x="6083808" y="2788920"/>
+            <a:ext cx="2584704" cy="1371600"/>
+          </a:xfrm>
+          <a:prstGeom prst="rect">
+            <a:avLst/>
+          </a:prstGeom>
+          <a:noFill/>
+          <a:ln/>
+        </p:spPr>
+        <p:txBody>
+          <a:bodyPr wrap="square" lIns="2032" tIns="2032" rIns="2032" bIns="2032" rtlCol="0" anchor="t"/>
+          <a:lstStyle/>
+          <a:p>
+            <a:pPr indent="0" marL="0">
+              <a:lnSpc>
+                <a:spcPct val="105000"/>
+              </a:lnSpc>
+              <a:spcAft>
+                <a:spcPts val="500"/>
+              </a:spcAft>
+              <a:buNone/>
+            </a:pPr>
+            <a:r>
+              <a:rPr lang="en-US" sz="900" dirty="0">
+                <a:solidFill>
+                  <a:srgbClr val="1668C0"/>
+                </a:solidFill>
+                <a:latin typeface="Courier New" pitchFamily="34" charset="0"/>
+                <a:ea typeface="Courier New" pitchFamily="34" charset="-122"/>
+                <a:cs typeface="Courier New" pitchFamily="34" charset="-120"/>
+              </a:rPr>
+              <a:t>03</a:t>
+            </a:r>
+            <a:endParaRPr lang="en-US" sz="900" dirty="0"/>
+          </a:p>
+          <a:p>
+            <a:pPr indent="0" marL="0">
+              <a:lnSpc>
+                <a:spcPct val="105000"/>
+              </a:lnSpc>
+              <a:spcAft>
+                <a:spcPts val="500"/>
+              </a:spcAft>
+              <a:buNone/>
+            </a:pPr>
+            <a:r>
+              <a:rPr lang="en-US" sz="1400" b="1" dirty="0">
+                <a:solidFill>
+                  <a:srgbClr val="171B20"/>
                 </a:solidFill>
                 <a:latin typeface="Arial" pitchFamily="34" charset="0"/>
                 <a:ea typeface="Arial" pitchFamily="34" charset="-122"/>
                 <a:cs typeface="Arial" pitchFamily="34" charset="-120"/>
               </a:rPr>
-              <a:t>→</a:t>
-            </a:r>
-            <a:endParaRPr lang="en-US" sz="2000" dirty="0"/>
-          </a:p>
-        </p:txBody>
-      </p:sp>
-      <p:sp>
-        <p:nvSpPr>
-          <p:cNvPr id="16" name="Shape 14"/>
-          <p:cNvSpPr/>
-          <p:nvPr/>
-        </p:nvSpPr>
-        <p:spPr>
-          <a:xfrm>
-            <a:off x="4846320" y="2743200"/>
-            <a:ext cx="3840480" cy="1783080"/>
-          </a:xfrm>
-          <a:prstGeom prst="roundRect">
-            <a:avLst>
-              <a:gd name="adj" fmla="val 3077"/>
-            </a:avLst>
-          </a:prstGeom>
-          <a:solidFill>
-            <a:srgbClr val="EAF1F8"/>
-          </a:solidFill>
-          <a:ln w="12700">
-            <a:solidFill>
-              <a:srgbClr val="CBDCEC"/>
-            </a:solidFill>
-            <a:prstDash val="solid"/>
-          </a:ln>
-        </p:spPr>
-      </p:sp>
-      <p:sp>
-        <p:nvSpPr>
-          <p:cNvPr id="17" name="Text 15"/>
-          <p:cNvSpPr/>
-          <p:nvPr/>
-        </p:nvSpPr>
-        <p:spPr>
-          <a:xfrm>
-            <a:off x="4846320" y="2743200"/>
-            <a:ext cx="3840480" cy="1783080"/>
-          </a:xfrm>
-          <a:prstGeom prst="rect">
-            <a:avLst/>
-          </a:prstGeom>
-          <a:noFill/>
-          <a:ln/>
-        </p:spPr>
-        <p:txBody>
-          <a:bodyPr wrap="square" lIns="2540" tIns="2540" rIns="2540" bIns="2540" rtlCol="0" anchor="t"/>
-          <a:lstStyle/>
+              <a:t>Продукт и услуги</a:t>
+            </a:r>
+            <a:endParaRPr lang="en-US" sz="900" dirty="0"/>
+          </a:p>
           <a:p>
             <a:pPr indent="0" marL="0">
               <a:lnSpc>
-                <a:spcPct val="115000"/>
+                <a:spcPct val="105000"/>
               </a:lnSpc>
               <a:spcAft>
-                <a:spcPts val="800"/>
+                <a:spcPts val="500"/>
               </a:spcAft>
               <a:buNone/>
             </a:pPr>
             <a:r>
-              <a:rPr lang="en-US" sz="950" spc="100" kern="0" dirty="0">
-                <a:solidFill>
-                  <a:srgbClr val="1D5C9A"/>
+              <a:rPr lang="en-US" sz="1000" dirty="0">
+                <a:solidFill>
+                  <a:srgbClr val="59626B"/>
+                </a:solidFill>
+                <a:latin typeface="Arial" pitchFamily="34" charset="0"/>
+                <a:ea typeface="Arial" pitchFamily="34" charset="-122"/>
+                <a:cs typeface="Arial" pitchFamily="34" charset="-120"/>
+              </a:rPr>
+              <a:t>Внедрение под ключ и готовый коробочный ЭДО Coordo.</a:t>
+            </a:r>
+            <a:endParaRPr lang="en-US" sz="900" dirty="0"/>
+          </a:p>
+        </p:txBody>
+      </p:sp>
+      <p:sp>
+        <p:nvSpPr>
+          <p:cNvPr id="18" name="Text 16"/>
+          <p:cNvSpPr/>
+          <p:nvPr/>
+        </p:nvSpPr>
+        <p:spPr>
+          <a:xfrm>
+            <a:off x="457200" y="4343400"/>
+            <a:ext cx="8229600" cy="274320"/>
+          </a:xfrm>
+          <a:prstGeom prst="rect">
+            <a:avLst/>
+          </a:prstGeom>
+          <a:noFill/>
+          <a:ln/>
+        </p:spPr>
+        <p:txBody>
+          <a:bodyPr wrap="square" lIns="0" tIns="0" rIns="0" bIns="0" rtlCol="0" anchor="ctr"/>
+          <a:lstStyle/>
+          <a:p>
+            <a:pPr indent="0" marL="0">
+              <a:buNone/>
+            </a:pPr>
+            <a:r>
+              <a:rPr lang="en-US" sz="1000" b="1" dirty="0">
+                <a:solidFill>
+                  <a:srgbClr val="171B20"/>
                 </a:solidFill>
                 <a:latin typeface="Courier New" pitchFamily="34" charset="0"/>
                 <a:ea typeface="Courier New" pitchFamily="34" charset="-122"/>
                 <a:cs typeface="Courier New" pitchFamily="34" charset="-120"/>
               </a:rPr>
-              <a:t>С COORDO НА ELMA365</a:t>
-            </a:r>
-            <a:endParaRPr lang="en-US" sz="950" dirty="0"/>
-          </a:p>
-          <a:p>
-            <a:pPr indent="0" marL="0">
-              <a:lnSpc>
-                <a:spcPct val="115000"/>
-              </a:lnSpc>
-              <a:buNone/>
-            </a:pPr>
-            <a:r>
-              <a:rPr lang="en-US" sz="1100" dirty="0">
+              <a:t>Россия и Казахстан</a:t>
+            </a:r>
+            <a:pPr indent="0" marL="0">
+              <a:buNone/>
+            </a:pPr>
+            <a:r>
+              <a:rPr lang="en-US" sz="1000" dirty="0">
+                <a:solidFill>
+                  <a:srgbClr val="D8E2EC"/>
+                </a:solidFill>
+                <a:latin typeface="Courier New" pitchFamily="34" charset="0"/>
+                <a:ea typeface="Courier New" pitchFamily="34" charset="-122"/>
+                <a:cs typeface="Courier New" pitchFamily="34" charset="-120"/>
+              </a:rPr>
+              <a:t>      ·      </a:t>
+            </a:r>
+            <a:pPr indent="0" marL="0">
+              <a:buNone/>
+            </a:pPr>
+            <a:r>
+              <a:rPr lang="en-US" sz="1000" dirty="0">
+                <a:solidFill>
+                  <a:srgbClr val="59626B"/>
+                </a:solidFill>
+                <a:latin typeface="Courier New" pitchFamily="34" charset="0"/>
+                <a:ea typeface="Courier New" pitchFamily="34" charset="-122"/>
+                <a:cs typeface="Courier New" pitchFamily="34" charset="-120"/>
+              </a:rPr>
+              <a:t>Руководитель — </a:t>
+            </a:r>
+            <a:pPr indent="0" marL="0">
+              <a:buNone/>
+            </a:pPr>
+            <a:r>
+              <a:rPr lang="en-US" sz="1000" b="1" dirty="0">
                 <a:solidFill>
                   <a:srgbClr val="171B20"/>
                 </a:solidFill>
-                <a:latin typeface="Arial" pitchFamily="34" charset="0"/>
-                <a:ea typeface="Arial" pitchFamily="34" charset="-122"/>
-                <a:cs typeface="Arial" pitchFamily="34" charset="-120"/>
-              </a:rPr>
-              <a:t>✓  Единый маршрут и реестр</a:t>
-            </a:r>
-            <a:endParaRPr lang="en-US" sz="950" dirty="0"/>
-          </a:p>
-          <a:p>
-            <a:pPr indent="0" marL="0">
-              <a:lnSpc>
-                <a:spcPct val="115000"/>
-              </a:lnSpc>
-              <a:buNone/>
-            </a:pPr>
-            <a:r>
-              <a:rPr lang="en-US" sz="1100" dirty="0">
-                <a:solidFill>
-                  <a:srgbClr val="171B20"/>
-                </a:solidFill>
-                <a:latin typeface="Arial" pitchFamily="34" charset="0"/>
-                <a:ea typeface="Arial" pitchFamily="34" charset="-122"/>
-                <a:cs typeface="Arial" pitchFamily="34" charset="-120"/>
-              </a:rPr>
-              <a:t>✓  Сроки, эскалация, делегирование</a:t>
-            </a:r>
-            <a:endParaRPr lang="en-US" sz="950" dirty="0"/>
-          </a:p>
-          <a:p>
-            <a:pPr indent="0" marL="0">
-              <a:lnSpc>
-                <a:spcPct val="115000"/>
-              </a:lnSpc>
-              <a:buNone/>
-            </a:pPr>
-            <a:r>
-              <a:rPr lang="en-US" sz="1100" dirty="0">
-                <a:solidFill>
-                  <a:srgbClr val="171B20"/>
-                </a:solidFill>
-                <a:latin typeface="Arial" pitchFamily="34" charset="0"/>
-                <a:ea typeface="Arial" pitchFamily="34" charset="-122"/>
-                <a:cs typeface="Arial" pitchFamily="34" charset="-120"/>
-              </a:rPr>
-              <a:t>✓  Видно статус на каждом этапе</a:t>
-            </a:r>
-            <a:endParaRPr lang="en-US" sz="950" dirty="0"/>
-          </a:p>
-          <a:p>
-            <a:pPr indent="0" marL="0">
-              <a:lnSpc>
-                <a:spcPct val="115000"/>
-              </a:lnSpc>
-              <a:buNone/>
-            </a:pPr>
-            <a:r>
-              <a:rPr lang="en-US" sz="1100" dirty="0">
-                <a:solidFill>
-                  <a:srgbClr val="171B20"/>
-                </a:solidFill>
-                <a:latin typeface="Arial" pitchFamily="34" charset="0"/>
-                <a:ea typeface="Arial" pitchFamily="34" charset="-122"/>
-                <a:cs typeface="Arial" pitchFamily="34" charset="-120"/>
-              </a:rPr>
-              <a:t>✓  Маршруты меняются без кода</a:t>
-            </a:r>
-            <a:endParaRPr lang="en-US" sz="950" dirty="0"/>
+                <a:latin typeface="Courier New" pitchFamily="34" charset="0"/>
+                <a:ea typeface="Courier New" pitchFamily="34" charset="-122"/>
+                <a:cs typeface="Courier New" pitchFamily="34" charset="-120"/>
+              </a:rPr>
+              <a:t>5 лет</a:t>
+            </a:r>
+            <a:pPr indent="0" marL="0">
+              <a:buNone/>
+            </a:pPr>
+            <a:r>
+              <a:rPr lang="en-US" sz="1000" dirty="0">
+                <a:solidFill>
+                  <a:srgbClr val="59626B"/>
+                </a:solidFill>
+                <a:latin typeface="Courier New" pitchFamily="34" charset="0"/>
+                <a:ea typeface="Courier New" pitchFamily="34" charset="-122"/>
+                <a:cs typeface="Courier New" pitchFamily="34" charset="-120"/>
+              </a:rPr>
+              <a:t> в ELMA365</a:t>
+            </a:r>
+            <a:pPr indent="0" marL="0">
+              <a:buNone/>
+            </a:pPr>
+            <a:r>
+              <a:rPr lang="en-US" sz="1000" dirty="0">
+                <a:solidFill>
+                  <a:srgbClr val="D8E2EC"/>
+                </a:solidFill>
+                <a:latin typeface="Courier New" pitchFamily="34" charset="0"/>
+                <a:ea typeface="Courier New" pitchFamily="34" charset="-122"/>
+                <a:cs typeface="Courier New" pitchFamily="34" charset="-120"/>
+              </a:rPr>
+              <a:t>      ·      </a:t>
+            </a:r>
+            <a:pPr indent="0" marL="0">
+              <a:buNone/>
+            </a:pPr>
+            <a:r>
+              <a:rPr lang="en-US" sz="1000" dirty="0">
+                <a:solidFill>
+                  <a:srgbClr val="59626B"/>
+                </a:solidFill>
+                <a:latin typeface="Courier New" pitchFamily="34" charset="0"/>
+                <a:ea typeface="Courier New" pitchFamily="34" charset="-122"/>
+                <a:cs typeface="Courier New" pitchFamily="34" charset="-120"/>
+              </a:rPr>
+              <a:t>Внедрение + продукт</a:t>
+            </a:r>
+            <a:endParaRPr lang="en-US" sz="1000" dirty="0"/>
           </a:p>
         </p:txBody>
       </p:sp>
@@ -2146,7 +2286,7 @@
     <p:bg>
       <p:bgPr>
         <a:solidFill>
-          <a:srgbClr val="F3F5F6"/>
+          <a:srgbClr val="F5F8FC"/>
         </a:solidFill>
       </p:bgPr>
     </p:bg>
@@ -2181,11 +2321,11 @@
             </a:avLst>
           </a:prstGeom>
           <a:solidFill>
-            <a:srgbClr val="F3F5F6"/>
+            <a:srgbClr val="F5F8FC"/>
           </a:solidFill>
           <a:ln w="15875">
             <a:solidFill>
-              <a:srgbClr val="1D5C9A"/>
+              <a:srgbClr val="1668C0"/>
             </a:solidFill>
             <a:prstDash val="solid"/>
           </a:ln>
@@ -2218,7 +2358,7 @@
             <a:r>
               <a:rPr lang="en-US" sz="1100" b="1" dirty="0">
                 <a:solidFill>
-                  <a:srgbClr val="1D5C9A"/>
+                  <a:srgbClr val="1668C0"/>
                 </a:solidFill>
                 <a:latin typeface="Arial" pitchFamily="34" charset="0"/>
                 <a:ea typeface="Arial" pitchFamily="34" charset="-122"/>
@@ -2302,7 +2442,7 @@
                 <a:ea typeface="Courier New" pitchFamily="34" charset="-122"/>
                 <a:cs typeface="Courier New" pitchFamily="34" charset="-120"/>
               </a:rPr>
-              <a:t>О компании</a:t>
+              <a:t>Проблема</a:t>
             </a:r>
             <a:endParaRPr lang="en-US" sz="900" dirty="0"/>
           </a:p>
@@ -2401,7 +2541,7 @@
             <a:avLst/>
           </a:prstGeom>
           <a:solidFill>
-            <a:srgbClr val="B25A1E"/>
+            <a:srgbClr val="1668C0"/>
           </a:solidFill>
           <a:ln/>
         </p:spPr>
@@ -2433,13 +2573,13 @@
             <a:r>
               <a:rPr lang="en-US" sz="1050" spc="200" kern="0" dirty="0">
                 <a:solidFill>
-                  <a:srgbClr val="B25A1E"/>
+                  <a:srgbClr val="1668C0"/>
                 </a:solidFill>
                 <a:latin typeface="Courier New" pitchFamily="34" charset="0"/>
                 <a:ea typeface="Courier New" pitchFamily="34" charset="-122"/>
                 <a:cs typeface="Courier New" pitchFamily="34" charset="-120"/>
               </a:rPr>
-              <a:t>КТО ЭТО РЕШАЕТ</a:t>
+              <a:t>С ЧЕГО ВСЁ НАЧИНАЕТСЯ</a:t>
             </a:r>
             <a:endParaRPr lang="en-US" sz="1050" dirty="0"/>
           </a:p>
@@ -2454,7 +2594,7 @@
         <p:spPr>
           <a:xfrm>
             <a:off x="457200" y="1170432"/>
-            <a:ext cx="8229600" cy="685800"/>
+            <a:ext cx="8229600" cy="914400"/>
           </a:xfrm>
           <a:prstGeom prst="rect">
             <a:avLst/>
@@ -2468,12 +2608,12 @@
           <a:p>
             <a:pPr indent="0" marL="0">
               <a:lnSpc>
-                <a:spcPts val="2415"/>
+                <a:spcPts val="3150"/>
               </a:lnSpc>
               <a:buNone/>
             </a:pPr>
             <a:r>
-              <a:rPr lang="en-US" sz="2300" b="1" dirty="0">
+              <a:rPr lang="en-US" sz="3000" b="1" dirty="0">
                 <a:solidFill>
                   <a:srgbClr val="171B20"/>
                 </a:solidFill>
@@ -2481,9 +2621,9 @@
                 <a:ea typeface="Arial" pitchFamily="34" charset="-122"/>
                 <a:cs typeface="Arial" pitchFamily="34" charset="-120"/>
               </a:rPr>
-              <a:t>Не подрядчик со стороны — мы сами живём в ELMA365</a:t>
-            </a:r>
-            <a:endParaRPr lang="en-US" sz="2300" dirty="0"/>
+              <a:t>Согласование договора тянется неделями</a:t>
+            </a:r>
+            <a:endParaRPr lang="en-US" sz="3000" dirty="0"/>
           </a:p>
         </p:txBody>
       </p:sp>
@@ -2523,7 +2663,7 @@
                 <a:ea typeface="Arial" pitchFamily="34" charset="-122"/>
                 <a:cs typeface="Arial" pitchFamily="34" charset="-120"/>
               </a:rPr>
-              <a:t>Свой документооборот, задачи и процессы ведём в системе, которую внедряем. Поэтому — по опыту, а не по учебнику.</a:t>
+              <a:t>Почта, бумага, версии в разных местах — не видно, у кого документ и когда будет готово.</a:t>
             </a:r>
             <a:endParaRPr lang="en-US" sz="1300" dirty="0"/>
           </a:p>
@@ -2537,87 +2677,283 @@
         </p:nvSpPr>
         <p:spPr>
           <a:xfrm>
-            <a:off x="457200" y="2788920"/>
-            <a:ext cx="2621280" cy="1371600"/>
+            <a:off x="457200" y="2743200"/>
+            <a:ext cx="3611880" cy="1783080"/>
           </a:xfrm>
           <a:prstGeom prst="roundRect">
             <a:avLst>
-              <a:gd name="adj" fmla="val 3333"/>
+              <a:gd name="adj" fmla="val 3077"/>
             </a:avLst>
           </a:prstGeom>
           <a:solidFill>
-            <a:srgbClr val="FFFFFF"/>
+            <a:srgbClr val="ECEEF0"/>
           </a:solidFill>
-          <a:ln w="9525">
+          <a:ln/>
+        </p:spPr>
+      </p:sp>
+      <p:sp>
+        <p:nvSpPr>
+          <p:cNvPr id="13" name="Text 11"/>
+          <p:cNvSpPr/>
+          <p:nvPr/>
+        </p:nvSpPr>
+        <p:spPr>
+          <a:xfrm>
+            <a:off x="457200" y="2743200"/>
+            <a:ext cx="3611880" cy="1783080"/>
+          </a:xfrm>
+          <a:prstGeom prst="rect">
+            <a:avLst/>
+          </a:prstGeom>
+          <a:noFill/>
+          <a:ln/>
+        </p:spPr>
+        <p:txBody>
+          <a:bodyPr wrap="square" lIns="2540" tIns="2540" rIns="2540" bIns="2540" rtlCol="0" anchor="t"/>
+          <a:lstStyle/>
+          <a:p>
+            <a:pPr indent="0" marL="0">
+              <a:lnSpc>
+                <a:spcPct val="115000"/>
+              </a:lnSpc>
+              <a:spcAft>
+                <a:spcPts val="800"/>
+              </a:spcAft>
+              <a:buNone/>
+            </a:pPr>
+            <a:r>
+              <a:rPr lang="en-US" sz="950" spc="100" kern="0" dirty="0">
+                <a:solidFill>
+                  <a:srgbClr val="59626B"/>
+                </a:solidFill>
+                <a:latin typeface="Courier New" pitchFamily="34" charset="0"/>
+                <a:ea typeface="Courier New" pitchFamily="34" charset="-122"/>
+                <a:cs typeface="Courier New" pitchFamily="34" charset="-120"/>
+              </a:rPr>
+              <a:t>КАК СЕЙЧАС</a:t>
+            </a:r>
+            <a:endParaRPr lang="en-US" sz="950" dirty="0"/>
+          </a:p>
+          <a:p>
+            <a:pPr indent="0" marL="0">
+              <a:lnSpc>
+                <a:spcPct val="115000"/>
+              </a:lnSpc>
+              <a:buNone/>
+            </a:pPr>
+            <a:r>
+              <a:rPr lang="en-US" sz="1100" dirty="0">
+                <a:solidFill>
+                  <a:srgbClr val="171B20"/>
+                </a:solidFill>
+                <a:latin typeface="Arial" pitchFamily="34" charset="0"/>
+                <a:ea typeface="Arial" pitchFamily="34" charset="-122"/>
+                <a:cs typeface="Arial" pitchFamily="34" charset="-120"/>
+              </a:rPr>
+              <a:t>—  Правки и версии теряются в почте</a:t>
+            </a:r>
+            <a:endParaRPr lang="en-US" sz="950" dirty="0"/>
+          </a:p>
+          <a:p>
+            <a:pPr indent="0" marL="0">
+              <a:lnSpc>
+                <a:spcPct val="115000"/>
+              </a:lnSpc>
+              <a:buNone/>
+            </a:pPr>
+            <a:r>
+              <a:rPr lang="en-US" sz="1100" dirty="0">
+                <a:solidFill>
+                  <a:srgbClr val="171B20"/>
+                </a:solidFill>
+                <a:latin typeface="Arial" pitchFamily="34" charset="0"/>
+                <a:ea typeface="Arial" pitchFamily="34" charset="-122"/>
+                <a:cs typeface="Arial" pitchFamily="34" charset="-120"/>
+              </a:rPr>
+              <a:t>—  Сроки плывут, эскалации нет</a:t>
+            </a:r>
+            <a:endParaRPr lang="en-US" sz="950" dirty="0"/>
+          </a:p>
+          <a:p>
+            <a:pPr indent="0" marL="0">
+              <a:lnSpc>
+                <a:spcPct val="115000"/>
+              </a:lnSpc>
+              <a:buNone/>
+            </a:pPr>
+            <a:r>
+              <a:rPr lang="en-US" sz="1100" dirty="0">
+                <a:solidFill>
+                  <a:srgbClr val="171B20"/>
+                </a:solidFill>
+                <a:latin typeface="Arial" pitchFamily="34" charset="0"/>
+                <a:ea typeface="Arial" pitchFamily="34" charset="-122"/>
+                <a:cs typeface="Arial" pitchFamily="34" charset="-120"/>
+              </a:rPr>
+              <a:t>—  Не видно, у кого документ</a:t>
+            </a:r>
+            <a:endParaRPr lang="en-US" sz="950" dirty="0"/>
+          </a:p>
+          <a:p>
+            <a:pPr indent="0" marL="0">
+              <a:lnSpc>
+                <a:spcPct val="115000"/>
+              </a:lnSpc>
+              <a:buNone/>
+            </a:pPr>
+            <a:r>
+              <a:rPr lang="en-US" sz="1100" dirty="0">
+                <a:solidFill>
+                  <a:srgbClr val="171B20"/>
+                </a:solidFill>
+                <a:latin typeface="Arial" pitchFamily="34" charset="0"/>
+                <a:ea typeface="Arial" pitchFamily="34" charset="-122"/>
+                <a:cs typeface="Arial" pitchFamily="34" charset="-120"/>
+              </a:rPr>
+              <a:t>—  Каждая доработка — задача разработчику</a:t>
+            </a:r>
+            <a:endParaRPr lang="en-US" sz="950" dirty="0"/>
+          </a:p>
+        </p:txBody>
+      </p:sp>
+      <p:sp>
+        <p:nvSpPr>
+          <p:cNvPr id="14" name="Shape 12"/>
+          <p:cNvSpPr/>
+          <p:nvPr/>
+        </p:nvSpPr>
+        <p:spPr>
+          <a:xfrm>
+            <a:off x="4206240" y="3401568"/>
+            <a:ext cx="502920" cy="502920"/>
+          </a:xfrm>
+          <a:prstGeom prst="ellipse">
+            <a:avLst/>
+          </a:prstGeom>
+          <a:solidFill>
+            <a:srgbClr val="1668C0"/>
+          </a:solidFill>
+          <a:ln/>
+        </p:spPr>
+      </p:sp>
+      <p:sp>
+        <p:nvSpPr>
+          <p:cNvPr id="15" name="Text 13"/>
+          <p:cNvSpPr/>
+          <p:nvPr/>
+        </p:nvSpPr>
+        <p:spPr>
+          <a:xfrm>
+            <a:off x="4206240" y="3401568"/>
+            <a:ext cx="502920" cy="502920"/>
+          </a:xfrm>
+          <a:prstGeom prst="rect">
+            <a:avLst/>
+          </a:prstGeom>
+          <a:noFill/>
+          <a:ln/>
+        </p:spPr>
+        <p:txBody>
+          <a:bodyPr wrap="square" lIns="0" tIns="0" rIns="0" bIns="0" rtlCol="0" anchor="ctr"/>
+          <a:lstStyle/>
+          <a:p>
+            <a:pPr algn="ctr" indent="0" marL="0">
+              <a:buNone/>
+            </a:pPr>
+            <a:r>
+              <a:rPr lang="en-US" sz="2000" b="1" dirty="0">
+                <a:solidFill>
+                  <a:srgbClr val="FFFFFF"/>
+                </a:solidFill>
+                <a:latin typeface="Arial" pitchFamily="34" charset="0"/>
+                <a:ea typeface="Arial" pitchFamily="34" charset="-122"/>
+                <a:cs typeface="Arial" pitchFamily="34" charset="-120"/>
+              </a:rPr>
+              <a:t>→</a:t>
+            </a:r>
+            <a:endParaRPr lang="en-US" sz="2000" dirty="0"/>
+          </a:p>
+        </p:txBody>
+      </p:sp>
+      <p:sp>
+        <p:nvSpPr>
+          <p:cNvPr id="16" name="Shape 14"/>
+          <p:cNvSpPr/>
+          <p:nvPr/>
+        </p:nvSpPr>
+        <p:spPr>
+          <a:xfrm>
+            <a:off x="4846320" y="2743200"/>
+            <a:ext cx="3840480" cy="1783080"/>
+          </a:xfrm>
+          <a:prstGeom prst="roundRect">
+            <a:avLst>
+              <a:gd name="adj" fmla="val 3077"/>
+            </a:avLst>
+          </a:prstGeom>
+          <a:solidFill>
+            <a:srgbClr val="E7F0FA"/>
+          </a:solidFill>
+          <a:ln w="12700">
             <a:solidFill>
-              <a:srgbClr val="D7DCE1"/>
+              <a:srgbClr val="CFE0F1"/>
             </a:solidFill>
             <a:prstDash val="solid"/>
           </a:ln>
-          <a:effectLst>
-            <a:outerShdw sx="100000" sy="100000" kx="0" ky="0" algn="bl" rotWithShape="0" blurRad="88900" dist="25400" dir="5400000">
-              <a:srgbClr val="1A2A3A">
-                <a:alpha val="10000"/>
-              </a:srgbClr>
-            </a:outerShdw>
-          </a:effectLst>
-        </p:spPr>
-      </p:sp>
-      <p:sp>
-        <p:nvSpPr>
-          <p:cNvPr id="13" name="Text 11"/>
-          <p:cNvSpPr/>
-          <p:nvPr/>
-        </p:nvSpPr>
-        <p:spPr>
-          <a:xfrm>
-            <a:off x="475488" y="2788920"/>
-            <a:ext cx="2584704" cy="1371600"/>
-          </a:xfrm>
-          <a:prstGeom prst="rect">
-            <a:avLst/>
-          </a:prstGeom>
-          <a:noFill/>
-          <a:ln/>
-        </p:spPr>
-        <p:txBody>
-          <a:bodyPr wrap="square" lIns="2032" tIns="2032" rIns="2032" bIns="2032" rtlCol="0" anchor="t"/>
+        </p:spPr>
+      </p:sp>
+      <p:sp>
+        <p:nvSpPr>
+          <p:cNvPr id="17" name="Text 15"/>
+          <p:cNvSpPr/>
+          <p:nvPr/>
+        </p:nvSpPr>
+        <p:spPr>
+          <a:xfrm>
+            <a:off x="4846320" y="2743200"/>
+            <a:ext cx="3840480" cy="1783080"/>
+          </a:xfrm>
+          <a:prstGeom prst="rect">
+            <a:avLst/>
+          </a:prstGeom>
+          <a:noFill/>
+          <a:ln/>
+        </p:spPr>
+        <p:txBody>
+          <a:bodyPr wrap="square" lIns="2540" tIns="2540" rIns="2540" bIns="2540" rtlCol="0" anchor="t"/>
           <a:lstStyle/>
           <a:p>
             <a:pPr indent="0" marL="0">
               <a:lnSpc>
-                <a:spcPct val="105000"/>
+                <a:spcPct val="115000"/>
               </a:lnSpc>
               <a:spcAft>
-                <a:spcPts val="500"/>
+                <a:spcPts val="800"/>
               </a:spcAft>
               <a:buNone/>
             </a:pPr>
             <a:r>
-              <a:rPr lang="en-US" sz="900" dirty="0">
-                <a:solidFill>
-                  <a:srgbClr val="B25A1E"/>
+              <a:rPr lang="en-US" sz="950" spc="100" kern="0" dirty="0">
+                <a:solidFill>
+                  <a:srgbClr val="1668C0"/>
                 </a:solidFill>
                 <a:latin typeface="Courier New" pitchFamily="34" charset="0"/>
                 <a:ea typeface="Courier New" pitchFamily="34" charset="-122"/>
                 <a:cs typeface="Courier New" pitchFamily="34" charset="-120"/>
               </a:rPr>
-              <a:t>01</a:t>
-            </a:r>
-            <a:endParaRPr lang="en-US" sz="900" dirty="0"/>
+              <a:t>С COORDO НА ELMA365</a:t>
+            </a:r>
+            <a:endParaRPr lang="en-US" sz="950" dirty="0"/>
           </a:p>
           <a:p>
             <a:pPr indent="0" marL="0">
               <a:lnSpc>
-                <a:spcPct val="105000"/>
+                <a:spcPct val="115000"/>
               </a:lnSpc>
-              <a:spcAft>
-                <a:spcPts val="500"/>
-              </a:spcAft>
-              <a:buNone/>
-            </a:pPr>
-            <a:r>
-              <a:rPr lang="en-US" sz="1400" b="1" dirty="0">
+              <a:buNone/>
+            </a:pPr>
+            <a:r>
+              <a:rPr lang="en-US" sz="1100" dirty="0">
                 <a:solidFill>
                   <a:srgbClr val="171B20"/>
                 </a:solidFill>
@@ -2625,124 +2961,39 @@
                 <a:ea typeface="Arial" pitchFamily="34" charset="-122"/>
                 <a:cs typeface="Arial" pitchFamily="34" charset="-120"/>
               </a:rPr>
-              <a:t>Сами живём в ELMA365</a:t>
-            </a:r>
-            <a:endParaRPr lang="en-US" sz="900" dirty="0"/>
+              <a:t>✓  Единый маршрут и реестр</a:t>
+            </a:r>
+            <a:endParaRPr lang="en-US" sz="950" dirty="0"/>
           </a:p>
           <a:p>
             <a:pPr indent="0" marL="0">
               <a:lnSpc>
-                <a:spcPct val="105000"/>
+                <a:spcPct val="115000"/>
               </a:lnSpc>
-              <a:spcAft>
-                <a:spcPts val="500"/>
-              </a:spcAft>
-              <a:buNone/>
-            </a:pPr>
-            <a:r>
-              <a:rPr lang="en-US" sz="1000" dirty="0">
-                <a:solidFill>
-                  <a:srgbClr val="59626B"/>
+              <a:buNone/>
+            </a:pPr>
+            <a:r>
+              <a:rPr lang="en-US" sz="1100" dirty="0">
+                <a:solidFill>
+                  <a:srgbClr val="171B20"/>
                 </a:solidFill>
                 <a:latin typeface="Arial" pitchFamily="34" charset="0"/>
                 <a:ea typeface="Arial" pitchFamily="34" charset="-122"/>
                 <a:cs typeface="Arial" pitchFamily="34" charset="-120"/>
               </a:rPr>
-              <a:t>Работаем на том, что внедряем — знаем систему изнутри.</a:t>
-            </a:r>
-            <a:endParaRPr lang="en-US" sz="900" dirty="0"/>
-          </a:p>
-        </p:txBody>
-      </p:sp>
-      <p:sp>
-        <p:nvSpPr>
-          <p:cNvPr id="14" name="Shape 12"/>
-          <p:cNvSpPr/>
-          <p:nvPr/>
-        </p:nvSpPr>
-        <p:spPr>
-          <a:xfrm>
-            <a:off x="3261360" y="2788920"/>
-            <a:ext cx="2621280" cy="1371600"/>
-          </a:xfrm>
-          <a:prstGeom prst="roundRect">
-            <a:avLst>
-              <a:gd name="adj" fmla="val 3333"/>
-            </a:avLst>
-          </a:prstGeom>
-          <a:solidFill>
-            <a:srgbClr val="FFFFFF"/>
-          </a:solidFill>
-          <a:ln w="9525">
-            <a:solidFill>
-              <a:srgbClr val="D7DCE1"/>
-            </a:solidFill>
-            <a:prstDash val="solid"/>
-          </a:ln>
-          <a:effectLst>
-            <a:outerShdw sx="100000" sy="100000" kx="0" ky="0" algn="bl" rotWithShape="0" blurRad="88900" dist="25400" dir="5400000">
-              <a:srgbClr val="1A2A3A">
-                <a:alpha val="10000"/>
-              </a:srgbClr>
-            </a:outerShdw>
-          </a:effectLst>
-        </p:spPr>
-      </p:sp>
-      <p:sp>
-        <p:nvSpPr>
-          <p:cNvPr id="15" name="Text 13"/>
-          <p:cNvSpPr/>
-          <p:nvPr/>
-        </p:nvSpPr>
-        <p:spPr>
-          <a:xfrm>
-            <a:off x="3279648" y="2788920"/>
-            <a:ext cx="2584704" cy="1371600"/>
-          </a:xfrm>
-          <a:prstGeom prst="rect">
-            <a:avLst/>
-          </a:prstGeom>
-          <a:noFill/>
-          <a:ln/>
-        </p:spPr>
-        <p:txBody>
-          <a:bodyPr wrap="square" lIns="2032" tIns="2032" rIns="2032" bIns="2032" rtlCol="0" anchor="t"/>
-          <a:lstStyle/>
+              <a:t>✓  Сроки, эскалация, делегирование</a:t>
+            </a:r>
+            <a:endParaRPr lang="en-US" sz="950" dirty="0"/>
+          </a:p>
           <a:p>
             <a:pPr indent="0" marL="0">
               <a:lnSpc>
-                <a:spcPct val="105000"/>
+                <a:spcPct val="115000"/>
               </a:lnSpc>
-              <a:spcAft>
-                <a:spcPts val="500"/>
-              </a:spcAft>
-              <a:buNone/>
-            </a:pPr>
-            <a:r>
-              <a:rPr lang="en-US" sz="900" dirty="0">
-                <a:solidFill>
-                  <a:srgbClr val="B25A1E"/>
-                </a:solidFill>
-                <a:latin typeface="Courier New" pitchFamily="34" charset="0"/>
-                <a:ea typeface="Courier New" pitchFamily="34" charset="-122"/>
-                <a:cs typeface="Courier New" pitchFamily="34" charset="-120"/>
-              </a:rPr>
-              <a:t>02</a:t>
-            </a:r>
-            <a:endParaRPr lang="en-US" sz="900" dirty="0"/>
-          </a:p>
-          <a:p>
-            <a:pPr indent="0" marL="0">
-              <a:lnSpc>
-                <a:spcPct val="105000"/>
-              </a:lnSpc>
-              <a:spcAft>
-                <a:spcPts val="500"/>
-              </a:spcAft>
-              <a:buNone/>
-            </a:pPr>
-            <a:r>
-              <a:rPr lang="en-US" sz="1400" b="1" dirty="0">
+              <a:buNone/>
+            </a:pPr>
+            <a:r>
+              <a:rPr lang="en-US" sz="1100" dirty="0">
                 <a:solidFill>
                   <a:srgbClr val="171B20"/>
                 </a:solidFill>
@@ -2750,280 +3001,29 @@
                 <a:ea typeface="Arial" pitchFamily="34" charset="-122"/>
                 <a:cs typeface="Arial" pitchFamily="34" charset="-120"/>
               </a:rPr>
-              <a:t>Сертифицированная команда</a:t>
-            </a:r>
-            <a:endParaRPr lang="en-US" sz="900" dirty="0"/>
+              <a:t>✓  Видно статус на каждом этапе</a:t>
+            </a:r>
+            <a:endParaRPr lang="en-US" sz="950" dirty="0"/>
           </a:p>
           <a:p>
             <a:pPr indent="0" marL="0">
               <a:lnSpc>
-                <a:spcPct val="105000"/>
+                <a:spcPct val="115000"/>
               </a:lnSpc>
-              <a:spcAft>
-                <a:spcPts val="500"/>
-              </a:spcAft>
-              <a:buNone/>
-            </a:pPr>
-            <a:r>
-              <a:rPr lang="en-US" sz="1000" dirty="0">
-                <a:solidFill>
-                  <a:srgbClr val="59626B"/>
+              <a:buNone/>
+            </a:pPr>
+            <a:r>
+              <a:rPr lang="en-US" sz="1100" dirty="0">
+                <a:solidFill>
+                  <a:srgbClr val="171B20"/>
                 </a:solidFill>
                 <a:latin typeface="Arial" pitchFamily="34" charset="0"/>
                 <a:ea typeface="Arial" pitchFamily="34" charset="-122"/>
                 <a:cs typeface="Arial" pitchFamily="34" charset="-120"/>
               </a:rPr>
-              <a:t>Аналитики и low-code разработчики, 10+ сертификатов ELMA.</a:t>
-            </a:r>
-            <a:endParaRPr lang="en-US" sz="900" dirty="0"/>
-          </a:p>
-        </p:txBody>
-      </p:sp>
-      <p:sp>
-        <p:nvSpPr>
-          <p:cNvPr id="16" name="Shape 14"/>
-          <p:cNvSpPr/>
-          <p:nvPr/>
-        </p:nvSpPr>
-        <p:spPr>
-          <a:xfrm>
-            <a:off x="6065520" y="2788920"/>
-            <a:ext cx="2621280" cy="1371600"/>
-          </a:xfrm>
-          <a:prstGeom prst="roundRect">
-            <a:avLst>
-              <a:gd name="adj" fmla="val 3333"/>
-            </a:avLst>
-          </a:prstGeom>
-          <a:solidFill>
-            <a:srgbClr val="FFFFFF"/>
-          </a:solidFill>
-          <a:ln w="9525">
-            <a:solidFill>
-              <a:srgbClr val="D7DCE1"/>
-            </a:solidFill>
-            <a:prstDash val="solid"/>
-          </a:ln>
-          <a:effectLst>
-            <a:outerShdw sx="100000" sy="100000" kx="0" ky="0" algn="bl" rotWithShape="0" blurRad="88900" dist="25400" dir="5400000">
-              <a:srgbClr val="1A2A3A">
-                <a:alpha val="10000"/>
-              </a:srgbClr>
-            </a:outerShdw>
-          </a:effectLst>
-        </p:spPr>
-      </p:sp>
-      <p:sp>
-        <p:nvSpPr>
-          <p:cNvPr id="17" name="Text 15"/>
-          <p:cNvSpPr/>
-          <p:nvPr/>
-        </p:nvSpPr>
-        <p:spPr>
-          <a:xfrm>
-            <a:off x="6083808" y="2788920"/>
-            <a:ext cx="2584704" cy="1371600"/>
-          </a:xfrm>
-          <a:prstGeom prst="rect">
-            <a:avLst/>
-          </a:prstGeom>
-          <a:noFill/>
-          <a:ln/>
-        </p:spPr>
-        <p:txBody>
-          <a:bodyPr wrap="square" lIns="2032" tIns="2032" rIns="2032" bIns="2032" rtlCol="0" anchor="t"/>
-          <a:lstStyle/>
-          <a:p>
-            <a:pPr indent="0" marL="0">
-              <a:lnSpc>
-                <a:spcPct val="105000"/>
-              </a:lnSpc>
-              <a:spcAft>
-                <a:spcPts val="500"/>
-              </a:spcAft>
-              <a:buNone/>
-            </a:pPr>
-            <a:r>
-              <a:rPr lang="en-US" sz="900" dirty="0">
-                <a:solidFill>
-                  <a:srgbClr val="B25A1E"/>
-                </a:solidFill>
-                <a:latin typeface="Courier New" pitchFamily="34" charset="0"/>
-                <a:ea typeface="Courier New" pitchFamily="34" charset="-122"/>
-                <a:cs typeface="Courier New" pitchFamily="34" charset="-120"/>
-              </a:rPr>
-              <a:t>03</a:t>
-            </a:r>
-            <a:endParaRPr lang="en-US" sz="900" dirty="0"/>
-          </a:p>
-          <a:p>
-            <a:pPr indent="0" marL="0">
-              <a:lnSpc>
-                <a:spcPct val="105000"/>
-              </a:lnSpc>
-              <a:spcAft>
-                <a:spcPts val="500"/>
-              </a:spcAft>
-              <a:buNone/>
-            </a:pPr>
-            <a:r>
-              <a:rPr lang="en-US" sz="1400" b="1" dirty="0">
-                <a:solidFill>
-                  <a:srgbClr val="171B20"/>
-                </a:solidFill>
-                <a:latin typeface="Arial" pitchFamily="34" charset="0"/>
-                <a:ea typeface="Arial" pitchFamily="34" charset="-122"/>
-                <a:cs typeface="Arial" pitchFamily="34" charset="-120"/>
-              </a:rPr>
-              <a:t>Продукт и услуги</a:t>
-            </a:r>
-            <a:endParaRPr lang="en-US" sz="900" dirty="0"/>
-          </a:p>
-          <a:p>
-            <a:pPr indent="0" marL="0">
-              <a:lnSpc>
-                <a:spcPct val="105000"/>
-              </a:lnSpc>
-              <a:spcAft>
-                <a:spcPts val="500"/>
-              </a:spcAft>
-              <a:buNone/>
-            </a:pPr>
-            <a:r>
-              <a:rPr lang="en-US" sz="1000" dirty="0">
-                <a:solidFill>
-                  <a:srgbClr val="59626B"/>
-                </a:solidFill>
-                <a:latin typeface="Arial" pitchFamily="34" charset="0"/>
-                <a:ea typeface="Arial" pitchFamily="34" charset="-122"/>
-                <a:cs typeface="Arial" pitchFamily="34" charset="-120"/>
-              </a:rPr>
-              <a:t>Внедрение под ключ и готовый коробочный ЭДО Coordo.</a:t>
-            </a:r>
-            <a:endParaRPr lang="en-US" sz="900" dirty="0"/>
-          </a:p>
-        </p:txBody>
-      </p:sp>
-      <p:sp>
-        <p:nvSpPr>
-          <p:cNvPr id="18" name="Text 16"/>
-          <p:cNvSpPr/>
-          <p:nvPr/>
-        </p:nvSpPr>
-        <p:spPr>
-          <a:xfrm>
-            <a:off x="457200" y="4343400"/>
-            <a:ext cx="8229600" cy="274320"/>
-          </a:xfrm>
-          <a:prstGeom prst="rect">
-            <a:avLst/>
-          </a:prstGeom>
-          <a:noFill/>
-          <a:ln/>
-        </p:spPr>
-        <p:txBody>
-          <a:bodyPr wrap="square" lIns="0" tIns="0" rIns="0" bIns="0" rtlCol="0" anchor="ctr"/>
-          <a:lstStyle/>
-          <a:p>
-            <a:pPr indent="0" marL="0">
-              <a:buNone/>
-            </a:pPr>
-            <a:r>
-              <a:rPr lang="en-US" sz="1000" b="1" dirty="0">
-                <a:solidFill>
-                  <a:srgbClr val="171B20"/>
-                </a:solidFill>
-                <a:latin typeface="Courier New" pitchFamily="34" charset="0"/>
-                <a:ea typeface="Courier New" pitchFamily="34" charset="-122"/>
-                <a:cs typeface="Courier New" pitchFamily="34" charset="-120"/>
-              </a:rPr>
-              <a:t>Россия и Казахстан</a:t>
-            </a:r>
-            <a:pPr indent="0" marL="0">
-              <a:buNone/>
-            </a:pPr>
-            <a:r>
-              <a:rPr lang="en-US" sz="1000" dirty="0">
-                <a:solidFill>
-                  <a:srgbClr val="D7DCE1"/>
-                </a:solidFill>
-                <a:latin typeface="Courier New" pitchFamily="34" charset="0"/>
-                <a:ea typeface="Courier New" pitchFamily="34" charset="-122"/>
-                <a:cs typeface="Courier New" pitchFamily="34" charset="-120"/>
-              </a:rPr>
-              <a:t>      ·      </a:t>
-            </a:r>
-            <a:pPr indent="0" marL="0">
-              <a:buNone/>
-            </a:pPr>
-            <a:r>
-              <a:rPr lang="en-US" sz="1000" dirty="0">
-                <a:solidFill>
-                  <a:srgbClr val="59626B"/>
-                </a:solidFill>
-                <a:latin typeface="Courier New" pitchFamily="34" charset="0"/>
-                <a:ea typeface="Courier New" pitchFamily="34" charset="-122"/>
-                <a:cs typeface="Courier New" pitchFamily="34" charset="-120"/>
-              </a:rPr>
-              <a:t>Руководитель — </a:t>
-            </a:r>
-            <a:pPr indent="0" marL="0">
-              <a:buNone/>
-            </a:pPr>
-            <a:r>
-              <a:rPr lang="en-US" sz="1000" b="1" dirty="0">
-                <a:solidFill>
-                  <a:srgbClr val="171B20"/>
-                </a:solidFill>
-                <a:latin typeface="Courier New" pitchFamily="34" charset="0"/>
-                <a:ea typeface="Courier New" pitchFamily="34" charset="-122"/>
-                <a:cs typeface="Courier New" pitchFamily="34" charset="-120"/>
-              </a:rPr>
-              <a:t>5 лет</a:t>
-            </a:r>
-            <a:pPr indent="0" marL="0">
-              <a:buNone/>
-            </a:pPr>
-            <a:r>
-              <a:rPr lang="en-US" sz="1000" dirty="0">
-                <a:solidFill>
-                  <a:srgbClr val="59626B"/>
-                </a:solidFill>
-                <a:latin typeface="Courier New" pitchFamily="34" charset="0"/>
-                <a:ea typeface="Courier New" pitchFamily="34" charset="-122"/>
-                <a:cs typeface="Courier New" pitchFamily="34" charset="-120"/>
-              </a:rPr>
-              <a:t> в ELMA365</a:t>
-            </a:r>
-            <a:pPr indent="0" marL="0">
-              <a:buNone/>
-            </a:pPr>
-            <a:r>
-              <a:rPr lang="en-US" sz="1000" dirty="0">
-                <a:solidFill>
-                  <a:srgbClr val="D7DCE1"/>
-                </a:solidFill>
-                <a:latin typeface="Courier New" pitchFamily="34" charset="0"/>
-                <a:ea typeface="Courier New" pitchFamily="34" charset="-122"/>
-                <a:cs typeface="Courier New" pitchFamily="34" charset="-120"/>
-              </a:rPr>
-              <a:t>      ·      </a:t>
-            </a:r>
-            <a:pPr indent="0" marL="0">
-              <a:buNone/>
-            </a:pPr>
-            <a:r>
-              <a:rPr lang="en-US" sz="1000" dirty="0">
-                <a:solidFill>
-                  <a:srgbClr val="59626B"/>
-                </a:solidFill>
-                <a:latin typeface="Courier New" pitchFamily="34" charset="0"/>
-                <a:ea typeface="Courier New" pitchFamily="34" charset="-122"/>
-                <a:cs typeface="Courier New" pitchFamily="34" charset="-120"/>
-              </a:rPr>
-              <a:t>Внедрение + продукт</a:t>
-            </a:r>
-            <a:endParaRPr lang="en-US" sz="1000" dirty="0"/>
+              <a:t>✓  Маршруты меняются без кода</a:t>
+            </a:r>
+            <a:endParaRPr lang="en-US" sz="950" dirty="0"/>
           </a:p>
         </p:txBody>
       </p:sp>
@@ -3041,7 +3041,7 @@
     <p:bg>
       <p:bgPr>
         <a:solidFill>
-          <a:srgbClr val="F3F5F6"/>
+          <a:srgbClr val="F5F8FC"/>
         </a:solidFill>
       </p:bgPr>
     </p:bg>
@@ -3076,11 +3076,11 @@
             </a:avLst>
           </a:prstGeom>
           <a:solidFill>
-            <a:srgbClr val="F3F5F6"/>
+            <a:srgbClr val="F5F8FC"/>
           </a:solidFill>
           <a:ln w="15875">
             <a:solidFill>
-              <a:srgbClr val="1D5C9A"/>
+              <a:srgbClr val="1668C0"/>
             </a:solidFill>
             <a:prstDash val="solid"/>
           </a:ln>
@@ -3113,7 +3113,7 @@
             <a:r>
               <a:rPr lang="en-US" sz="1100" b="1" dirty="0">
                 <a:solidFill>
-                  <a:srgbClr val="1D5C9A"/>
+                  <a:srgbClr val="1668C0"/>
                 </a:solidFill>
                 <a:latin typeface="Arial" pitchFamily="34" charset="0"/>
                 <a:ea typeface="Arial" pitchFamily="34" charset="-122"/>
@@ -3296,7 +3296,7 @@
             <a:avLst/>
           </a:prstGeom>
           <a:solidFill>
-            <a:srgbClr val="B25A1E"/>
+            <a:srgbClr val="1668C0"/>
           </a:solidFill>
           <a:ln/>
         </p:spPr>
@@ -3328,7 +3328,7 @@
             <a:r>
               <a:rPr lang="en-US" sz="1050" spc="200" kern="0" dirty="0">
                 <a:solidFill>
-                  <a:srgbClr val="B25A1E"/>
+                  <a:srgbClr val="1668C0"/>
                 </a:solidFill>
                 <a:latin typeface="Courier New" pitchFamily="34" charset="0"/>
                 <a:ea typeface="Courier New" pitchFamily="34" charset="-122"/>
@@ -3409,7 +3409,7 @@
             <a:r>
               <a:rPr lang="en-US" sz="7200" b="1" dirty="0">
                 <a:solidFill>
-                  <a:srgbClr val="134C7A"/>
+                  <a:srgbClr val="1668C0"/>
                 </a:solidFill>
                 <a:latin typeface="Arial" pitchFamily="34" charset="0"/>
                 <a:ea typeface="Arial" pitchFamily="34" charset="-122"/>
@@ -3436,7 +3436,7 @@
             <a:avLst/>
           </a:prstGeom>
           <a:solidFill>
-            <a:srgbClr val="B25A1E"/>
+            <a:srgbClr val="1668C0"/>
           </a:solidFill>
           <a:ln/>
         </p:spPr>
@@ -3523,11 +3523,11 @@
             </a:avLst>
           </a:prstGeom>
           <a:solidFill>
-            <a:srgbClr val="FFFFFF"/>
+            <a:srgbClr val="E9F1FB"/>
           </a:solidFill>
           <a:ln w="9525">
             <a:solidFill>
-              <a:srgbClr val="D7DCE1"/>
+              <a:srgbClr val="D8E2EC"/>
             </a:solidFill>
             <a:prstDash val="solid"/>
           </a:ln>
@@ -3573,7 +3573,7 @@
             <a:r>
               <a:rPr lang="en-US" sz="2000" b="1" dirty="0">
                 <a:solidFill>
-                  <a:srgbClr val="1D5C9A"/>
+                  <a:srgbClr val="1668C0"/>
                 </a:solidFill>
                 <a:latin typeface="Arial" pitchFamily="34" charset="0"/>
                 <a:ea typeface="Arial" pitchFamily="34" charset="-122"/>
@@ -3620,7 +3620,7 @@
             <a:avLst/>
           </a:prstGeom>
           <a:solidFill>
-            <a:srgbClr val="D7DCE1"/>
+            <a:srgbClr val="D8E2EC"/>
           </a:solidFill>
           <a:ln/>
         </p:spPr>
@@ -3658,7 +3658,7 @@
             <a:r>
               <a:rPr lang="en-US" sz="2000" b="1" dirty="0">
                 <a:solidFill>
-                  <a:srgbClr val="1D5C9A"/>
+                  <a:srgbClr val="1668C0"/>
                 </a:solidFill>
                 <a:latin typeface="Arial" pitchFamily="34" charset="0"/>
                 <a:ea typeface="Arial" pitchFamily="34" charset="-122"/>
@@ -3705,7 +3705,7 @@
             <a:avLst/>
           </a:prstGeom>
           <a:solidFill>
-            <a:srgbClr val="D7DCE1"/>
+            <a:srgbClr val="D8E2EC"/>
           </a:solidFill>
           <a:ln/>
         </p:spPr>
@@ -3743,7 +3743,7 @@
             <a:r>
               <a:rPr lang="en-US" sz="2000" b="1" dirty="0">
                 <a:solidFill>
-                  <a:srgbClr val="1D5C9A"/>
+                  <a:srgbClr val="1668C0"/>
                 </a:solidFill>
                 <a:latin typeface="Arial" pitchFamily="34" charset="0"/>
                 <a:ea typeface="Arial" pitchFamily="34" charset="-122"/>
@@ -3790,7 +3790,7 @@
             <a:avLst/>
           </a:prstGeom>
           <a:solidFill>
-            <a:srgbClr val="D7DCE1"/>
+            <a:srgbClr val="D8E2EC"/>
           </a:solidFill>
           <a:ln/>
         </p:spPr>
@@ -3828,7 +3828,7 @@
             <a:r>
               <a:rPr lang="en-US" sz="2000" b="1" dirty="0">
                 <a:solidFill>
-                  <a:srgbClr val="1D5C9A"/>
+                  <a:srgbClr val="1668C0"/>
                 </a:solidFill>
                 <a:latin typeface="Arial" pitchFamily="34" charset="0"/>
                 <a:ea typeface="Arial" pitchFamily="34" charset="-122"/>
@@ -3913,7 +3913,7 @@
     <p:bg>
       <p:bgPr>
         <a:solidFill>
-          <a:srgbClr val="F3F5F6"/>
+          <a:srgbClr val="F5F8FC"/>
         </a:solidFill>
       </p:bgPr>
     </p:bg>
@@ -3948,11 +3948,11 @@
             </a:avLst>
           </a:prstGeom>
           <a:solidFill>
-            <a:srgbClr val="F3F5F6"/>
+            <a:srgbClr val="F5F8FC"/>
           </a:solidFill>
           <a:ln w="15875">
             <a:solidFill>
-              <a:srgbClr val="1D5C9A"/>
+              <a:srgbClr val="1668C0"/>
             </a:solidFill>
             <a:prstDash val="solid"/>
           </a:ln>
@@ -3985,7 +3985,7 @@
             <a:r>
               <a:rPr lang="en-US" sz="1100" b="1" dirty="0">
                 <a:solidFill>
-                  <a:srgbClr val="1D5C9A"/>
+                  <a:srgbClr val="1668C0"/>
                 </a:solidFill>
                 <a:latin typeface="Arial" pitchFamily="34" charset="0"/>
                 <a:ea typeface="Arial" pitchFamily="34" charset="-122"/>
@@ -4168,7 +4168,7 @@
             <a:avLst/>
           </a:prstGeom>
           <a:solidFill>
-            <a:srgbClr val="B25A1E"/>
+            <a:srgbClr val="1668C0"/>
           </a:solidFill>
           <a:ln/>
         </p:spPr>
@@ -4200,7 +4200,7 @@
             <a:r>
               <a:rPr lang="en-US" sz="1050" spc="200" kern="0" dirty="0">
                 <a:solidFill>
-                  <a:srgbClr val="B25A1E"/>
+                  <a:srgbClr val="1668C0"/>
                 </a:solidFill>
                 <a:latin typeface="Courier New" pitchFamily="34" charset="0"/>
                 <a:ea typeface="Courier New" pitchFamily="34" charset="-122"/>
@@ -4320,7 +4320,7 @@
             <a:r>
               <a:rPr lang="en-US" sz="2600" b="1" dirty="0">
                 <a:solidFill>
-                  <a:srgbClr val="B25A1E"/>
+                  <a:srgbClr val="1668C0"/>
                 </a:solidFill>
                 <a:latin typeface="Arial" pitchFamily="34" charset="0"/>
                 <a:ea typeface="Arial" pitchFamily="34" charset="-122"/>
@@ -4359,7 +4359,7 @@
             <a:r>
               <a:rPr lang="en-US" sz="4000" b="1" dirty="0">
                 <a:solidFill>
-                  <a:srgbClr val="134C7A"/>
+                  <a:srgbClr val="1668C0"/>
                 </a:solidFill>
                 <a:latin typeface="Arial" pitchFamily="34" charset="0"/>
                 <a:ea typeface="Arial" pitchFamily="34" charset="-122"/>
@@ -4392,7 +4392,7 @@
           </a:solidFill>
           <a:ln w="9525">
             <a:solidFill>
-              <a:srgbClr val="D7DCE1"/>
+              <a:srgbClr val="D8E2EC"/>
             </a:solidFill>
             <a:prstDash val="solid"/>
           </a:ln>
@@ -4438,7 +4438,7 @@
             <a:r>
               <a:rPr lang="en-US" sz="900" dirty="0">
                 <a:solidFill>
-                  <a:srgbClr val="B25A1E"/>
+                  <a:srgbClr val="1668C0"/>
                 </a:solidFill>
                 <a:latin typeface="Courier New" pitchFamily="34" charset="0"/>
                 <a:ea typeface="Courier New" pitchFamily="34" charset="-122"/>
@@ -4517,7 +4517,7 @@
           </a:solidFill>
           <a:ln w="9525">
             <a:solidFill>
-              <a:srgbClr val="D7DCE1"/>
+              <a:srgbClr val="D8E2EC"/>
             </a:solidFill>
             <a:prstDash val="solid"/>
           </a:ln>
@@ -4563,7 +4563,7 @@
             <a:r>
               <a:rPr lang="en-US" sz="900" dirty="0">
                 <a:solidFill>
-                  <a:srgbClr val="B25A1E"/>
+                  <a:srgbClr val="1668C0"/>
                 </a:solidFill>
                 <a:latin typeface="Courier New" pitchFamily="34" charset="0"/>
                 <a:ea typeface="Courier New" pitchFamily="34" charset="-122"/>
@@ -4642,7 +4642,7 @@
           </a:solidFill>
           <a:ln w="9525">
             <a:solidFill>
-              <a:srgbClr val="D7DCE1"/>
+              <a:srgbClr val="D8E2EC"/>
             </a:solidFill>
             <a:prstDash val="solid"/>
           </a:ln>
@@ -4688,7 +4688,7 @@
             <a:r>
               <a:rPr lang="en-US" sz="900" dirty="0">
                 <a:solidFill>
-                  <a:srgbClr val="B25A1E"/>
+                  <a:srgbClr val="1668C0"/>
                 </a:solidFill>
                 <a:latin typeface="Courier New" pitchFamily="34" charset="0"/>
                 <a:ea typeface="Courier New" pitchFamily="34" charset="-122"/>
@@ -4813,7 +4813,7 @@
     <p:bg>
       <p:bgPr>
         <a:solidFill>
-          <a:srgbClr val="F3F5F6"/>
+          <a:srgbClr val="F5F8FC"/>
         </a:solidFill>
       </p:bgPr>
     </p:bg>
@@ -4848,11 +4848,11 @@
             </a:avLst>
           </a:prstGeom>
           <a:solidFill>
-            <a:srgbClr val="F3F5F6"/>
+            <a:srgbClr val="F5F8FC"/>
           </a:solidFill>
           <a:ln w="15875">
             <a:solidFill>
-              <a:srgbClr val="1D5C9A"/>
+              <a:srgbClr val="1668C0"/>
             </a:solidFill>
             <a:prstDash val="solid"/>
           </a:ln>
@@ -4885,7 +4885,7 @@
             <a:r>
               <a:rPr lang="en-US" sz="1100" b="1" dirty="0">
                 <a:solidFill>
-                  <a:srgbClr val="1D5C9A"/>
+                  <a:srgbClr val="1668C0"/>
                 </a:solidFill>
                 <a:latin typeface="Arial" pitchFamily="34" charset="0"/>
                 <a:ea typeface="Arial" pitchFamily="34" charset="-122"/>
@@ -5068,7 +5068,7 @@
             <a:avLst/>
           </a:prstGeom>
           <a:solidFill>
-            <a:srgbClr val="B25A1E"/>
+            <a:srgbClr val="1668C0"/>
           </a:solidFill>
           <a:ln/>
         </p:spPr>
@@ -5100,7 +5100,7 @@
             <a:r>
               <a:rPr lang="en-US" sz="1050" spc="200" kern="0" dirty="0">
                 <a:solidFill>
-                  <a:srgbClr val="B25A1E"/>
+                  <a:srgbClr val="1668C0"/>
                 </a:solidFill>
                 <a:latin typeface="Courier New" pitchFamily="34" charset="0"/>
                 <a:ea typeface="Courier New" pitchFamily="34" charset="-122"/>
@@ -5175,7 +5175,7 @@
           </a:solidFill>
           <a:ln w="9525">
             <a:solidFill>
-              <a:srgbClr val="D7DCE1"/>
+              <a:srgbClr val="D8E2EC"/>
             </a:solidFill>
             <a:prstDash val="solid"/>
           </a:ln>
@@ -5218,7 +5218,7 @@
             <a:r>
               <a:rPr lang="en-US" sz="900" spc="100" kern="0" dirty="0">
                 <a:solidFill>
-                  <a:srgbClr val="B25A1E"/>
+                  <a:srgbClr val="1668C0"/>
                 </a:solidFill>
                 <a:latin typeface="Courier New" pitchFamily="34" charset="0"/>
                 <a:ea typeface="Courier New" pitchFamily="34" charset="-122"/>
@@ -5238,7 +5238,7 @@
             <a:r>
               <a:rPr lang="en-US" sz="900" dirty="0">
                 <a:solidFill>
-                  <a:srgbClr val="B25A1E"/>
+                  <a:srgbClr val="1668C0"/>
                 </a:solidFill>
                 <a:latin typeface="Courier New" pitchFamily="34" charset="0"/>
                 <a:ea typeface="Courier New" pitchFamily="34" charset="-122"/>
@@ -5265,7 +5265,7 @@
             <a:avLst/>
           </a:prstGeom>
           <a:solidFill>
-            <a:srgbClr val="D7DCE1"/>
+            <a:srgbClr val="D8E2EC"/>
           </a:solidFill>
           <a:ln/>
         </p:spPr>
@@ -5333,7 +5333,7 @@
           </a:solidFill>
           <a:ln w="9525">
             <a:solidFill>
-              <a:srgbClr val="D7DCE1"/>
+              <a:srgbClr val="D8E2EC"/>
             </a:solidFill>
             <a:prstDash val="solid"/>
           </a:ln>
@@ -5372,7 +5372,7 @@
             <a:r>
               <a:rPr lang="en-US" sz="850" spc="100" kern="0" dirty="0">
                 <a:solidFill>
-                  <a:srgbClr val="1D5C9A"/>
+                  <a:srgbClr val="1668C0"/>
                 </a:solidFill>
                 <a:latin typeface="Courier New" pitchFamily="34" charset="0"/>
                 <a:ea typeface="Courier New" pitchFamily="34" charset="-122"/>
@@ -5445,7 +5445,7 @@
           </a:solidFill>
           <a:ln w="9525">
             <a:solidFill>
-              <a:srgbClr val="D7DCE1"/>
+              <a:srgbClr val="D8E2EC"/>
             </a:solidFill>
             <a:prstDash val="solid"/>
           </a:ln>
@@ -5484,7 +5484,7 @@
             <a:r>
               <a:rPr lang="en-US" sz="850" spc="100" kern="0" dirty="0">
                 <a:solidFill>
-                  <a:srgbClr val="1D5C9A"/>
+                  <a:srgbClr val="1668C0"/>
                 </a:solidFill>
                 <a:latin typeface="Courier New" pitchFamily="34" charset="0"/>
                 <a:ea typeface="Courier New" pitchFamily="34" charset="-122"/>
@@ -5592,11 +5592,11 @@
             </a:avLst>
           </a:prstGeom>
           <a:solidFill>
-            <a:srgbClr val="F3F5F6"/>
+            <a:srgbClr val="F5F8FC"/>
           </a:solidFill>
           <a:ln w="12700">
             <a:solidFill>
-              <a:srgbClr val="D7DCE1"/>
+              <a:srgbClr val="D8E2EC"/>
             </a:solidFill>
             <a:prstDash val="dash"/>
           </a:ln>
@@ -5658,11 +5658,11 @@
             </a:avLst>
           </a:prstGeom>
           <a:solidFill>
-            <a:srgbClr val="F3F5F6"/>
+            <a:srgbClr val="F5F8FC"/>
           </a:solidFill>
           <a:ln w="12700">
             <a:solidFill>
-              <a:srgbClr val="D7DCE1"/>
+              <a:srgbClr val="D8E2EC"/>
             </a:solidFill>
             <a:prstDash val="dash"/>
           </a:ln>
@@ -5724,11 +5724,11 @@
             </a:avLst>
           </a:prstGeom>
           <a:solidFill>
-            <a:srgbClr val="F3F5F6"/>
+            <a:srgbClr val="F5F8FC"/>
           </a:solidFill>
           <a:ln w="12700">
             <a:solidFill>
-              <a:srgbClr val="D7DCE1"/>
+              <a:srgbClr val="D8E2EC"/>
             </a:solidFill>
             <a:prstDash val="dash"/>
           </a:ln>
@@ -5790,11 +5790,11 @@
             </a:avLst>
           </a:prstGeom>
           <a:solidFill>
-            <a:srgbClr val="F3F5F6"/>
+            <a:srgbClr val="F5F8FC"/>
           </a:solidFill>
           <a:ln w="12700">
             <a:solidFill>
-              <a:srgbClr val="D7DCE1"/>
+              <a:srgbClr val="D8E2EC"/>
             </a:solidFill>
             <a:prstDash val="dash"/>
           </a:ln>
@@ -5856,11 +5856,11 @@
             </a:avLst>
           </a:prstGeom>
           <a:solidFill>
-            <a:srgbClr val="F3F5F6"/>
+            <a:srgbClr val="F5F8FC"/>
           </a:solidFill>
           <a:ln w="12700">
             <a:solidFill>
-              <a:srgbClr val="D7DCE1"/>
+              <a:srgbClr val="D8E2EC"/>
             </a:solidFill>
             <a:prstDash val="dash"/>
           </a:ln>
@@ -5958,7 +5958,7 @@
     <p:bg>
       <p:bgPr>
         <a:solidFill>
-          <a:srgbClr val="F3F5F6"/>
+          <a:srgbClr val="F5F8FC"/>
         </a:solidFill>
       </p:bgPr>
     </p:bg>
@@ -5993,11 +5993,11 @@
             </a:avLst>
           </a:prstGeom>
           <a:solidFill>
-            <a:srgbClr val="F3F5F6"/>
+            <a:srgbClr val="F5F8FC"/>
           </a:solidFill>
           <a:ln w="15875">
             <a:solidFill>
-              <a:srgbClr val="1D5C9A"/>
+              <a:srgbClr val="1668C0"/>
             </a:solidFill>
             <a:prstDash val="solid"/>
           </a:ln>
@@ -6030,7 +6030,7 @@
             <a:r>
               <a:rPr lang="en-US" sz="1100" b="1" dirty="0">
                 <a:solidFill>
-                  <a:srgbClr val="1D5C9A"/>
+                  <a:srgbClr val="1668C0"/>
                 </a:solidFill>
                 <a:latin typeface="Arial" pitchFamily="34" charset="0"/>
                 <a:ea typeface="Arial" pitchFamily="34" charset="-122"/>
@@ -6213,7 +6213,7 @@
             <a:avLst/>
           </a:prstGeom>
           <a:solidFill>
-            <a:srgbClr val="B25A1E"/>
+            <a:srgbClr val="1668C0"/>
           </a:solidFill>
           <a:ln/>
         </p:spPr>
@@ -6245,7 +6245,7 @@
             <a:r>
               <a:rPr lang="en-US" sz="1050" spc="200" kern="0" dirty="0">
                 <a:solidFill>
-                  <a:srgbClr val="B25A1E"/>
+                  <a:srgbClr val="1668C0"/>
                 </a:solidFill>
                 <a:latin typeface="Courier New" pitchFamily="34" charset="0"/>
                 <a:ea typeface="Courier New" pitchFamily="34" charset="-122"/>
@@ -6320,7 +6320,7 @@
           </a:solidFill>
           <a:ln w="9525">
             <a:solidFill>
-              <a:srgbClr val="D7DCE1"/>
+              <a:srgbClr val="D8E2EC"/>
             </a:solidFill>
             <a:prstDash val="solid"/>
           </a:ln>
@@ -6413,7 +6413,7 @@
           </a:solidFill>
           <a:ln w="9525">
             <a:solidFill>
-              <a:srgbClr val="D7DCE1"/>
+              <a:srgbClr val="D8E2EC"/>
             </a:solidFill>
             <a:prstDash val="solid"/>
           </a:ln>
@@ -6506,7 +6506,7 @@
           </a:solidFill>
           <a:ln w="9525">
             <a:solidFill>
-              <a:srgbClr val="D7DCE1"/>
+              <a:srgbClr val="D8E2EC"/>
             </a:solidFill>
             <a:prstDash val="solid"/>
           </a:ln>
@@ -6599,7 +6599,7 @@
           </a:solidFill>
           <a:ln w="9525">
             <a:solidFill>
-              <a:srgbClr val="D7DCE1"/>
+              <a:srgbClr val="D8E2EC"/>
             </a:solidFill>
             <a:prstDash val="solid"/>
           </a:ln>
@@ -6692,7 +6692,7 @@
           </a:solidFill>
           <a:ln w="9525">
             <a:solidFill>
-              <a:srgbClr val="D7DCE1"/>
+              <a:srgbClr val="D8E2EC"/>
             </a:solidFill>
             <a:prstDash val="solid"/>
           </a:ln>
@@ -6785,7 +6785,7 @@
           </a:solidFill>
           <a:ln w="9525">
             <a:solidFill>
-              <a:srgbClr val="D7DCE1"/>
+              <a:srgbClr val="D8E2EC"/>
             </a:solidFill>
             <a:prstDash val="solid"/>
           </a:ln>
@@ -6878,7 +6878,7 @@
           </a:solidFill>
           <a:ln w="9525">
             <a:solidFill>
-              <a:srgbClr val="D7DCE1"/>
+              <a:srgbClr val="D8E2EC"/>
             </a:solidFill>
             <a:prstDash val="solid"/>
           </a:ln>
@@ -6971,7 +6971,7 @@
           </a:solidFill>
           <a:ln w="9525">
             <a:solidFill>
-              <a:srgbClr val="D7DCE1"/>
+              <a:srgbClr val="D8E2EC"/>
             </a:solidFill>
             <a:prstDash val="solid"/>
           </a:ln>
@@ -7060,11 +7060,11 @@
             </a:avLst>
           </a:prstGeom>
           <a:solidFill>
-            <a:srgbClr val="FBEEE0"/>
+            <a:srgbClr val="E9F1FB"/>
           </a:solidFill>
           <a:ln w="12700">
             <a:solidFill>
-              <a:srgbClr val="EAD6BF"/>
+              <a:srgbClr val="CFE0F1"/>
             </a:solidFill>
             <a:prstDash val="solid"/>
           </a:ln>
@@ -7100,7 +7100,7 @@
             <a:r>
               <a:rPr lang="en-US" sz="1050" b="1" dirty="0">
                 <a:solidFill>
-                  <a:srgbClr val="5E3212"/>
+                  <a:srgbClr val="0F3560"/>
                 </a:solidFill>
                 <a:latin typeface="Courier New" pitchFamily="34" charset="0"/>
                 <a:ea typeface="Courier New" pitchFamily="34" charset="-122"/>
@@ -7117,7 +7117,7 @@
             <a:r>
               <a:rPr lang="en-US" sz="1050" dirty="0">
                 <a:solidFill>
-                  <a:srgbClr val="7A421A"/>
+                  <a:srgbClr val="123F73"/>
                 </a:solidFill>
                 <a:latin typeface="Courier New" pitchFamily="34" charset="0"/>
                 <a:ea typeface="Courier New" pitchFamily="34" charset="-122"/>
@@ -7143,7 +7143,7 @@
     <p:bg>
       <p:bgPr>
         <a:solidFill>
-          <a:srgbClr val="134C7A"/>
+          <a:srgbClr val="123F73"/>
         </a:solidFill>
       </p:bgPr>
     </p:bg>
@@ -7178,11 +7178,11 @@
             </a:avLst>
           </a:prstGeom>
           <a:solidFill>
-            <a:srgbClr val="134C7A"/>
+            <a:srgbClr val="1668C0"/>
           </a:solidFill>
           <a:ln w="15875">
             <a:solidFill>
-              <a:srgbClr val="86B8E0"/>
+              <a:srgbClr val="9BC7EE"/>
             </a:solidFill>
             <a:prstDash val="solid"/>
           </a:ln>
@@ -7215,7 +7215,7 @@
             <a:r>
               <a:rPr lang="en-US" sz="1100" b="1" dirty="0">
                 <a:solidFill>
-                  <a:srgbClr val="86B8E0"/>
+                  <a:srgbClr val="9BC7EE"/>
                 </a:solidFill>
                 <a:latin typeface="Arial" pitchFamily="34" charset="0"/>
                 <a:ea typeface="Arial" pitchFamily="34" charset="-122"/>
@@ -7254,7 +7254,7 @@
             <a:r>
               <a:rPr lang="en-US" sz="1200" b="1" dirty="0">
                 <a:solidFill>
-                  <a:srgbClr val="EEF1F4"/>
+                  <a:srgbClr val="EEF3F8"/>
                 </a:solidFill>
                 <a:latin typeface="Arial" pitchFamily="34" charset="0"/>
                 <a:ea typeface="Arial" pitchFamily="34" charset="-122"/>
@@ -7293,7 +7293,7 @@
             <a:r>
               <a:rPr lang="en-US" sz="900" spc="200" kern="0" dirty="0">
                 <a:solidFill>
-                  <a:srgbClr val="AEC2D3"/>
+                  <a:srgbClr val="B7CBE0"/>
                 </a:solidFill>
                 <a:latin typeface="Courier New" pitchFamily="34" charset="0"/>
                 <a:ea typeface="Courier New" pitchFamily="34" charset="-122"/>
@@ -7320,7 +7320,7 @@
             <a:avLst/>
           </a:prstGeom>
           <a:solidFill>
-            <a:srgbClr val="86B8E0"/>
+            <a:srgbClr val="9BC7EE"/>
           </a:solidFill>
           <a:ln/>
         </p:spPr>
@@ -7352,7 +7352,7 @@
             <a:r>
               <a:rPr lang="en-US" sz="1050" spc="200" kern="0" dirty="0">
                 <a:solidFill>
-                  <a:srgbClr val="86B8E0"/>
+                  <a:srgbClr val="9BC7EE"/>
                 </a:solidFill>
                 <a:latin typeface="Courier New" pitchFamily="34" charset="0"/>
                 <a:ea typeface="Courier New" pitchFamily="34" charset="-122"/>
@@ -7394,7 +7394,7 @@
             <a:r>
               <a:rPr lang="en-US" sz="3000" b="1" dirty="0">
                 <a:solidFill>
-                  <a:srgbClr val="EEF1F4"/>
+                  <a:srgbClr val="EEF3F8"/>
                 </a:solidFill>
                 <a:latin typeface="Arial" pitchFamily="34" charset="0"/>
                 <a:ea typeface="Arial" pitchFamily="34" charset="-122"/>
@@ -7436,7 +7436,7 @@
             <a:r>
               <a:rPr lang="en-US" sz="1300" dirty="0">
                 <a:solidFill>
-                  <a:srgbClr val="AEC2D3"/>
+                  <a:srgbClr val="B7CBE0"/>
                 </a:solidFill>
                 <a:latin typeface="Arial" pitchFamily="34" charset="0"/>
                 <a:ea typeface="Arial" pitchFamily="34" charset="-122"/>
@@ -7465,7 +7465,7 @@
             </a:avLst>
           </a:prstGeom>
           <a:solidFill>
-            <a:srgbClr val="B25A1E"/>
+            <a:srgbClr val="FFFFFF"/>
           </a:solidFill>
           <a:ln/>
         </p:spPr>
@@ -7497,7 +7497,7 @@
             <a:r>
               <a:rPr lang="en-US" sz="1500" b="1" dirty="0">
                 <a:solidFill>
-                  <a:srgbClr val="FFFFFF"/>
+                  <a:srgbClr val="123F73"/>
                 </a:solidFill>
                 <a:latin typeface="Arial" pitchFamily="34" charset="0"/>
                 <a:ea typeface="Arial" pitchFamily="34" charset="-122"/>
@@ -7536,7 +7536,7 @@
             <a:r>
               <a:rPr lang="en-US" sz="1150" dirty="0">
                 <a:solidFill>
-                  <a:srgbClr val="EEF1F4"/>
+                  <a:srgbClr val="EEF3F8"/>
                 </a:solidFill>
                 <a:latin typeface="Courier New" pitchFamily="34" charset="0"/>
                 <a:ea typeface="Courier New" pitchFamily="34" charset="-122"/>
@@ -7550,7 +7550,7 @@
             <a:r>
               <a:rPr lang="en-US" sz="1150" dirty="0">
                 <a:solidFill>
-                  <a:srgbClr val="EEF1F4"/>
+                  <a:srgbClr val="EEF3F8"/>
                 </a:solidFill>
                 <a:latin typeface="Courier New" pitchFamily="34" charset="0"/>
                 <a:ea typeface="Courier New" pitchFamily="34" charset="-122"/>
@@ -7564,7 +7564,7 @@
             <a:r>
               <a:rPr lang="en-US" sz="1150" dirty="0">
                 <a:solidFill>
-                  <a:srgbClr val="AEC2D3"/>
+                  <a:srgbClr val="B7CBE0"/>
                 </a:solidFill>
                 <a:latin typeface="Courier New" pitchFamily="34" charset="0"/>
                 <a:ea typeface="Courier New" pitchFamily="34" charset="-122"/>

--- a/deliverables/WhatDaDev_Презентация_Знакомство.pptx
+++ b/deliverables/WhatDaDev_Презентация_Знакомство.pptx
@@ -508,7 +508,7 @@
           <a:p>
             <a:r>
               <a:rPr lang="en-US" dirty="0"/>
-              <a:t>Козырь доверия: dogfooding. Сертифицированная команда, продукт+услуги, РФ и КЗ.</a:t>
+              <a:t>Обложка-титул + О нас: вордмарк, dogfooding-опоры, РФ/КЗ.</a:t>
             </a:r>
             <a:endParaRPr lang="en-US" dirty="0"/>
           </a:p>
@@ -1391,7 +1391,7 @@
     <p:bg>
       <p:bgPr>
         <a:solidFill>
-          <a:srgbClr val="F5F8FC"/>
+          <a:srgbClr val="123F73"/>
         </a:solidFill>
       </p:bgPr>
     </p:bg>
@@ -1426,11 +1426,11 @@
             </a:avLst>
           </a:prstGeom>
           <a:solidFill>
-            <a:srgbClr val="F5F8FC"/>
+            <a:srgbClr val="1668C0"/>
           </a:solidFill>
           <a:ln w="15875">
             <a:solidFill>
-              <a:srgbClr val="1668C0"/>
+              <a:srgbClr val="9BC7EE"/>
             </a:solidFill>
             <a:prstDash val="solid"/>
           </a:ln>
@@ -1463,7 +1463,7 @@
             <a:r>
               <a:rPr lang="en-US" sz="1100" b="1" dirty="0">
                 <a:solidFill>
-                  <a:srgbClr val="1668C0"/>
+                  <a:srgbClr val="9BC7EE"/>
                 </a:solidFill>
                 <a:latin typeface="Arial" pitchFamily="34" charset="0"/>
                 <a:ea typeface="Arial" pitchFamily="34" charset="-122"/>
@@ -1502,7 +1502,7 @@
             <a:r>
               <a:rPr lang="en-US" sz="1200" b="1" dirty="0">
                 <a:solidFill>
-                  <a:srgbClr val="171B20"/>
+                  <a:srgbClr val="EEF3F8"/>
                 </a:solidFill>
                 <a:latin typeface="Arial" pitchFamily="34" charset="0"/>
                 <a:ea typeface="Arial" pitchFamily="34" charset="-122"/>
@@ -1541,7 +1541,7 @@
             <a:r>
               <a:rPr lang="en-US" sz="900" spc="200" kern="0" dirty="0">
                 <a:solidFill>
-                  <a:srgbClr val="59626B"/>
+                  <a:srgbClr val="B7CBE0"/>
                 </a:solidFill>
                 <a:latin typeface="Courier New" pitchFamily="34" charset="0"/>
                 <a:ea typeface="Courier New" pitchFamily="34" charset="-122"/>
@@ -1580,7 +1580,7 @@
             <a:r>
               <a:rPr lang="en-US" sz="850" dirty="0">
                 <a:solidFill>
-                  <a:srgbClr val="59626B"/>
+                  <a:srgbClr val="B7CBE0"/>
                 </a:solidFill>
                 <a:latin typeface="Courier New" pitchFamily="34" charset="0"/>
                 <a:ea typeface="Courier New" pitchFamily="34" charset="-122"/>
@@ -1619,7 +1619,7 @@
             <a:r>
               <a:rPr lang="en-US" sz="850" dirty="0">
                 <a:solidFill>
-                  <a:srgbClr val="59626B"/>
+                  <a:srgbClr val="B7CBE0"/>
                 </a:solidFill>
                 <a:latin typeface="Courier New" pitchFamily="34" charset="0"/>
                 <a:ea typeface="Courier New" pitchFamily="34" charset="-122"/>
@@ -1646,7 +1646,7 @@
             <a:avLst/>
           </a:prstGeom>
           <a:solidFill>
-            <a:srgbClr val="1668C0"/>
+            <a:srgbClr val="9BC7EE"/>
           </a:solidFill>
           <a:ln/>
         </p:spPr>
@@ -1678,13 +1678,13 @@
             <a:r>
               <a:rPr lang="en-US" sz="1050" spc="200" kern="0" dirty="0">
                 <a:solidFill>
-                  <a:srgbClr val="1668C0"/>
+                  <a:srgbClr val="9BC7EE"/>
                 </a:solidFill>
                 <a:latin typeface="Courier New" pitchFamily="34" charset="0"/>
                 <a:ea typeface="Courier New" pitchFamily="34" charset="-122"/>
                 <a:cs typeface="Courier New" pitchFamily="34" charset="-120"/>
               </a:rPr>
-              <a:t>КТО ЭТО РЕШАЕТ</a:t>
+              <a:t>ЗНАКОМСТВО · ВНЕДРЕНИЕ ELMA365</a:t>
             </a:r>
             <a:endParaRPr lang="en-US" sz="1050" dirty="0"/>
           </a:p>
@@ -1698,37 +1698,34 @@
         </p:nvSpPr>
         <p:spPr>
           <a:xfrm>
-            <a:off x="457200" y="1170432"/>
-            <a:ext cx="8229600" cy="685800"/>
-          </a:xfrm>
-          <a:prstGeom prst="rect">
-            <a:avLst/>
-          </a:prstGeom>
-          <a:noFill/>
-          <a:ln/>
-        </p:spPr>
-        <p:txBody>
-          <a:bodyPr wrap="square" lIns="0" tIns="0" rIns="0" bIns="0" rtlCol="0" anchor="t"/>
-          <a:lstStyle/>
-          <a:p>
-            <a:pPr indent="0" marL="0">
-              <a:lnSpc>
-                <a:spcPts val="2415"/>
-              </a:lnSpc>
-              <a:buNone/>
-            </a:pPr>
-            <a:r>
-              <a:rPr lang="en-US" sz="2300" b="1" dirty="0">
-                <a:solidFill>
-                  <a:srgbClr val="171B20"/>
+            <a:off x="429768" y="1005840"/>
+            <a:ext cx="7772400" cy="1051560"/>
+          </a:xfrm>
+          <a:prstGeom prst="rect">
+            <a:avLst/>
+          </a:prstGeom>
+          <a:noFill/>
+          <a:ln/>
+        </p:spPr>
+        <p:txBody>
+          <a:bodyPr wrap="square" lIns="0" tIns="0" rIns="0" bIns="0" rtlCol="0" anchor="ctr"/>
+          <a:lstStyle/>
+          <a:p>
+            <a:pPr indent="0" marL="0">
+              <a:buNone/>
+            </a:pPr>
+            <a:r>
+              <a:rPr lang="en-US" sz="5400" b="1" spc="-100" kern="0" dirty="0">
+                <a:solidFill>
+                  <a:srgbClr val="EEF3F8"/>
                 </a:solidFill>
                 <a:latin typeface="Arial" pitchFamily="34" charset="0"/>
                 <a:ea typeface="Arial" pitchFamily="34" charset="-122"/>
                 <a:cs typeface="Arial" pitchFamily="34" charset="-120"/>
               </a:rPr>
-              <a:t>Не подрядчик со стороны — мы сами живём в ELMA365</a:t>
-            </a:r>
-            <a:endParaRPr lang="en-US" sz="2300" dirty="0"/>
+              <a:t>WhatDaDev</a:t>
+            </a:r>
+            <a:endParaRPr lang="en-US" sz="5400" dirty="0"/>
           </a:p>
         </p:txBody>
       </p:sp>
@@ -1740,8 +1737,8 @@
         </p:nvSpPr>
         <p:spPr>
           <a:xfrm>
-            <a:off x="457200" y="2148840"/>
-            <a:ext cx="6766560" cy="640080"/>
+            <a:off x="457200" y="2103120"/>
+            <a:ext cx="6858000" cy="548640"/>
           </a:xfrm>
           <a:prstGeom prst="rect">
             <a:avLst/>
@@ -1755,22 +1752,22 @@
           <a:p>
             <a:pPr indent="0" marL="0">
               <a:lnSpc>
-                <a:spcPct val="112000"/>
+                <a:spcPct val="115000"/>
               </a:lnSpc>
               <a:buNone/>
             </a:pPr>
             <a:r>
-              <a:rPr lang="en-US" sz="1300" dirty="0">
-                <a:solidFill>
-                  <a:srgbClr val="59626B"/>
+              <a:rPr lang="en-US" sz="1400" dirty="0">
+                <a:solidFill>
+                  <a:srgbClr val="B7CBE0"/>
                 </a:solidFill>
                 <a:latin typeface="Arial" pitchFamily="34" charset="0"/>
                 <a:ea typeface="Arial" pitchFamily="34" charset="-122"/>
                 <a:cs typeface="Arial" pitchFamily="34" charset="-120"/>
               </a:rPr>
-              <a:t>Свой документооборот, задачи и процессы ведём в системе, которую внедряем. Поэтому — по опыту, а не по учебнику.</a:t>
-            </a:r>
-            <a:endParaRPr lang="en-US" sz="1300" dirty="0"/>
+              <a:t>Внедряем ELMA365 под ключ и делаем готовый документооборот из коробки — и сами живём в этой системе.</a:t>
+            </a:r>
+            <a:endParaRPr lang="en-US" sz="1400" dirty="0"/>
           </a:p>
         </p:txBody>
       </p:sp>
@@ -1782,42 +1779,50 @@
         </p:nvSpPr>
         <p:spPr>
           <a:xfrm>
-            <a:off x="457200" y="2788920"/>
-            <a:ext cx="2621280" cy="1371600"/>
+            <a:off x="457200" y="2761488"/>
+            <a:ext cx="777240" cy="50292"/>
+          </a:xfrm>
+          <a:prstGeom prst="rect">
+            <a:avLst/>
+          </a:prstGeom>
+          <a:solidFill>
+            <a:srgbClr val="9BC7EE"/>
+          </a:solidFill>
+          <a:ln/>
+        </p:spPr>
+      </p:sp>
+      <p:sp>
+        <p:nvSpPr>
+          <p:cNvPr id="13" name="Shape 11"/>
+          <p:cNvSpPr/>
+          <p:nvPr/>
+        </p:nvSpPr>
+        <p:spPr>
+          <a:xfrm>
+            <a:off x="457200" y="3017520"/>
+            <a:ext cx="2633472" cy="1234440"/>
           </a:xfrm>
           <a:prstGeom prst="roundRect">
             <a:avLst>
-              <a:gd name="adj" fmla="val 3333"/>
+              <a:gd name="adj" fmla="val 2963"/>
             </a:avLst>
           </a:prstGeom>
           <a:solidFill>
-            <a:srgbClr val="FFFFFF"/>
+            <a:srgbClr val="18507F"/>
           </a:solidFill>
-          <a:ln w="9525">
-            <a:solidFill>
-              <a:srgbClr val="D8E2EC"/>
-            </a:solidFill>
-            <a:prstDash val="solid"/>
-          </a:ln>
-          <a:effectLst>
-            <a:outerShdw sx="100000" sy="100000" kx="0" ky="0" algn="bl" rotWithShape="0" blurRad="88900" dist="25400" dir="5400000">
-              <a:srgbClr val="1A2A3A">
-                <a:alpha val="10000"/>
-              </a:srgbClr>
-            </a:outerShdw>
-          </a:effectLst>
-        </p:spPr>
-      </p:sp>
-      <p:sp>
-        <p:nvSpPr>
-          <p:cNvPr id="13" name="Text 11"/>
-          <p:cNvSpPr/>
-          <p:nvPr/>
-        </p:nvSpPr>
-        <p:spPr>
-          <a:xfrm>
-            <a:off x="475488" y="2788920"/>
-            <a:ext cx="2584704" cy="1371600"/>
+          <a:ln/>
+        </p:spPr>
+      </p:sp>
+      <p:sp>
+        <p:nvSpPr>
+          <p:cNvPr id="14" name="Text 12"/>
+          <p:cNvSpPr/>
+          <p:nvPr/>
+        </p:nvSpPr>
+        <p:spPr>
+          <a:xfrm>
+            <a:off x="475488" y="3017520"/>
+            <a:ext cx="2596896" cy="1234440"/>
           </a:xfrm>
           <a:prstGeom prst="rect">
             <a:avLst/>
@@ -1831,442 +1836,298 @@
           <a:p>
             <a:pPr indent="0" marL="0">
               <a:lnSpc>
-                <a:spcPct val="105000"/>
+                <a:spcPct val="110000"/>
               </a:lnSpc>
               <a:spcAft>
-                <a:spcPts val="500"/>
+                <a:spcPts val="400"/>
               </a:spcAft>
               <a:buNone/>
             </a:pPr>
             <a:r>
-              <a:rPr lang="en-US" sz="900" dirty="0">
-                <a:solidFill>
-                  <a:srgbClr val="1668C0"/>
+              <a:rPr lang="en-US" sz="1250" b="1" dirty="0">
+                <a:solidFill>
+                  <a:srgbClr val="EEF3F8"/>
+                </a:solidFill>
+                <a:latin typeface="Arial" pitchFamily="34" charset="0"/>
+                <a:ea typeface="Arial" pitchFamily="34" charset="-122"/>
+                <a:cs typeface="Arial" pitchFamily="34" charset="-120"/>
+              </a:rPr>
+              <a:t>Сами живём в ELMA365</a:t>
+            </a:r>
+            <a:endParaRPr lang="en-US" sz="1250" dirty="0"/>
+          </a:p>
+          <a:p>
+            <a:pPr indent="0" marL="0">
+              <a:lnSpc>
+                <a:spcPct val="110000"/>
+              </a:lnSpc>
+              <a:buNone/>
+            </a:pPr>
+            <a:r>
+              <a:rPr lang="en-US" sz="950" dirty="0">
+                <a:solidFill>
+                  <a:srgbClr val="B7CBE0"/>
+                </a:solidFill>
+                <a:latin typeface="Arial" pitchFamily="34" charset="0"/>
+                <a:ea typeface="Arial" pitchFamily="34" charset="-122"/>
+                <a:cs typeface="Arial" pitchFamily="34" charset="-120"/>
+              </a:rPr>
+              <a:t>Работаем на том, что внедряем — знаем систему изнутри.</a:t>
+            </a:r>
+            <a:endParaRPr lang="en-US" sz="1250" dirty="0"/>
+          </a:p>
+        </p:txBody>
+      </p:sp>
+      <p:sp>
+        <p:nvSpPr>
+          <p:cNvPr id="15" name="Shape 13"/>
+          <p:cNvSpPr/>
+          <p:nvPr/>
+        </p:nvSpPr>
+        <p:spPr>
+          <a:xfrm>
+            <a:off x="3255264" y="3017520"/>
+            <a:ext cx="2633472" cy="1234440"/>
+          </a:xfrm>
+          <a:prstGeom prst="roundRect">
+            <a:avLst>
+              <a:gd name="adj" fmla="val 2963"/>
+            </a:avLst>
+          </a:prstGeom>
+          <a:solidFill>
+            <a:srgbClr val="18507F"/>
+          </a:solidFill>
+          <a:ln/>
+        </p:spPr>
+      </p:sp>
+      <p:sp>
+        <p:nvSpPr>
+          <p:cNvPr id="16" name="Text 14"/>
+          <p:cNvSpPr/>
+          <p:nvPr/>
+        </p:nvSpPr>
+        <p:spPr>
+          <a:xfrm>
+            <a:off x="3273552" y="3017520"/>
+            <a:ext cx="2596896" cy="1234440"/>
+          </a:xfrm>
+          <a:prstGeom prst="rect">
+            <a:avLst/>
+          </a:prstGeom>
+          <a:noFill/>
+          <a:ln/>
+        </p:spPr>
+        <p:txBody>
+          <a:bodyPr wrap="square" lIns="2032" tIns="2032" rIns="2032" bIns="2032" rtlCol="0" anchor="t"/>
+          <a:lstStyle/>
+          <a:p>
+            <a:pPr indent="0" marL="0">
+              <a:lnSpc>
+                <a:spcPct val="110000"/>
+              </a:lnSpc>
+              <a:spcAft>
+                <a:spcPts val="400"/>
+              </a:spcAft>
+              <a:buNone/>
+            </a:pPr>
+            <a:r>
+              <a:rPr lang="en-US" sz="1250" b="1" dirty="0">
+                <a:solidFill>
+                  <a:srgbClr val="EEF3F8"/>
+                </a:solidFill>
+                <a:latin typeface="Arial" pitchFamily="34" charset="0"/>
+                <a:ea typeface="Arial" pitchFamily="34" charset="-122"/>
+                <a:cs typeface="Arial" pitchFamily="34" charset="-120"/>
+              </a:rPr>
+              <a:t>Сертифицированная команда</a:t>
+            </a:r>
+            <a:endParaRPr lang="en-US" sz="1250" dirty="0"/>
+          </a:p>
+          <a:p>
+            <a:pPr indent="0" marL="0">
+              <a:lnSpc>
+                <a:spcPct val="110000"/>
+              </a:lnSpc>
+              <a:buNone/>
+            </a:pPr>
+            <a:r>
+              <a:rPr lang="en-US" sz="950" dirty="0">
+                <a:solidFill>
+                  <a:srgbClr val="B7CBE0"/>
+                </a:solidFill>
+                <a:latin typeface="Arial" pitchFamily="34" charset="0"/>
+                <a:ea typeface="Arial" pitchFamily="34" charset="-122"/>
+                <a:cs typeface="Arial" pitchFamily="34" charset="-120"/>
+              </a:rPr>
+              <a:t>Аналитики и low-code разработчики, 10+ сертификатов ELMA.</a:t>
+            </a:r>
+            <a:endParaRPr lang="en-US" sz="1250" dirty="0"/>
+          </a:p>
+        </p:txBody>
+      </p:sp>
+      <p:sp>
+        <p:nvSpPr>
+          <p:cNvPr id="17" name="Shape 15"/>
+          <p:cNvSpPr/>
+          <p:nvPr/>
+        </p:nvSpPr>
+        <p:spPr>
+          <a:xfrm>
+            <a:off x="6053328" y="3017520"/>
+            <a:ext cx="2633472" cy="1234440"/>
+          </a:xfrm>
+          <a:prstGeom prst="roundRect">
+            <a:avLst>
+              <a:gd name="adj" fmla="val 2963"/>
+            </a:avLst>
+          </a:prstGeom>
+          <a:solidFill>
+            <a:srgbClr val="18507F"/>
+          </a:solidFill>
+          <a:ln/>
+        </p:spPr>
+      </p:sp>
+      <p:sp>
+        <p:nvSpPr>
+          <p:cNvPr id="18" name="Text 16"/>
+          <p:cNvSpPr/>
+          <p:nvPr/>
+        </p:nvSpPr>
+        <p:spPr>
+          <a:xfrm>
+            <a:off x="6071616" y="3017520"/>
+            <a:ext cx="2596896" cy="1234440"/>
+          </a:xfrm>
+          <a:prstGeom prst="rect">
+            <a:avLst/>
+          </a:prstGeom>
+          <a:noFill/>
+          <a:ln/>
+        </p:spPr>
+        <p:txBody>
+          <a:bodyPr wrap="square" lIns="2032" tIns="2032" rIns="2032" bIns="2032" rtlCol="0" anchor="t"/>
+          <a:lstStyle/>
+          <a:p>
+            <a:pPr indent="0" marL="0">
+              <a:lnSpc>
+                <a:spcPct val="110000"/>
+              </a:lnSpc>
+              <a:spcAft>
+                <a:spcPts val="400"/>
+              </a:spcAft>
+              <a:buNone/>
+            </a:pPr>
+            <a:r>
+              <a:rPr lang="en-US" sz="1250" b="1" dirty="0">
+                <a:solidFill>
+                  <a:srgbClr val="EEF3F8"/>
+                </a:solidFill>
+                <a:latin typeface="Arial" pitchFamily="34" charset="0"/>
+                <a:ea typeface="Arial" pitchFamily="34" charset="-122"/>
+                <a:cs typeface="Arial" pitchFamily="34" charset="-120"/>
+              </a:rPr>
+              <a:t>Продукт и услуги</a:t>
+            </a:r>
+            <a:endParaRPr lang="en-US" sz="1250" dirty="0"/>
+          </a:p>
+          <a:p>
+            <a:pPr indent="0" marL="0">
+              <a:lnSpc>
+                <a:spcPct val="110000"/>
+              </a:lnSpc>
+              <a:buNone/>
+            </a:pPr>
+            <a:r>
+              <a:rPr lang="en-US" sz="950" dirty="0">
+                <a:solidFill>
+                  <a:srgbClr val="B7CBE0"/>
+                </a:solidFill>
+                <a:latin typeface="Arial" pitchFamily="34" charset="0"/>
+                <a:ea typeface="Arial" pitchFamily="34" charset="-122"/>
+                <a:cs typeface="Arial" pitchFamily="34" charset="-120"/>
+              </a:rPr>
+              <a:t>Внедрение под ключ и готовый коробочный ЭДО Coordo.</a:t>
+            </a:r>
+            <a:endParaRPr lang="en-US" sz="1250" dirty="0"/>
+          </a:p>
+        </p:txBody>
+      </p:sp>
+      <p:sp>
+        <p:nvSpPr>
+          <p:cNvPr id="19" name="Text 17"/>
+          <p:cNvSpPr/>
+          <p:nvPr/>
+        </p:nvSpPr>
+        <p:spPr>
+          <a:xfrm>
+            <a:off x="457200" y="4434840"/>
+            <a:ext cx="8229600" cy="274320"/>
+          </a:xfrm>
+          <a:prstGeom prst="rect">
+            <a:avLst/>
+          </a:prstGeom>
+          <a:noFill/>
+          <a:ln/>
+        </p:spPr>
+        <p:txBody>
+          <a:bodyPr wrap="square" lIns="0" tIns="0" rIns="0" bIns="0" rtlCol="0" anchor="ctr"/>
+          <a:lstStyle/>
+          <a:p>
+            <a:pPr indent="0" marL="0">
+              <a:buNone/>
+            </a:pPr>
+            <a:r>
+              <a:rPr lang="en-US" sz="1000" b="1" dirty="0">
+                <a:solidFill>
+                  <a:srgbClr val="EEF3F8"/>
                 </a:solidFill>
                 <a:latin typeface="Courier New" pitchFamily="34" charset="0"/>
                 <a:ea typeface="Courier New" pitchFamily="34" charset="-122"/>
                 <a:cs typeface="Courier New" pitchFamily="34" charset="-120"/>
               </a:rPr>
-              <a:t>01</a:t>
-            </a:r>
-            <a:endParaRPr lang="en-US" sz="900" dirty="0"/>
-          </a:p>
-          <a:p>
-            <a:pPr indent="0" marL="0">
-              <a:lnSpc>
-                <a:spcPct val="105000"/>
-              </a:lnSpc>
-              <a:spcAft>
-                <a:spcPts val="500"/>
-              </a:spcAft>
-              <a:buNone/>
-            </a:pPr>
-            <a:r>
-              <a:rPr lang="en-US" sz="1400" b="1" dirty="0">
-                <a:solidFill>
-                  <a:srgbClr val="171B20"/>
-                </a:solidFill>
-                <a:latin typeface="Arial" pitchFamily="34" charset="0"/>
-                <a:ea typeface="Arial" pitchFamily="34" charset="-122"/>
-                <a:cs typeface="Arial" pitchFamily="34" charset="-120"/>
-              </a:rPr>
-              <a:t>Сами живём в ELMA365</a:t>
-            </a:r>
-            <a:endParaRPr lang="en-US" sz="900" dirty="0"/>
-          </a:p>
-          <a:p>
-            <a:pPr indent="0" marL="0">
-              <a:lnSpc>
-                <a:spcPct val="105000"/>
-              </a:lnSpc>
-              <a:spcAft>
-                <a:spcPts val="500"/>
-              </a:spcAft>
+              <a:t>Россия и Казахстан</a:t>
+            </a:r>
+            <a:pPr indent="0" marL="0">
               <a:buNone/>
             </a:pPr>
             <a:r>
               <a:rPr lang="en-US" sz="1000" dirty="0">
                 <a:solidFill>
-                  <a:srgbClr val="59626B"/>
-                </a:solidFill>
-                <a:latin typeface="Arial" pitchFamily="34" charset="0"/>
-                <a:ea typeface="Arial" pitchFamily="34" charset="-122"/>
-                <a:cs typeface="Arial" pitchFamily="34" charset="-120"/>
-              </a:rPr>
-              <a:t>Работаем на том, что внедряем — знаем систему изнутри.</a:t>
-            </a:r>
-            <a:endParaRPr lang="en-US" sz="900" dirty="0"/>
-          </a:p>
-        </p:txBody>
-      </p:sp>
-      <p:sp>
-        <p:nvSpPr>
-          <p:cNvPr id="14" name="Shape 12"/>
-          <p:cNvSpPr/>
-          <p:nvPr/>
-        </p:nvSpPr>
-        <p:spPr>
-          <a:xfrm>
-            <a:off x="3261360" y="2788920"/>
-            <a:ext cx="2621280" cy="1371600"/>
-          </a:xfrm>
-          <a:prstGeom prst="roundRect">
-            <a:avLst>
-              <a:gd name="adj" fmla="val 3333"/>
-            </a:avLst>
-          </a:prstGeom>
-          <a:solidFill>
-            <a:srgbClr val="FFFFFF"/>
-          </a:solidFill>
-          <a:ln w="9525">
-            <a:solidFill>
-              <a:srgbClr val="D8E2EC"/>
-            </a:solidFill>
-            <a:prstDash val="solid"/>
-          </a:ln>
-          <a:effectLst>
-            <a:outerShdw sx="100000" sy="100000" kx="0" ky="0" algn="bl" rotWithShape="0" blurRad="88900" dist="25400" dir="5400000">
-              <a:srgbClr val="1A2A3A">
-                <a:alpha val="10000"/>
-              </a:srgbClr>
-            </a:outerShdw>
-          </a:effectLst>
-        </p:spPr>
-      </p:sp>
-      <p:sp>
-        <p:nvSpPr>
-          <p:cNvPr id="15" name="Text 13"/>
-          <p:cNvSpPr/>
-          <p:nvPr/>
-        </p:nvSpPr>
-        <p:spPr>
-          <a:xfrm>
-            <a:off x="3279648" y="2788920"/>
-            <a:ext cx="2584704" cy="1371600"/>
-          </a:xfrm>
-          <a:prstGeom prst="rect">
-            <a:avLst/>
-          </a:prstGeom>
-          <a:noFill/>
-          <a:ln/>
-        </p:spPr>
-        <p:txBody>
-          <a:bodyPr wrap="square" lIns="2032" tIns="2032" rIns="2032" bIns="2032" rtlCol="0" anchor="t"/>
-          <a:lstStyle/>
-          <a:p>
-            <a:pPr indent="0" marL="0">
-              <a:lnSpc>
-                <a:spcPct val="105000"/>
-              </a:lnSpc>
-              <a:spcAft>
-                <a:spcPts val="500"/>
-              </a:spcAft>
-              <a:buNone/>
-            </a:pPr>
-            <a:r>
-              <a:rPr lang="en-US" sz="900" dirty="0">
-                <a:solidFill>
-                  <a:srgbClr val="1668C0"/>
+                  <a:srgbClr val="B7CBE0"/>
                 </a:solidFill>
                 <a:latin typeface="Courier New" pitchFamily="34" charset="0"/>
                 <a:ea typeface="Courier New" pitchFamily="34" charset="-122"/>
                 <a:cs typeface="Courier New" pitchFamily="34" charset="-120"/>
               </a:rPr>
-              <a:t>02</a:t>
-            </a:r>
-            <a:endParaRPr lang="en-US" sz="900" dirty="0"/>
-          </a:p>
-          <a:p>
-            <a:pPr indent="0" marL="0">
-              <a:lnSpc>
-                <a:spcPct val="105000"/>
-              </a:lnSpc>
-              <a:spcAft>
-                <a:spcPts val="500"/>
-              </a:spcAft>
-              <a:buNone/>
-            </a:pPr>
-            <a:r>
-              <a:rPr lang="en-US" sz="1400" b="1" dirty="0">
-                <a:solidFill>
-                  <a:srgbClr val="171B20"/>
-                </a:solidFill>
-                <a:latin typeface="Arial" pitchFamily="34" charset="0"/>
-                <a:ea typeface="Arial" pitchFamily="34" charset="-122"/>
-                <a:cs typeface="Arial" pitchFamily="34" charset="-120"/>
-              </a:rPr>
-              <a:t>Сертифицированная команда</a:t>
-            </a:r>
-            <a:endParaRPr lang="en-US" sz="900" dirty="0"/>
-          </a:p>
-          <a:p>
-            <a:pPr indent="0" marL="0">
-              <a:lnSpc>
-                <a:spcPct val="105000"/>
-              </a:lnSpc>
-              <a:spcAft>
-                <a:spcPts val="500"/>
-              </a:spcAft>
-              <a:buNone/>
-            </a:pPr>
-            <a:r>
-              <a:rPr lang="en-US" sz="1000" dirty="0">
-                <a:solidFill>
-                  <a:srgbClr val="59626B"/>
-                </a:solidFill>
-                <a:latin typeface="Arial" pitchFamily="34" charset="0"/>
-                <a:ea typeface="Arial" pitchFamily="34" charset="-122"/>
-                <a:cs typeface="Arial" pitchFamily="34" charset="-120"/>
-              </a:rPr>
-              <a:t>Аналитики и low-code разработчики, 10+ сертификатов ELMA.</a:t>
-            </a:r>
-            <a:endParaRPr lang="en-US" sz="900" dirty="0"/>
-          </a:p>
-        </p:txBody>
-      </p:sp>
-      <p:sp>
-        <p:nvSpPr>
-          <p:cNvPr id="16" name="Shape 14"/>
-          <p:cNvSpPr/>
-          <p:nvPr/>
-        </p:nvSpPr>
-        <p:spPr>
-          <a:xfrm>
-            <a:off x="6065520" y="2788920"/>
-            <a:ext cx="2621280" cy="1371600"/>
-          </a:xfrm>
-          <a:prstGeom prst="roundRect">
-            <a:avLst>
-              <a:gd name="adj" fmla="val 3333"/>
-            </a:avLst>
-          </a:prstGeom>
-          <a:solidFill>
-            <a:srgbClr val="FFFFFF"/>
-          </a:solidFill>
-          <a:ln w="9525">
-            <a:solidFill>
-              <a:srgbClr val="D8E2EC"/>
-            </a:solidFill>
-            <a:prstDash val="solid"/>
-          </a:ln>
-          <a:effectLst>
-            <a:outerShdw sx="100000" sy="100000" kx="0" ky="0" algn="bl" rotWithShape="0" blurRad="88900" dist="25400" dir="5400000">
-              <a:srgbClr val="1A2A3A">
-                <a:alpha val="10000"/>
-              </a:srgbClr>
-            </a:outerShdw>
-          </a:effectLst>
-        </p:spPr>
-      </p:sp>
-      <p:sp>
-        <p:nvSpPr>
-          <p:cNvPr id="17" name="Text 15"/>
-          <p:cNvSpPr/>
-          <p:nvPr/>
-        </p:nvSpPr>
-        <p:spPr>
-          <a:xfrm>
-            <a:off x="6083808" y="2788920"/>
-            <a:ext cx="2584704" cy="1371600"/>
-          </a:xfrm>
-          <a:prstGeom prst="rect">
-            <a:avLst/>
-          </a:prstGeom>
-          <a:noFill/>
-          <a:ln/>
-        </p:spPr>
-        <p:txBody>
-          <a:bodyPr wrap="square" lIns="2032" tIns="2032" rIns="2032" bIns="2032" rtlCol="0" anchor="t"/>
-          <a:lstStyle/>
-          <a:p>
-            <a:pPr indent="0" marL="0">
-              <a:lnSpc>
-                <a:spcPct val="105000"/>
-              </a:lnSpc>
-              <a:spcAft>
-                <a:spcPts val="500"/>
-              </a:spcAft>
-              <a:buNone/>
-            </a:pPr>
-            <a:r>
-              <a:rPr lang="en-US" sz="900" dirty="0">
-                <a:solidFill>
-                  <a:srgbClr val="1668C0"/>
+              <a:t>   ·   Руководитель — </a:t>
+            </a:r>
+            <a:pPr indent="0" marL="0">
+              <a:buNone/>
+            </a:pPr>
+            <a:r>
+              <a:rPr lang="en-US" sz="1000" b="1" dirty="0">
+                <a:solidFill>
+                  <a:srgbClr val="EEF3F8"/>
                 </a:solidFill>
                 <a:latin typeface="Courier New" pitchFamily="34" charset="0"/>
                 <a:ea typeface="Courier New" pitchFamily="34" charset="-122"/>
                 <a:cs typeface="Courier New" pitchFamily="34" charset="-120"/>
               </a:rPr>
-              <a:t>03</a:t>
-            </a:r>
-            <a:endParaRPr lang="en-US" sz="900" dirty="0"/>
-          </a:p>
-          <a:p>
-            <a:pPr indent="0" marL="0">
-              <a:lnSpc>
-                <a:spcPct val="105000"/>
-              </a:lnSpc>
-              <a:spcAft>
-                <a:spcPts val="500"/>
-              </a:spcAft>
-              <a:buNone/>
-            </a:pPr>
-            <a:r>
-              <a:rPr lang="en-US" sz="1400" b="1" dirty="0">
-                <a:solidFill>
-                  <a:srgbClr val="171B20"/>
-                </a:solidFill>
-                <a:latin typeface="Arial" pitchFamily="34" charset="0"/>
-                <a:ea typeface="Arial" pitchFamily="34" charset="-122"/>
-                <a:cs typeface="Arial" pitchFamily="34" charset="-120"/>
-              </a:rPr>
-              <a:t>Продукт и услуги</a:t>
-            </a:r>
-            <a:endParaRPr lang="en-US" sz="900" dirty="0"/>
-          </a:p>
-          <a:p>
-            <a:pPr indent="0" marL="0">
-              <a:lnSpc>
-                <a:spcPct val="105000"/>
-              </a:lnSpc>
-              <a:spcAft>
-                <a:spcPts val="500"/>
-              </a:spcAft>
+              <a:t>5 лет</a:t>
+            </a:r>
+            <a:pPr indent="0" marL="0">
               <a:buNone/>
             </a:pPr>
             <a:r>
               <a:rPr lang="en-US" sz="1000" dirty="0">
                 <a:solidFill>
-                  <a:srgbClr val="59626B"/>
-                </a:solidFill>
-                <a:latin typeface="Arial" pitchFamily="34" charset="0"/>
-                <a:ea typeface="Arial" pitchFamily="34" charset="-122"/>
-                <a:cs typeface="Arial" pitchFamily="34" charset="-120"/>
-              </a:rPr>
-              <a:t>Внедрение под ключ и готовый коробочный ЭДО Coordo.</a:t>
-            </a:r>
-            <a:endParaRPr lang="en-US" sz="900" dirty="0"/>
-          </a:p>
-        </p:txBody>
-      </p:sp>
-      <p:sp>
-        <p:nvSpPr>
-          <p:cNvPr id="18" name="Text 16"/>
-          <p:cNvSpPr/>
-          <p:nvPr/>
-        </p:nvSpPr>
-        <p:spPr>
-          <a:xfrm>
-            <a:off x="457200" y="4343400"/>
-            <a:ext cx="8229600" cy="274320"/>
-          </a:xfrm>
-          <a:prstGeom prst="rect">
-            <a:avLst/>
-          </a:prstGeom>
-          <a:noFill/>
-          <a:ln/>
-        </p:spPr>
-        <p:txBody>
-          <a:bodyPr wrap="square" lIns="0" tIns="0" rIns="0" bIns="0" rtlCol="0" anchor="ctr"/>
-          <a:lstStyle/>
-          <a:p>
-            <a:pPr indent="0" marL="0">
-              <a:buNone/>
-            </a:pPr>
-            <a:r>
-              <a:rPr lang="en-US" sz="1000" b="1" dirty="0">
-                <a:solidFill>
-                  <a:srgbClr val="171B20"/>
+                  <a:srgbClr val="B7CBE0"/>
                 </a:solidFill>
                 <a:latin typeface="Courier New" pitchFamily="34" charset="0"/>
                 <a:ea typeface="Courier New" pitchFamily="34" charset="-122"/>
                 <a:cs typeface="Courier New" pitchFamily="34" charset="-120"/>
               </a:rPr>
-              <a:t>Россия и Казахстан</a:t>
-            </a:r>
-            <a:pPr indent="0" marL="0">
-              <a:buNone/>
-            </a:pPr>
-            <a:r>
-              <a:rPr lang="en-US" sz="1000" dirty="0">
-                <a:solidFill>
-                  <a:srgbClr val="D8E2EC"/>
-                </a:solidFill>
-                <a:latin typeface="Courier New" pitchFamily="34" charset="0"/>
-                <a:ea typeface="Courier New" pitchFamily="34" charset="-122"/>
-                <a:cs typeface="Courier New" pitchFamily="34" charset="-120"/>
-              </a:rPr>
-              <a:t>      ·      </a:t>
-            </a:r>
-            <a:pPr indent="0" marL="0">
-              <a:buNone/>
-            </a:pPr>
-            <a:r>
-              <a:rPr lang="en-US" sz="1000" dirty="0">
-                <a:solidFill>
-                  <a:srgbClr val="59626B"/>
-                </a:solidFill>
-                <a:latin typeface="Courier New" pitchFamily="34" charset="0"/>
-                <a:ea typeface="Courier New" pitchFamily="34" charset="-122"/>
-                <a:cs typeface="Courier New" pitchFamily="34" charset="-120"/>
-              </a:rPr>
-              <a:t>Руководитель — </a:t>
-            </a:r>
-            <a:pPr indent="0" marL="0">
-              <a:buNone/>
-            </a:pPr>
-            <a:r>
-              <a:rPr lang="en-US" sz="1000" b="1" dirty="0">
-                <a:solidFill>
-                  <a:srgbClr val="171B20"/>
-                </a:solidFill>
-                <a:latin typeface="Courier New" pitchFamily="34" charset="0"/>
-                <a:ea typeface="Courier New" pitchFamily="34" charset="-122"/>
-                <a:cs typeface="Courier New" pitchFamily="34" charset="-120"/>
-              </a:rPr>
-              <a:t>5 лет</a:t>
-            </a:r>
-            <a:pPr indent="0" marL="0">
-              <a:buNone/>
-            </a:pPr>
-            <a:r>
-              <a:rPr lang="en-US" sz="1000" dirty="0">
-                <a:solidFill>
-                  <a:srgbClr val="59626B"/>
-                </a:solidFill>
-                <a:latin typeface="Courier New" pitchFamily="34" charset="0"/>
-                <a:ea typeface="Courier New" pitchFamily="34" charset="-122"/>
-                <a:cs typeface="Courier New" pitchFamily="34" charset="-120"/>
-              </a:rPr>
-              <a:t> в ELMA365</a:t>
-            </a:r>
-            <a:pPr indent="0" marL="0">
-              <a:buNone/>
-            </a:pPr>
-            <a:r>
-              <a:rPr lang="en-US" sz="1000" dirty="0">
-                <a:solidFill>
-                  <a:srgbClr val="D8E2EC"/>
-                </a:solidFill>
-                <a:latin typeface="Courier New" pitchFamily="34" charset="0"/>
-                <a:ea typeface="Courier New" pitchFamily="34" charset="-122"/>
-                <a:cs typeface="Courier New" pitchFamily="34" charset="-120"/>
-              </a:rPr>
-              <a:t>      ·      </a:t>
-            </a:r>
-            <a:pPr indent="0" marL="0">
-              <a:buNone/>
-            </a:pPr>
-            <a:r>
-              <a:rPr lang="en-US" sz="1000" dirty="0">
-                <a:solidFill>
-                  <a:srgbClr val="59626B"/>
-                </a:solidFill>
-                <a:latin typeface="Courier New" pitchFamily="34" charset="0"/>
-                <a:ea typeface="Courier New" pitchFamily="34" charset="-122"/>
-                <a:cs typeface="Courier New" pitchFamily="34" charset="-120"/>
-              </a:rPr>
-              <a:t>Внедрение + продукт</a:t>
+              <a:t> в ELMA365   ·   внедрение + продукт</a:t>
             </a:r>
             <a:endParaRPr lang="en-US" sz="1000" dirty="0"/>
           </a:p>
@@ -2615,7 +2476,7 @@
             <a:r>
               <a:rPr lang="en-US" sz="3000" b="1" dirty="0">
                 <a:solidFill>
-                  <a:srgbClr val="171B20"/>
+                  <a:srgbClr val="123F73"/>
                 </a:solidFill>
                 <a:latin typeface="Arial" pitchFamily="34" charset="0"/>
                 <a:ea typeface="Arial" pitchFamily="34" charset="-122"/>
@@ -3370,7 +3231,7 @@
             <a:r>
               <a:rPr lang="en-US" sz="2300" b="1" dirty="0">
                 <a:solidFill>
-                  <a:srgbClr val="171B20"/>
+                  <a:srgbClr val="123F73"/>
                 </a:solidFill>
                 <a:latin typeface="Arial" pitchFamily="34" charset="0"/>
                 <a:ea typeface="Arial" pitchFamily="34" charset="-122"/>
@@ -4242,7 +4103,7 @@
             <a:r>
               <a:rPr lang="en-US" sz="2300" b="1" dirty="0">
                 <a:solidFill>
-                  <a:srgbClr val="171B20"/>
+                  <a:srgbClr val="123F73"/>
                 </a:solidFill>
                 <a:latin typeface="Arial" pitchFamily="34" charset="0"/>
                 <a:ea typeface="Arial" pitchFamily="34" charset="-122"/>
@@ -5142,7 +5003,7 @@
             <a:r>
               <a:rPr lang="en-US" sz="2300" b="1" dirty="0">
                 <a:solidFill>
-                  <a:srgbClr val="171B20"/>
+                  <a:srgbClr val="123F73"/>
                 </a:solidFill>
                 <a:latin typeface="Arial" pitchFamily="34" charset="0"/>
                 <a:ea typeface="Arial" pitchFamily="34" charset="-122"/>
@@ -6287,7 +6148,7 @@
             <a:r>
               <a:rPr lang="en-US" sz="2300" b="1" dirty="0">
                 <a:solidFill>
-                  <a:srgbClr val="171B20"/>
+                  <a:srgbClr val="123F73"/>
                 </a:solidFill>
                 <a:latin typeface="Arial" pitchFamily="34" charset="0"/>
                 <a:ea typeface="Arial" pitchFamily="34" charset="-122"/>
